--- a/docs/amar engine overview.pptx
+++ b/docs/amar engine overview.pptx
@@ -5,12 +5,16 @@
     <p:sldMasterId id="2147483648" r:id="rId1"/>
   </p:sldMasterIdLst>
   <p:notesMasterIdLst>
-    <p:notesMasterId r:id="rId5"/>
+    <p:notesMasterId r:id="rId9"/>
   </p:notesMasterIdLst>
   <p:sldIdLst>
     <p:sldId id="257" r:id="rId2"/>
-    <p:sldId id="258" r:id="rId3"/>
-    <p:sldId id="256" r:id="rId4"/>
+    <p:sldId id="260" r:id="rId3"/>
+    <p:sldId id="258" r:id="rId4"/>
+    <p:sldId id="256" r:id="rId5"/>
+    <p:sldId id="259" r:id="rId6"/>
+    <p:sldId id="262" r:id="rId7"/>
+    <p:sldId id="261" r:id="rId8"/>
   </p:sldIdLst>
   <p:sldSz cx="12192000" cy="6858000"/>
   <p:notesSz cx="6858000" cy="9144000"/>
@@ -199,7 +203,7 @@
           <a:p>
             <a:fld id="{CAC5895B-3708-46E1-A199-8735536F71F9}" type="datetimeFigureOut">
               <a:rPr lang="zh-CN" altLang="en-US" smtClean="0"/>
-              <a:t>2026/2/24</a:t>
+              <a:t>2026/2/25</a:t>
             </a:fld>
             <a:endParaRPr lang="zh-CN" altLang="en-US"/>
           </a:p>
@@ -531,7 +535,7 @@
           <a:p>
             <a:fld id="{6AB730D5-1C7C-4557-8722-3813F1ECD0F3}" type="slidenum">
               <a:rPr lang="zh-CN" altLang="en-US" smtClean="0"/>
-              <a:t>3</a:t>
+              <a:t>4</a:t>
             </a:fld>
             <a:endParaRPr lang="zh-CN" altLang="en-US"/>
           </a:p>
@@ -697,7 +701,7 @@
           <a:p>
             <a:fld id="{0B98B24C-C9E3-4F8A-B4AE-8209A59F7979}" type="datetimeFigureOut">
               <a:rPr lang="zh-CN" altLang="en-US" smtClean="0"/>
-              <a:t>2026/2/24</a:t>
+              <a:t>2026/2/25</a:t>
             </a:fld>
             <a:endParaRPr lang="zh-CN" altLang="en-US"/>
           </a:p>
@@ -895,7 +899,7 @@
           <a:p>
             <a:fld id="{0B98B24C-C9E3-4F8A-B4AE-8209A59F7979}" type="datetimeFigureOut">
               <a:rPr lang="zh-CN" altLang="en-US" smtClean="0"/>
-              <a:t>2026/2/24</a:t>
+              <a:t>2026/2/25</a:t>
             </a:fld>
             <a:endParaRPr lang="zh-CN" altLang="en-US"/>
           </a:p>
@@ -1103,7 +1107,7 @@
           <a:p>
             <a:fld id="{0B98B24C-C9E3-4F8A-B4AE-8209A59F7979}" type="datetimeFigureOut">
               <a:rPr lang="zh-CN" altLang="en-US" smtClean="0"/>
-              <a:t>2026/2/24</a:t>
+              <a:t>2026/2/25</a:t>
             </a:fld>
             <a:endParaRPr lang="zh-CN" altLang="en-US"/>
           </a:p>
@@ -1301,7 +1305,7 @@
           <a:p>
             <a:fld id="{0B98B24C-C9E3-4F8A-B4AE-8209A59F7979}" type="datetimeFigureOut">
               <a:rPr lang="zh-CN" altLang="en-US" smtClean="0"/>
-              <a:t>2026/2/24</a:t>
+              <a:t>2026/2/25</a:t>
             </a:fld>
             <a:endParaRPr lang="zh-CN" altLang="en-US"/>
           </a:p>
@@ -1576,7 +1580,7 @@
           <a:p>
             <a:fld id="{0B98B24C-C9E3-4F8A-B4AE-8209A59F7979}" type="datetimeFigureOut">
               <a:rPr lang="zh-CN" altLang="en-US" smtClean="0"/>
-              <a:t>2026/2/24</a:t>
+              <a:t>2026/2/25</a:t>
             </a:fld>
             <a:endParaRPr lang="zh-CN" altLang="en-US"/>
           </a:p>
@@ -1841,7 +1845,7 @@
           <a:p>
             <a:fld id="{0B98B24C-C9E3-4F8A-B4AE-8209A59F7979}" type="datetimeFigureOut">
               <a:rPr lang="zh-CN" altLang="en-US" smtClean="0"/>
-              <a:t>2026/2/24</a:t>
+              <a:t>2026/2/25</a:t>
             </a:fld>
             <a:endParaRPr lang="zh-CN" altLang="en-US"/>
           </a:p>
@@ -2253,7 +2257,7 @@
           <a:p>
             <a:fld id="{0B98B24C-C9E3-4F8A-B4AE-8209A59F7979}" type="datetimeFigureOut">
               <a:rPr lang="zh-CN" altLang="en-US" smtClean="0"/>
-              <a:t>2026/2/24</a:t>
+              <a:t>2026/2/25</a:t>
             </a:fld>
             <a:endParaRPr lang="zh-CN" altLang="en-US"/>
           </a:p>
@@ -2394,7 +2398,7 @@
           <a:p>
             <a:fld id="{0B98B24C-C9E3-4F8A-B4AE-8209A59F7979}" type="datetimeFigureOut">
               <a:rPr lang="zh-CN" altLang="en-US" smtClean="0"/>
-              <a:t>2026/2/24</a:t>
+              <a:t>2026/2/25</a:t>
             </a:fld>
             <a:endParaRPr lang="zh-CN" altLang="en-US"/>
           </a:p>
@@ -2507,7 +2511,7 @@
           <a:p>
             <a:fld id="{0B98B24C-C9E3-4F8A-B4AE-8209A59F7979}" type="datetimeFigureOut">
               <a:rPr lang="zh-CN" altLang="en-US" smtClean="0"/>
-              <a:t>2026/2/24</a:t>
+              <a:t>2026/2/25</a:t>
             </a:fld>
             <a:endParaRPr lang="zh-CN" altLang="en-US"/>
           </a:p>
@@ -2818,7 +2822,7 @@
           <a:p>
             <a:fld id="{0B98B24C-C9E3-4F8A-B4AE-8209A59F7979}" type="datetimeFigureOut">
               <a:rPr lang="zh-CN" altLang="en-US" smtClean="0"/>
-              <a:t>2026/2/24</a:t>
+              <a:t>2026/2/25</a:t>
             </a:fld>
             <a:endParaRPr lang="zh-CN" altLang="en-US"/>
           </a:p>
@@ -3106,7 +3110,7 @@
           <a:p>
             <a:fld id="{0B98B24C-C9E3-4F8A-B4AE-8209A59F7979}" type="datetimeFigureOut">
               <a:rPr lang="zh-CN" altLang="en-US" smtClean="0"/>
-              <a:t>2026/2/24</a:t>
+              <a:t>2026/2/25</a:t>
             </a:fld>
             <a:endParaRPr lang="zh-CN" altLang="en-US"/>
           </a:p>
@@ -3347,7 +3351,7 @@
           <a:p>
             <a:fld id="{0B98B24C-C9E3-4F8A-B4AE-8209A59F7979}" type="datetimeFigureOut">
               <a:rPr lang="zh-CN" altLang="en-US" smtClean="0"/>
-              <a:t>2026/2/24</a:t>
+              <a:t>2026/2/25</a:t>
             </a:fld>
             <a:endParaRPr lang="zh-CN" altLang="en-US"/>
           </a:p>
@@ -3815,12 +3819,34 @@
             <p:ph idx="1"/>
           </p:nvPr>
         </p:nvSpPr>
-        <p:spPr/>
+        <p:spPr>
+          <a:xfrm>
+            <a:off x="838200" y="1825625"/>
+            <a:ext cx="10397987" cy="972240"/>
+          </a:xfrm>
+        </p:spPr>
         <p:txBody>
           <a:bodyPr/>
           <a:lstStyle/>
           <a:p>
-            <a:endParaRPr lang="zh-CN" altLang="en-US" dirty="0"/>
+            <a:r>
+              <a:rPr lang="en-US" altLang="zh-CN" dirty="0" err="1">
+                <a:latin typeface="Noto Sans SC Black" panose="020B0200000000000000" pitchFamily="34" charset="-122"/>
+                <a:ea typeface="Noto Sans SC Black" panose="020B0200000000000000" pitchFamily="34" charset="-122"/>
+              </a:rPr>
+              <a:t>Metaclass</a:t>
+            </a:r>
+            <a:r>
+              <a:rPr lang="en-US" altLang="zh-CN" dirty="0">
+                <a:latin typeface="Noto Sans SC Black" panose="020B0200000000000000" pitchFamily="34" charset="-122"/>
+                <a:ea typeface="Noto Sans SC Black" panose="020B0200000000000000" pitchFamily="34" charset="-122"/>
+              </a:rPr>
+              <a:t> is the “external constitution.” AMAR Engine is the “world engine that adopts this constitution.”</a:t>
+            </a:r>
+            <a:endParaRPr lang="zh-CN" altLang="en-US" dirty="0">
+              <a:latin typeface="Noto Sans SC Black" panose="020B0200000000000000" pitchFamily="34" charset="-122"/>
+              <a:ea typeface="Noto Sans SC Black" panose="020B0200000000000000" pitchFamily="34" charset="-122"/>
+            </a:endParaRPr>
           </a:p>
         </p:txBody>
       </p:sp>
@@ -3860,6 +3886,130 @@
           </a:prstGeom>
         </p:spPr>
       </p:pic>
+      <p:sp>
+        <p:nvSpPr>
+          <p:cNvPr id="6" name="文本框 5">
+            <a:extLst>
+              <a:ext uri="{FF2B5EF4-FFF2-40B4-BE49-F238E27FC236}">
+                <a16:creationId xmlns:a16="http://schemas.microsoft.com/office/drawing/2014/main" id="{CAAF05AA-C957-C5D7-5EE6-3FAE6A28168B}"/>
+              </a:ext>
+            </a:extLst>
+          </p:cNvPr>
+          <p:cNvSpPr txBox="1"/>
+          <p:nvPr/>
+        </p:nvSpPr>
+        <p:spPr>
+          <a:xfrm>
+            <a:off x="730526" y="2797866"/>
+            <a:ext cx="3766931" cy="3539430"/>
+          </a:xfrm>
+          <a:prstGeom prst="rect">
+            <a:avLst/>
+          </a:prstGeom>
+          <a:noFill/>
+        </p:spPr>
+        <p:txBody>
+          <a:bodyPr wrap="square" rtlCol="0">
+            <a:spAutoFit/>
+          </a:bodyPr>
+          <a:lstStyle/>
+          <a:p>
+            <a:r>
+              <a:rPr lang="en-US" altLang="zh-CN" sz="1600" dirty="0">
+                <a:latin typeface="Noto Sans SC Black" panose="020B0200000000000000" pitchFamily="34" charset="-122"/>
+                <a:ea typeface="Noto Sans SC Black" panose="020B0200000000000000" pitchFamily="34" charset="-122"/>
+              </a:rPr>
+              <a:t>Principles:</a:t>
+            </a:r>
+          </a:p>
+          <a:p>
+            <a:endParaRPr lang="en-US" altLang="zh-CN" sz="1600" dirty="0">
+              <a:latin typeface="Noto Sans SC Black" panose="020B0200000000000000" pitchFamily="34" charset="-122"/>
+              <a:ea typeface="Noto Sans SC Black" panose="020B0200000000000000" pitchFamily="34" charset="-122"/>
+            </a:endParaRPr>
+          </a:p>
+          <a:p>
+            <a:r>
+              <a:rPr lang="en-US" altLang="zh-CN" sz="1600" dirty="0" err="1">
+                <a:latin typeface="Noto Sans SC Black" panose="020B0200000000000000" pitchFamily="34" charset="-122"/>
+                <a:ea typeface="Noto Sans SC Black" panose="020B0200000000000000" pitchFamily="34" charset="-122"/>
+              </a:rPr>
+              <a:t>Metaclass</a:t>
+            </a:r>
+            <a:r>
+              <a:rPr lang="en-US" altLang="zh-CN" sz="1600" dirty="0">
+                <a:latin typeface="Noto Sans SC Black" panose="020B0200000000000000" pitchFamily="34" charset="-122"/>
+                <a:ea typeface="Noto Sans SC Black" panose="020B0200000000000000" pitchFamily="34" charset="-122"/>
+              </a:rPr>
+              <a:t> is an independent standard</a:t>
+            </a:r>
+          </a:p>
+          <a:p>
+            <a:endParaRPr lang="en-US" altLang="zh-CN" sz="1600" dirty="0">
+              <a:latin typeface="Noto Sans SC Black" panose="020B0200000000000000" pitchFamily="34" charset="-122"/>
+              <a:ea typeface="Noto Sans SC Black" panose="020B0200000000000000" pitchFamily="34" charset="-122"/>
+            </a:endParaRPr>
+          </a:p>
+          <a:p>
+            <a:r>
+              <a:rPr lang="en-US" altLang="zh-CN" sz="1600" dirty="0">
+                <a:latin typeface="Noto Sans SC Black" panose="020B0200000000000000" pitchFamily="34" charset="-122"/>
+                <a:ea typeface="Noto Sans SC Black" panose="020B0200000000000000" pitchFamily="34" charset="-122"/>
+              </a:rPr>
+              <a:t>AMAR Engine is the first runtime</a:t>
+            </a:r>
+          </a:p>
+          <a:p>
+            <a:endParaRPr lang="en-US" altLang="zh-CN" sz="1600" dirty="0">
+              <a:latin typeface="Noto Sans SC Black" panose="020B0200000000000000" pitchFamily="34" charset="-122"/>
+              <a:ea typeface="Noto Sans SC Black" panose="020B0200000000000000" pitchFamily="34" charset="-122"/>
+            </a:endParaRPr>
+          </a:p>
+          <a:p>
+            <a:r>
+              <a:rPr lang="en-US" altLang="zh-CN" sz="1600" dirty="0">
+                <a:latin typeface="Noto Sans SC Black" panose="020B0200000000000000" pitchFamily="34" charset="-122"/>
+                <a:ea typeface="Noto Sans SC Black" panose="020B0200000000000000" pitchFamily="34" charset="-122"/>
+              </a:rPr>
+              <a:t>GENIS is the physical execution core</a:t>
+            </a:r>
+          </a:p>
+          <a:p>
+            <a:endParaRPr lang="en-US" altLang="zh-CN" sz="1600" dirty="0">
+              <a:latin typeface="Noto Sans SC Black" panose="020B0200000000000000" pitchFamily="34" charset="-122"/>
+              <a:ea typeface="Noto Sans SC Black" panose="020B0200000000000000" pitchFamily="34" charset="-122"/>
+            </a:endParaRPr>
+          </a:p>
+          <a:p>
+            <a:r>
+              <a:rPr lang="en-US" altLang="zh-CN" sz="1600" dirty="0">
+                <a:latin typeface="Noto Sans SC Black" panose="020B0200000000000000" pitchFamily="34" charset="-122"/>
+                <a:ea typeface="Noto Sans SC Black" panose="020B0200000000000000" pitchFamily="34" charset="-122"/>
+              </a:rPr>
+              <a:t>AME Admin is the control layer</a:t>
+            </a:r>
+          </a:p>
+          <a:p>
+            <a:endParaRPr lang="en-US" altLang="zh-CN" sz="1600" dirty="0">
+              <a:latin typeface="Noto Sans SC Black" panose="020B0200000000000000" pitchFamily="34" charset="-122"/>
+              <a:ea typeface="Noto Sans SC Black" panose="020B0200000000000000" pitchFamily="34" charset="-122"/>
+            </a:endParaRPr>
+          </a:p>
+          <a:p>
+            <a:r>
+              <a:rPr lang="en-US" altLang="zh-CN" sz="1600" dirty="0">
+                <a:latin typeface="Noto Sans SC Black" panose="020B0200000000000000" pitchFamily="34" charset="-122"/>
+                <a:ea typeface="Noto Sans SC Black" panose="020B0200000000000000" pitchFamily="34" charset="-122"/>
+              </a:rPr>
+              <a:t>Output is a "structured, interactive world"</a:t>
+            </a:r>
+            <a:endParaRPr lang="zh-CN" altLang="en-US" sz="1600" dirty="0">
+              <a:latin typeface="Noto Sans SC Black" panose="020B0200000000000000" pitchFamily="34" charset="-122"/>
+              <a:ea typeface="Noto Sans SC Black" panose="020B0200000000000000" pitchFamily="34" charset="-122"/>
+            </a:endParaRPr>
+          </a:p>
+        </p:txBody>
+      </p:sp>
     </p:spTree>
     <p:extLst>
       <p:ext uri="{BB962C8B-B14F-4D97-AF65-F5344CB8AC3E}">
@@ -3892,6 +4042,1266 @@
       </p:grpSpPr>
       <p:sp>
         <p:nvSpPr>
+          <p:cNvPr id="2" name="标题 1">
+            <a:extLst>
+              <a:ext uri="{FF2B5EF4-FFF2-40B4-BE49-F238E27FC236}">
+                <a16:creationId xmlns:a16="http://schemas.microsoft.com/office/drawing/2014/main" id="{007D22A6-5897-27A0-8AEB-D51F058C4FE4}"/>
+              </a:ext>
+            </a:extLst>
+          </p:cNvPr>
+          <p:cNvSpPr>
+            <a:spLocks noGrp="1"/>
+          </p:cNvSpPr>
+          <p:nvPr>
+            <p:ph type="title"/>
+          </p:nvPr>
+        </p:nvSpPr>
+        <p:spPr>
+          <a:xfrm>
+            <a:off x="231913" y="238539"/>
+            <a:ext cx="3987248" cy="324058"/>
+          </a:xfrm>
+        </p:spPr>
+        <p:txBody>
+          <a:bodyPr>
+            <a:normAutofit/>
+          </a:bodyPr>
+          <a:lstStyle/>
+          <a:p>
+            <a:r>
+              <a:rPr lang="en-US" altLang="zh-CN" sz="1000" dirty="0">
+                <a:latin typeface="Noto Sans SC Black" panose="020B0200000000000000" pitchFamily="34" charset="-122"/>
+                <a:ea typeface="Noto Sans SC Black" panose="020B0200000000000000" pitchFamily="34" charset="-122"/>
+              </a:rPr>
+              <a:t>AMAR Engine — First Runtime of the </a:t>
+            </a:r>
+            <a:r>
+              <a:rPr lang="en-US" altLang="zh-CN" sz="1000" dirty="0" err="1">
+                <a:latin typeface="Noto Sans SC Black" panose="020B0200000000000000" pitchFamily="34" charset="-122"/>
+                <a:ea typeface="Noto Sans SC Black" panose="020B0200000000000000" pitchFamily="34" charset="-122"/>
+              </a:rPr>
+              <a:t>Metaclass</a:t>
+            </a:r>
+            <a:r>
+              <a:rPr lang="en-US" altLang="zh-CN" sz="1000" dirty="0">
+                <a:latin typeface="Noto Sans SC Black" panose="020B0200000000000000" pitchFamily="34" charset="-122"/>
+                <a:ea typeface="Noto Sans SC Black" panose="020B0200000000000000" pitchFamily="34" charset="-122"/>
+              </a:rPr>
+              <a:t> Standard</a:t>
+            </a:r>
+            <a:endParaRPr lang="zh-CN" altLang="en-US" sz="1000" dirty="0">
+              <a:latin typeface="Noto Sans SC Black" panose="020B0200000000000000" pitchFamily="34" charset="-122"/>
+              <a:ea typeface="Noto Sans SC Black" panose="020B0200000000000000" pitchFamily="34" charset="-122"/>
+            </a:endParaRPr>
+          </a:p>
+        </p:txBody>
+      </p:sp>
+      <p:sp>
+        <p:nvSpPr>
+          <p:cNvPr id="4" name="矩形 3">
+            <a:extLst>
+              <a:ext uri="{FF2B5EF4-FFF2-40B4-BE49-F238E27FC236}">
+                <a16:creationId xmlns:a16="http://schemas.microsoft.com/office/drawing/2014/main" id="{2E93000B-8C69-5123-FDD3-17CAAAE8D55B}"/>
+              </a:ext>
+            </a:extLst>
+          </p:cNvPr>
+          <p:cNvSpPr>
+            <a:spLocks noGrp="1" noRot="1" noMove="1" noResize="1" noEditPoints="1" noAdjustHandles="1" noChangeArrowheads="1" noChangeShapeType="1"/>
+          </p:cNvSpPr>
+          <p:nvPr/>
+        </p:nvSpPr>
+        <p:spPr>
+          <a:xfrm>
+            <a:off x="101600" y="483798"/>
+            <a:ext cx="5008880" cy="6153163"/>
+          </a:xfrm>
+          <a:prstGeom prst="rect">
+            <a:avLst/>
+          </a:prstGeom>
+        </p:spPr>
+        <p:style>
+          <a:lnRef idx="2">
+            <a:schemeClr val="accent2">
+              <a:shade val="15000"/>
+            </a:schemeClr>
+          </a:lnRef>
+          <a:fillRef idx="1">
+            <a:schemeClr val="accent2"/>
+          </a:fillRef>
+          <a:effectRef idx="0">
+            <a:schemeClr val="accent2"/>
+          </a:effectRef>
+          <a:fontRef idx="minor">
+            <a:schemeClr val="lt1"/>
+          </a:fontRef>
+        </p:style>
+        <p:txBody>
+          <a:bodyPr rtlCol="0" anchor="ctr"/>
+          <a:lstStyle/>
+          <a:p>
+            <a:pPr algn="ctr"/>
+            <a:endParaRPr lang="zh-CN" altLang="en-US"/>
+          </a:p>
+        </p:txBody>
+      </p:sp>
+      <p:sp>
+        <p:nvSpPr>
+          <p:cNvPr id="5" name="文本框 4">
+            <a:extLst>
+              <a:ext uri="{FF2B5EF4-FFF2-40B4-BE49-F238E27FC236}">
+                <a16:creationId xmlns:a16="http://schemas.microsoft.com/office/drawing/2014/main" id="{32CDFB29-8DC8-09EC-66B7-490E9B0F4563}"/>
+              </a:ext>
+            </a:extLst>
+          </p:cNvPr>
+          <p:cNvSpPr txBox="1"/>
+          <p:nvPr/>
+        </p:nvSpPr>
+        <p:spPr>
+          <a:xfrm>
+            <a:off x="142240" y="562597"/>
+            <a:ext cx="4360407" cy="369332"/>
+          </a:xfrm>
+          <a:prstGeom prst="rect">
+            <a:avLst/>
+          </a:prstGeom>
+          <a:noFill/>
+        </p:spPr>
+        <p:txBody>
+          <a:bodyPr wrap="square" rtlCol="0">
+            <a:spAutoFit/>
+          </a:bodyPr>
+          <a:lstStyle/>
+          <a:p>
+            <a:r>
+              <a:rPr lang="en-US" altLang="zh-CN" dirty="0" err="1">
+                <a:latin typeface="Noto Sans SC Black" panose="020B0200000000000000" pitchFamily="34" charset="-122"/>
+                <a:ea typeface="Noto Sans SC Black" panose="020B0200000000000000" pitchFamily="34" charset="-122"/>
+              </a:rPr>
+              <a:t>Metaclass</a:t>
+            </a:r>
+            <a:r>
+              <a:rPr lang="en-US" altLang="zh-CN" dirty="0">
+                <a:latin typeface="Noto Sans SC Black" panose="020B0200000000000000" pitchFamily="34" charset="-122"/>
+                <a:ea typeface="Noto Sans SC Black" panose="020B0200000000000000" pitchFamily="34" charset="-122"/>
+              </a:rPr>
+              <a:t> System (Engine-Agnostic)</a:t>
+            </a:r>
+            <a:endParaRPr lang="zh-CN" altLang="en-US" dirty="0">
+              <a:latin typeface="Noto Sans SC Black" panose="020B0200000000000000" pitchFamily="34" charset="-122"/>
+              <a:ea typeface="Noto Sans SC Black" panose="020B0200000000000000" pitchFamily="34" charset="-122"/>
+            </a:endParaRPr>
+          </a:p>
+        </p:txBody>
+      </p:sp>
+      <p:sp>
+        <p:nvSpPr>
+          <p:cNvPr id="6" name="矩形 5">
+            <a:extLst>
+              <a:ext uri="{FF2B5EF4-FFF2-40B4-BE49-F238E27FC236}">
+                <a16:creationId xmlns:a16="http://schemas.microsoft.com/office/drawing/2014/main" id="{016B5D27-3F5C-91F4-6F6B-E903AC8EF1BF}"/>
+              </a:ext>
+            </a:extLst>
+          </p:cNvPr>
+          <p:cNvSpPr>
+            <a:spLocks noGrp="1" noRot="1" noMove="1" noResize="1" noEditPoints="1" noAdjustHandles="1" noChangeArrowheads="1" noChangeShapeType="1"/>
+          </p:cNvSpPr>
+          <p:nvPr/>
+        </p:nvSpPr>
+        <p:spPr>
+          <a:xfrm>
+            <a:off x="5796280" y="527036"/>
+            <a:ext cx="6200582" cy="6290323"/>
+          </a:xfrm>
+          <a:prstGeom prst="rect">
+            <a:avLst/>
+          </a:prstGeom>
+        </p:spPr>
+        <p:style>
+          <a:lnRef idx="2">
+            <a:schemeClr val="accent2">
+              <a:shade val="15000"/>
+            </a:schemeClr>
+          </a:lnRef>
+          <a:fillRef idx="1">
+            <a:schemeClr val="accent2"/>
+          </a:fillRef>
+          <a:effectRef idx="0">
+            <a:schemeClr val="accent2"/>
+          </a:effectRef>
+          <a:fontRef idx="minor">
+            <a:schemeClr val="lt1"/>
+          </a:fontRef>
+        </p:style>
+        <p:txBody>
+          <a:bodyPr rtlCol="0" anchor="ctr"/>
+          <a:lstStyle/>
+          <a:p>
+            <a:pPr algn="ctr"/>
+            <a:endParaRPr lang="zh-CN" altLang="en-US"/>
+          </a:p>
+        </p:txBody>
+      </p:sp>
+      <p:sp>
+        <p:nvSpPr>
+          <p:cNvPr id="9" name="文本框 8">
+            <a:extLst>
+              <a:ext uri="{FF2B5EF4-FFF2-40B4-BE49-F238E27FC236}">
+                <a16:creationId xmlns:a16="http://schemas.microsoft.com/office/drawing/2014/main" id="{19ECE009-E934-EE76-9524-45BEF09BAA71}"/>
+              </a:ext>
+            </a:extLst>
+          </p:cNvPr>
+          <p:cNvSpPr txBox="1"/>
+          <p:nvPr/>
+        </p:nvSpPr>
+        <p:spPr>
+          <a:xfrm>
+            <a:off x="5952104" y="631134"/>
+            <a:ext cx="5794513" cy="369332"/>
+          </a:xfrm>
+          <a:prstGeom prst="rect">
+            <a:avLst/>
+          </a:prstGeom>
+          <a:noFill/>
+        </p:spPr>
+        <p:txBody>
+          <a:bodyPr wrap="square" rtlCol="0">
+            <a:spAutoFit/>
+          </a:bodyPr>
+          <a:lstStyle/>
+          <a:p>
+            <a:r>
+              <a:rPr lang="en-US" altLang="zh-CN" dirty="0">
+                <a:latin typeface="Noto Sans SC Black" panose="020B0200000000000000" pitchFamily="34" charset="-122"/>
+                <a:ea typeface="Noto Sans SC Black" panose="020B0200000000000000" pitchFamily="34" charset="-122"/>
+              </a:rPr>
+              <a:t>AMAR Engine Stack</a:t>
+            </a:r>
+            <a:endParaRPr lang="zh-CN" altLang="en-US" dirty="0">
+              <a:latin typeface="Noto Sans SC Black" panose="020B0200000000000000" pitchFamily="34" charset="-122"/>
+              <a:ea typeface="Noto Sans SC Black" panose="020B0200000000000000" pitchFamily="34" charset="-122"/>
+            </a:endParaRPr>
+          </a:p>
+        </p:txBody>
+      </p:sp>
+      <p:sp>
+        <p:nvSpPr>
+          <p:cNvPr id="17" name="矩形 16">
+            <a:extLst>
+              <a:ext uri="{FF2B5EF4-FFF2-40B4-BE49-F238E27FC236}">
+                <a16:creationId xmlns:a16="http://schemas.microsoft.com/office/drawing/2014/main" id="{20AC4087-3A48-5927-375C-200A35016420}"/>
+              </a:ext>
+            </a:extLst>
+          </p:cNvPr>
+          <p:cNvSpPr/>
+          <p:nvPr/>
+        </p:nvSpPr>
+        <p:spPr>
+          <a:xfrm>
+            <a:off x="5997824" y="1205923"/>
+            <a:ext cx="5953539" cy="735483"/>
+          </a:xfrm>
+          <a:prstGeom prst="rect">
+            <a:avLst/>
+          </a:prstGeom>
+        </p:spPr>
+        <p:style>
+          <a:lnRef idx="2">
+            <a:schemeClr val="accent6">
+              <a:shade val="15000"/>
+            </a:schemeClr>
+          </a:lnRef>
+          <a:fillRef idx="1">
+            <a:schemeClr val="accent6"/>
+          </a:fillRef>
+          <a:effectRef idx="0">
+            <a:schemeClr val="accent6"/>
+          </a:effectRef>
+          <a:fontRef idx="minor">
+            <a:schemeClr val="lt1"/>
+          </a:fontRef>
+        </p:style>
+        <p:txBody>
+          <a:bodyPr rtlCol="0" anchor="ctr"/>
+          <a:lstStyle/>
+          <a:p>
+            <a:pPr algn="ctr"/>
+            <a:endParaRPr lang="zh-CN" altLang="en-US"/>
+          </a:p>
+        </p:txBody>
+      </p:sp>
+      <p:sp>
+        <p:nvSpPr>
+          <p:cNvPr id="18" name="文本框 17">
+            <a:extLst>
+              <a:ext uri="{FF2B5EF4-FFF2-40B4-BE49-F238E27FC236}">
+                <a16:creationId xmlns:a16="http://schemas.microsoft.com/office/drawing/2014/main" id="{F934F747-2BB5-3FE6-0171-7E1A540D1047}"/>
+              </a:ext>
+            </a:extLst>
+          </p:cNvPr>
+          <p:cNvSpPr txBox="1"/>
+          <p:nvPr/>
+        </p:nvSpPr>
+        <p:spPr>
+          <a:xfrm>
+            <a:off x="6309360" y="1264920"/>
+            <a:ext cx="4983480" cy="923330"/>
+          </a:xfrm>
+          <a:prstGeom prst="rect">
+            <a:avLst/>
+          </a:prstGeom>
+          <a:noFill/>
+        </p:spPr>
+        <p:txBody>
+          <a:bodyPr wrap="square" rtlCol="0">
+            <a:spAutoFit/>
+          </a:bodyPr>
+          <a:lstStyle/>
+          <a:p>
+            <a:r>
+              <a:rPr lang="en-US" altLang="zh-CN" dirty="0"/>
+              <a:t>AME Admin</a:t>
+            </a:r>
+          </a:p>
+          <a:p>
+            <a:r>
+              <a:rPr lang="en-US" altLang="zh-CN" dirty="0"/>
+              <a:t>(Control / Orchestration)</a:t>
+            </a:r>
+          </a:p>
+          <a:p>
+            <a:endParaRPr lang="zh-CN" altLang="en-US" dirty="0"/>
+          </a:p>
+        </p:txBody>
+      </p:sp>
+      <p:sp>
+        <p:nvSpPr>
+          <p:cNvPr id="19" name="箭头: 下 18">
+            <a:extLst>
+              <a:ext uri="{FF2B5EF4-FFF2-40B4-BE49-F238E27FC236}">
+                <a16:creationId xmlns:a16="http://schemas.microsoft.com/office/drawing/2014/main" id="{CD6CD4BC-7DED-9504-4318-473936BBF89D}"/>
+              </a:ext>
+            </a:extLst>
+          </p:cNvPr>
+          <p:cNvSpPr/>
+          <p:nvPr/>
+        </p:nvSpPr>
+        <p:spPr>
+          <a:xfrm>
+            <a:off x="6217920" y="2037080"/>
+            <a:ext cx="1463040" cy="340356"/>
+          </a:xfrm>
+          <a:prstGeom prst="downArrow">
+            <a:avLst/>
+          </a:prstGeom>
+        </p:spPr>
+        <p:style>
+          <a:lnRef idx="2">
+            <a:schemeClr val="accent1">
+              <a:shade val="15000"/>
+            </a:schemeClr>
+          </a:lnRef>
+          <a:fillRef idx="1">
+            <a:schemeClr val="accent1"/>
+          </a:fillRef>
+          <a:effectRef idx="0">
+            <a:schemeClr val="accent1"/>
+          </a:effectRef>
+          <a:fontRef idx="minor">
+            <a:schemeClr val="lt1"/>
+          </a:fontRef>
+        </p:style>
+        <p:txBody>
+          <a:bodyPr rtlCol="0" anchor="ctr"/>
+          <a:lstStyle/>
+          <a:p>
+            <a:pPr algn="ctr"/>
+            <a:endParaRPr lang="zh-CN" altLang="en-US"/>
+          </a:p>
+        </p:txBody>
+      </p:sp>
+      <p:sp>
+        <p:nvSpPr>
+          <p:cNvPr id="23" name="矩形 22">
+            <a:extLst>
+              <a:ext uri="{FF2B5EF4-FFF2-40B4-BE49-F238E27FC236}">
+                <a16:creationId xmlns:a16="http://schemas.microsoft.com/office/drawing/2014/main" id="{4E5C077A-B903-3753-1450-ACD1F4C62C1D}"/>
+              </a:ext>
+            </a:extLst>
+          </p:cNvPr>
+          <p:cNvSpPr/>
+          <p:nvPr/>
+        </p:nvSpPr>
+        <p:spPr>
+          <a:xfrm>
+            <a:off x="6034985" y="2464938"/>
+            <a:ext cx="5879216" cy="735483"/>
+          </a:xfrm>
+          <a:prstGeom prst="rect">
+            <a:avLst/>
+          </a:prstGeom>
+        </p:spPr>
+        <p:style>
+          <a:lnRef idx="2">
+            <a:schemeClr val="accent6">
+              <a:shade val="15000"/>
+            </a:schemeClr>
+          </a:lnRef>
+          <a:fillRef idx="1">
+            <a:schemeClr val="accent6"/>
+          </a:fillRef>
+          <a:effectRef idx="0">
+            <a:schemeClr val="accent6"/>
+          </a:effectRef>
+          <a:fontRef idx="minor">
+            <a:schemeClr val="lt1"/>
+          </a:fontRef>
+        </p:style>
+        <p:txBody>
+          <a:bodyPr rtlCol="0" anchor="ctr"/>
+          <a:lstStyle/>
+          <a:p>
+            <a:pPr algn="ctr"/>
+            <a:endParaRPr lang="zh-CN" altLang="en-US"/>
+          </a:p>
+        </p:txBody>
+      </p:sp>
+      <p:sp>
+        <p:nvSpPr>
+          <p:cNvPr id="24" name="文本框 23">
+            <a:extLst>
+              <a:ext uri="{FF2B5EF4-FFF2-40B4-BE49-F238E27FC236}">
+                <a16:creationId xmlns:a16="http://schemas.microsoft.com/office/drawing/2014/main" id="{13E86C95-A862-1F63-25C6-E6FDC6871B61}"/>
+              </a:ext>
+            </a:extLst>
+          </p:cNvPr>
+          <p:cNvSpPr txBox="1"/>
+          <p:nvPr/>
+        </p:nvSpPr>
+        <p:spPr>
+          <a:xfrm>
+            <a:off x="6180289" y="2537494"/>
+            <a:ext cx="5577287" cy="923330"/>
+          </a:xfrm>
+          <a:prstGeom prst="rect">
+            <a:avLst/>
+          </a:prstGeom>
+          <a:noFill/>
+        </p:spPr>
+        <p:txBody>
+          <a:bodyPr wrap="square" rtlCol="0">
+            <a:spAutoFit/>
+          </a:bodyPr>
+          <a:lstStyle/>
+          <a:p>
+            <a:r>
+              <a:rPr lang="en-US" altLang="zh-CN" dirty="0"/>
+              <a:t>AMAR Engine Core</a:t>
+            </a:r>
+          </a:p>
+          <a:p>
+            <a:r>
+              <a:rPr lang="en-US" altLang="zh-CN" dirty="0"/>
+              <a:t>(</a:t>
+            </a:r>
+            <a:r>
+              <a:rPr lang="en-US" altLang="zh-CN" dirty="0" err="1"/>
+              <a:t>Metaclass</a:t>
+            </a:r>
+            <a:r>
+              <a:rPr lang="en-US" altLang="zh-CN" dirty="0"/>
+              <a:t> Binding &amp; World Construction)</a:t>
+            </a:r>
+          </a:p>
+          <a:p>
+            <a:endParaRPr lang="zh-CN" altLang="en-US" dirty="0"/>
+          </a:p>
+        </p:txBody>
+      </p:sp>
+      <p:sp>
+        <p:nvSpPr>
+          <p:cNvPr id="25" name="矩形 24">
+            <a:extLst>
+              <a:ext uri="{FF2B5EF4-FFF2-40B4-BE49-F238E27FC236}">
+                <a16:creationId xmlns:a16="http://schemas.microsoft.com/office/drawing/2014/main" id="{7E652AFA-E921-89D9-DC9A-72BA677045B7}"/>
+              </a:ext>
+            </a:extLst>
+          </p:cNvPr>
+          <p:cNvSpPr/>
+          <p:nvPr/>
+        </p:nvSpPr>
+        <p:spPr>
+          <a:xfrm>
+            <a:off x="5997824" y="3741678"/>
+            <a:ext cx="5953539" cy="735483"/>
+          </a:xfrm>
+          <a:prstGeom prst="rect">
+            <a:avLst/>
+          </a:prstGeom>
+        </p:spPr>
+        <p:style>
+          <a:lnRef idx="2">
+            <a:schemeClr val="accent6">
+              <a:shade val="15000"/>
+            </a:schemeClr>
+          </a:lnRef>
+          <a:fillRef idx="1">
+            <a:schemeClr val="accent6"/>
+          </a:fillRef>
+          <a:effectRef idx="0">
+            <a:schemeClr val="accent6"/>
+          </a:effectRef>
+          <a:fontRef idx="minor">
+            <a:schemeClr val="lt1"/>
+          </a:fontRef>
+        </p:style>
+        <p:txBody>
+          <a:bodyPr rtlCol="0" anchor="ctr"/>
+          <a:lstStyle/>
+          <a:p>
+            <a:pPr algn="ctr"/>
+            <a:endParaRPr lang="zh-CN" altLang="en-US"/>
+          </a:p>
+        </p:txBody>
+      </p:sp>
+      <p:sp>
+        <p:nvSpPr>
+          <p:cNvPr id="26" name="箭头: 下 25">
+            <a:extLst>
+              <a:ext uri="{FF2B5EF4-FFF2-40B4-BE49-F238E27FC236}">
+                <a16:creationId xmlns:a16="http://schemas.microsoft.com/office/drawing/2014/main" id="{8FAE87B6-D395-B860-9C6E-5954A3412988}"/>
+              </a:ext>
+            </a:extLst>
+          </p:cNvPr>
+          <p:cNvSpPr/>
+          <p:nvPr/>
+        </p:nvSpPr>
+        <p:spPr>
+          <a:xfrm>
+            <a:off x="6258560" y="3330796"/>
+            <a:ext cx="1463040" cy="340356"/>
+          </a:xfrm>
+          <a:prstGeom prst="downArrow">
+            <a:avLst/>
+          </a:prstGeom>
+        </p:spPr>
+        <p:style>
+          <a:lnRef idx="2">
+            <a:schemeClr val="accent1">
+              <a:shade val="15000"/>
+            </a:schemeClr>
+          </a:lnRef>
+          <a:fillRef idx="1">
+            <a:schemeClr val="accent1"/>
+          </a:fillRef>
+          <a:effectRef idx="0">
+            <a:schemeClr val="accent1"/>
+          </a:effectRef>
+          <a:fontRef idx="minor">
+            <a:schemeClr val="lt1"/>
+          </a:fontRef>
+        </p:style>
+        <p:txBody>
+          <a:bodyPr rtlCol="0" anchor="ctr"/>
+          <a:lstStyle/>
+          <a:p>
+            <a:pPr algn="ctr"/>
+            <a:endParaRPr lang="zh-CN" altLang="en-US"/>
+          </a:p>
+        </p:txBody>
+      </p:sp>
+      <p:sp>
+        <p:nvSpPr>
+          <p:cNvPr id="27" name="文本框 26">
+            <a:extLst>
+              <a:ext uri="{FF2B5EF4-FFF2-40B4-BE49-F238E27FC236}">
+                <a16:creationId xmlns:a16="http://schemas.microsoft.com/office/drawing/2014/main" id="{D3944942-ACE3-B23F-FB81-A25485094D84}"/>
+              </a:ext>
+            </a:extLst>
+          </p:cNvPr>
+          <p:cNvSpPr txBox="1"/>
+          <p:nvPr/>
+        </p:nvSpPr>
+        <p:spPr>
+          <a:xfrm>
+            <a:off x="6096000" y="3804920"/>
+            <a:ext cx="5661576" cy="923330"/>
+          </a:xfrm>
+          <a:prstGeom prst="rect">
+            <a:avLst/>
+          </a:prstGeom>
+          <a:noFill/>
+        </p:spPr>
+        <p:txBody>
+          <a:bodyPr wrap="square" rtlCol="0">
+            <a:spAutoFit/>
+          </a:bodyPr>
+          <a:lstStyle/>
+          <a:p>
+            <a:r>
+              <a:rPr lang="en-US" altLang="zh-CN" dirty="0"/>
+              <a:t>AMAR World Format</a:t>
+            </a:r>
+          </a:p>
+          <a:p>
+            <a:r>
+              <a:rPr lang="en-US" altLang="zh-CN" dirty="0"/>
+              <a:t>(Structured Folder Specification)</a:t>
+            </a:r>
+          </a:p>
+          <a:p>
+            <a:endParaRPr lang="zh-CN" altLang="en-US" dirty="0"/>
+          </a:p>
+        </p:txBody>
+      </p:sp>
+      <p:sp>
+        <p:nvSpPr>
+          <p:cNvPr id="28" name="箭头: 下 27">
+            <a:extLst>
+              <a:ext uri="{FF2B5EF4-FFF2-40B4-BE49-F238E27FC236}">
+                <a16:creationId xmlns:a16="http://schemas.microsoft.com/office/drawing/2014/main" id="{22ED2EC4-CD77-D9FA-9966-ECEB5459E3C3}"/>
+              </a:ext>
+            </a:extLst>
+          </p:cNvPr>
+          <p:cNvSpPr/>
+          <p:nvPr/>
+        </p:nvSpPr>
+        <p:spPr>
+          <a:xfrm>
+            <a:off x="6217920" y="4506937"/>
+            <a:ext cx="1463040" cy="340356"/>
+          </a:xfrm>
+          <a:prstGeom prst="downArrow">
+            <a:avLst/>
+          </a:prstGeom>
+        </p:spPr>
+        <p:style>
+          <a:lnRef idx="2">
+            <a:schemeClr val="accent1">
+              <a:shade val="15000"/>
+            </a:schemeClr>
+          </a:lnRef>
+          <a:fillRef idx="1">
+            <a:schemeClr val="accent1"/>
+          </a:fillRef>
+          <a:effectRef idx="0">
+            <a:schemeClr val="accent1"/>
+          </a:effectRef>
+          <a:fontRef idx="minor">
+            <a:schemeClr val="lt1"/>
+          </a:fontRef>
+        </p:style>
+        <p:txBody>
+          <a:bodyPr rtlCol="0" anchor="ctr"/>
+          <a:lstStyle/>
+          <a:p>
+            <a:pPr algn="ctr"/>
+            <a:endParaRPr lang="zh-CN" altLang="en-US"/>
+          </a:p>
+        </p:txBody>
+      </p:sp>
+      <p:sp>
+        <p:nvSpPr>
+          <p:cNvPr id="29" name="矩形 28">
+            <a:extLst>
+              <a:ext uri="{FF2B5EF4-FFF2-40B4-BE49-F238E27FC236}">
+                <a16:creationId xmlns:a16="http://schemas.microsoft.com/office/drawing/2014/main" id="{A1539B85-6B13-E7F0-099B-C2B9DCE26DFB}"/>
+              </a:ext>
+            </a:extLst>
+          </p:cNvPr>
+          <p:cNvSpPr/>
+          <p:nvPr/>
+        </p:nvSpPr>
+        <p:spPr>
+          <a:xfrm>
+            <a:off x="5960662" y="4916594"/>
+            <a:ext cx="5953539" cy="735483"/>
+          </a:xfrm>
+          <a:prstGeom prst="rect">
+            <a:avLst/>
+          </a:prstGeom>
+        </p:spPr>
+        <p:style>
+          <a:lnRef idx="2">
+            <a:schemeClr val="accent6">
+              <a:shade val="15000"/>
+            </a:schemeClr>
+          </a:lnRef>
+          <a:fillRef idx="1">
+            <a:schemeClr val="accent6"/>
+          </a:fillRef>
+          <a:effectRef idx="0">
+            <a:schemeClr val="accent6"/>
+          </a:effectRef>
+          <a:fontRef idx="minor">
+            <a:schemeClr val="lt1"/>
+          </a:fontRef>
+        </p:style>
+        <p:txBody>
+          <a:bodyPr rtlCol="0" anchor="ctr"/>
+          <a:lstStyle/>
+          <a:p>
+            <a:pPr algn="ctr"/>
+            <a:endParaRPr lang="zh-CN" altLang="en-US"/>
+          </a:p>
+        </p:txBody>
+      </p:sp>
+      <p:sp>
+        <p:nvSpPr>
+          <p:cNvPr id="30" name="文本框 29">
+            <a:extLst>
+              <a:ext uri="{FF2B5EF4-FFF2-40B4-BE49-F238E27FC236}">
+                <a16:creationId xmlns:a16="http://schemas.microsoft.com/office/drawing/2014/main" id="{2E11B1BE-4CD9-4968-E23B-9EE6D1F5ED93}"/>
+              </a:ext>
+            </a:extLst>
+          </p:cNvPr>
+          <p:cNvSpPr txBox="1"/>
+          <p:nvPr/>
+        </p:nvSpPr>
+        <p:spPr>
+          <a:xfrm>
+            <a:off x="6096000" y="4916594"/>
+            <a:ext cx="5603240" cy="923330"/>
+          </a:xfrm>
+          <a:prstGeom prst="rect">
+            <a:avLst/>
+          </a:prstGeom>
+          <a:noFill/>
+        </p:spPr>
+        <p:txBody>
+          <a:bodyPr wrap="square" rtlCol="0">
+            <a:spAutoFit/>
+          </a:bodyPr>
+          <a:lstStyle/>
+          <a:p>
+            <a:r>
+              <a:rPr lang="en-US" altLang="zh-CN" dirty="0"/>
+              <a:t>AMAR GENIS</a:t>
+            </a:r>
+          </a:p>
+          <a:p>
+            <a:r>
+              <a:rPr lang="en-US" altLang="zh-CN" dirty="0"/>
+              <a:t>(Physics Execution Core)</a:t>
+            </a:r>
+          </a:p>
+          <a:p>
+            <a:endParaRPr lang="zh-CN" altLang="en-US" dirty="0"/>
+          </a:p>
+        </p:txBody>
+      </p:sp>
+      <p:sp>
+        <p:nvSpPr>
+          <p:cNvPr id="31" name="箭头: 下 30">
+            <a:extLst>
+              <a:ext uri="{FF2B5EF4-FFF2-40B4-BE49-F238E27FC236}">
+                <a16:creationId xmlns:a16="http://schemas.microsoft.com/office/drawing/2014/main" id="{6137DDC3-1A47-99DE-5A1A-1EEADE1C752E}"/>
+              </a:ext>
+            </a:extLst>
+          </p:cNvPr>
+          <p:cNvSpPr/>
+          <p:nvPr/>
+        </p:nvSpPr>
+        <p:spPr>
+          <a:xfrm>
+            <a:off x="6258560" y="5686031"/>
+            <a:ext cx="1463040" cy="340356"/>
+          </a:xfrm>
+          <a:prstGeom prst="downArrow">
+            <a:avLst/>
+          </a:prstGeom>
+        </p:spPr>
+        <p:style>
+          <a:lnRef idx="2">
+            <a:schemeClr val="accent1">
+              <a:shade val="15000"/>
+            </a:schemeClr>
+          </a:lnRef>
+          <a:fillRef idx="1">
+            <a:schemeClr val="accent1"/>
+          </a:fillRef>
+          <a:effectRef idx="0">
+            <a:schemeClr val="accent1"/>
+          </a:effectRef>
+          <a:fontRef idx="minor">
+            <a:schemeClr val="lt1"/>
+          </a:fontRef>
+        </p:style>
+        <p:txBody>
+          <a:bodyPr rtlCol="0" anchor="ctr"/>
+          <a:lstStyle/>
+          <a:p>
+            <a:pPr algn="ctr"/>
+            <a:endParaRPr lang="zh-CN" altLang="en-US"/>
+          </a:p>
+        </p:txBody>
+      </p:sp>
+      <p:sp>
+        <p:nvSpPr>
+          <p:cNvPr id="32" name="矩形 31">
+            <a:extLst>
+              <a:ext uri="{FF2B5EF4-FFF2-40B4-BE49-F238E27FC236}">
+                <a16:creationId xmlns:a16="http://schemas.microsoft.com/office/drawing/2014/main" id="{55A75830-77C4-BCDA-58B4-5E941BBE30FB}"/>
+              </a:ext>
+            </a:extLst>
+          </p:cNvPr>
+          <p:cNvSpPr/>
+          <p:nvPr/>
+        </p:nvSpPr>
+        <p:spPr>
+          <a:xfrm>
+            <a:off x="5997824" y="6040237"/>
+            <a:ext cx="5879216" cy="600293"/>
+          </a:xfrm>
+          <a:prstGeom prst="rect">
+            <a:avLst/>
+          </a:prstGeom>
+        </p:spPr>
+        <p:style>
+          <a:lnRef idx="2">
+            <a:schemeClr val="accent6">
+              <a:shade val="15000"/>
+            </a:schemeClr>
+          </a:lnRef>
+          <a:fillRef idx="1">
+            <a:schemeClr val="accent6"/>
+          </a:fillRef>
+          <a:effectRef idx="0">
+            <a:schemeClr val="accent6"/>
+          </a:effectRef>
+          <a:fontRef idx="minor">
+            <a:schemeClr val="lt1"/>
+          </a:fontRef>
+        </p:style>
+        <p:txBody>
+          <a:bodyPr rtlCol="0" anchor="ctr"/>
+          <a:lstStyle/>
+          <a:p>
+            <a:pPr algn="ctr"/>
+            <a:endParaRPr lang="zh-CN" altLang="en-US"/>
+          </a:p>
+        </p:txBody>
+      </p:sp>
+      <p:sp>
+        <p:nvSpPr>
+          <p:cNvPr id="33" name="文本框 32">
+            <a:extLst>
+              <a:ext uri="{FF2B5EF4-FFF2-40B4-BE49-F238E27FC236}">
+                <a16:creationId xmlns:a16="http://schemas.microsoft.com/office/drawing/2014/main" id="{979346EE-743F-FA19-143D-CE94321DFCEB}"/>
+              </a:ext>
+            </a:extLst>
+          </p:cNvPr>
+          <p:cNvSpPr txBox="1"/>
+          <p:nvPr/>
+        </p:nvSpPr>
+        <p:spPr>
+          <a:xfrm>
+            <a:off x="6096000" y="6040237"/>
+            <a:ext cx="5770935" cy="923330"/>
+          </a:xfrm>
+          <a:prstGeom prst="rect">
+            <a:avLst/>
+          </a:prstGeom>
+          <a:noFill/>
+        </p:spPr>
+        <p:txBody>
+          <a:bodyPr wrap="square" rtlCol="0">
+            <a:spAutoFit/>
+          </a:bodyPr>
+          <a:lstStyle/>
+          <a:p>
+            <a:r>
+              <a:rPr lang="en-US" altLang="zh-CN" dirty="0"/>
+              <a:t>Interactive World</a:t>
+            </a:r>
+          </a:p>
+          <a:p>
+            <a:r>
+              <a:rPr lang="en-US" altLang="zh-CN" dirty="0"/>
+              <a:t>(Executable Reality)</a:t>
+            </a:r>
+            <a:endParaRPr lang="zh-CN" altLang="en-US" dirty="0"/>
+          </a:p>
+          <a:p>
+            <a:endParaRPr lang="zh-CN" altLang="en-US" dirty="0"/>
+          </a:p>
+        </p:txBody>
+      </p:sp>
+      <p:sp>
+        <p:nvSpPr>
+          <p:cNvPr id="3" name="矩形 2">
+            <a:extLst>
+              <a:ext uri="{FF2B5EF4-FFF2-40B4-BE49-F238E27FC236}">
+                <a16:creationId xmlns:a16="http://schemas.microsoft.com/office/drawing/2014/main" id="{B545F713-FA3B-13C7-D425-F51FED188CBD}"/>
+              </a:ext>
+            </a:extLst>
+          </p:cNvPr>
+          <p:cNvSpPr/>
+          <p:nvPr/>
+        </p:nvSpPr>
+        <p:spPr>
+          <a:xfrm>
+            <a:off x="231913" y="1000466"/>
+            <a:ext cx="4655047" cy="940940"/>
+          </a:xfrm>
+          <a:prstGeom prst="rect">
+            <a:avLst/>
+          </a:prstGeom>
+        </p:spPr>
+        <p:style>
+          <a:lnRef idx="2">
+            <a:schemeClr val="accent1">
+              <a:shade val="15000"/>
+            </a:schemeClr>
+          </a:lnRef>
+          <a:fillRef idx="1">
+            <a:schemeClr val="accent1"/>
+          </a:fillRef>
+          <a:effectRef idx="0">
+            <a:schemeClr val="accent1"/>
+          </a:effectRef>
+          <a:fontRef idx="minor">
+            <a:schemeClr val="lt1"/>
+          </a:fontRef>
+        </p:style>
+        <p:txBody>
+          <a:bodyPr rtlCol="0" anchor="ctr"/>
+          <a:lstStyle/>
+          <a:p>
+            <a:pPr algn="ctr"/>
+            <a:endParaRPr lang="zh-CN" altLang="en-US"/>
+          </a:p>
+        </p:txBody>
+      </p:sp>
+      <p:sp>
+        <p:nvSpPr>
+          <p:cNvPr id="7" name="文本框 6">
+            <a:extLst>
+              <a:ext uri="{FF2B5EF4-FFF2-40B4-BE49-F238E27FC236}">
+                <a16:creationId xmlns:a16="http://schemas.microsoft.com/office/drawing/2014/main" id="{51B18399-EDE7-80AD-D84E-5FCD680E5F54}"/>
+              </a:ext>
+            </a:extLst>
+          </p:cNvPr>
+          <p:cNvSpPr txBox="1"/>
+          <p:nvPr/>
+        </p:nvSpPr>
+        <p:spPr>
+          <a:xfrm>
+            <a:off x="350520" y="1122680"/>
+            <a:ext cx="4368800" cy="646331"/>
+          </a:xfrm>
+          <a:prstGeom prst="rect">
+            <a:avLst/>
+          </a:prstGeom>
+          <a:noFill/>
+        </p:spPr>
+        <p:txBody>
+          <a:bodyPr wrap="square" rtlCol="0">
+            <a:spAutoFit/>
+          </a:bodyPr>
+          <a:lstStyle/>
+          <a:p>
+            <a:r>
+              <a:rPr lang="zh-CN" altLang="zh-CN" dirty="0">
+                <a:latin typeface="Arial" panose="020B0604020202020204" pitchFamily="34" charset="0"/>
+              </a:rPr>
+              <a:t>Metaclass Protocol</a:t>
+            </a:r>
+          </a:p>
+          <a:p>
+            <a:endParaRPr lang="zh-CN" altLang="en-US" dirty="0"/>
+          </a:p>
+        </p:txBody>
+      </p:sp>
+      <p:sp>
+        <p:nvSpPr>
+          <p:cNvPr id="8" name="矩形 7">
+            <a:extLst>
+              <a:ext uri="{FF2B5EF4-FFF2-40B4-BE49-F238E27FC236}">
+                <a16:creationId xmlns:a16="http://schemas.microsoft.com/office/drawing/2014/main" id="{CC0592AB-6E32-B543-3313-2BCF384794C4}"/>
+              </a:ext>
+            </a:extLst>
+          </p:cNvPr>
+          <p:cNvSpPr/>
+          <p:nvPr/>
+        </p:nvSpPr>
+        <p:spPr>
+          <a:xfrm>
+            <a:off x="231912" y="2259481"/>
+            <a:ext cx="4655047" cy="940940"/>
+          </a:xfrm>
+          <a:prstGeom prst="rect">
+            <a:avLst/>
+          </a:prstGeom>
+        </p:spPr>
+        <p:style>
+          <a:lnRef idx="2">
+            <a:schemeClr val="accent1">
+              <a:shade val="15000"/>
+            </a:schemeClr>
+          </a:lnRef>
+          <a:fillRef idx="1">
+            <a:schemeClr val="accent1"/>
+          </a:fillRef>
+          <a:effectRef idx="0">
+            <a:schemeClr val="accent1"/>
+          </a:effectRef>
+          <a:fontRef idx="minor">
+            <a:schemeClr val="lt1"/>
+          </a:fontRef>
+        </p:style>
+        <p:txBody>
+          <a:bodyPr rtlCol="0" anchor="ctr"/>
+          <a:lstStyle/>
+          <a:p>
+            <a:pPr algn="ctr"/>
+            <a:endParaRPr lang="zh-CN" altLang="en-US"/>
+          </a:p>
+        </p:txBody>
+      </p:sp>
+      <p:sp>
+        <p:nvSpPr>
+          <p:cNvPr id="10" name="矩形 9">
+            <a:extLst>
+              <a:ext uri="{FF2B5EF4-FFF2-40B4-BE49-F238E27FC236}">
+                <a16:creationId xmlns:a16="http://schemas.microsoft.com/office/drawing/2014/main" id="{5EDB4668-299B-944F-B5F3-AB6C28D1F112}"/>
+              </a:ext>
+            </a:extLst>
+          </p:cNvPr>
+          <p:cNvSpPr/>
+          <p:nvPr/>
+        </p:nvSpPr>
+        <p:spPr>
+          <a:xfrm>
+            <a:off x="240637" y="3587033"/>
+            <a:ext cx="4655047" cy="940940"/>
+          </a:xfrm>
+          <a:prstGeom prst="rect">
+            <a:avLst/>
+          </a:prstGeom>
+        </p:spPr>
+        <p:style>
+          <a:lnRef idx="2">
+            <a:schemeClr val="accent1">
+              <a:shade val="15000"/>
+            </a:schemeClr>
+          </a:lnRef>
+          <a:fillRef idx="1">
+            <a:schemeClr val="accent1"/>
+          </a:fillRef>
+          <a:effectRef idx="0">
+            <a:schemeClr val="accent1"/>
+          </a:effectRef>
+          <a:fontRef idx="minor">
+            <a:schemeClr val="lt1"/>
+          </a:fontRef>
+        </p:style>
+        <p:txBody>
+          <a:bodyPr rtlCol="0" anchor="ctr"/>
+          <a:lstStyle/>
+          <a:p>
+            <a:pPr algn="ctr"/>
+            <a:endParaRPr lang="zh-CN" altLang="en-US"/>
+          </a:p>
+        </p:txBody>
+      </p:sp>
+      <p:sp>
+        <p:nvSpPr>
+          <p:cNvPr id="11" name="文本框 10">
+            <a:extLst>
+              <a:ext uri="{FF2B5EF4-FFF2-40B4-BE49-F238E27FC236}">
+                <a16:creationId xmlns:a16="http://schemas.microsoft.com/office/drawing/2014/main" id="{2E31F9DD-118C-1988-461C-BE57143B6891}"/>
+              </a:ext>
+            </a:extLst>
+          </p:cNvPr>
+          <p:cNvSpPr txBox="1"/>
+          <p:nvPr/>
+        </p:nvSpPr>
+        <p:spPr>
+          <a:xfrm>
+            <a:off x="396240" y="2377436"/>
+            <a:ext cx="4064000" cy="646331"/>
+          </a:xfrm>
+          <a:prstGeom prst="rect">
+            <a:avLst/>
+          </a:prstGeom>
+          <a:noFill/>
+        </p:spPr>
+        <p:txBody>
+          <a:bodyPr wrap="square" rtlCol="0">
+            <a:spAutoFit/>
+          </a:bodyPr>
+          <a:lstStyle/>
+          <a:p>
+            <a:r>
+              <a:rPr lang="zh-CN" altLang="zh-CN" dirty="0">
+                <a:latin typeface="Arial" panose="020B0604020202020204" pitchFamily="34" charset="0"/>
+              </a:rPr>
+              <a:t>Root Metaclasses</a:t>
+            </a:r>
+          </a:p>
+          <a:p>
+            <a:endParaRPr lang="zh-CN" altLang="en-US" dirty="0"/>
+          </a:p>
+        </p:txBody>
+      </p:sp>
+      <p:sp>
+        <p:nvSpPr>
+          <p:cNvPr id="12" name="文本框 11">
+            <a:extLst>
+              <a:ext uri="{FF2B5EF4-FFF2-40B4-BE49-F238E27FC236}">
+                <a16:creationId xmlns:a16="http://schemas.microsoft.com/office/drawing/2014/main" id="{39D05CC5-F17E-6B07-60A7-60D303D14CEF}"/>
+              </a:ext>
+            </a:extLst>
+          </p:cNvPr>
+          <p:cNvSpPr txBox="1"/>
+          <p:nvPr/>
+        </p:nvSpPr>
+        <p:spPr>
+          <a:xfrm>
+            <a:off x="396240" y="3671152"/>
+            <a:ext cx="4106407" cy="650367"/>
+          </a:xfrm>
+          <a:prstGeom prst="rect">
+            <a:avLst/>
+          </a:prstGeom>
+          <a:noFill/>
+        </p:spPr>
+        <p:txBody>
+          <a:bodyPr wrap="square" rtlCol="0">
+            <a:spAutoFit/>
+          </a:bodyPr>
+          <a:lstStyle/>
+          <a:p>
+            <a:r>
+              <a:rPr lang="zh-CN" altLang="zh-CN" dirty="0">
+                <a:latin typeface="Arial" panose="020B0604020202020204" pitchFamily="34" charset="0"/>
+              </a:rPr>
+              <a:t>Standard Metaclasses</a:t>
+            </a:r>
+          </a:p>
+          <a:p>
+            <a:endParaRPr lang="zh-CN" altLang="en-US" dirty="0"/>
+          </a:p>
+        </p:txBody>
+      </p:sp>
+      <p:sp>
+        <p:nvSpPr>
+          <p:cNvPr id="13" name="矩形 12">
+            <a:extLst>
+              <a:ext uri="{FF2B5EF4-FFF2-40B4-BE49-F238E27FC236}">
+                <a16:creationId xmlns:a16="http://schemas.microsoft.com/office/drawing/2014/main" id="{91B170B7-998A-EA7C-EB6D-968C79F55375}"/>
+              </a:ext>
+            </a:extLst>
+          </p:cNvPr>
+          <p:cNvSpPr/>
+          <p:nvPr/>
+        </p:nvSpPr>
+        <p:spPr>
+          <a:xfrm>
+            <a:off x="240637" y="4689848"/>
+            <a:ext cx="4655047" cy="940940"/>
+          </a:xfrm>
+          <a:prstGeom prst="rect">
+            <a:avLst/>
+          </a:prstGeom>
+        </p:spPr>
+        <p:style>
+          <a:lnRef idx="2">
+            <a:schemeClr val="accent1">
+              <a:shade val="15000"/>
+            </a:schemeClr>
+          </a:lnRef>
+          <a:fillRef idx="1">
+            <a:schemeClr val="accent1"/>
+          </a:fillRef>
+          <a:effectRef idx="0">
+            <a:schemeClr val="accent1"/>
+          </a:effectRef>
+          <a:fontRef idx="minor">
+            <a:schemeClr val="lt1"/>
+          </a:fontRef>
+        </p:style>
+        <p:txBody>
+          <a:bodyPr rtlCol="0" anchor="ctr"/>
+          <a:lstStyle/>
+          <a:p>
+            <a:pPr algn="ctr"/>
+            <a:endParaRPr lang="zh-CN" altLang="en-US"/>
+          </a:p>
+        </p:txBody>
+      </p:sp>
+      <p:sp>
+        <p:nvSpPr>
+          <p:cNvPr id="14" name="文本框 13">
+            <a:extLst>
+              <a:ext uri="{FF2B5EF4-FFF2-40B4-BE49-F238E27FC236}">
+                <a16:creationId xmlns:a16="http://schemas.microsoft.com/office/drawing/2014/main" id="{31FD5477-5926-2F25-D27C-0541366EDDC8}"/>
+              </a:ext>
+            </a:extLst>
+          </p:cNvPr>
+          <p:cNvSpPr txBox="1"/>
+          <p:nvPr/>
+        </p:nvSpPr>
+        <p:spPr>
+          <a:xfrm>
+            <a:off x="396240" y="4775200"/>
+            <a:ext cx="4241800" cy="646331"/>
+          </a:xfrm>
+          <a:prstGeom prst="rect">
+            <a:avLst/>
+          </a:prstGeom>
+          <a:noFill/>
+        </p:spPr>
+        <p:txBody>
+          <a:bodyPr wrap="square" rtlCol="0">
+            <a:spAutoFit/>
+          </a:bodyPr>
+          <a:lstStyle/>
+          <a:p>
+            <a:r>
+              <a:rPr lang="zh-CN" altLang="zh-CN" dirty="0">
+                <a:latin typeface="Arial" panose="020B0604020202020204" pitchFamily="34" charset="0"/>
+              </a:rPr>
+              <a:t>Instance Specifications</a:t>
+            </a:r>
+          </a:p>
+          <a:p>
+            <a:endParaRPr lang="zh-CN" altLang="en-US" dirty="0"/>
+          </a:p>
+        </p:txBody>
+      </p:sp>
+    </p:spTree>
+    <p:extLst>
+      <p:ext uri="{BB962C8B-B14F-4D97-AF65-F5344CB8AC3E}">
+        <p14:creationId xmlns:p14="http://schemas.microsoft.com/office/powerpoint/2010/main" val="2974184025"/>
+      </p:ext>
+    </p:extLst>
+  </p:cSld>
+  <p:clrMapOvr>
+    <a:masterClrMapping/>
+  </p:clrMapOvr>
+</p:sld>
+</file>
+
+<file path=ppt/slides/slide3.xml><?xml version="1.0" encoding="utf-8"?>
+<p:sld xmlns:a="http://schemas.openxmlformats.org/drawingml/2006/main" xmlns:r="http://schemas.openxmlformats.org/officeDocument/2006/relationships" xmlns:p="http://schemas.openxmlformats.org/presentationml/2006/main">
+  <p:cSld>
+    <p:spTree>
+      <p:nvGrpSpPr>
+        <p:cNvPr id="1" name=""/>
+        <p:cNvGrpSpPr/>
+        <p:nvPr/>
+      </p:nvGrpSpPr>
+      <p:grpSpPr>
+        <a:xfrm>
+          <a:off x="0" y="0"/>
+          <a:ext cx="0" cy="0"/>
+          <a:chOff x="0" y="0"/>
+          <a:chExt cx="0" cy="0"/>
+        </a:xfrm>
+      </p:grpSpPr>
+      <p:sp>
+        <p:nvSpPr>
           <p:cNvPr id="4" name="文本框 3">
             <a:extLst>
               <a:ext uri="{FF2B5EF4-FFF2-40B4-BE49-F238E27FC236}">
@@ -3928,6 +5338,18 @@
             <a:r>
               <a:rPr lang="en-US" altLang="zh-CN" dirty="0"/>
               <a:t>Structure</a:t>
+            </a:r>
+            <a:r>
+              <a:rPr lang="zh-CN" altLang="en-US" dirty="0"/>
+              <a:t>（</a:t>
+            </a:r>
+            <a:r>
+              <a:rPr lang="en-US" altLang="zh-CN" dirty="0" err="1"/>
+              <a:t>lefted</a:t>
+            </a:r>
+            <a:r>
+              <a:rPr lang="zh-CN" altLang="en-US" dirty="0"/>
+              <a:t>）</a:t>
             </a:r>
             <a:endParaRPr lang="zh-CN" altLang="en-US" dirty="0">
               <a:latin typeface="Noto Sans JP Black" panose="020B0200000000000000" pitchFamily="34" charset="-122"/>
@@ -5380,6 +6802,314 @@
           </a:p>
         </p:txBody>
       </p:sp>
+      <p:sp>
+        <p:nvSpPr>
+          <p:cNvPr id="24" name="文本框 23">
+            <a:extLst>
+              <a:ext uri="{FF2B5EF4-FFF2-40B4-BE49-F238E27FC236}">
+                <a16:creationId xmlns:a16="http://schemas.microsoft.com/office/drawing/2014/main" id="{6C5CE8ED-E519-6266-34EB-B6F678B77F95}"/>
+              </a:ext>
+            </a:extLst>
+          </p:cNvPr>
+          <p:cNvSpPr txBox="1"/>
+          <p:nvPr/>
+        </p:nvSpPr>
+        <p:spPr>
+          <a:xfrm>
+            <a:off x="7790206" y="5637860"/>
+            <a:ext cx="2286000" cy="646331"/>
+          </a:xfrm>
+          <a:prstGeom prst="rect">
+            <a:avLst/>
+          </a:prstGeom>
+          <a:noFill/>
+        </p:spPr>
+        <p:txBody>
+          <a:bodyPr wrap="square" rtlCol="0">
+            <a:spAutoFit/>
+          </a:bodyPr>
+          <a:lstStyle/>
+          <a:p>
+            <a:r>
+              <a:rPr lang="en-US" altLang="zh-CN" b="1" dirty="0"/>
+              <a:t>Structural Ontology Layer</a:t>
+            </a:r>
+            <a:endParaRPr lang="zh-CN" altLang="en-US" dirty="0"/>
+          </a:p>
+        </p:txBody>
+      </p:sp>
+      <p:sp>
+        <p:nvSpPr>
+          <p:cNvPr id="25" name="文本框 24">
+            <a:extLst>
+              <a:ext uri="{FF2B5EF4-FFF2-40B4-BE49-F238E27FC236}">
+                <a16:creationId xmlns:a16="http://schemas.microsoft.com/office/drawing/2014/main" id="{632BD359-8653-2C9F-A737-8386CB3B5448}"/>
+              </a:ext>
+            </a:extLst>
+          </p:cNvPr>
+          <p:cNvSpPr txBox="1"/>
+          <p:nvPr/>
+        </p:nvSpPr>
+        <p:spPr>
+          <a:xfrm>
+            <a:off x="7878312" y="3959879"/>
+            <a:ext cx="2230094" cy="923330"/>
+          </a:xfrm>
+          <a:prstGeom prst="rect">
+            <a:avLst/>
+          </a:prstGeom>
+          <a:noFill/>
+        </p:spPr>
+        <p:txBody>
+          <a:bodyPr wrap="square" rtlCol="0">
+            <a:spAutoFit/>
+          </a:bodyPr>
+          <a:lstStyle/>
+          <a:p>
+            <a:r>
+              <a:rPr lang="en-US" altLang="zh-CN" b="1" dirty="0"/>
+              <a:t> World Representation Layer</a:t>
+            </a:r>
+            <a:endParaRPr lang="zh-CN" altLang="en-US" dirty="0"/>
+          </a:p>
+        </p:txBody>
+      </p:sp>
+      <p:sp>
+        <p:nvSpPr>
+          <p:cNvPr id="26" name="文本框 25">
+            <a:extLst>
+              <a:ext uri="{FF2B5EF4-FFF2-40B4-BE49-F238E27FC236}">
+                <a16:creationId xmlns:a16="http://schemas.microsoft.com/office/drawing/2014/main" id="{62B61124-2CFB-E673-6912-5871AB5E5678}"/>
+              </a:ext>
+            </a:extLst>
+          </p:cNvPr>
+          <p:cNvSpPr txBox="1"/>
+          <p:nvPr/>
+        </p:nvSpPr>
+        <p:spPr>
+          <a:xfrm>
+            <a:off x="7997374" y="2686059"/>
+            <a:ext cx="2201519" cy="369332"/>
+          </a:xfrm>
+          <a:prstGeom prst="rect">
+            <a:avLst/>
+          </a:prstGeom>
+          <a:noFill/>
+        </p:spPr>
+        <p:txBody>
+          <a:bodyPr wrap="square" rtlCol="0">
+            <a:spAutoFit/>
+          </a:bodyPr>
+          <a:lstStyle/>
+          <a:p>
+            <a:r>
+              <a:rPr lang="en-US" altLang="zh-CN" b="1" dirty="0"/>
+              <a:t> Runtime Core</a:t>
+            </a:r>
+            <a:endParaRPr lang="zh-CN" altLang="en-US" dirty="0"/>
+          </a:p>
+        </p:txBody>
+      </p:sp>
+      <p:sp>
+        <p:nvSpPr>
+          <p:cNvPr id="27" name="文本框 26">
+            <a:extLst>
+              <a:ext uri="{FF2B5EF4-FFF2-40B4-BE49-F238E27FC236}">
+                <a16:creationId xmlns:a16="http://schemas.microsoft.com/office/drawing/2014/main" id="{C1E09D02-6A38-6402-226A-6C2C2CD1C8A9}"/>
+              </a:ext>
+            </a:extLst>
+          </p:cNvPr>
+          <p:cNvSpPr txBox="1"/>
+          <p:nvPr/>
+        </p:nvSpPr>
+        <p:spPr>
+          <a:xfrm>
+            <a:off x="7997374" y="1200577"/>
+            <a:ext cx="2077694" cy="369332"/>
+          </a:xfrm>
+          <a:prstGeom prst="rect">
+            <a:avLst/>
+          </a:prstGeom>
+          <a:noFill/>
+        </p:spPr>
+        <p:txBody>
+          <a:bodyPr wrap="square" rtlCol="0">
+            <a:spAutoFit/>
+          </a:bodyPr>
+          <a:lstStyle/>
+          <a:p>
+            <a:r>
+              <a:rPr lang="en-US" altLang="zh-CN" b="1" dirty="0"/>
+              <a:t>Interface Layer</a:t>
+            </a:r>
+            <a:endParaRPr lang="zh-CN" altLang="en-US" dirty="0"/>
+          </a:p>
+        </p:txBody>
+      </p:sp>
+      <p:sp>
+        <p:nvSpPr>
+          <p:cNvPr id="3" name="矩形 2">
+            <a:extLst>
+              <a:ext uri="{FF2B5EF4-FFF2-40B4-BE49-F238E27FC236}">
+                <a16:creationId xmlns:a16="http://schemas.microsoft.com/office/drawing/2014/main" id="{AA194A77-2698-6734-26BA-D04C3728AB10}"/>
+              </a:ext>
+            </a:extLst>
+          </p:cNvPr>
+          <p:cNvSpPr/>
+          <p:nvPr/>
+        </p:nvSpPr>
+        <p:spPr>
+          <a:xfrm>
+            <a:off x="397565" y="896974"/>
+            <a:ext cx="2171700" cy="1045509"/>
+          </a:xfrm>
+          <a:prstGeom prst="rect">
+            <a:avLst/>
+          </a:prstGeom>
+        </p:spPr>
+        <p:style>
+          <a:lnRef idx="2">
+            <a:schemeClr val="accent1">
+              <a:shade val="15000"/>
+            </a:schemeClr>
+          </a:lnRef>
+          <a:fillRef idx="1">
+            <a:schemeClr val="accent1"/>
+          </a:fillRef>
+          <a:effectRef idx="0">
+            <a:schemeClr val="accent1"/>
+          </a:effectRef>
+          <a:fontRef idx="minor">
+            <a:schemeClr val="lt1"/>
+          </a:fontRef>
+        </p:style>
+        <p:txBody>
+          <a:bodyPr rtlCol="0" anchor="ctr"/>
+          <a:lstStyle/>
+          <a:p>
+            <a:pPr algn="ctr"/>
+            <a:endParaRPr lang="zh-CN" altLang="en-US"/>
+          </a:p>
+        </p:txBody>
+      </p:sp>
+      <p:sp>
+        <p:nvSpPr>
+          <p:cNvPr id="28" name="文本框 27">
+            <a:extLst>
+              <a:ext uri="{FF2B5EF4-FFF2-40B4-BE49-F238E27FC236}">
+                <a16:creationId xmlns:a16="http://schemas.microsoft.com/office/drawing/2014/main" id="{1472CEEF-0D18-975F-06D4-275A145BCB9C}"/>
+              </a:ext>
+            </a:extLst>
+          </p:cNvPr>
+          <p:cNvSpPr txBox="1"/>
+          <p:nvPr/>
+        </p:nvSpPr>
+        <p:spPr>
+          <a:xfrm>
+            <a:off x="831576" y="1208417"/>
+            <a:ext cx="1918252" cy="369332"/>
+          </a:xfrm>
+          <a:prstGeom prst="rect">
+            <a:avLst/>
+          </a:prstGeom>
+          <a:noFill/>
+        </p:spPr>
+        <p:txBody>
+          <a:bodyPr wrap="square" rtlCol="0">
+            <a:spAutoFit/>
+          </a:bodyPr>
+          <a:lstStyle/>
+          <a:p>
+            <a:r>
+              <a:rPr lang="en-US" altLang="zh-CN" dirty="0"/>
+              <a:t>LLM API</a:t>
+            </a:r>
+            <a:endParaRPr lang="zh-CN" altLang="en-US" dirty="0"/>
+          </a:p>
+        </p:txBody>
+      </p:sp>
+      <p:sp>
+        <p:nvSpPr>
+          <p:cNvPr id="29" name="矩形 28">
+            <a:extLst>
+              <a:ext uri="{FF2B5EF4-FFF2-40B4-BE49-F238E27FC236}">
+                <a16:creationId xmlns:a16="http://schemas.microsoft.com/office/drawing/2014/main" id="{8DF1260B-6BED-5C9E-5675-A8ACF527C57E}"/>
+              </a:ext>
+            </a:extLst>
+          </p:cNvPr>
+          <p:cNvSpPr/>
+          <p:nvPr/>
+        </p:nvSpPr>
+        <p:spPr>
+          <a:xfrm>
+            <a:off x="2722496" y="870328"/>
+            <a:ext cx="2171700" cy="1045509"/>
+          </a:xfrm>
+          <a:prstGeom prst="rect">
+            <a:avLst/>
+          </a:prstGeom>
+        </p:spPr>
+        <p:style>
+          <a:lnRef idx="2">
+            <a:schemeClr val="accent1">
+              <a:shade val="15000"/>
+            </a:schemeClr>
+          </a:lnRef>
+          <a:fillRef idx="1">
+            <a:schemeClr val="accent1"/>
+          </a:fillRef>
+          <a:effectRef idx="0">
+            <a:schemeClr val="accent1"/>
+          </a:effectRef>
+          <a:fontRef idx="minor">
+            <a:schemeClr val="lt1"/>
+          </a:fontRef>
+        </p:style>
+        <p:txBody>
+          <a:bodyPr rtlCol="0" anchor="ctr"/>
+          <a:lstStyle/>
+          <a:p>
+            <a:pPr algn="ctr"/>
+            <a:endParaRPr lang="zh-CN" altLang="en-US"/>
+          </a:p>
+        </p:txBody>
+      </p:sp>
+      <p:sp>
+        <p:nvSpPr>
+          <p:cNvPr id="30" name="文本框 29">
+            <a:extLst>
+              <a:ext uri="{FF2B5EF4-FFF2-40B4-BE49-F238E27FC236}">
+                <a16:creationId xmlns:a16="http://schemas.microsoft.com/office/drawing/2014/main" id="{469625E8-747F-B578-DE59-E892A16D8F58}"/>
+              </a:ext>
+            </a:extLst>
+          </p:cNvPr>
+          <p:cNvSpPr txBox="1"/>
+          <p:nvPr/>
+        </p:nvSpPr>
+        <p:spPr>
+          <a:xfrm>
+            <a:off x="3373403" y="1165788"/>
+            <a:ext cx="1779104" cy="369332"/>
+          </a:xfrm>
+          <a:prstGeom prst="rect">
+            <a:avLst/>
+          </a:prstGeom>
+          <a:noFill/>
+        </p:spPr>
+        <p:txBody>
+          <a:bodyPr wrap="square" rtlCol="0">
+            <a:spAutoFit/>
+          </a:bodyPr>
+          <a:lstStyle/>
+          <a:p>
+            <a:r>
+              <a:rPr lang="en-US" altLang="zh-CN" dirty="0"/>
+              <a:t>3DGS</a:t>
+            </a:r>
+            <a:endParaRPr lang="zh-CN" altLang="en-US" dirty="0"/>
+          </a:p>
+        </p:txBody>
+      </p:sp>
     </p:spTree>
     <p:extLst>
       <p:ext uri="{BB962C8B-B14F-4D97-AF65-F5344CB8AC3E}">
@@ -5393,7 +7123,7 @@
 </p:sld>
 </file>
 
-<file path=ppt/slides/slide3.xml><?xml version="1.0" encoding="utf-8"?>
+<file path=ppt/slides/slide4.xml><?xml version="1.0" encoding="utf-8"?>
 <p:sld xmlns:a="http://schemas.openxmlformats.org/drawingml/2006/main" xmlns:r="http://schemas.openxmlformats.org/officeDocument/2006/relationships" xmlns:p="http://schemas.openxmlformats.org/presentationml/2006/main">
   <p:cSld>
     <p:spTree>
@@ -6062,7 +7792,7 @@
         </p:nvSpPr>
         <p:spPr>
           <a:xfrm>
-            <a:off x="9559290" y="5474970"/>
+            <a:off x="9559290" y="5292098"/>
             <a:ext cx="1615440" cy="461665"/>
           </a:xfrm>
           <a:prstGeom prst="rect">
@@ -7792,7 +9522,7 @@
         </p:nvSpPr>
         <p:spPr>
           <a:xfrm>
-            <a:off x="5891150" y="3142862"/>
+            <a:off x="5931042" y="3179160"/>
             <a:ext cx="2318603" cy="773430"/>
           </a:xfrm>
           <a:prstGeom prst="rect">
@@ -7884,7 +9614,7 @@
         </p:nvSpPr>
         <p:spPr>
           <a:xfrm>
-            <a:off x="6368307" y="3344911"/>
+            <a:off x="6189644" y="3345992"/>
             <a:ext cx="1979478" cy="369332"/>
           </a:xfrm>
           <a:prstGeom prst="rect">
@@ -7899,9 +9629,14 @@
           <a:lstStyle/>
           <a:p>
             <a:r>
-              <a:rPr lang="zh-CN" altLang="en-US" dirty="0"/>
-              <a:t>分配元类</a:t>
-            </a:r>
+              <a:rPr lang="en-US" altLang="zh-CN" dirty="0"/>
+              <a:t>Assign </a:t>
+            </a:r>
+            <a:r>
+              <a:rPr lang="en-US" altLang="zh-CN" dirty="0" err="1"/>
+              <a:t>metaclass</a:t>
+            </a:r>
+            <a:endParaRPr lang="zh-CN" altLang="en-US" dirty="0"/>
           </a:p>
         </p:txBody>
       </p:sp>
@@ -8747,7 +10482,7 @@
         </p:nvSpPr>
         <p:spPr>
           <a:xfrm>
-            <a:off x="5938838" y="1108075"/>
+            <a:off x="6170218" y="1206981"/>
             <a:ext cx="2265916" cy="369332"/>
           </a:xfrm>
           <a:prstGeom prst="rect">
@@ -8762,9 +10497,26 @@
           <a:lstStyle/>
           <a:p>
             <a:r>
+              <a:rPr lang="en-US" altLang="zh-CN" dirty="0"/>
+              <a:t>Start</a:t>
+            </a:r>
+            <a:r>
               <a:rPr lang="zh-CN" altLang="en-US" dirty="0"/>
-              <a:t>开始构建</a:t>
-            </a:r>
+              <a:t> </a:t>
+            </a:r>
+            <a:r>
+              <a:rPr lang="en-US" altLang="zh-CN" dirty="0"/>
+              <a:t>to</a:t>
+            </a:r>
+            <a:r>
+              <a:rPr lang="zh-CN" altLang="en-US" dirty="0"/>
+              <a:t> </a:t>
+            </a:r>
+            <a:r>
+              <a:rPr lang="en-US" altLang="zh-CN" dirty="0"/>
+              <a:t>BUILD</a:t>
+            </a:r>
+            <a:endParaRPr lang="zh-CN" altLang="en-US" dirty="0"/>
           </a:p>
         </p:txBody>
       </p:sp>
@@ -8958,10 +10710,1290 @@
           </a:p>
         </p:txBody>
       </p:sp>
+      <p:sp>
+        <p:nvSpPr>
+          <p:cNvPr id="70" name="箭头: 右 69">
+            <a:extLst>
+              <a:ext uri="{FF2B5EF4-FFF2-40B4-BE49-F238E27FC236}">
+                <a16:creationId xmlns:a16="http://schemas.microsoft.com/office/drawing/2014/main" id="{7AB8C733-12FE-5B31-6CC9-F008E6E8D0ED}"/>
+              </a:ext>
+            </a:extLst>
+          </p:cNvPr>
+          <p:cNvSpPr/>
+          <p:nvPr/>
+        </p:nvSpPr>
+        <p:spPr>
+          <a:xfrm>
+            <a:off x="11213820" y="1479507"/>
+            <a:ext cx="588895" cy="94334"/>
+          </a:xfrm>
+          <a:prstGeom prst="rightArrow">
+            <a:avLst/>
+          </a:prstGeom>
+        </p:spPr>
+        <p:style>
+          <a:lnRef idx="2">
+            <a:schemeClr val="accent1">
+              <a:shade val="15000"/>
+            </a:schemeClr>
+          </a:lnRef>
+          <a:fillRef idx="1">
+            <a:schemeClr val="accent1"/>
+          </a:fillRef>
+          <a:effectRef idx="0">
+            <a:schemeClr val="accent1"/>
+          </a:effectRef>
+          <a:fontRef idx="minor">
+            <a:schemeClr val="lt1"/>
+          </a:fontRef>
+        </p:style>
+        <p:txBody>
+          <a:bodyPr rtlCol="0" anchor="ctr"/>
+          <a:lstStyle/>
+          <a:p>
+            <a:pPr algn="ctr"/>
+            <a:endParaRPr lang="zh-CN" altLang="en-US"/>
+          </a:p>
+        </p:txBody>
+      </p:sp>
+      <p:sp>
+        <p:nvSpPr>
+          <p:cNvPr id="75" name="文本框 74">
+            <a:extLst>
+              <a:ext uri="{FF2B5EF4-FFF2-40B4-BE49-F238E27FC236}">
+                <a16:creationId xmlns:a16="http://schemas.microsoft.com/office/drawing/2014/main" id="{1FC809DE-A36D-60B3-61FF-F5B171ACFA67}"/>
+              </a:ext>
+            </a:extLst>
+          </p:cNvPr>
+          <p:cNvSpPr txBox="1"/>
+          <p:nvPr/>
+        </p:nvSpPr>
+        <p:spPr>
+          <a:xfrm>
+            <a:off x="11277600" y="-19826"/>
+            <a:ext cx="1303269" cy="523220"/>
+          </a:xfrm>
+          <a:prstGeom prst="rect">
+            <a:avLst/>
+          </a:prstGeom>
+          <a:noFill/>
+        </p:spPr>
+        <p:txBody>
+          <a:bodyPr wrap="square" rtlCol="0">
+            <a:spAutoFit/>
+          </a:bodyPr>
+          <a:lstStyle/>
+          <a:p>
+            <a:r>
+              <a:rPr lang="en-US" altLang="zh-CN" sz="1400" dirty="0">
+                <a:latin typeface="Noto Sans SC Black" panose="020B0200000000000000" pitchFamily="34" charset="-122"/>
+                <a:ea typeface="Noto Sans SC Black" panose="020B0200000000000000" pitchFamily="34" charset="-122"/>
+              </a:rPr>
+              <a:t>Finished product</a:t>
+            </a:r>
+            <a:endParaRPr lang="zh-CN" altLang="en-US" sz="1400" dirty="0">
+              <a:latin typeface="Noto Sans SC Black" panose="020B0200000000000000" pitchFamily="34" charset="-122"/>
+              <a:ea typeface="Noto Sans SC Black" panose="020B0200000000000000" pitchFamily="34" charset="-122"/>
+            </a:endParaRPr>
+          </a:p>
+        </p:txBody>
+      </p:sp>
+      <p:sp>
+        <p:nvSpPr>
+          <p:cNvPr id="82" name="箭头: 下 81">
+            <a:extLst>
+              <a:ext uri="{FF2B5EF4-FFF2-40B4-BE49-F238E27FC236}">
+                <a16:creationId xmlns:a16="http://schemas.microsoft.com/office/drawing/2014/main" id="{4DA12131-07E0-0743-2D0F-2CE81EA318A2}"/>
+              </a:ext>
+            </a:extLst>
+          </p:cNvPr>
+          <p:cNvSpPr/>
+          <p:nvPr/>
+        </p:nvSpPr>
+        <p:spPr>
+          <a:xfrm rot="10800000">
+            <a:off x="11802715" y="506895"/>
+            <a:ext cx="121108" cy="1061513"/>
+          </a:xfrm>
+          <a:prstGeom prst="downArrow">
+            <a:avLst/>
+          </a:prstGeom>
+        </p:spPr>
+        <p:style>
+          <a:lnRef idx="2">
+            <a:schemeClr val="accent1">
+              <a:shade val="15000"/>
+            </a:schemeClr>
+          </a:lnRef>
+          <a:fillRef idx="1">
+            <a:schemeClr val="accent1"/>
+          </a:fillRef>
+          <a:effectRef idx="0">
+            <a:schemeClr val="accent1"/>
+          </a:effectRef>
+          <a:fontRef idx="minor">
+            <a:schemeClr val="lt1"/>
+          </a:fontRef>
+        </p:style>
+        <p:txBody>
+          <a:bodyPr rtlCol="0" anchor="ctr"/>
+          <a:lstStyle/>
+          <a:p>
+            <a:pPr algn="ctr"/>
+            <a:endParaRPr lang="zh-CN" altLang="en-US"/>
+          </a:p>
+        </p:txBody>
+      </p:sp>
     </p:spTree>
     <p:extLst>
       <p:ext uri="{BB962C8B-B14F-4D97-AF65-F5344CB8AC3E}">
         <p14:creationId xmlns:p14="http://schemas.microsoft.com/office/powerpoint/2010/main" val="3317911221"/>
+      </p:ext>
+    </p:extLst>
+  </p:cSld>
+  <p:clrMapOvr>
+    <a:masterClrMapping/>
+  </p:clrMapOvr>
+</p:sld>
+</file>
+
+<file path=ppt/slides/slide5.xml><?xml version="1.0" encoding="utf-8"?>
+<p:sld xmlns:a="http://schemas.openxmlformats.org/drawingml/2006/main" xmlns:r="http://schemas.openxmlformats.org/officeDocument/2006/relationships" xmlns:p="http://schemas.openxmlformats.org/presentationml/2006/main">
+  <p:cSld>
+    <p:spTree>
+      <p:nvGrpSpPr>
+        <p:cNvPr id="1" name=""/>
+        <p:cNvGrpSpPr/>
+        <p:nvPr/>
+      </p:nvGrpSpPr>
+      <p:grpSpPr>
+        <a:xfrm>
+          <a:off x="0" y="0"/>
+          <a:ext cx="0" cy="0"/>
+          <a:chOff x="0" y="0"/>
+          <a:chExt cx="0" cy="0"/>
+        </a:xfrm>
+      </p:grpSpPr>
+      <p:sp>
+        <p:nvSpPr>
+          <p:cNvPr id="2" name="标题 1">
+            <a:extLst>
+              <a:ext uri="{FF2B5EF4-FFF2-40B4-BE49-F238E27FC236}">
+                <a16:creationId xmlns:a16="http://schemas.microsoft.com/office/drawing/2014/main" id="{6A57BF15-77F4-81A2-80C5-9FFF0EB9DB6C}"/>
+              </a:ext>
+            </a:extLst>
+          </p:cNvPr>
+          <p:cNvSpPr>
+            <a:spLocks noGrp="1"/>
+          </p:cNvSpPr>
+          <p:nvPr>
+            <p:ph type="title"/>
+          </p:nvPr>
+        </p:nvSpPr>
+        <p:spPr/>
+        <p:txBody>
+          <a:bodyPr/>
+          <a:lstStyle/>
+          <a:p>
+            <a:r>
+              <a:rPr lang="en-US" altLang="zh-CN" dirty="0">
+                <a:latin typeface="Noto Sans JP Black" panose="020B0200000000000000" pitchFamily="34" charset="-122"/>
+                <a:ea typeface="Noto Sans JP Black" panose="020B0200000000000000" pitchFamily="34" charset="-122"/>
+              </a:rPr>
+              <a:t>ABOUT US</a:t>
+            </a:r>
+            <a:endParaRPr lang="zh-CN" altLang="en-US" dirty="0">
+              <a:latin typeface="Noto Sans JP Black" panose="020B0200000000000000" pitchFamily="34" charset="-122"/>
+              <a:ea typeface="Noto Sans JP Black" panose="020B0200000000000000" pitchFamily="34" charset="-122"/>
+            </a:endParaRPr>
+          </a:p>
+        </p:txBody>
+      </p:sp>
+      <p:sp>
+        <p:nvSpPr>
+          <p:cNvPr id="3" name="内容占位符 2">
+            <a:extLst>
+              <a:ext uri="{FF2B5EF4-FFF2-40B4-BE49-F238E27FC236}">
+                <a16:creationId xmlns:a16="http://schemas.microsoft.com/office/drawing/2014/main" id="{4C24DB54-D574-FD55-FE53-49E9081DB724}"/>
+              </a:ext>
+            </a:extLst>
+          </p:cNvPr>
+          <p:cNvSpPr>
+            <a:spLocks noGrp="1"/>
+          </p:cNvSpPr>
+          <p:nvPr>
+            <p:ph idx="1"/>
+          </p:nvPr>
+        </p:nvSpPr>
+        <p:spPr/>
+        <p:txBody>
+          <a:bodyPr/>
+          <a:lstStyle/>
+          <a:p>
+            <a:endParaRPr lang="zh-CN" altLang="en-US" dirty="0"/>
+          </a:p>
+        </p:txBody>
+      </p:sp>
+      <p:sp>
+        <p:nvSpPr>
+          <p:cNvPr id="4" name="矩形 3">
+            <a:extLst>
+              <a:ext uri="{FF2B5EF4-FFF2-40B4-BE49-F238E27FC236}">
+                <a16:creationId xmlns:a16="http://schemas.microsoft.com/office/drawing/2014/main" id="{A48C643F-7FED-4F25-11FD-DAC5BBAF0AF5}"/>
+              </a:ext>
+            </a:extLst>
+          </p:cNvPr>
+          <p:cNvSpPr/>
+          <p:nvPr/>
+        </p:nvSpPr>
+        <p:spPr>
+          <a:xfrm>
+            <a:off x="725557" y="1426265"/>
+            <a:ext cx="3374334" cy="5066610"/>
+          </a:xfrm>
+          <a:prstGeom prst="rect">
+            <a:avLst/>
+          </a:prstGeom>
+        </p:spPr>
+        <p:style>
+          <a:lnRef idx="2">
+            <a:schemeClr val="accent4"/>
+          </a:lnRef>
+          <a:fillRef idx="1">
+            <a:schemeClr val="lt1"/>
+          </a:fillRef>
+          <a:effectRef idx="0">
+            <a:schemeClr val="accent4"/>
+          </a:effectRef>
+          <a:fontRef idx="minor">
+            <a:schemeClr val="dk1"/>
+          </a:fontRef>
+        </p:style>
+        <p:txBody>
+          <a:bodyPr rtlCol="0" anchor="ctr"/>
+          <a:lstStyle/>
+          <a:p>
+            <a:pPr algn="ctr"/>
+            <a:endParaRPr lang="zh-CN" altLang="en-US"/>
+          </a:p>
+        </p:txBody>
+      </p:sp>
+      <p:sp>
+        <p:nvSpPr>
+          <p:cNvPr id="5" name="矩形 4">
+            <a:extLst>
+              <a:ext uri="{FF2B5EF4-FFF2-40B4-BE49-F238E27FC236}">
+                <a16:creationId xmlns:a16="http://schemas.microsoft.com/office/drawing/2014/main" id="{82EF4A6D-6FFF-68CC-E8B6-65E830DB7F34}"/>
+              </a:ext>
+            </a:extLst>
+          </p:cNvPr>
+          <p:cNvSpPr/>
+          <p:nvPr/>
+        </p:nvSpPr>
+        <p:spPr>
+          <a:xfrm>
+            <a:off x="4139648" y="1426265"/>
+            <a:ext cx="3374334" cy="5066610"/>
+          </a:xfrm>
+          <a:prstGeom prst="rect">
+            <a:avLst/>
+          </a:prstGeom>
+        </p:spPr>
+        <p:style>
+          <a:lnRef idx="2">
+            <a:schemeClr val="accent4"/>
+          </a:lnRef>
+          <a:fillRef idx="1">
+            <a:schemeClr val="lt1"/>
+          </a:fillRef>
+          <a:effectRef idx="0">
+            <a:schemeClr val="accent4"/>
+          </a:effectRef>
+          <a:fontRef idx="minor">
+            <a:schemeClr val="dk1"/>
+          </a:fontRef>
+        </p:style>
+        <p:txBody>
+          <a:bodyPr rtlCol="0" anchor="ctr"/>
+          <a:lstStyle/>
+          <a:p>
+            <a:pPr algn="ctr"/>
+            <a:endParaRPr lang="zh-CN" altLang="en-US"/>
+          </a:p>
+        </p:txBody>
+      </p:sp>
+      <p:sp>
+        <p:nvSpPr>
+          <p:cNvPr id="6" name="矩形 5">
+            <a:extLst>
+              <a:ext uri="{FF2B5EF4-FFF2-40B4-BE49-F238E27FC236}">
+                <a16:creationId xmlns:a16="http://schemas.microsoft.com/office/drawing/2014/main" id="{A48C643F-7FED-4F25-11FD-DAC5BBAF0AF5}"/>
+              </a:ext>
+            </a:extLst>
+          </p:cNvPr>
+          <p:cNvSpPr/>
+          <p:nvPr/>
+        </p:nvSpPr>
+        <p:spPr>
+          <a:xfrm>
+            <a:off x="7553739" y="1426265"/>
+            <a:ext cx="3374334" cy="5066610"/>
+          </a:xfrm>
+          <a:prstGeom prst="rect">
+            <a:avLst/>
+          </a:prstGeom>
+        </p:spPr>
+        <p:style>
+          <a:lnRef idx="2">
+            <a:schemeClr val="accent4"/>
+          </a:lnRef>
+          <a:fillRef idx="1">
+            <a:schemeClr val="lt1"/>
+          </a:fillRef>
+          <a:effectRef idx="0">
+            <a:schemeClr val="accent4"/>
+          </a:effectRef>
+          <a:fontRef idx="minor">
+            <a:schemeClr val="dk1"/>
+          </a:fontRef>
+        </p:style>
+        <p:txBody>
+          <a:bodyPr rtlCol="0" anchor="ctr"/>
+          <a:lstStyle>
+            <a:defPPr>
+              <a:defRPr lang="zh-CN"/>
+            </a:defPPr>
+            <a:lvl1pPr marL="0" algn="l" defTabSz="914400" rtl="0" eaLnBrk="1" latinLnBrk="0" hangingPunct="1">
+              <a:defRPr sz="1800" kern="1200">
+                <a:solidFill>
+                  <a:schemeClr val="dk1"/>
+                </a:solidFill>
+                <a:latin typeface="+mn-lt"/>
+                <a:ea typeface="+mn-ea"/>
+                <a:cs typeface="+mn-cs"/>
+              </a:defRPr>
+            </a:lvl1pPr>
+            <a:lvl2pPr marL="457200" algn="l" defTabSz="914400" rtl="0" eaLnBrk="1" latinLnBrk="0" hangingPunct="1">
+              <a:defRPr sz="1800" kern="1200">
+                <a:solidFill>
+                  <a:schemeClr val="dk1"/>
+                </a:solidFill>
+                <a:latin typeface="+mn-lt"/>
+                <a:ea typeface="+mn-ea"/>
+                <a:cs typeface="+mn-cs"/>
+              </a:defRPr>
+            </a:lvl2pPr>
+            <a:lvl3pPr marL="914400" algn="l" defTabSz="914400" rtl="0" eaLnBrk="1" latinLnBrk="0" hangingPunct="1">
+              <a:defRPr sz="1800" kern="1200">
+                <a:solidFill>
+                  <a:schemeClr val="dk1"/>
+                </a:solidFill>
+                <a:latin typeface="+mn-lt"/>
+                <a:ea typeface="+mn-ea"/>
+                <a:cs typeface="+mn-cs"/>
+              </a:defRPr>
+            </a:lvl3pPr>
+            <a:lvl4pPr marL="1371600" algn="l" defTabSz="914400" rtl="0" eaLnBrk="1" latinLnBrk="0" hangingPunct="1">
+              <a:defRPr sz="1800" kern="1200">
+                <a:solidFill>
+                  <a:schemeClr val="dk1"/>
+                </a:solidFill>
+                <a:latin typeface="+mn-lt"/>
+                <a:ea typeface="+mn-ea"/>
+                <a:cs typeface="+mn-cs"/>
+              </a:defRPr>
+            </a:lvl4pPr>
+            <a:lvl5pPr marL="1828800" algn="l" defTabSz="914400" rtl="0" eaLnBrk="1" latinLnBrk="0" hangingPunct="1">
+              <a:defRPr sz="1800" kern="1200">
+                <a:solidFill>
+                  <a:schemeClr val="dk1"/>
+                </a:solidFill>
+                <a:latin typeface="+mn-lt"/>
+                <a:ea typeface="+mn-ea"/>
+                <a:cs typeface="+mn-cs"/>
+              </a:defRPr>
+            </a:lvl5pPr>
+            <a:lvl6pPr marL="2286000" algn="l" defTabSz="914400" rtl="0" eaLnBrk="1" latinLnBrk="0" hangingPunct="1">
+              <a:defRPr sz="1800" kern="1200">
+                <a:solidFill>
+                  <a:schemeClr val="dk1"/>
+                </a:solidFill>
+                <a:latin typeface="+mn-lt"/>
+                <a:ea typeface="+mn-ea"/>
+                <a:cs typeface="+mn-cs"/>
+              </a:defRPr>
+            </a:lvl6pPr>
+            <a:lvl7pPr marL="2743200" algn="l" defTabSz="914400" rtl="0" eaLnBrk="1" latinLnBrk="0" hangingPunct="1">
+              <a:defRPr sz="1800" kern="1200">
+                <a:solidFill>
+                  <a:schemeClr val="dk1"/>
+                </a:solidFill>
+                <a:latin typeface="+mn-lt"/>
+                <a:ea typeface="+mn-ea"/>
+                <a:cs typeface="+mn-cs"/>
+              </a:defRPr>
+            </a:lvl7pPr>
+            <a:lvl8pPr marL="3200400" algn="l" defTabSz="914400" rtl="0" eaLnBrk="1" latinLnBrk="0" hangingPunct="1">
+              <a:defRPr sz="1800" kern="1200">
+                <a:solidFill>
+                  <a:schemeClr val="dk1"/>
+                </a:solidFill>
+                <a:latin typeface="+mn-lt"/>
+                <a:ea typeface="+mn-ea"/>
+                <a:cs typeface="+mn-cs"/>
+              </a:defRPr>
+            </a:lvl8pPr>
+            <a:lvl9pPr marL="3657600" algn="l" defTabSz="914400" rtl="0" eaLnBrk="1" latinLnBrk="0" hangingPunct="1">
+              <a:defRPr sz="1800" kern="1200">
+                <a:solidFill>
+                  <a:schemeClr val="dk1"/>
+                </a:solidFill>
+                <a:latin typeface="+mn-lt"/>
+                <a:ea typeface="+mn-ea"/>
+                <a:cs typeface="+mn-cs"/>
+              </a:defRPr>
+            </a:lvl9pPr>
+          </a:lstStyle>
+          <a:p>
+            <a:pPr algn="ctr"/>
+            <a:endParaRPr lang="zh-CN" altLang="en-US"/>
+          </a:p>
+        </p:txBody>
+      </p:sp>
+      <p:sp>
+        <p:nvSpPr>
+          <p:cNvPr id="7" name="文本框 6">
+            <a:extLst>
+              <a:ext uri="{FF2B5EF4-FFF2-40B4-BE49-F238E27FC236}">
+                <a16:creationId xmlns:a16="http://schemas.microsoft.com/office/drawing/2014/main" id="{F2C8D887-4AF6-623B-0CF0-444AA513A77A}"/>
+              </a:ext>
+            </a:extLst>
+          </p:cNvPr>
+          <p:cNvSpPr txBox="1"/>
+          <p:nvPr/>
+        </p:nvSpPr>
+        <p:spPr>
+          <a:xfrm>
+            <a:off x="838200" y="1470991"/>
+            <a:ext cx="3301448" cy="646331"/>
+          </a:xfrm>
+          <a:prstGeom prst="rect">
+            <a:avLst/>
+          </a:prstGeom>
+          <a:noFill/>
+        </p:spPr>
+        <p:txBody>
+          <a:bodyPr wrap="square" rtlCol="0">
+            <a:spAutoFit/>
+          </a:bodyPr>
+          <a:lstStyle/>
+          <a:p>
+            <a:r>
+              <a:rPr lang="en-US" altLang="zh-CN" dirty="0" err="1">
+                <a:latin typeface="Noto Sans SC Black" panose="020B0200000000000000" pitchFamily="34" charset="-122"/>
+                <a:ea typeface="Noto Sans SC Black" panose="020B0200000000000000" pitchFamily="34" charset="-122"/>
+              </a:rPr>
+              <a:t>Ceaserzhao</a:t>
+            </a:r>
+            <a:r>
+              <a:rPr lang="en-US" altLang="zh-CN" dirty="0">
+                <a:latin typeface="Noto Sans SC Black" panose="020B0200000000000000" pitchFamily="34" charset="-122"/>
+                <a:ea typeface="Noto Sans SC Black" panose="020B0200000000000000" pitchFamily="34" charset="-122"/>
+              </a:rPr>
+              <a:t>(</a:t>
+            </a:r>
+            <a:r>
+              <a:rPr lang="en-US" altLang="zh-CN" dirty="0" err="1">
+                <a:latin typeface="Noto Sans SC Black" panose="020B0200000000000000" pitchFamily="34" charset="-122"/>
+                <a:ea typeface="Noto Sans SC Black" panose="020B0200000000000000" pitchFamily="34" charset="-122"/>
+              </a:rPr>
+              <a:t>Wenzhang</a:t>
+            </a:r>
+            <a:r>
+              <a:rPr lang="en-US" altLang="zh-CN" dirty="0">
+                <a:latin typeface="Noto Sans SC Black" panose="020B0200000000000000" pitchFamily="34" charset="-122"/>
+                <a:ea typeface="Noto Sans SC Black" panose="020B0200000000000000" pitchFamily="34" charset="-122"/>
+              </a:rPr>
+              <a:t> Zhao)</a:t>
+            </a:r>
+            <a:endParaRPr lang="zh-CN" altLang="en-US" dirty="0">
+              <a:latin typeface="Noto Sans SC Black" panose="020B0200000000000000" pitchFamily="34" charset="-122"/>
+              <a:ea typeface="Noto Sans SC Black" panose="020B0200000000000000" pitchFamily="34" charset="-122"/>
+            </a:endParaRPr>
+          </a:p>
+        </p:txBody>
+      </p:sp>
+      <p:sp>
+        <p:nvSpPr>
+          <p:cNvPr id="8" name="文本框 7">
+            <a:extLst>
+              <a:ext uri="{FF2B5EF4-FFF2-40B4-BE49-F238E27FC236}">
+                <a16:creationId xmlns:a16="http://schemas.microsoft.com/office/drawing/2014/main" id="{732519DF-4396-EE40-F196-1B2B8184F6F4}"/>
+              </a:ext>
+            </a:extLst>
+          </p:cNvPr>
+          <p:cNvSpPr txBox="1"/>
+          <p:nvPr/>
+        </p:nvSpPr>
+        <p:spPr>
+          <a:xfrm>
+            <a:off x="7603435" y="1570383"/>
+            <a:ext cx="2375452" cy="369332"/>
+          </a:xfrm>
+          <a:prstGeom prst="rect">
+            <a:avLst/>
+          </a:prstGeom>
+          <a:noFill/>
+        </p:spPr>
+        <p:txBody>
+          <a:bodyPr wrap="square" rtlCol="0">
+            <a:spAutoFit/>
+          </a:bodyPr>
+          <a:lstStyle/>
+          <a:p>
+            <a:r>
+              <a:rPr lang="en-US" altLang="zh-CN" dirty="0" err="1">
+                <a:latin typeface="Noto Sans SC Black" panose="020B0200000000000000" pitchFamily="34" charset="-122"/>
+                <a:ea typeface="Noto Sans SC Black" panose="020B0200000000000000" pitchFamily="34" charset="-122"/>
+              </a:rPr>
+              <a:t>Nissunay</a:t>
+            </a:r>
+            <a:endParaRPr lang="zh-CN" altLang="en-US" dirty="0">
+              <a:latin typeface="Noto Sans SC Black" panose="020B0200000000000000" pitchFamily="34" charset="-122"/>
+              <a:ea typeface="Noto Sans SC Black" panose="020B0200000000000000" pitchFamily="34" charset="-122"/>
+            </a:endParaRPr>
+          </a:p>
+        </p:txBody>
+      </p:sp>
+      <p:sp>
+        <p:nvSpPr>
+          <p:cNvPr id="9" name="文本框 8">
+            <a:extLst>
+              <a:ext uri="{FF2B5EF4-FFF2-40B4-BE49-F238E27FC236}">
+                <a16:creationId xmlns:a16="http://schemas.microsoft.com/office/drawing/2014/main" id="{54A7EB2D-D42C-32BB-753D-7542AF7493F8}"/>
+              </a:ext>
+            </a:extLst>
+          </p:cNvPr>
+          <p:cNvSpPr txBox="1"/>
+          <p:nvPr/>
+        </p:nvSpPr>
+        <p:spPr>
+          <a:xfrm>
+            <a:off x="4212534" y="1506022"/>
+            <a:ext cx="2360545" cy="369332"/>
+          </a:xfrm>
+          <a:prstGeom prst="rect">
+            <a:avLst/>
+          </a:prstGeom>
+          <a:noFill/>
+        </p:spPr>
+        <p:txBody>
+          <a:bodyPr wrap="square" rtlCol="0">
+            <a:spAutoFit/>
+          </a:bodyPr>
+          <a:lstStyle/>
+          <a:p>
+            <a:r>
+              <a:rPr lang="en-US" altLang="zh-CN" dirty="0">
+                <a:latin typeface="Noto Sans SC Black" panose="020B0200000000000000" pitchFamily="34" charset="-122"/>
+                <a:ea typeface="Noto Sans SC Black" panose="020B0200000000000000" pitchFamily="34" charset="-122"/>
+              </a:rPr>
+              <a:t>Evan Tang</a:t>
+            </a:r>
+            <a:endParaRPr lang="zh-CN" altLang="en-US" dirty="0">
+              <a:latin typeface="Noto Sans SC Black" panose="020B0200000000000000" pitchFamily="34" charset="-122"/>
+              <a:ea typeface="Noto Sans SC Black" panose="020B0200000000000000" pitchFamily="34" charset="-122"/>
+            </a:endParaRPr>
+          </a:p>
+        </p:txBody>
+      </p:sp>
+      <p:sp>
+        <p:nvSpPr>
+          <p:cNvPr id="10" name="文本框 9">
+            <a:extLst>
+              <a:ext uri="{FF2B5EF4-FFF2-40B4-BE49-F238E27FC236}">
+                <a16:creationId xmlns:a16="http://schemas.microsoft.com/office/drawing/2014/main" id="{DF3FAF57-E3CA-6BCE-6225-D2B47D2E85FB}"/>
+              </a:ext>
+            </a:extLst>
+          </p:cNvPr>
+          <p:cNvSpPr txBox="1"/>
+          <p:nvPr/>
+        </p:nvSpPr>
+        <p:spPr>
+          <a:xfrm>
+            <a:off x="803412" y="2993796"/>
+            <a:ext cx="1984513" cy="369332"/>
+          </a:xfrm>
+          <a:prstGeom prst="rect">
+            <a:avLst/>
+          </a:prstGeom>
+          <a:noFill/>
+        </p:spPr>
+        <p:txBody>
+          <a:bodyPr wrap="square" rtlCol="0">
+            <a:spAutoFit/>
+          </a:bodyPr>
+          <a:lstStyle/>
+          <a:p>
+            <a:r>
+              <a:rPr lang="en-US" altLang="zh-CN" dirty="0"/>
+              <a:t>FROM:CHINA</a:t>
+            </a:r>
+            <a:endParaRPr lang="zh-CN" altLang="en-US" dirty="0"/>
+          </a:p>
+        </p:txBody>
+      </p:sp>
+      <p:sp>
+        <p:nvSpPr>
+          <p:cNvPr id="11" name="文本框 10">
+            <a:extLst>
+              <a:ext uri="{FF2B5EF4-FFF2-40B4-BE49-F238E27FC236}">
+                <a16:creationId xmlns:a16="http://schemas.microsoft.com/office/drawing/2014/main" id="{4BFAEE57-6187-1354-C277-3E1F0F28F38D}"/>
+              </a:ext>
+            </a:extLst>
+          </p:cNvPr>
+          <p:cNvSpPr txBox="1"/>
+          <p:nvPr/>
+        </p:nvSpPr>
+        <p:spPr>
+          <a:xfrm>
+            <a:off x="7894983" y="3000855"/>
+            <a:ext cx="2292626" cy="369332"/>
+          </a:xfrm>
+          <a:prstGeom prst="rect">
+            <a:avLst/>
+          </a:prstGeom>
+          <a:noFill/>
+        </p:spPr>
+        <p:txBody>
+          <a:bodyPr wrap="square" rtlCol="0">
+            <a:spAutoFit/>
+          </a:bodyPr>
+          <a:lstStyle/>
+          <a:p>
+            <a:r>
+              <a:rPr lang="en-US" altLang="zh-CN" dirty="0"/>
+              <a:t>FROM:MEXICO</a:t>
+            </a:r>
+            <a:endParaRPr lang="zh-CN" altLang="en-US" dirty="0"/>
+          </a:p>
+        </p:txBody>
+      </p:sp>
+      <p:sp>
+        <p:nvSpPr>
+          <p:cNvPr id="12" name="文本框 11">
+            <a:extLst>
+              <a:ext uri="{FF2B5EF4-FFF2-40B4-BE49-F238E27FC236}">
+                <a16:creationId xmlns:a16="http://schemas.microsoft.com/office/drawing/2014/main" id="{11729016-4456-C71E-DC83-89A95A42B7D7}"/>
+              </a:ext>
+            </a:extLst>
+          </p:cNvPr>
+          <p:cNvSpPr txBox="1"/>
+          <p:nvPr/>
+        </p:nvSpPr>
+        <p:spPr>
+          <a:xfrm>
+            <a:off x="4400549" y="2993796"/>
+            <a:ext cx="1984513" cy="369332"/>
+          </a:xfrm>
+          <a:prstGeom prst="rect">
+            <a:avLst/>
+          </a:prstGeom>
+          <a:noFill/>
+        </p:spPr>
+        <p:txBody>
+          <a:bodyPr wrap="square" rtlCol="0">
+            <a:spAutoFit/>
+          </a:bodyPr>
+          <a:lstStyle/>
+          <a:p>
+            <a:r>
+              <a:rPr lang="en-US" altLang="zh-CN" dirty="0"/>
+              <a:t>FROM:CHINA</a:t>
+            </a:r>
+            <a:endParaRPr lang="zh-CN" altLang="en-US" dirty="0"/>
+          </a:p>
+        </p:txBody>
+      </p:sp>
+      <p:sp>
+        <p:nvSpPr>
+          <p:cNvPr id="13" name="文本框 12">
+            <a:extLst>
+              <a:ext uri="{FF2B5EF4-FFF2-40B4-BE49-F238E27FC236}">
+                <a16:creationId xmlns:a16="http://schemas.microsoft.com/office/drawing/2014/main" id="{CC95FC8B-340B-A0D6-AFC2-9FE45D242A91}"/>
+              </a:ext>
+            </a:extLst>
+          </p:cNvPr>
+          <p:cNvSpPr txBox="1"/>
+          <p:nvPr/>
+        </p:nvSpPr>
+        <p:spPr>
+          <a:xfrm>
+            <a:off x="879613" y="2390361"/>
+            <a:ext cx="2574235" cy="369332"/>
+          </a:xfrm>
+          <a:prstGeom prst="rect">
+            <a:avLst/>
+          </a:prstGeom>
+          <a:noFill/>
+        </p:spPr>
+        <p:txBody>
+          <a:bodyPr wrap="square" rtlCol="0">
+            <a:spAutoFit/>
+          </a:bodyPr>
+          <a:lstStyle/>
+          <a:p>
+            <a:r>
+              <a:rPr lang="en-US" altLang="zh-CN" dirty="0"/>
+              <a:t>Founder &amp; CEO</a:t>
+            </a:r>
+            <a:endParaRPr lang="zh-CN" altLang="en-US" dirty="0"/>
+          </a:p>
+        </p:txBody>
+      </p:sp>
+      <p:sp>
+        <p:nvSpPr>
+          <p:cNvPr id="14" name="文本框 13">
+            <a:extLst>
+              <a:ext uri="{FF2B5EF4-FFF2-40B4-BE49-F238E27FC236}">
+                <a16:creationId xmlns:a16="http://schemas.microsoft.com/office/drawing/2014/main" id="{C837F801-F554-A99E-4805-1F1B370A3691}"/>
+              </a:ext>
+            </a:extLst>
+          </p:cNvPr>
+          <p:cNvSpPr txBox="1"/>
+          <p:nvPr/>
+        </p:nvSpPr>
+        <p:spPr>
+          <a:xfrm>
+            <a:off x="879613" y="4184374"/>
+            <a:ext cx="2834308" cy="646331"/>
+          </a:xfrm>
+          <a:prstGeom prst="rect">
+            <a:avLst/>
+          </a:prstGeom>
+          <a:noFill/>
+        </p:spPr>
+        <p:txBody>
+          <a:bodyPr wrap="square" rtlCol="0">
+            <a:spAutoFit/>
+          </a:bodyPr>
+          <a:lstStyle/>
+          <a:p>
+            <a:r>
+              <a:rPr lang="en-US" altLang="zh-CN" dirty="0" err="1"/>
+              <a:t>Github:https</a:t>
+            </a:r>
+            <a:r>
+              <a:rPr lang="en-US" altLang="zh-CN" dirty="0"/>
+              <a:t>://github.com/</a:t>
+            </a:r>
+            <a:r>
+              <a:rPr lang="en-US" altLang="zh-CN" dirty="0" err="1"/>
+              <a:t>zbbsdsb</a:t>
+            </a:r>
+            <a:endParaRPr lang="zh-CN" altLang="en-US" dirty="0"/>
+          </a:p>
+        </p:txBody>
+      </p:sp>
+      <p:sp>
+        <p:nvSpPr>
+          <p:cNvPr id="15" name="文本框 14">
+            <a:extLst>
+              <a:ext uri="{FF2B5EF4-FFF2-40B4-BE49-F238E27FC236}">
+                <a16:creationId xmlns:a16="http://schemas.microsoft.com/office/drawing/2014/main" id="{FB5057EE-A3DF-011D-6AE0-0A7DB9DDB33E}"/>
+              </a:ext>
+            </a:extLst>
+          </p:cNvPr>
+          <p:cNvSpPr txBox="1"/>
+          <p:nvPr/>
+        </p:nvSpPr>
+        <p:spPr>
+          <a:xfrm>
+            <a:off x="4409661" y="4239602"/>
+            <a:ext cx="2834308" cy="646331"/>
+          </a:xfrm>
+          <a:prstGeom prst="rect">
+            <a:avLst/>
+          </a:prstGeom>
+          <a:noFill/>
+        </p:spPr>
+        <p:txBody>
+          <a:bodyPr wrap="square" rtlCol="0">
+            <a:spAutoFit/>
+          </a:bodyPr>
+          <a:lstStyle/>
+          <a:p>
+            <a:r>
+              <a:rPr lang="en-US" altLang="zh-CN" dirty="0" err="1"/>
+              <a:t>Github:https</a:t>
+            </a:r>
+            <a:r>
+              <a:rPr lang="en-US" altLang="zh-CN" dirty="0"/>
+              <a:t>://github.com/tangsky123</a:t>
+            </a:r>
+            <a:endParaRPr lang="zh-CN" altLang="en-US" dirty="0"/>
+          </a:p>
+        </p:txBody>
+      </p:sp>
+      <p:sp>
+        <p:nvSpPr>
+          <p:cNvPr id="16" name="文本框 15">
+            <a:extLst>
+              <a:ext uri="{FF2B5EF4-FFF2-40B4-BE49-F238E27FC236}">
+                <a16:creationId xmlns:a16="http://schemas.microsoft.com/office/drawing/2014/main" id="{820DD644-9AEC-2D9D-341B-D203AB0E32BA}"/>
+              </a:ext>
+            </a:extLst>
+          </p:cNvPr>
+          <p:cNvSpPr txBox="1"/>
+          <p:nvPr/>
+        </p:nvSpPr>
+        <p:spPr>
+          <a:xfrm>
+            <a:off x="7894983" y="4219577"/>
+            <a:ext cx="2834308" cy="646331"/>
+          </a:xfrm>
+          <a:prstGeom prst="rect">
+            <a:avLst/>
+          </a:prstGeom>
+          <a:noFill/>
+        </p:spPr>
+        <p:txBody>
+          <a:bodyPr wrap="square" rtlCol="0">
+            <a:spAutoFit/>
+          </a:bodyPr>
+          <a:lstStyle/>
+          <a:p>
+            <a:r>
+              <a:rPr lang="en-US" altLang="zh-CN" dirty="0" err="1"/>
+              <a:t>Github:https</a:t>
+            </a:r>
+            <a:r>
+              <a:rPr lang="en-US" altLang="zh-CN" dirty="0"/>
+              <a:t>://github.com/</a:t>
+            </a:r>
+            <a:r>
+              <a:rPr lang="en-US" altLang="zh-CN" dirty="0" err="1"/>
+              <a:t>AmaiDonatsu</a:t>
+            </a:r>
+            <a:endParaRPr lang="zh-CN" altLang="en-US" dirty="0"/>
+          </a:p>
+        </p:txBody>
+      </p:sp>
+    </p:spTree>
+    <p:extLst>
+      <p:ext uri="{BB962C8B-B14F-4D97-AF65-F5344CB8AC3E}">
+        <p14:creationId xmlns:p14="http://schemas.microsoft.com/office/powerpoint/2010/main" val="901082095"/>
+      </p:ext>
+    </p:extLst>
+  </p:cSld>
+  <p:clrMapOvr>
+    <a:masterClrMapping/>
+  </p:clrMapOvr>
+</p:sld>
+</file>
+
+<file path=ppt/slides/slide6.xml><?xml version="1.0" encoding="utf-8"?>
+<p:sld xmlns:a="http://schemas.openxmlformats.org/drawingml/2006/main" xmlns:r="http://schemas.openxmlformats.org/officeDocument/2006/relationships" xmlns:p="http://schemas.openxmlformats.org/presentationml/2006/main">
+  <p:cSld>
+    <p:spTree>
+      <p:nvGrpSpPr>
+        <p:cNvPr id="1" name=""/>
+        <p:cNvGrpSpPr/>
+        <p:nvPr/>
+      </p:nvGrpSpPr>
+      <p:grpSpPr>
+        <a:xfrm>
+          <a:off x="0" y="0"/>
+          <a:ext cx="0" cy="0"/>
+          <a:chOff x="0" y="0"/>
+          <a:chExt cx="0" cy="0"/>
+        </a:xfrm>
+      </p:grpSpPr>
+      <p:sp>
+        <p:nvSpPr>
+          <p:cNvPr id="2" name="标题 1">
+            <a:extLst>
+              <a:ext uri="{FF2B5EF4-FFF2-40B4-BE49-F238E27FC236}">
+                <a16:creationId xmlns:a16="http://schemas.microsoft.com/office/drawing/2014/main" id="{7FDA2C4D-46C0-CE4A-D7D4-8580EF1CA0B0}"/>
+              </a:ext>
+            </a:extLst>
+          </p:cNvPr>
+          <p:cNvSpPr>
+            <a:spLocks noGrp="1"/>
+          </p:cNvSpPr>
+          <p:nvPr>
+            <p:ph type="title"/>
+          </p:nvPr>
+        </p:nvSpPr>
+        <p:spPr/>
+        <p:txBody>
+          <a:bodyPr/>
+          <a:lstStyle/>
+          <a:p>
+            <a:r>
+              <a:rPr lang="zh-CN" altLang="en-US" dirty="0"/>
+              <a:t>补充</a:t>
+            </a:r>
+          </a:p>
+        </p:txBody>
+      </p:sp>
+      <p:sp>
+        <p:nvSpPr>
+          <p:cNvPr id="3" name="内容占位符 2">
+            <a:extLst>
+              <a:ext uri="{FF2B5EF4-FFF2-40B4-BE49-F238E27FC236}">
+                <a16:creationId xmlns:a16="http://schemas.microsoft.com/office/drawing/2014/main" id="{547C3539-7607-5D17-C602-79B4E6F12052}"/>
+              </a:ext>
+            </a:extLst>
+          </p:cNvPr>
+          <p:cNvSpPr>
+            <a:spLocks noGrp="1"/>
+          </p:cNvSpPr>
+          <p:nvPr>
+            <p:ph idx="1"/>
+          </p:nvPr>
+        </p:nvSpPr>
+        <p:spPr/>
+        <p:txBody>
+          <a:bodyPr>
+            <a:normAutofit fontScale="25000" lnSpcReduction="20000"/>
+          </a:bodyPr>
+          <a:lstStyle/>
+          <a:p>
+            <a:r>
+              <a:rPr lang="zh-CN" altLang="en-US" b="1" dirty="0"/>
+              <a:t>🧩 现在我给你一个视觉建议</a:t>
+            </a:r>
+          </a:p>
+          <a:p>
+            <a:r>
+              <a:rPr lang="zh-CN" altLang="en-US" dirty="0"/>
+              <a:t>左侧用冷色（蓝）</a:t>
+            </a:r>
+          </a:p>
+          <a:p>
+            <a:r>
+              <a:rPr lang="zh-CN" altLang="en-US" dirty="0"/>
+              <a:t>右侧用结构色（灰</a:t>
+            </a:r>
+            <a:r>
+              <a:rPr lang="en-US" altLang="zh-CN" dirty="0"/>
+              <a:t>/</a:t>
+            </a:r>
+            <a:r>
+              <a:rPr lang="zh-CN" altLang="en-US" dirty="0"/>
+              <a:t>白）</a:t>
+            </a:r>
+          </a:p>
+          <a:p>
+            <a:r>
+              <a:rPr lang="en-US" altLang="zh-CN" dirty="0"/>
+              <a:t>GENIS </a:t>
+            </a:r>
+            <a:r>
+              <a:rPr lang="zh-CN" altLang="en-US" dirty="0"/>
+              <a:t>用红色（物理核心）</a:t>
+            </a:r>
+          </a:p>
+          <a:p>
+            <a:r>
+              <a:rPr lang="en-US" altLang="zh-CN" dirty="0"/>
+              <a:t>Interactive World </a:t>
+            </a:r>
+            <a:r>
+              <a:rPr lang="zh-CN" altLang="en-US" dirty="0"/>
+              <a:t>用绿色（结果）</a:t>
+            </a:r>
+          </a:p>
+          <a:p>
+            <a:r>
+              <a:rPr lang="zh-CN" altLang="en-US" dirty="0"/>
+              <a:t>颜色要讲故事。</a:t>
+            </a:r>
+          </a:p>
+          <a:p>
+            <a:br>
+              <a:rPr lang="zh-CN" altLang="en-US" dirty="0"/>
+            </a:br>
+            <a:endParaRPr lang="zh-CN" altLang="en-US" dirty="0"/>
+          </a:p>
+          <a:p>
+            <a:r>
+              <a:rPr lang="zh-CN" altLang="en-US" b="1" dirty="0"/>
+              <a:t>📌 第二页将会是：</a:t>
+            </a:r>
+          </a:p>
+          <a:p>
+            <a:r>
+              <a:rPr lang="en-US" altLang="zh-CN" dirty="0"/>
+              <a:t>User Flow</a:t>
+            </a:r>
+          </a:p>
+          <a:p>
+            <a:r>
+              <a:rPr lang="zh-CN" altLang="en-US" dirty="0"/>
+              <a:t>但第一页必须是：</a:t>
+            </a:r>
+          </a:p>
+          <a:p>
+            <a:r>
+              <a:rPr lang="zh-CN" altLang="en-US" dirty="0"/>
+              <a:t>“结构权力分布图”。</a:t>
+            </a:r>
+          </a:p>
+          <a:p>
+            <a:br>
+              <a:rPr lang="zh-CN" altLang="en-US" dirty="0"/>
+            </a:br>
+            <a:endParaRPr lang="zh-CN" altLang="en-US" dirty="0"/>
+          </a:p>
+          <a:p>
+            <a:r>
+              <a:rPr lang="zh-CN" altLang="en-US" b="1" dirty="0"/>
+              <a:t>🔥 现在我问你一个关键问题</a:t>
+            </a:r>
+          </a:p>
+          <a:p>
+            <a:r>
+              <a:rPr lang="en-US" altLang="zh-CN" dirty="0" err="1"/>
+              <a:t>Metaclass</a:t>
+            </a:r>
+            <a:r>
+              <a:rPr lang="en-US" altLang="zh-CN" dirty="0"/>
+              <a:t> System </a:t>
+            </a:r>
+            <a:r>
+              <a:rPr lang="zh-CN" altLang="en-US" dirty="0"/>
+              <a:t>是否拥有版本号？</a:t>
+            </a:r>
+          </a:p>
+          <a:p>
+            <a:r>
+              <a:rPr lang="zh-CN" altLang="en-US" dirty="0"/>
+              <a:t>如果有：</a:t>
+            </a:r>
+          </a:p>
+          <a:p>
+            <a:r>
+              <a:rPr lang="zh-CN" altLang="en-US" dirty="0"/>
+              <a:t>我们可以在图上写：</a:t>
+            </a:r>
+          </a:p>
+          <a:p>
+            <a:r>
+              <a:rPr lang="en-US" altLang="zh-CN" dirty="0" err="1"/>
+              <a:t>Metaclass</a:t>
+            </a:r>
+            <a:r>
+              <a:rPr lang="en-US" altLang="zh-CN" dirty="0"/>
+              <a:t> Standard v0.1</a:t>
+            </a:r>
+          </a:p>
+          <a:p>
+            <a:r>
+              <a:rPr lang="zh-CN" altLang="en-US" dirty="0"/>
+              <a:t>这会极度专业。</a:t>
+            </a:r>
+          </a:p>
+          <a:p>
+            <a:r>
+              <a:rPr lang="zh-CN" altLang="en-US" dirty="0"/>
+              <a:t>如果没有，</a:t>
+            </a:r>
+          </a:p>
+          <a:p>
+            <a:r>
+              <a:rPr lang="zh-CN" altLang="en-US" dirty="0"/>
+              <a:t>我们可以开始定义版本。</a:t>
+            </a:r>
+          </a:p>
+          <a:p>
+            <a:endParaRPr lang="zh-CN" altLang="en-US" dirty="0"/>
+          </a:p>
+        </p:txBody>
+      </p:sp>
+    </p:spTree>
+    <p:extLst>
+      <p:ext uri="{BB962C8B-B14F-4D97-AF65-F5344CB8AC3E}">
+        <p14:creationId xmlns:p14="http://schemas.microsoft.com/office/powerpoint/2010/main" val="3056409584"/>
+      </p:ext>
+    </p:extLst>
+  </p:cSld>
+  <p:clrMapOvr>
+    <a:masterClrMapping/>
+  </p:clrMapOvr>
+</p:sld>
+</file>
+
+<file path=ppt/slides/slide7.xml><?xml version="1.0" encoding="utf-8"?>
+<p:sld xmlns:a="http://schemas.openxmlformats.org/drawingml/2006/main" xmlns:r="http://schemas.openxmlformats.org/officeDocument/2006/relationships" xmlns:p="http://schemas.openxmlformats.org/presentationml/2006/main">
+  <p:cSld>
+    <p:spTree>
+      <p:nvGrpSpPr>
+        <p:cNvPr id="1" name=""/>
+        <p:cNvGrpSpPr/>
+        <p:nvPr/>
+      </p:nvGrpSpPr>
+      <p:grpSpPr>
+        <a:xfrm>
+          <a:off x="0" y="0"/>
+          <a:ext cx="0" cy="0"/>
+          <a:chOff x="0" y="0"/>
+          <a:chExt cx="0" cy="0"/>
+        </a:xfrm>
+      </p:grpSpPr>
+      <p:sp>
+        <p:nvSpPr>
+          <p:cNvPr id="2" name="标题 1">
+            <a:extLst>
+              <a:ext uri="{FF2B5EF4-FFF2-40B4-BE49-F238E27FC236}">
+                <a16:creationId xmlns:a16="http://schemas.microsoft.com/office/drawing/2014/main" id="{4EA98BA7-0EAD-B7F5-0A06-AF08CCC84ACF}"/>
+              </a:ext>
+            </a:extLst>
+          </p:cNvPr>
+          <p:cNvSpPr>
+            <a:spLocks noGrp="1"/>
+          </p:cNvSpPr>
+          <p:nvPr>
+            <p:ph type="title"/>
+          </p:nvPr>
+        </p:nvSpPr>
+        <p:spPr/>
+        <p:txBody>
+          <a:bodyPr/>
+          <a:lstStyle/>
+          <a:p>
+            <a:endParaRPr lang="zh-CN" altLang="en-US"/>
+          </a:p>
+        </p:txBody>
+      </p:sp>
+      <p:sp>
+        <p:nvSpPr>
+          <p:cNvPr id="3" name="内容占位符 2">
+            <a:extLst>
+              <a:ext uri="{FF2B5EF4-FFF2-40B4-BE49-F238E27FC236}">
+                <a16:creationId xmlns:a16="http://schemas.microsoft.com/office/drawing/2014/main" id="{0391C089-2DD9-4D07-8D63-C8ED9D7BCEB8}"/>
+              </a:ext>
+            </a:extLst>
+          </p:cNvPr>
+          <p:cNvSpPr>
+            <a:spLocks noGrp="1"/>
+          </p:cNvSpPr>
+          <p:nvPr>
+            <p:ph idx="1"/>
+          </p:nvPr>
+        </p:nvSpPr>
+        <p:spPr>
+          <a:xfrm>
+            <a:off x="3393440" y="2499360"/>
+            <a:ext cx="11089088" cy="4109624"/>
+          </a:xfrm>
+        </p:spPr>
+        <p:txBody>
+          <a:bodyPr>
+            <a:normAutofit/>
+          </a:bodyPr>
+          <a:lstStyle/>
+          <a:p>
+            <a:pPr marL="0" indent="0">
+              <a:buNone/>
+            </a:pPr>
+            <a:r>
+              <a:rPr lang="en-US" altLang="zh-CN" sz="9600" dirty="0">
+                <a:latin typeface="Noto Sans SC Black" panose="020B0200000000000000" pitchFamily="34" charset="-122"/>
+                <a:ea typeface="Noto Sans SC Black" panose="020B0200000000000000" pitchFamily="34" charset="-122"/>
+              </a:rPr>
+              <a:t>Thx!</a:t>
+            </a:r>
+            <a:endParaRPr lang="zh-CN" altLang="en-US" sz="9600" dirty="0">
+              <a:latin typeface="Noto Sans SC Black" panose="020B0200000000000000" pitchFamily="34" charset="-122"/>
+              <a:ea typeface="Noto Sans SC Black" panose="020B0200000000000000" pitchFamily="34" charset="-122"/>
+            </a:endParaRPr>
+          </a:p>
+        </p:txBody>
+      </p:sp>
+      <p:sp>
+        <p:nvSpPr>
+          <p:cNvPr id="4" name="文本框 3">
+            <a:extLst>
+              <a:ext uri="{FF2B5EF4-FFF2-40B4-BE49-F238E27FC236}">
+                <a16:creationId xmlns:a16="http://schemas.microsoft.com/office/drawing/2014/main" id="{0BF2F8F8-0315-B701-59E8-0BEF377B872F}"/>
+              </a:ext>
+            </a:extLst>
+          </p:cNvPr>
+          <p:cNvSpPr txBox="1"/>
+          <p:nvPr/>
+        </p:nvSpPr>
+        <p:spPr>
+          <a:xfrm>
+            <a:off x="7640320" y="2346960"/>
+            <a:ext cx="6024880" cy="1569660"/>
+          </a:xfrm>
+          <a:prstGeom prst="rect">
+            <a:avLst/>
+          </a:prstGeom>
+          <a:noFill/>
+        </p:spPr>
+        <p:txBody>
+          <a:bodyPr wrap="square" rtlCol="0">
+            <a:spAutoFit/>
+          </a:bodyPr>
+          <a:lstStyle/>
+          <a:p>
+            <a:r>
+              <a:rPr lang="en-US" altLang="zh-CN" sz="9600" dirty="0"/>
+              <a:t>:3</a:t>
+            </a:r>
+            <a:endParaRPr lang="zh-CN" altLang="en-US" sz="9600" dirty="0"/>
+          </a:p>
+        </p:txBody>
+      </p:sp>
+      <p:sp>
+        <p:nvSpPr>
+          <p:cNvPr id="5" name="文本框 4">
+            <a:extLst>
+              <a:ext uri="{FF2B5EF4-FFF2-40B4-BE49-F238E27FC236}">
+                <a16:creationId xmlns:a16="http://schemas.microsoft.com/office/drawing/2014/main" id="{CCF54208-BF2E-D901-D202-AC45D0777428}"/>
+              </a:ext>
+            </a:extLst>
+          </p:cNvPr>
+          <p:cNvSpPr txBox="1"/>
+          <p:nvPr/>
+        </p:nvSpPr>
+        <p:spPr>
+          <a:xfrm>
+            <a:off x="127000" y="2433320"/>
+            <a:ext cx="2941320" cy="1569660"/>
+          </a:xfrm>
+          <a:prstGeom prst="rect">
+            <a:avLst/>
+          </a:prstGeom>
+          <a:noFill/>
+        </p:spPr>
+        <p:txBody>
+          <a:bodyPr wrap="square" rtlCol="0">
+            <a:spAutoFit/>
+          </a:bodyPr>
+          <a:lstStyle/>
+          <a:p>
+            <a:r>
+              <a:rPr lang="en-US" altLang="zh-CN" sz="9600" dirty="0">
+                <a:latin typeface="Noto Sans SC Black" panose="020B0200000000000000" pitchFamily="34" charset="-122"/>
+                <a:ea typeface="Noto Sans SC Black" panose="020B0200000000000000" pitchFamily="34" charset="-122"/>
+              </a:rPr>
+              <a:t>&lt;3</a:t>
+            </a:r>
+            <a:endParaRPr lang="zh-CN" altLang="en-US" sz="9600" dirty="0">
+              <a:latin typeface="Noto Sans SC Black" panose="020B0200000000000000" pitchFamily="34" charset="-122"/>
+              <a:ea typeface="Noto Sans SC Black" panose="020B0200000000000000" pitchFamily="34" charset="-122"/>
+            </a:endParaRPr>
+          </a:p>
+        </p:txBody>
+      </p:sp>
+    </p:spTree>
+    <p:extLst>
+      <p:ext uri="{BB962C8B-B14F-4D97-AF65-F5344CB8AC3E}">
+        <p14:creationId xmlns:p14="http://schemas.microsoft.com/office/powerpoint/2010/main" val="1867969755"/>
       </p:ext>
     </p:extLst>
   </p:cSld>

--- a/docs/amar engine overview.pptx
+++ b/docs/amar engine overview.pptx
@@ -8244,6 +8244,9 @@
           <a:prstGeom prst="rect">
             <a:avLst/>
           </a:prstGeom>
+          <a:solidFill>
+            <a:srgbClr val="FF0000"/>
+          </a:solidFill>
         </p:spPr>
         <p:style>
           <a:lnRef idx="2">
@@ -10631,10 +10634,18 @@
           <a:lstStyle/>
           <a:p>
             <a:r>
-              <a:rPr lang="en-US" altLang="zh-CN" dirty="0"/>
+              <a:rPr lang="en-US" altLang="zh-CN" dirty="0">
+                <a:highlight>
+                  <a:srgbClr val="00FF00"/>
+                </a:highlight>
+              </a:rPr>
               <a:t>7. It's an interactive world,(folders) are not single files.</a:t>
             </a:r>
-            <a:endParaRPr lang="zh-CN" altLang="en-US" dirty="0"/>
+            <a:endParaRPr lang="zh-CN" altLang="en-US" dirty="0">
+              <a:highlight>
+                <a:srgbClr val="00FF00"/>
+              </a:highlight>
+            </a:endParaRPr>
           </a:p>
         </p:txBody>
       </p:sp>

--- a/docs/amar engine overview.pptx
+++ b/docs/amar engine overview.pptx
@@ -5,16 +5,15 @@
     <p:sldMasterId id="2147483648" r:id="rId1"/>
   </p:sldMasterIdLst>
   <p:notesMasterIdLst>
-    <p:notesMasterId r:id="rId9"/>
+    <p:notesMasterId r:id="rId8"/>
   </p:notesMasterIdLst>
   <p:sldIdLst>
     <p:sldId id="257" r:id="rId2"/>
     <p:sldId id="260" r:id="rId3"/>
-    <p:sldId id="258" r:id="rId4"/>
-    <p:sldId id="256" r:id="rId5"/>
-    <p:sldId id="259" r:id="rId6"/>
-    <p:sldId id="262" r:id="rId7"/>
-    <p:sldId id="261" r:id="rId8"/>
+    <p:sldId id="256" r:id="rId4"/>
+    <p:sldId id="259" r:id="rId5"/>
+    <p:sldId id="258" r:id="rId6"/>
+    <p:sldId id="261" r:id="rId7"/>
   </p:sldIdLst>
   <p:sldSz cx="12192000" cy="6858000"/>
   <p:notesSz cx="6858000" cy="9144000"/>
@@ -535,7 +534,7 @@
           <a:p>
             <a:fld id="{6AB730D5-1C7C-4557-8722-3813F1ECD0F3}" type="slidenum">
               <a:rPr lang="zh-CN" altLang="en-US" smtClean="0"/>
-              <a:t>4</a:t>
+              <a:t>3</a:t>
             </a:fld>
             <a:endParaRPr lang="zh-CN" altLang="en-US"/>
           </a:p>
@@ -5302,6 +5301,4486 @@
       </p:grpSpPr>
       <p:sp>
         <p:nvSpPr>
+          <p:cNvPr id="62" name="矩形 61">
+            <a:extLst>
+              <a:ext uri="{FF2B5EF4-FFF2-40B4-BE49-F238E27FC236}">
+                <a16:creationId xmlns:a16="http://schemas.microsoft.com/office/drawing/2014/main" id="{5BE91CDD-C68E-59CC-BA62-6297C4EBBCC4}"/>
+              </a:ext>
+            </a:extLst>
+          </p:cNvPr>
+          <p:cNvSpPr/>
+          <p:nvPr/>
+        </p:nvSpPr>
+        <p:spPr>
+          <a:xfrm>
+            <a:off x="81998" y="5883965"/>
+            <a:ext cx="2800350" cy="850559"/>
+          </a:xfrm>
+          <a:prstGeom prst="rect">
+            <a:avLst/>
+          </a:prstGeom>
+        </p:spPr>
+        <p:style>
+          <a:lnRef idx="2">
+            <a:schemeClr val="accent4"/>
+          </a:lnRef>
+          <a:fillRef idx="1">
+            <a:schemeClr val="lt1"/>
+          </a:fillRef>
+          <a:effectRef idx="0">
+            <a:schemeClr val="accent4"/>
+          </a:effectRef>
+          <a:fontRef idx="minor">
+            <a:schemeClr val="dk1"/>
+          </a:fontRef>
+        </p:style>
+        <p:txBody>
+          <a:bodyPr rtlCol="0" anchor="ctr"/>
+          <a:lstStyle/>
+          <a:p>
+            <a:pPr algn="ctr"/>
+            <a:endParaRPr lang="zh-CN" altLang="en-US"/>
+          </a:p>
+        </p:txBody>
+      </p:sp>
+      <p:sp>
+        <p:nvSpPr>
+          <p:cNvPr id="53" name="矩形 52">
+            <a:extLst>
+              <a:ext uri="{FF2B5EF4-FFF2-40B4-BE49-F238E27FC236}">
+                <a16:creationId xmlns:a16="http://schemas.microsoft.com/office/drawing/2014/main" id="{8A767945-2F1C-E6A0-D465-7D0850E0514B}"/>
+              </a:ext>
+            </a:extLst>
+          </p:cNvPr>
+          <p:cNvSpPr/>
+          <p:nvPr/>
+        </p:nvSpPr>
+        <p:spPr>
+          <a:xfrm>
+            <a:off x="81998" y="5198169"/>
+            <a:ext cx="2425810" cy="615779"/>
+          </a:xfrm>
+          <a:prstGeom prst="rect">
+            <a:avLst/>
+          </a:prstGeom>
+        </p:spPr>
+        <p:style>
+          <a:lnRef idx="2">
+            <a:schemeClr val="accent4"/>
+          </a:lnRef>
+          <a:fillRef idx="1">
+            <a:schemeClr val="lt1"/>
+          </a:fillRef>
+          <a:effectRef idx="0">
+            <a:schemeClr val="accent4"/>
+          </a:effectRef>
+          <a:fontRef idx="minor">
+            <a:schemeClr val="dk1"/>
+          </a:fontRef>
+        </p:style>
+        <p:txBody>
+          <a:bodyPr rtlCol="0" anchor="ctr"/>
+          <a:lstStyle/>
+          <a:p>
+            <a:pPr algn="ctr"/>
+            <a:endParaRPr lang="zh-CN" altLang="en-US"/>
+          </a:p>
+        </p:txBody>
+      </p:sp>
+      <p:sp>
+        <p:nvSpPr>
+          <p:cNvPr id="49" name="矩形 48">
+            <a:extLst>
+              <a:ext uri="{FF2B5EF4-FFF2-40B4-BE49-F238E27FC236}">
+                <a16:creationId xmlns:a16="http://schemas.microsoft.com/office/drawing/2014/main" id="{51D13E15-AC94-633D-5CED-1A5950B4E791}"/>
+              </a:ext>
+            </a:extLst>
+          </p:cNvPr>
+          <p:cNvSpPr/>
+          <p:nvPr/>
+        </p:nvSpPr>
+        <p:spPr>
+          <a:xfrm>
+            <a:off x="71396" y="4489659"/>
+            <a:ext cx="2436412" cy="646331"/>
+          </a:xfrm>
+          <a:prstGeom prst="rect">
+            <a:avLst/>
+          </a:prstGeom>
+        </p:spPr>
+        <p:style>
+          <a:lnRef idx="2">
+            <a:schemeClr val="accent4"/>
+          </a:lnRef>
+          <a:fillRef idx="1">
+            <a:schemeClr val="lt1"/>
+          </a:fillRef>
+          <a:effectRef idx="0">
+            <a:schemeClr val="accent4"/>
+          </a:effectRef>
+          <a:fontRef idx="minor">
+            <a:schemeClr val="dk1"/>
+          </a:fontRef>
+        </p:style>
+        <p:txBody>
+          <a:bodyPr rtlCol="0" anchor="ctr"/>
+          <a:lstStyle/>
+          <a:p>
+            <a:pPr algn="ctr"/>
+            <a:endParaRPr lang="zh-CN" altLang="en-US" dirty="0"/>
+          </a:p>
+        </p:txBody>
+      </p:sp>
+      <p:sp>
+        <p:nvSpPr>
+          <p:cNvPr id="8" name="矩形 7">
+            <a:extLst>
+              <a:ext uri="{FF2B5EF4-FFF2-40B4-BE49-F238E27FC236}">
+                <a16:creationId xmlns:a16="http://schemas.microsoft.com/office/drawing/2014/main" id="{7FC3AC08-1B62-48A1-797F-2AAA0B113715}"/>
+              </a:ext>
+            </a:extLst>
+          </p:cNvPr>
+          <p:cNvSpPr/>
+          <p:nvPr/>
+        </p:nvSpPr>
+        <p:spPr>
+          <a:xfrm>
+            <a:off x="1289602" y="631134"/>
+            <a:ext cx="2489752" cy="3250096"/>
+          </a:xfrm>
+          <a:prstGeom prst="rect">
+            <a:avLst/>
+          </a:prstGeom>
+        </p:spPr>
+        <p:style>
+          <a:lnRef idx="2">
+            <a:schemeClr val="accent2">
+              <a:shade val="15000"/>
+            </a:schemeClr>
+          </a:lnRef>
+          <a:fillRef idx="1">
+            <a:schemeClr val="accent2"/>
+          </a:fillRef>
+          <a:effectRef idx="0">
+            <a:schemeClr val="accent2"/>
+          </a:effectRef>
+          <a:fontRef idx="minor">
+            <a:schemeClr val="lt1"/>
+          </a:fontRef>
+        </p:style>
+        <p:txBody>
+          <a:bodyPr rtlCol="0" anchor="ctr"/>
+          <a:lstStyle/>
+          <a:p>
+            <a:pPr algn="ctr"/>
+            <a:endParaRPr lang="zh-CN" altLang="en-US"/>
+          </a:p>
+        </p:txBody>
+      </p:sp>
+      <p:sp>
+        <p:nvSpPr>
+          <p:cNvPr id="4" name="矩形 3">
+            <a:extLst>
+              <a:ext uri="{FF2B5EF4-FFF2-40B4-BE49-F238E27FC236}">
+                <a16:creationId xmlns:a16="http://schemas.microsoft.com/office/drawing/2014/main" id="{6CCC5C1A-A47F-0EB6-EFF3-B21231832262}"/>
+              </a:ext>
+            </a:extLst>
+          </p:cNvPr>
+          <p:cNvSpPr/>
+          <p:nvPr/>
+        </p:nvSpPr>
+        <p:spPr>
+          <a:xfrm>
+            <a:off x="1759226" y="1212574"/>
+            <a:ext cx="1550504" cy="785191"/>
+          </a:xfrm>
+          <a:prstGeom prst="rect">
+            <a:avLst/>
+          </a:prstGeom>
+        </p:spPr>
+        <p:style>
+          <a:lnRef idx="2">
+            <a:schemeClr val="accent1">
+              <a:shade val="15000"/>
+            </a:schemeClr>
+          </a:lnRef>
+          <a:fillRef idx="1">
+            <a:schemeClr val="accent1"/>
+          </a:fillRef>
+          <a:effectRef idx="0">
+            <a:schemeClr val="accent1"/>
+          </a:effectRef>
+          <a:fontRef idx="minor">
+            <a:schemeClr val="lt1"/>
+          </a:fontRef>
+        </p:style>
+        <p:txBody>
+          <a:bodyPr rtlCol="0" anchor="ctr"/>
+          <a:lstStyle/>
+          <a:p>
+            <a:pPr algn="ctr"/>
+            <a:endParaRPr lang="zh-CN" altLang="en-US"/>
+          </a:p>
+        </p:txBody>
+      </p:sp>
+      <p:sp>
+        <p:nvSpPr>
+          <p:cNvPr id="6" name="矩形 5">
+            <a:extLst>
+              <a:ext uri="{FF2B5EF4-FFF2-40B4-BE49-F238E27FC236}">
+                <a16:creationId xmlns:a16="http://schemas.microsoft.com/office/drawing/2014/main" id="{C81BC4E6-8331-AEDE-3946-7F2EAA6E5774}"/>
+              </a:ext>
+            </a:extLst>
+          </p:cNvPr>
+          <p:cNvSpPr/>
+          <p:nvPr/>
+        </p:nvSpPr>
+        <p:spPr>
+          <a:xfrm>
+            <a:off x="1759226" y="2080591"/>
+            <a:ext cx="1550504" cy="785191"/>
+          </a:xfrm>
+          <a:prstGeom prst="rect">
+            <a:avLst/>
+          </a:prstGeom>
+        </p:spPr>
+        <p:style>
+          <a:lnRef idx="2">
+            <a:schemeClr val="accent1">
+              <a:shade val="15000"/>
+            </a:schemeClr>
+          </a:lnRef>
+          <a:fillRef idx="1">
+            <a:schemeClr val="accent1"/>
+          </a:fillRef>
+          <a:effectRef idx="0">
+            <a:schemeClr val="accent1"/>
+          </a:effectRef>
+          <a:fontRef idx="minor">
+            <a:schemeClr val="lt1"/>
+          </a:fontRef>
+        </p:style>
+        <p:txBody>
+          <a:bodyPr rtlCol="0" anchor="ctr"/>
+          <a:lstStyle/>
+          <a:p>
+            <a:pPr algn="ctr"/>
+            <a:endParaRPr lang="zh-CN" altLang="en-US"/>
+          </a:p>
+        </p:txBody>
+      </p:sp>
+      <p:sp>
+        <p:nvSpPr>
+          <p:cNvPr id="7" name="矩形 6">
+            <a:extLst>
+              <a:ext uri="{FF2B5EF4-FFF2-40B4-BE49-F238E27FC236}">
+                <a16:creationId xmlns:a16="http://schemas.microsoft.com/office/drawing/2014/main" id="{EA8275DF-53D8-4E1E-AA98-EB8720A2D58A}"/>
+              </a:ext>
+            </a:extLst>
+          </p:cNvPr>
+          <p:cNvSpPr/>
+          <p:nvPr/>
+        </p:nvSpPr>
+        <p:spPr>
+          <a:xfrm>
+            <a:off x="1759226" y="2948608"/>
+            <a:ext cx="1550504" cy="785191"/>
+          </a:xfrm>
+          <a:prstGeom prst="rect">
+            <a:avLst/>
+          </a:prstGeom>
+        </p:spPr>
+        <p:style>
+          <a:lnRef idx="2">
+            <a:schemeClr val="accent1">
+              <a:shade val="15000"/>
+            </a:schemeClr>
+          </a:lnRef>
+          <a:fillRef idx="1">
+            <a:schemeClr val="accent1"/>
+          </a:fillRef>
+          <a:effectRef idx="0">
+            <a:schemeClr val="accent1"/>
+          </a:effectRef>
+          <a:fontRef idx="minor">
+            <a:schemeClr val="lt1"/>
+          </a:fontRef>
+        </p:style>
+        <p:txBody>
+          <a:bodyPr rtlCol="0" anchor="ctr"/>
+          <a:lstStyle/>
+          <a:p>
+            <a:pPr algn="ctr"/>
+            <a:endParaRPr lang="zh-CN" altLang="en-US"/>
+          </a:p>
+        </p:txBody>
+      </p:sp>
+      <p:sp>
+        <p:nvSpPr>
+          <p:cNvPr id="2" name="文本框 1">
+            <a:extLst>
+              <a:ext uri="{FF2B5EF4-FFF2-40B4-BE49-F238E27FC236}">
+                <a16:creationId xmlns:a16="http://schemas.microsoft.com/office/drawing/2014/main" id="{A43141FA-B24C-18E7-D130-E91BF5CF010E}"/>
+              </a:ext>
+            </a:extLst>
+          </p:cNvPr>
+          <p:cNvSpPr txBox="1"/>
+          <p:nvPr/>
+        </p:nvSpPr>
+        <p:spPr>
+          <a:xfrm>
+            <a:off x="2087217" y="695811"/>
+            <a:ext cx="1396448" cy="369332"/>
+          </a:xfrm>
+          <a:prstGeom prst="rect">
+            <a:avLst/>
+          </a:prstGeom>
+          <a:noFill/>
+        </p:spPr>
+        <p:txBody>
+          <a:bodyPr wrap="square" rtlCol="0">
+            <a:spAutoFit/>
+          </a:bodyPr>
+          <a:lstStyle/>
+          <a:p>
+            <a:r>
+              <a:rPr lang="en-US" altLang="zh-CN" dirty="0">
+                <a:latin typeface="MS UI Gothic" panose="020B0600070205080204" pitchFamily="34" charset="-128"/>
+                <a:ea typeface="MS UI Gothic" panose="020B0600070205080204" pitchFamily="34" charset="-128"/>
+              </a:rPr>
+              <a:t>INPUT</a:t>
+            </a:r>
+            <a:endParaRPr lang="zh-CN" altLang="en-US" dirty="0">
+              <a:latin typeface="MS UI Gothic" panose="020B0600070205080204" pitchFamily="34" charset="-128"/>
+              <a:ea typeface="MS UI Gothic" panose="020B0600070205080204" pitchFamily="34" charset="-128"/>
+            </a:endParaRPr>
+          </a:p>
+        </p:txBody>
+      </p:sp>
+      <p:sp>
+        <p:nvSpPr>
+          <p:cNvPr id="3" name="矩形 2">
+            <a:extLst>
+              <a:ext uri="{FF2B5EF4-FFF2-40B4-BE49-F238E27FC236}">
+                <a16:creationId xmlns:a16="http://schemas.microsoft.com/office/drawing/2014/main" id="{414C27B1-FD70-8F48-D8C5-EAFAB2532D61}"/>
+              </a:ext>
+            </a:extLst>
+          </p:cNvPr>
+          <p:cNvSpPr/>
+          <p:nvPr/>
+        </p:nvSpPr>
+        <p:spPr>
+          <a:xfrm>
+            <a:off x="9064486" y="506895"/>
+            <a:ext cx="2594113" cy="5928691"/>
+          </a:xfrm>
+          <a:prstGeom prst="rect">
+            <a:avLst/>
+          </a:prstGeom>
+        </p:spPr>
+        <p:style>
+          <a:lnRef idx="2">
+            <a:schemeClr val="accent2">
+              <a:shade val="15000"/>
+            </a:schemeClr>
+          </a:lnRef>
+          <a:fillRef idx="1">
+            <a:schemeClr val="accent2"/>
+          </a:fillRef>
+          <a:effectRef idx="0">
+            <a:schemeClr val="accent2"/>
+          </a:effectRef>
+          <a:fontRef idx="minor">
+            <a:schemeClr val="lt1"/>
+          </a:fontRef>
+        </p:style>
+        <p:txBody>
+          <a:bodyPr rtlCol="0" anchor="ctr"/>
+          <a:lstStyle/>
+          <a:p>
+            <a:pPr algn="ctr"/>
+            <a:endParaRPr lang="zh-CN" altLang="en-US"/>
+          </a:p>
+        </p:txBody>
+      </p:sp>
+      <p:sp>
+        <p:nvSpPr>
+          <p:cNvPr id="5" name="矩形 4">
+            <a:extLst>
+              <a:ext uri="{FF2B5EF4-FFF2-40B4-BE49-F238E27FC236}">
+                <a16:creationId xmlns:a16="http://schemas.microsoft.com/office/drawing/2014/main" id="{90363CCF-F9C6-2297-5930-700E203DDB8F}"/>
+              </a:ext>
+            </a:extLst>
+          </p:cNvPr>
+          <p:cNvSpPr/>
+          <p:nvPr/>
+        </p:nvSpPr>
+        <p:spPr>
+          <a:xfrm>
+            <a:off x="9230689" y="971351"/>
+            <a:ext cx="2251213" cy="3841475"/>
+          </a:xfrm>
+          <a:prstGeom prst="rect">
+            <a:avLst/>
+          </a:prstGeom>
+        </p:spPr>
+        <p:style>
+          <a:lnRef idx="2">
+            <a:schemeClr val="accent6">
+              <a:shade val="15000"/>
+            </a:schemeClr>
+          </a:lnRef>
+          <a:fillRef idx="1">
+            <a:schemeClr val="accent6"/>
+          </a:fillRef>
+          <a:effectRef idx="0">
+            <a:schemeClr val="accent6"/>
+          </a:effectRef>
+          <a:fontRef idx="minor">
+            <a:schemeClr val="lt1"/>
+          </a:fontRef>
+        </p:style>
+        <p:txBody>
+          <a:bodyPr rtlCol="0" anchor="ctr"/>
+          <a:lstStyle/>
+          <a:p>
+            <a:pPr algn="ctr"/>
+            <a:endParaRPr lang="zh-CN" altLang="en-US"/>
+          </a:p>
+        </p:txBody>
+      </p:sp>
+      <p:sp>
+        <p:nvSpPr>
+          <p:cNvPr id="9" name="矩形 8">
+            <a:extLst>
+              <a:ext uri="{FF2B5EF4-FFF2-40B4-BE49-F238E27FC236}">
+                <a16:creationId xmlns:a16="http://schemas.microsoft.com/office/drawing/2014/main" id="{A9014885-527C-63CE-94D9-F425BD860CD2}"/>
+              </a:ext>
+            </a:extLst>
+          </p:cNvPr>
+          <p:cNvSpPr/>
+          <p:nvPr/>
+        </p:nvSpPr>
+        <p:spPr>
+          <a:xfrm>
+            <a:off x="9278176" y="4904961"/>
+            <a:ext cx="2166730" cy="1446144"/>
+          </a:xfrm>
+          <a:prstGeom prst="rect">
+            <a:avLst/>
+          </a:prstGeom>
+        </p:spPr>
+        <p:style>
+          <a:lnRef idx="1">
+            <a:schemeClr val="accent4"/>
+          </a:lnRef>
+          <a:fillRef idx="2">
+            <a:schemeClr val="accent4"/>
+          </a:fillRef>
+          <a:effectRef idx="1">
+            <a:schemeClr val="accent4"/>
+          </a:effectRef>
+          <a:fontRef idx="minor">
+            <a:schemeClr val="dk1"/>
+          </a:fontRef>
+        </p:style>
+        <p:txBody>
+          <a:bodyPr rtlCol="0" anchor="ctr"/>
+          <a:lstStyle/>
+          <a:p>
+            <a:pPr algn="ctr"/>
+            <a:endParaRPr lang="zh-CN" altLang="en-US"/>
+          </a:p>
+        </p:txBody>
+      </p:sp>
+      <p:sp>
+        <p:nvSpPr>
+          <p:cNvPr id="10" name="文本框 9">
+            <a:extLst>
+              <a:ext uri="{FF2B5EF4-FFF2-40B4-BE49-F238E27FC236}">
+                <a16:creationId xmlns:a16="http://schemas.microsoft.com/office/drawing/2014/main" id="{11BC3741-A913-0762-7012-A3B0A65F83F3}"/>
+              </a:ext>
+            </a:extLst>
+          </p:cNvPr>
+          <p:cNvSpPr txBox="1"/>
+          <p:nvPr/>
+        </p:nvSpPr>
+        <p:spPr>
+          <a:xfrm>
+            <a:off x="9695622" y="558284"/>
+            <a:ext cx="2107093" cy="369332"/>
+          </a:xfrm>
+          <a:prstGeom prst="rect">
+            <a:avLst/>
+          </a:prstGeom>
+          <a:noFill/>
+        </p:spPr>
+        <p:txBody>
+          <a:bodyPr wrap="square" rtlCol="0">
+            <a:spAutoFit/>
+          </a:bodyPr>
+          <a:lstStyle/>
+          <a:p>
+            <a:r>
+              <a:rPr lang="en-US" altLang="zh-CN" dirty="0"/>
+              <a:t>OUTPUT</a:t>
+            </a:r>
+            <a:endParaRPr lang="zh-CN" altLang="en-US" dirty="0"/>
+          </a:p>
+        </p:txBody>
+      </p:sp>
+      <p:sp>
+        <p:nvSpPr>
+          <p:cNvPr id="11" name="文本框 10">
+            <a:extLst>
+              <a:ext uri="{FF2B5EF4-FFF2-40B4-BE49-F238E27FC236}">
+                <a16:creationId xmlns:a16="http://schemas.microsoft.com/office/drawing/2014/main" id="{67C17DFB-C0FF-F35A-5DF0-66D74223F73C}"/>
+              </a:ext>
+            </a:extLst>
+          </p:cNvPr>
+          <p:cNvSpPr txBox="1"/>
+          <p:nvPr/>
+        </p:nvSpPr>
+        <p:spPr>
+          <a:xfrm>
+            <a:off x="9509259" y="5013503"/>
+            <a:ext cx="1704561" cy="369332"/>
+          </a:xfrm>
+          <a:prstGeom prst="rect">
+            <a:avLst/>
+          </a:prstGeom>
+          <a:noFill/>
+        </p:spPr>
+        <p:txBody>
+          <a:bodyPr wrap="square" rtlCol="0">
+            <a:spAutoFit/>
+          </a:bodyPr>
+          <a:lstStyle/>
+          <a:p>
+            <a:r>
+              <a:rPr lang="en-US" altLang="zh-CN" dirty="0"/>
+              <a:t>EME WORLD</a:t>
+            </a:r>
+            <a:endParaRPr lang="zh-CN" altLang="en-US" dirty="0"/>
+          </a:p>
+        </p:txBody>
+      </p:sp>
+      <p:sp>
+        <p:nvSpPr>
+          <p:cNvPr id="12" name="文本框 11">
+            <a:extLst>
+              <a:ext uri="{FF2B5EF4-FFF2-40B4-BE49-F238E27FC236}">
+                <a16:creationId xmlns:a16="http://schemas.microsoft.com/office/drawing/2014/main" id="{1E932628-2694-BD66-E75B-F1B3E9707A87}"/>
+              </a:ext>
+            </a:extLst>
+          </p:cNvPr>
+          <p:cNvSpPr txBox="1"/>
+          <p:nvPr/>
+        </p:nvSpPr>
+        <p:spPr>
+          <a:xfrm>
+            <a:off x="2087217" y="2256182"/>
+            <a:ext cx="1386509" cy="369332"/>
+          </a:xfrm>
+          <a:prstGeom prst="rect">
+            <a:avLst/>
+          </a:prstGeom>
+          <a:noFill/>
+        </p:spPr>
+        <p:txBody>
+          <a:bodyPr wrap="square" rtlCol="0">
+            <a:spAutoFit/>
+          </a:bodyPr>
+          <a:lstStyle/>
+          <a:p>
+            <a:r>
+              <a:rPr lang="en-US" altLang="zh-CN" dirty="0"/>
+              <a:t>LLM API</a:t>
+            </a:r>
+            <a:endParaRPr lang="zh-CN" altLang="en-US" dirty="0"/>
+          </a:p>
+        </p:txBody>
+      </p:sp>
+      <p:sp>
+        <p:nvSpPr>
+          <p:cNvPr id="13" name="文本框 12">
+            <a:extLst>
+              <a:ext uri="{FF2B5EF4-FFF2-40B4-BE49-F238E27FC236}">
+                <a16:creationId xmlns:a16="http://schemas.microsoft.com/office/drawing/2014/main" id="{FB4FEC95-B6E1-D130-EA6A-8CD95B0ADEA5}"/>
+              </a:ext>
+            </a:extLst>
+          </p:cNvPr>
+          <p:cNvSpPr txBox="1"/>
+          <p:nvPr/>
+        </p:nvSpPr>
+        <p:spPr>
+          <a:xfrm>
+            <a:off x="1993900" y="3124200"/>
+            <a:ext cx="1085850" cy="369332"/>
+          </a:xfrm>
+          <a:prstGeom prst="rect">
+            <a:avLst/>
+          </a:prstGeom>
+          <a:noFill/>
+        </p:spPr>
+        <p:txBody>
+          <a:bodyPr wrap="square" rtlCol="0">
+            <a:spAutoFit/>
+          </a:bodyPr>
+          <a:lstStyle/>
+          <a:p>
+            <a:r>
+              <a:rPr lang="en-US" altLang="zh-CN" dirty="0"/>
+              <a:t>3DGS</a:t>
+            </a:r>
+            <a:endParaRPr lang="zh-CN" altLang="en-US" dirty="0"/>
+          </a:p>
+        </p:txBody>
+      </p:sp>
+      <p:sp>
+        <p:nvSpPr>
+          <p:cNvPr id="14" name="文本框 13">
+            <a:extLst>
+              <a:ext uri="{FF2B5EF4-FFF2-40B4-BE49-F238E27FC236}">
+                <a16:creationId xmlns:a16="http://schemas.microsoft.com/office/drawing/2014/main" id="{27F2FB6D-5423-ABA2-ABC5-C18DB98A8523}"/>
+              </a:ext>
+            </a:extLst>
+          </p:cNvPr>
+          <p:cNvSpPr txBox="1"/>
+          <p:nvPr/>
+        </p:nvSpPr>
+        <p:spPr>
+          <a:xfrm>
+            <a:off x="9559290" y="5292098"/>
+            <a:ext cx="1615440" cy="461665"/>
+          </a:xfrm>
+          <a:prstGeom prst="rect">
+            <a:avLst/>
+          </a:prstGeom>
+          <a:noFill/>
+        </p:spPr>
+        <p:txBody>
+          <a:bodyPr wrap="square" rtlCol="0">
+            <a:spAutoFit/>
+          </a:bodyPr>
+          <a:lstStyle/>
+          <a:p>
+            <a:r>
+              <a:rPr lang="en-US" altLang="zh-CN" sz="1200" dirty="0"/>
+              <a:t>We don't need to consider this for now.</a:t>
+            </a:r>
+            <a:endParaRPr lang="zh-CN" altLang="en-US" sz="1200" dirty="0"/>
+          </a:p>
+        </p:txBody>
+      </p:sp>
+      <p:sp>
+        <p:nvSpPr>
+          <p:cNvPr id="15" name="文本框 14">
+            <a:extLst>
+              <a:ext uri="{FF2B5EF4-FFF2-40B4-BE49-F238E27FC236}">
+                <a16:creationId xmlns:a16="http://schemas.microsoft.com/office/drawing/2014/main" id="{BBD2CF9C-6E52-A147-8215-55B8D7F3892E}"/>
+              </a:ext>
+            </a:extLst>
+          </p:cNvPr>
+          <p:cNvSpPr txBox="1"/>
+          <p:nvPr/>
+        </p:nvSpPr>
+        <p:spPr>
+          <a:xfrm>
+            <a:off x="1870074" y="1263650"/>
+            <a:ext cx="1463675" cy="369332"/>
+          </a:xfrm>
+          <a:prstGeom prst="rect">
+            <a:avLst/>
+          </a:prstGeom>
+          <a:noFill/>
+        </p:spPr>
+        <p:txBody>
+          <a:bodyPr wrap="square" rtlCol="0">
+            <a:spAutoFit/>
+          </a:bodyPr>
+          <a:lstStyle/>
+          <a:p>
+            <a:r>
+              <a:rPr lang="en-US" altLang="zh-CN" dirty="0" err="1"/>
+              <a:t>Photo,video</a:t>
+            </a:r>
+            <a:endParaRPr lang="zh-CN" altLang="en-US" dirty="0"/>
+          </a:p>
+        </p:txBody>
+      </p:sp>
+      <p:sp>
+        <p:nvSpPr>
+          <p:cNvPr id="16" name="矩形 15">
+            <a:extLst>
+              <a:ext uri="{FF2B5EF4-FFF2-40B4-BE49-F238E27FC236}">
+                <a16:creationId xmlns:a16="http://schemas.microsoft.com/office/drawing/2014/main" id="{D3C047A2-B398-185B-A46F-9A774994271B}"/>
+              </a:ext>
+            </a:extLst>
+          </p:cNvPr>
+          <p:cNvSpPr/>
+          <p:nvPr/>
+        </p:nvSpPr>
+        <p:spPr>
+          <a:xfrm>
+            <a:off x="4089400" y="1212850"/>
+            <a:ext cx="1339850" cy="704850"/>
+          </a:xfrm>
+          <a:prstGeom prst="rect">
+            <a:avLst/>
+          </a:prstGeom>
+        </p:spPr>
+        <p:style>
+          <a:lnRef idx="2">
+            <a:schemeClr val="accent1">
+              <a:shade val="15000"/>
+            </a:schemeClr>
+          </a:lnRef>
+          <a:fillRef idx="1">
+            <a:schemeClr val="accent1"/>
+          </a:fillRef>
+          <a:effectRef idx="0">
+            <a:schemeClr val="accent1"/>
+          </a:effectRef>
+          <a:fontRef idx="minor">
+            <a:schemeClr val="lt1"/>
+          </a:fontRef>
+        </p:style>
+        <p:txBody>
+          <a:bodyPr rtlCol="0" anchor="ctr"/>
+          <a:lstStyle/>
+          <a:p>
+            <a:pPr algn="ctr"/>
+            <a:endParaRPr lang="zh-CN" altLang="en-US"/>
+          </a:p>
+        </p:txBody>
+      </p:sp>
+      <p:sp>
+        <p:nvSpPr>
+          <p:cNvPr id="17" name="文本框 16">
+            <a:extLst>
+              <a:ext uri="{FF2B5EF4-FFF2-40B4-BE49-F238E27FC236}">
+                <a16:creationId xmlns:a16="http://schemas.microsoft.com/office/drawing/2014/main" id="{35940A9D-0E41-7561-4CC1-21F5DEAC1D2A}"/>
+              </a:ext>
+            </a:extLst>
+          </p:cNvPr>
+          <p:cNvSpPr txBox="1"/>
+          <p:nvPr/>
+        </p:nvSpPr>
+        <p:spPr>
+          <a:xfrm>
+            <a:off x="4264025" y="1355725"/>
+            <a:ext cx="1165225" cy="369332"/>
+          </a:xfrm>
+          <a:prstGeom prst="rect">
+            <a:avLst/>
+          </a:prstGeom>
+          <a:noFill/>
+        </p:spPr>
+        <p:txBody>
+          <a:bodyPr wrap="square" rtlCol="0">
+            <a:spAutoFit/>
+          </a:bodyPr>
+          <a:lstStyle/>
+          <a:p>
+            <a:r>
+              <a:rPr lang="en-US" altLang="zh-CN" dirty="0"/>
+              <a:t>Tahoe</a:t>
+            </a:r>
+            <a:endParaRPr lang="zh-CN" altLang="en-US" dirty="0"/>
+          </a:p>
+        </p:txBody>
+      </p:sp>
+      <p:sp>
+        <p:nvSpPr>
+          <p:cNvPr id="20" name="箭头: 右 19">
+            <a:extLst>
+              <a:ext uri="{FF2B5EF4-FFF2-40B4-BE49-F238E27FC236}">
+                <a16:creationId xmlns:a16="http://schemas.microsoft.com/office/drawing/2014/main" id="{243B9B5A-9DF2-5739-FB44-60C57D9F2FFD}"/>
+              </a:ext>
+            </a:extLst>
+          </p:cNvPr>
+          <p:cNvSpPr/>
+          <p:nvPr/>
+        </p:nvSpPr>
+        <p:spPr>
+          <a:xfrm>
+            <a:off x="3419475" y="1355725"/>
+            <a:ext cx="628650" cy="369332"/>
+          </a:xfrm>
+          <a:prstGeom prst="rightArrow">
+            <a:avLst/>
+          </a:prstGeom>
+        </p:spPr>
+        <p:style>
+          <a:lnRef idx="2">
+            <a:schemeClr val="accent1">
+              <a:shade val="15000"/>
+            </a:schemeClr>
+          </a:lnRef>
+          <a:fillRef idx="1">
+            <a:schemeClr val="accent1"/>
+          </a:fillRef>
+          <a:effectRef idx="0">
+            <a:schemeClr val="accent1"/>
+          </a:effectRef>
+          <a:fontRef idx="minor">
+            <a:schemeClr val="lt1"/>
+          </a:fontRef>
+        </p:style>
+        <p:txBody>
+          <a:bodyPr rtlCol="0" anchor="ctr"/>
+          <a:lstStyle/>
+          <a:p>
+            <a:pPr algn="ctr"/>
+            <a:endParaRPr lang="zh-CN" altLang="en-US"/>
+          </a:p>
+        </p:txBody>
+      </p:sp>
+      <p:sp>
+        <p:nvSpPr>
+          <p:cNvPr id="21" name="椭圆 20">
+            <a:extLst>
+              <a:ext uri="{FF2B5EF4-FFF2-40B4-BE49-F238E27FC236}">
+                <a16:creationId xmlns:a16="http://schemas.microsoft.com/office/drawing/2014/main" id="{BC2F963A-4350-5A96-3512-FB11643490A2}"/>
+              </a:ext>
+            </a:extLst>
+          </p:cNvPr>
+          <p:cNvSpPr/>
+          <p:nvPr/>
+        </p:nvSpPr>
+        <p:spPr>
+          <a:xfrm>
+            <a:off x="5176836" y="1263650"/>
+            <a:ext cx="165100" cy="177800"/>
+          </a:xfrm>
+          <a:prstGeom prst="ellipse">
+            <a:avLst/>
+          </a:prstGeom>
+        </p:spPr>
+        <p:style>
+          <a:lnRef idx="2">
+            <a:schemeClr val="accent2">
+              <a:shade val="15000"/>
+            </a:schemeClr>
+          </a:lnRef>
+          <a:fillRef idx="1">
+            <a:schemeClr val="accent2"/>
+          </a:fillRef>
+          <a:effectRef idx="0">
+            <a:schemeClr val="accent2"/>
+          </a:effectRef>
+          <a:fontRef idx="minor">
+            <a:schemeClr val="lt1"/>
+          </a:fontRef>
+        </p:style>
+        <p:txBody>
+          <a:bodyPr rtlCol="0" anchor="ctr"/>
+          <a:lstStyle/>
+          <a:p>
+            <a:pPr algn="ctr"/>
+            <a:endParaRPr lang="zh-CN" altLang="en-US"/>
+          </a:p>
+        </p:txBody>
+      </p:sp>
+      <p:sp>
+        <p:nvSpPr>
+          <p:cNvPr id="22" name="文本框 21">
+            <a:extLst>
+              <a:ext uri="{FF2B5EF4-FFF2-40B4-BE49-F238E27FC236}">
+                <a16:creationId xmlns:a16="http://schemas.microsoft.com/office/drawing/2014/main" id="{1D984F89-675C-46D8-A980-F7F632A9E723}"/>
+              </a:ext>
+            </a:extLst>
+          </p:cNvPr>
+          <p:cNvSpPr txBox="1"/>
+          <p:nvPr/>
+        </p:nvSpPr>
+        <p:spPr>
+          <a:xfrm>
+            <a:off x="5137945" y="1225592"/>
+            <a:ext cx="165099" cy="253916"/>
+          </a:xfrm>
+          <a:prstGeom prst="rect">
+            <a:avLst/>
+          </a:prstGeom>
+          <a:noFill/>
+        </p:spPr>
+        <p:txBody>
+          <a:bodyPr wrap="square" rtlCol="0">
+            <a:spAutoFit/>
+          </a:bodyPr>
+          <a:lstStyle/>
+          <a:p>
+            <a:r>
+              <a:rPr lang="en-US" altLang="zh-CN" sz="1050" dirty="0"/>
+              <a:t>1</a:t>
+            </a:r>
+            <a:endParaRPr lang="zh-CN" altLang="en-US" sz="1050" dirty="0"/>
+          </a:p>
+        </p:txBody>
+      </p:sp>
+      <p:sp>
+        <p:nvSpPr>
+          <p:cNvPr id="24" name="矩形 23">
+            <a:extLst>
+              <a:ext uri="{FF2B5EF4-FFF2-40B4-BE49-F238E27FC236}">
+                <a16:creationId xmlns:a16="http://schemas.microsoft.com/office/drawing/2014/main" id="{BA8D103F-E6D2-0C69-1F32-C58447F00C71}"/>
+              </a:ext>
+            </a:extLst>
+          </p:cNvPr>
+          <p:cNvSpPr/>
+          <p:nvPr/>
+        </p:nvSpPr>
+        <p:spPr>
+          <a:xfrm>
+            <a:off x="9355381" y="3881230"/>
+            <a:ext cx="2012315" cy="827930"/>
+          </a:xfrm>
+          <a:prstGeom prst="rect">
+            <a:avLst/>
+          </a:prstGeom>
+        </p:spPr>
+        <p:style>
+          <a:lnRef idx="2">
+            <a:schemeClr val="accent4">
+              <a:shade val="15000"/>
+            </a:schemeClr>
+          </a:lnRef>
+          <a:fillRef idx="1">
+            <a:schemeClr val="accent4"/>
+          </a:fillRef>
+          <a:effectRef idx="0">
+            <a:schemeClr val="accent4"/>
+          </a:effectRef>
+          <a:fontRef idx="minor">
+            <a:schemeClr val="lt1"/>
+          </a:fontRef>
+        </p:style>
+        <p:txBody>
+          <a:bodyPr rtlCol="0" anchor="ctr"/>
+          <a:lstStyle/>
+          <a:p>
+            <a:pPr algn="ctr"/>
+            <a:endParaRPr lang="zh-CN" altLang="en-US"/>
+          </a:p>
+        </p:txBody>
+      </p:sp>
+      <p:sp>
+        <p:nvSpPr>
+          <p:cNvPr id="25" name="文本框 24">
+            <a:extLst>
+              <a:ext uri="{FF2B5EF4-FFF2-40B4-BE49-F238E27FC236}">
+                <a16:creationId xmlns:a16="http://schemas.microsoft.com/office/drawing/2014/main" id="{C3FC6DA9-36F2-0E5E-B307-2E7EC4D673C1}"/>
+              </a:ext>
+            </a:extLst>
+          </p:cNvPr>
+          <p:cNvSpPr txBox="1"/>
+          <p:nvPr/>
+        </p:nvSpPr>
+        <p:spPr>
+          <a:xfrm>
+            <a:off x="9890712" y="4066792"/>
+            <a:ext cx="1824990" cy="369332"/>
+          </a:xfrm>
+          <a:prstGeom prst="rect">
+            <a:avLst/>
+          </a:prstGeom>
+          <a:noFill/>
+        </p:spPr>
+        <p:txBody>
+          <a:bodyPr wrap="square" rtlCol="0">
+            <a:spAutoFit/>
+          </a:bodyPr>
+          <a:lstStyle/>
+          <a:p>
+            <a:r>
+              <a:rPr lang="en-US" altLang="zh-CN" dirty="0"/>
+              <a:t>Genesis</a:t>
+            </a:r>
+            <a:endParaRPr lang="zh-CN" altLang="en-US" dirty="0"/>
+          </a:p>
+        </p:txBody>
+      </p:sp>
+      <p:sp>
+        <p:nvSpPr>
+          <p:cNvPr id="26" name="箭头: 下 25">
+            <a:extLst>
+              <a:ext uri="{FF2B5EF4-FFF2-40B4-BE49-F238E27FC236}">
+                <a16:creationId xmlns:a16="http://schemas.microsoft.com/office/drawing/2014/main" id="{700ED5AB-62A5-D122-4C9A-C7D989BAA292}"/>
+              </a:ext>
+            </a:extLst>
+          </p:cNvPr>
+          <p:cNvSpPr/>
+          <p:nvPr/>
+        </p:nvSpPr>
+        <p:spPr>
+          <a:xfrm>
+            <a:off x="9559290" y="3429000"/>
+            <a:ext cx="444443" cy="360095"/>
+          </a:xfrm>
+          <a:prstGeom prst="downArrow">
+            <a:avLst/>
+          </a:prstGeom>
+        </p:spPr>
+        <p:style>
+          <a:lnRef idx="2">
+            <a:schemeClr val="accent1">
+              <a:shade val="15000"/>
+            </a:schemeClr>
+          </a:lnRef>
+          <a:fillRef idx="1">
+            <a:schemeClr val="accent1"/>
+          </a:fillRef>
+          <a:effectRef idx="0">
+            <a:schemeClr val="accent1"/>
+          </a:effectRef>
+          <a:fontRef idx="minor">
+            <a:schemeClr val="lt1"/>
+          </a:fontRef>
+        </p:style>
+        <p:txBody>
+          <a:bodyPr rtlCol="0" anchor="ctr"/>
+          <a:lstStyle/>
+          <a:p>
+            <a:pPr algn="ctr"/>
+            <a:endParaRPr lang="zh-CN" altLang="en-US"/>
+          </a:p>
+        </p:txBody>
+      </p:sp>
+      <p:sp>
+        <p:nvSpPr>
+          <p:cNvPr id="27" name="文本框 26">
+            <a:extLst>
+              <a:ext uri="{FF2B5EF4-FFF2-40B4-BE49-F238E27FC236}">
+                <a16:creationId xmlns:a16="http://schemas.microsoft.com/office/drawing/2014/main" id="{EED7DF7D-79DE-FE7D-5649-FF5EB5BC2C22}"/>
+              </a:ext>
+            </a:extLst>
+          </p:cNvPr>
+          <p:cNvSpPr txBox="1"/>
+          <p:nvPr/>
+        </p:nvSpPr>
+        <p:spPr>
+          <a:xfrm>
+            <a:off x="10042525" y="3429000"/>
+            <a:ext cx="1235075" cy="369332"/>
+          </a:xfrm>
+          <a:prstGeom prst="rect">
+            <a:avLst/>
+          </a:prstGeom>
+          <a:noFill/>
+        </p:spPr>
+        <p:txBody>
+          <a:bodyPr wrap="square" rtlCol="0">
+            <a:spAutoFit/>
+          </a:bodyPr>
+          <a:lstStyle/>
+          <a:p>
+            <a:r>
+              <a:rPr lang="en-US" altLang="zh-CN" dirty="0"/>
+              <a:t>Based on</a:t>
+            </a:r>
+            <a:endParaRPr lang="zh-CN" altLang="en-US" dirty="0"/>
+          </a:p>
+        </p:txBody>
+      </p:sp>
+      <p:sp>
+        <p:nvSpPr>
+          <p:cNvPr id="28" name="矩形 27">
+            <a:extLst>
+              <a:ext uri="{FF2B5EF4-FFF2-40B4-BE49-F238E27FC236}">
+                <a16:creationId xmlns:a16="http://schemas.microsoft.com/office/drawing/2014/main" id="{D880FCCE-7103-9A73-DF05-607D4895CFFA}"/>
+              </a:ext>
+            </a:extLst>
+          </p:cNvPr>
+          <p:cNvSpPr/>
+          <p:nvPr/>
+        </p:nvSpPr>
+        <p:spPr>
+          <a:xfrm>
+            <a:off x="9302750" y="2498725"/>
+            <a:ext cx="2107093" cy="781050"/>
+          </a:xfrm>
+          <a:prstGeom prst="rect">
+            <a:avLst/>
+          </a:prstGeom>
+          <a:solidFill>
+            <a:srgbClr val="FF0000"/>
+          </a:solidFill>
+        </p:spPr>
+        <p:style>
+          <a:lnRef idx="2">
+            <a:schemeClr val="accent4">
+              <a:shade val="15000"/>
+            </a:schemeClr>
+          </a:lnRef>
+          <a:fillRef idx="1">
+            <a:schemeClr val="accent4"/>
+          </a:fillRef>
+          <a:effectRef idx="0">
+            <a:schemeClr val="accent4"/>
+          </a:effectRef>
+          <a:fontRef idx="minor">
+            <a:schemeClr val="lt1"/>
+          </a:fontRef>
+        </p:style>
+        <p:txBody>
+          <a:bodyPr rtlCol="0" anchor="ctr"/>
+          <a:lstStyle/>
+          <a:p>
+            <a:pPr algn="ctr"/>
+            <a:endParaRPr lang="zh-CN" altLang="en-US"/>
+          </a:p>
+        </p:txBody>
+      </p:sp>
+      <p:sp>
+        <p:nvSpPr>
+          <p:cNvPr id="29" name="文本框 28">
+            <a:extLst>
+              <a:ext uri="{FF2B5EF4-FFF2-40B4-BE49-F238E27FC236}">
+                <a16:creationId xmlns:a16="http://schemas.microsoft.com/office/drawing/2014/main" id="{4EF0427C-E840-5409-49CD-F2C8B5FCE8F9}"/>
+              </a:ext>
+            </a:extLst>
+          </p:cNvPr>
+          <p:cNvSpPr txBox="1"/>
+          <p:nvPr/>
+        </p:nvSpPr>
+        <p:spPr>
+          <a:xfrm>
+            <a:off x="9404350" y="2673350"/>
+            <a:ext cx="1809470" cy="369332"/>
+          </a:xfrm>
+          <a:prstGeom prst="rect">
+            <a:avLst/>
+          </a:prstGeom>
+          <a:noFill/>
+        </p:spPr>
+        <p:txBody>
+          <a:bodyPr wrap="square" rtlCol="0">
+            <a:spAutoFit/>
+          </a:bodyPr>
+          <a:lstStyle/>
+          <a:p>
+            <a:r>
+              <a:rPr lang="en-US" altLang="zh-CN" dirty="0"/>
+              <a:t>AMAR GENIS</a:t>
+            </a:r>
+            <a:endParaRPr lang="zh-CN" altLang="en-US" dirty="0"/>
+          </a:p>
+        </p:txBody>
+      </p:sp>
+      <p:sp>
+        <p:nvSpPr>
+          <p:cNvPr id="30" name="箭头: 下 29">
+            <a:extLst>
+              <a:ext uri="{FF2B5EF4-FFF2-40B4-BE49-F238E27FC236}">
+                <a16:creationId xmlns:a16="http://schemas.microsoft.com/office/drawing/2014/main" id="{C31BD1BD-369A-84A0-021F-9407484AB32E}"/>
+              </a:ext>
+            </a:extLst>
+          </p:cNvPr>
+          <p:cNvSpPr/>
+          <p:nvPr/>
+        </p:nvSpPr>
+        <p:spPr>
+          <a:xfrm>
+            <a:off x="9559290" y="2080591"/>
+            <a:ext cx="330835" cy="333653"/>
+          </a:xfrm>
+          <a:prstGeom prst="downArrow">
+            <a:avLst/>
+          </a:prstGeom>
+        </p:spPr>
+        <p:style>
+          <a:lnRef idx="2">
+            <a:schemeClr val="accent1">
+              <a:shade val="15000"/>
+            </a:schemeClr>
+          </a:lnRef>
+          <a:fillRef idx="1">
+            <a:schemeClr val="accent1"/>
+          </a:fillRef>
+          <a:effectRef idx="0">
+            <a:schemeClr val="accent1"/>
+          </a:effectRef>
+          <a:fontRef idx="minor">
+            <a:schemeClr val="lt1"/>
+          </a:fontRef>
+        </p:style>
+        <p:txBody>
+          <a:bodyPr rtlCol="0" anchor="ctr"/>
+          <a:lstStyle/>
+          <a:p>
+            <a:pPr algn="ctr"/>
+            <a:endParaRPr lang="zh-CN" altLang="en-US"/>
+          </a:p>
+        </p:txBody>
+      </p:sp>
+      <p:sp>
+        <p:nvSpPr>
+          <p:cNvPr id="31" name="文本框 30">
+            <a:extLst>
+              <a:ext uri="{FF2B5EF4-FFF2-40B4-BE49-F238E27FC236}">
+                <a16:creationId xmlns:a16="http://schemas.microsoft.com/office/drawing/2014/main" id="{C51AB83E-90C0-6DF1-EA2C-97C28F7E3EED}"/>
+              </a:ext>
+            </a:extLst>
+          </p:cNvPr>
+          <p:cNvSpPr txBox="1"/>
+          <p:nvPr/>
+        </p:nvSpPr>
+        <p:spPr>
+          <a:xfrm>
+            <a:off x="9974332" y="2013332"/>
+            <a:ext cx="1371459" cy="369332"/>
+          </a:xfrm>
+          <a:prstGeom prst="rect">
+            <a:avLst/>
+          </a:prstGeom>
+          <a:noFill/>
+        </p:spPr>
+        <p:txBody>
+          <a:bodyPr wrap="square" rtlCol="0">
+            <a:spAutoFit/>
+          </a:bodyPr>
+          <a:lstStyle/>
+          <a:p>
+            <a:r>
+              <a:rPr lang="en-US" altLang="zh-CN" dirty="0"/>
+              <a:t>Based on</a:t>
+            </a:r>
+            <a:endParaRPr lang="zh-CN" altLang="en-US" dirty="0"/>
+          </a:p>
+        </p:txBody>
+      </p:sp>
+      <p:sp>
+        <p:nvSpPr>
+          <p:cNvPr id="32" name="文本框 31">
+            <a:extLst>
+              <a:ext uri="{FF2B5EF4-FFF2-40B4-BE49-F238E27FC236}">
+                <a16:creationId xmlns:a16="http://schemas.microsoft.com/office/drawing/2014/main" id="{985A8567-5450-9BDE-A4B3-74EC53705452}"/>
+              </a:ext>
+            </a:extLst>
+          </p:cNvPr>
+          <p:cNvSpPr txBox="1"/>
+          <p:nvPr/>
+        </p:nvSpPr>
+        <p:spPr>
+          <a:xfrm>
+            <a:off x="81998" y="4489660"/>
+            <a:ext cx="2758108" cy="646331"/>
+          </a:xfrm>
+          <a:prstGeom prst="rect">
+            <a:avLst/>
+          </a:prstGeom>
+          <a:noFill/>
+        </p:spPr>
+        <p:txBody>
+          <a:bodyPr wrap="square" rtlCol="0">
+            <a:spAutoFit/>
+          </a:bodyPr>
+          <a:lstStyle/>
+          <a:p>
+            <a:r>
+              <a:rPr lang="en-US" altLang="zh-CN" dirty="0"/>
+              <a:t>1.This is a world model based on </a:t>
+            </a:r>
+            <a:r>
+              <a:rPr lang="en-US" altLang="zh-CN" dirty="0" err="1"/>
+              <a:t>SpatialLM</a:t>
+            </a:r>
+            <a:r>
+              <a:rPr lang="en-US" altLang="zh-CN" dirty="0"/>
+              <a:t>.</a:t>
+            </a:r>
+            <a:endParaRPr lang="zh-CN" altLang="en-US" dirty="0"/>
+          </a:p>
+        </p:txBody>
+      </p:sp>
+      <p:sp>
+        <p:nvSpPr>
+          <p:cNvPr id="33" name="文本框 32">
+            <a:extLst>
+              <a:ext uri="{FF2B5EF4-FFF2-40B4-BE49-F238E27FC236}">
+                <a16:creationId xmlns:a16="http://schemas.microsoft.com/office/drawing/2014/main" id="{19490E92-BF83-D9A6-E7D6-9841493BFCED}"/>
+              </a:ext>
+            </a:extLst>
+          </p:cNvPr>
+          <p:cNvSpPr txBox="1"/>
+          <p:nvPr/>
+        </p:nvSpPr>
+        <p:spPr>
+          <a:xfrm>
+            <a:off x="104361" y="4086765"/>
+            <a:ext cx="1316935" cy="369332"/>
+          </a:xfrm>
+          <a:prstGeom prst="rect">
+            <a:avLst/>
+          </a:prstGeom>
+          <a:noFill/>
+        </p:spPr>
+        <p:txBody>
+          <a:bodyPr wrap="square" rtlCol="0">
+            <a:spAutoFit/>
+          </a:bodyPr>
+          <a:lstStyle/>
+          <a:p>
+            <a:r>
+              <a:rPr lang="en-US" altLang="zh-CN" dirty="0"/>
+              <a:t>Notes:</a:t>
+            </a:r>
+            <a:endParaRPr lang="zh-CN" altLang="en-US" dirty="0"/>
+          </a:p>
+        </p:txBody>
+      </p:sp>
+      <p:sp>
+        <p:nvSpPr>
+          <p:cNvPr id="34" name="文本框 33">
+            <a:extLst>
+              <a:ext uri="{FF2B5EF4-FFF2-40B4-BE49-F238E27FC236}">
+                <a16:creationId xmlns:a16="http://schemas.microsoft.com/office/drawing/2014/main" id="{0EC00E08-8A78-CF2F-D06A-505750BC38A3}"/>
+              </a:ext>
+            </a:extLst>
+          </p:cNvPr>
+          <p:cNvSpPr txBox="1"/>
+          <p:nvPr/>
+        </p:nvSpPr>
+        <p:spPr>
+          <a:xfrm>
+            <a:off x="160682" y="61404"/>
+            <a:ext cx="4635683" cy="369332"/>
+          </a:xfrm>
+          <a:prstGeom prst="rect">
+            <a:avLst/>
+          </a:prstGeom>
+          <a:noFill/>
+        </p:spPr>
+        <p:txBody>
+          <a:bodyPr wrap="square" rtlCol="0">
+            <a:spAutoFit/>
+          </a:bodyPr>
+          <a:lstStyle/>
+          <a:p>
+            <a:r>
+              <a:rPr lang="en-US" altLang="zh-CN" dirty="0">
+                <a:latin typeface="Noto Sans JP Black" panose="020B0200000000000000" pitchFamily="34" charset="-122"/>
+                <a:ea typeface="Noto Sans JP Black" panose="020B0200000000000000" pitchFamily="34" charset="-122"/>
+              </a:rPr>
+              <a:t>AMAR ENGINE     </a:t>
+            </a:r>
+            <a:r>
+              <a:rPr lang="en-US" altLang="zh-CN" dirty="0"/>
+              <a:t>User Experience Flow</a:t>
+            </a:r>
+            <a:endParaRPr lang="zh-CN" altLang="en-US" dirty="0">
+              <a:latin typeface="Noto Sans JP Black" panose="020B0200000000000000" pitchFamily="34" charset="-122"/>
+              <a:ea typeface="Noto Sans JP Black" panose="020B0200000000000000" pitchFamily="34" charset="-122"/>
+            </a:endParaRPr>
+          </a:p>
+        </p:txBody>
+      </p:sp>
+      <p:sp>
+        <p:nvSpPr>
+          <p:cNvPr id="35" name="文本框 34">
+            <a:extLst>
+              <a:ext uri="{FF2B5EF4-FFF2-40B4-BE49-F238E27FC236}">
+                <a16:creationId xmlns:a16="http://schemas.microsoft.com/office/drawing/2014/main" id="{8F7F5F47-DAAD-CCCA-1923-407607941B71}"/>
+              </a:ext>
+            </a:extLst>
+          </p:cNvPr>
+          <p:cNvSpPr txBox="1"/>
+          <p:nvPr/>
+        </p:nvSpPr>
+        <p:spPr>
+          <a:xfrm>
+            <a:off x="104361" y="800100"/>
+            <a:ext cx="1041125" cy="261610"/>
+          </a:xfrm>
+          <a:prstGeom prst="rect">
+            <a:avLst/>
+          </a:prstGeom>
+          <a:noFill/>
+        </p:spPr>
+        <p:txBody>
+          <a:bodyPr wrap="square" rtlCol="0">
+            <a:spAutoFit/>
+          </a:bodyPr>
+          <a:lstStyle/>
+          <a:p>
+            <a:r>
+              <a:rPr lang="en-US" altLang="zh-CN" sz="1100" dirty="0" err="1">
+                <a:latin typeface="Britannic Bold" panose="020B0903060703020204" pitchFamily="34" charset="0"/>
+              </a:rPr>
+              <a:t>ceaserzhao</a:t>
+            </a:r>
+            <a:endParaRPr lang="zh-CN" altLang="en-US" sz="1100" dirty="0">
+              <a:latin typeface="Britannic Bold" panose="020B0903060703020204" pitchFamily="34" charset="0"/>
+            </a:endParaRPr>
+          </a:p>
+        </p:txBody>
+      </p:sp>
+      <p:sp>
+        <p:nvSpPr>
+          <p:cNvPr id="36" name="矩形 35">
+            <a:extLst>
+              <a:ext uri="{FF2B5EF4-FFF2-40B4-BE49-F238E27FC236}">
+                <a16:creationId xmlns:a16="http://schemas.microsoft.com/office/drawing/2014/main" id="{4A1544BB-AF39-1C71-DF33-8DB37E71A01D}"/>
+              </a:ext>
+            </a:extLst>
+          </p:cNvPr>
+          <p:cNvSpPr/>
+          <p:nvPr/>
+        </p:nvSpPr>
+        <p:spPr>
+          <a:xfrm>
+            <a:off x="5610760" y="558284"/>
+            <a:ext cx="2737025" cy="5048228"/>
+          </a:xfrm>
+          <a:prstGeom prst="rect">
+            <a:avLst/>
+          </a:prstGeom>
+        </p:spPr>
+        <p:style>
+          <a:lnRef idx="2">
+            <a:schemeClr val="accent2">
+              <a:shade val="15000"/>
+            </a:schemeClr>
+          </a:lnRef>
+          <a:fillRef idx="1">
+            <a:schemeClr val="accent2"/>
+          </a:fillRef>
+          <a:effectRef idx="0">
+            <a:schemeClr val="accent2"/>
+          </a:effectRef>
+          <a:fontRef idx="minor">
+            <a:schemeClr val="lt1"/>
+          </a:fontRef>
+        </p:style>
+        <p:txBody>
+          <a:bodyPr rtlCol="0" anchor="ctr"/>
+          <a:lstStyle/>
+          <a:p>
+            <a:pPr algn="ctr"/>
+            <a:endParaRPr lang="zh-CN" altLang="en-US" dirty="0"/>
+          </a:p>
+        </p:txBody>
+      </p:sp>
+      <p:sp>
+        <p:nvSpPr>
+          <p:cNvPr id="37" name="文本框 36">
+            <a:extLst>
+              <a:ext uri="{FF2B5EF4-FFF2-40B4-BE49-F238E27FC236}">
+                <a16:creationId xmlns:a16="http://schemas.microsoft.com/office/drawing/2014/main" id="{347E795D-4F29-B6D3-743C-EAC0C77F773F}"/>
+              </a:ext>
+            </a:extLst>
+          </p:cNvPr>
+          <p:cNvSpPr txBox="1"/>
+          <p:nvPr/>
+        </p:nvSpPr>
+        <p:spPr>
+          <a:xfrm>
+            <a:off x="6341164" y="646115"/>
+            <a:ext cx="2216426" cy="369332"/>
+          </a:xfrm>
+          <a:prstGeom prst="rect">
+            <a:avLst/>
+          </a:prstGeom>
+          <a:noFill/>
+        </p:spPr>
+        <p:txBody>
+          <a:bodyPr wrap="square" rtlCol="0">
+            <a:spAutoFit/>
+          </a:bodyPr>
+          <a:lstStyle/>
+          <a:p>
+            <a:r>
+              <a:rPr lang="en-US" altLang="zh-CN" dirty="0"/>
+              <a:t>AME ADMIN</a:t>
+            </a:r>
+            <a:endParaRPr lang="zh-CN" altLang="en-US" dirty="0"/>
+          </a:p>
+        </p:txBody>
+      </p:sp>
+      <p:sp>
+        <p:nvSpPr>
+          <p:cNvPr id="39" name="矩形 38">
+            <a:extLst>
+              <a:ext uri="{FF2B5EF4-FFF2-40B4-BE49-F238E27FC236}">
+                <a16:creationId xmlns:a16="http://schemas.microsoft.com/office/drawing/2014/main" id="{6CD7EADD-6243-D921-FA03-9AD0956E200C}"/>
+              </a:ext>
+            </a:extLst>
+          </p:cNvPr>
+          <p:cNvSpPr/>
+          <p:nvPr/>
+        </p:nvSpPr>
+        <p:spPr>
+          <a:xfrm>
+            <a:off x="3436711" y="4471454"/>
+            <a:ext cx="1604484" cy="552968"/>
+          </a:xfrm>
+          <a:prstGeom prst="rect">
+            <a:avLst/>
+          </a:prstGeom>
+        </p:spPr>
+        <p:style>
+          <a:lnRef idx="2">
+            <a:schemeClr val="accent6">
+              <a:shade val="15000"/>
+            </a:schemeClr>
+          </a:lnRef>
+          <a:fillRef idx="1">
+            <a:schemeClr val="accent6"/>
+          </a:fillRef>
+          <a:effectRef idx="0">
+            <a:schemeClr val="accent6"/>
+          </a:effectRef>
+          <a:fontRef idx="minor">
+            <a:schemeClr val="lt1"/>
+          </a:fontRef>
+        </p:style>
+        <p:txBody>
+          <a:bodyPr rtlCol="0" anchor="ctr"/>
+          <a:lstStyle/>
+          <a:p>
+            <a:pPr algn="ctr"/>
+            <a:endParaRPr lang="zh-CN" altLang="en-US"/>
+          </a:p>
+        </p:txBody>
+      </p:sp>
+      <p:sp>
+        <p:nvSpPr>
+          <p:cNvPr id="38" name="箭头: 右 37">
+            <a:extLst>
+              <a:ext uri="{FF2B5EF4-FFF2-40B4-BE49-F238E27FC236}">
+                <a16:creationId xmlns:a16="http://schemas.microsoft.com/office/drawing/2014/main" id="{A147669C-5D84-B053-896E-C267DF095108}"/>
+              </a:ext>
+            </a:extLst>
+          </p:cNvPr>
+          <p:cNvSpPr/>
+          <p:nvPr/>
+        </p:nvSpPr>
+        <p:spPr>
+          <a:xfrm rot="3387979">
+            <a:off x="2522053" y="3969231"/>
+            <a:ext cx="1480950" cy="104801"/>
+          </a:xfrm>
+          <a:prstGeom prst="rightArrow">
+            <a:avLst/>
+          </a:prstGeom>
+        </p:spPr>
+        <p:style>
+          <a:lnRef idx="2">
+            <a:schemeClr val="accent1">
+              <a:shade val="15000"/>
+            </a:schemeClr>
+          </a:lnRef>
+          <a:fillRef idx="1">
+            <a:schemeClr val="accent1"/>
+          </a:fillRef>
+          <a:effectRef idx="0">
+            <a:schemeClr val="accent1"/>
+          </a:effectRef>
+          <a:fontRef idx="minor">
+            <a:schemeClr val="lt1"/>
+          </a:fontRef>
+        </p:style>
+        <p:txBody>
+          <a:bodyPr rtlCol="0" anchor="ctr"/>
+          <a:lstStyle/>
+          <a:p>
+            <a:pPr algn="ctr"/>
+            <a:endParaRPr lang="zh-CN" altLang="en-US"/>
+          </a:p>
+        </p:txBody>
+      </p:sp>
+      <p:sp>
+        <p:nvSpPr>
+          <p:cNvPr id="40" name="文本框 39">
+            <a:extLst>
+              <a:ext uri="{FF2B5EF4-FFF2-40B4-BE49-F238E27FC236}">
+                <a16:creationId xmlns:a16="http://schemas.microsoft.com/office/drawing/2014/main" id="{3169AFDA-52E0-C61E-B0EA-F90CCD6F3261}"/>
+              </a:ext>
+            </a:extLst>
+          </p:cNvPr>
+          <p:cNvSpPr txBox="1"/>
+          <p:nvPr/>
+        </p:nvSpPr>
+        <p:spPr>
+          <a:xfrm>
+            <a:off x="3412207" y="4575579"/>
+            <a:ext cx="1729418" cy="369332"/>
+          </a:xfrm>
+          <a:prstGeom prst="rect">
+            <a:avLst/>
+          </a:prstGeom>
+          <a:noFill/>
+        </p:spPr>
+        <p:txBody>
+          <a:bodyPr wrap="square" rtlCol="0">
+            <a:spAutoFit/>
+          </a:bodyPr>
+          <a:lstStyle/>
+          <a:p>
+            <a:r>
+              <a:rPr lang="en-US" altLang="zh-CN" dirty="0"/>
+              <a:t>AME SCANNER</a:t>
+            </a:r>
+            <a:endParaRPr lang="zh-CN" altLang="en-US" dirty="0"/>
+          </a:p>
+        </p:txBody>
+      </p:sp>
+      <p:pic>
+        <p:nvPicPr>
+          <p:cNvPr id="42" name="图片 41" descr="徽标, 公司名称&#10;&#10;AI 生成的内容可能不正确。">
+            <a:extLst>
+              <a:ext uri="{FF2B5EF4-FFF2-40B4-BE49-F238E27FC236}">
+                <a16:creationId xmlns:a16="http://schemas.microsoft.com/office/drawing/2014/main" id="{1185C566-0941-CCAE-731E-B1D0F3C298BF}"/>
+              </a:ext>
+            </a:extLst>
+          </p:cNvPr>
+          <p:cNvPicPr>
+            <a:picLocks noChangeAspect="1"/>
+          </p:cNvPicPr>
+          <p:nvPr/>
+        </p:nvPicPr>
+        <p:blipFill>
+          <a:blip r:embed="rId3">
+            <a:extLst>
+              <a:ext uri="{28A0092B-C50C-407E-A947-70E740481C1C}">
+                <a14:useLocalDpi xmlns:a14="http://schemas.microsoft.com/office/drawing/2010/main" val="0"/>
+              </a:ext>
+            </a:extLst>
+          </a:blip>
+          <a:stretch>
+            <a:fillRect/>
+          </a:stretch>
+        </p:blipFill>
+        <p:spPr>
+          <a:xfrm>
+            <a:off x="89866" y="1267033"/>
+            <a:ext cx="930965" cy="930965"/>
+          </a:xfrm>
+          <a:prstGeom prst="rect">
+            <a:avLst/>
+          </a:prstGeom>
+        </p:spPr>
+      </p:pic>
+      <p:sp>
+        <p:nvSpPr>
+          <p:cNvPr id="43" name="箭头: 右 42">
+            <a:extLst>
+              <a:ext uri="{FF2B5EF4-FFF2-40B4-BE49-F238E27FC236}">
+                <a16:creationId xmlns:a16="http://schemas.microsoft.com/office/drawing/2014/main" id="{BE5614AD-DE1D-D731-B3EC-78B017719254}"/>
+              </a:ext>
+            </a:extLst>
+          </p:cNvPr>
+          <p:cNvSpPr/>
+          <p:nvPr/>
+        </p:nvSpPr>
+        <p:spPr>
+          <a:xfrm>
+            <a:off x="8348870" y="1263650"/>
+            <a:ext cx="984387" cy="461407"/>
+          </a:xfrm>
+          <a:prstGeom prst="rightArrow">
+            <a:avLst/>
+          </a:prstGeom>
+        </p:spPr>
+        <p:style>
+          <a:lnRef idx="2">
+            <a:schemeClr val="accent1">
+              <a:shade val="15000"/>
+            </a:schemeClr>
+          </a:lnRef>
+          <a:fillRef idx="1">
+            <a:schemeClr val="accent1"/>
+          </a:fillRef>
+          <a:effectRef idx="0">
+            <a:schemeClr val="accent1"/>
+          </a:effectRef>
+          <a:fontRef idx="minor">
+            <a:schemeClr val="lt1"/>
+          </a:fontRef>
+        </p:style>
+        <p:txBody>
+          <a:bodyPr rtlCol="0" anchor="ctr"/>
+          <a:lstStyle/>
+          <a:p>
+            <a:pPr algn="ctr"/>
+            <a:endParaRPr lang="zh-CN" altLang="en-US"/>
+          </a:p>
+        </p:txBody>
+      </p:sp>
+      <p:sp>
+        <p:nvSpPr>
+          <p:cNvPr id="44" name="椭圆 43">
+            <a:extLst>
+              <a:ext uri="{FF2B5EF4-FFF2-40B4-BE49-F238E27FC236}">
+                <a16:creationId xmlns:a16="http://schemas.microsoft.com/office/drawing/2014/main" id="{7507A5E4-71F8-791F-BCCC-06F99122A4FE}"/>
+              </a:ext>
+            </a:extLst>
+          </p:cNvPr>
+          <p:cNvSpPr/>
+          <p:nvPr/>
+        </p:nvSpPr>
+        <p:spPr>
+          <a:xfrm>
+            <a:off x="8887789" y="1390608"/>
+            <a:ext cx="165100" cy="177800"/>
+          </a:xfrm>
+          <a:prstGeom prst="ellipse">
+            <a:avLst/>
+          </a:prstGeom>
+        </p:spPr>
+        <p:style>
+          <a:lnRef idx="2">
+            <a:schemeClr val="accent2">
+              <a:shade val="15000"/>
+            </a:schemeClr>
+          </a:lnRef>
+          <a:fillRef idx="1">
+            <a:schemeClr val="accent2"/>
+          </a:fillRef>
+          <a:effectRef idx="0">
+            <a:schemeClr val="accent2"/>
+          </a:effectRef>
+          <a:fontRef idx="minor">
+            <a:schemeClr val="lt1"/>
+          </a:fontRef>
+        </p:style>
+        <p:txBody>
+          <a:bodyPr rtlCol="0" anchor="ctr"/>
+          <a:lstStyle/>
+          <a:p>
+            <a:pPr algn="ctr"/>
+            <a:endParaRPr lang="zh-CN" altLang="en-US"/>
+          </a:p>
+        </p:txBody>
+      </p:sp>
+      <p:sp>
+        <p:nvSpPr>
+          <p:cNvPr id="45" name="文本框 44">
+            <a:extLst>
+              <a:ext uri="{FF2B5EF4-FFF2-40B4-BE49-F238E27FC236}">
+                <a16:creationId xmlns:a16="http://schemas.microsoft.com/office/drawing/2014/main" id="{793CA584-C824-EF90-2C46-ADFFCFEF5D1B}"/>
+              </a:ext>
+            </a:extLst>
+          </p:cNvPr>
+          <p:cNvSpPr txBox="1"/>
+          <p:nvPr/>
+        </p:nvSpPr>
+        <p:spPr>
+          <a:xfrm>
+            <a:off x="8875955" y="1341008"/>
+            <a:ext cx="104775" cy="276999"/>
+          </a:xfrm>
+          <a:prstGeom prst="rect">
+            <a:avLst/>
+          </a:prstGeom>
+          <a:noFill/>
+        </p:spPr>
+        <p:txBody>
+          <a:bodyPr wrap="square" rtlCol="0">
+            <a:spAutoFit/>
+          </a:bodyPr>
+          <a:lstStyle/>
+          <a:p>
+            <a:r>
+              <a:rPr lang="en-US" altLang="zh-CN" sz="1200" dirty="0"/>
+              <a:t>2</a:t>
+            </a:r>
+            <a:endParaRPr lang="zh-CN" altLang="en-US" sz="1200" dirty="0"/>
+          </a:p>
+        </p:txBody>
+      </p:sp>
+      <p:sp>
+        <p:nvSpPr>
+          <p:cNvPr id="48" name="文本框 47">
+            <a:extLst>
+              <a:ext uri="{FF2B5EF4-FFF2-40B4-BE49-F238E27FC236}">
+                <a16:creationId xmlns:a16="http://schemas.microsoft.com/office/drawing/2014/main" id="{F354C7C6-FB1B-9D3D-BFC1-05AE942125F9}"/>
+              </a:ext>
+            </a:extLst>
+          </p:cNvPr>
+          <p:cNvSpPr txBox="1"/>
+          <p:nvPr/>
+        </p:nvSpPr>
+        <p:spPr>
+          <a:xfrm>
+            <a:off x="104361" y="5151804"/>
+            <a:ext cx="2251710" cy="646331"/>
+          </a:xfrm>
+          <a:prstGeom prst="rect">
+            <a:avLst/>
+          </a:prstGeom>
+          <a:noFill/>
+        </p:spPr>
+        <p:txBody>
+          <a:bodyPr wrap="square" rtlCol="0">
+            <a:spAutoFit/>
+          </a:bodyPr>
+          <a:lstStyle/>
+          <a:p>
+            <a:r>
+              <a:rPr lang="en-US" altLang="zh-CN" dirty="0"/>
+              <a:t>2.A series of complex processes</a:t>
+            </a:r>
+            <a:endParaRPr lang="zh-CN" altLang="en-US" dirty="0"/>
+          </a:p>
+        </p:txBody>
+      </p:sp>
+      <p:sp>
+        <p:nvSpPr>
+          <p:cNvPr id="54" name="文本框 53">
+            <a:extLst>
+              <a:ext uri="{FF2B5EF4-FFF2-40B4-BE49-F238E27FC236}">
+                <a16:creationId xmlns:a16="http://schemas.microsoft.com/office/drawing/2014/main" id="{50295B0E-594C-85D8-8168-93220D4456C5}"/>
+              </a:ext>
+            </a:extLst>
+          </p:cNvPr>
+          <p:cNvSpPr txBox="1"/>
+          <p:nvPr/>
+        </p:nvSpPr>
+        <p:spPr>
+          <a:xfrm>
+            <a:off x="119818" y="1002639"/>
+            <a:ext cx="1130892" cy="230832"/>
+          </a:xfrm>
+          <a:prstGeom prst="rect">
+            <a:avLst/>
+          </a:prstGeom>
+          <a:noFill/>
+        </p:spPr>
+        <p:txBody>
+          <a:bodyPr wrap="square" rtlCol="0">
+            <a:spAutoFit/>
+          </a:bodyPr>
+          <a:lstStyle/>
+          <a:p>
+            <a:r>
+              <a:rPr lang="en-US" altLang="zh-CN" sz="900" dirty="0">
+                <a:latin typeface="BIZ UDGothic" panose="020B0400000000000000" pitchFamily="33" charset="-128"/>
+                <a:ea typeface="BIZ UDGothic" panose="020B0400000000000000" pitchFamily="33" charset="-128"/>
+              </a:rPr>
+              <a:t>2.23.2026</a:t>
+            </a:r>
+            <a:endParaRPr lang="zh-CN" altLang="en-US" sz="900" dirty="0">
+              <a:latin typeface="BIZ UDGothic" panose="020B0400000000000000" pitchFamily="33" charset="-128"/>
+              <a:ea typeface="BIZ UDGothic" panose="020B0400000000000000" pitchFamily="33" charset="-128"/>
+            </a:endParaRPr>
+          </a:p>
+        </p:txBody>
+      </p:sp>
+      <p:sp>
+        <p:nvSpPr>
+          <p:cNvPr id="55" name="矩形 54">
+            <a:extLst>
+              <a:ext uri="{FF2B5EF4-FFF2-40B4-BE49-F238E27FC236}">
+                <a16:creationId xmlns:a16="http://schemas.microsoft.com/office/drawing/2014/main" id="{A94C40C3-64B0-CCA4-53B5-999BD45EED56}"/>
+              </a:ext>
+            </a:extLst>
+          </p:cNvPr>
+          <p:cNvSpPr/>
+          <p:nvPr/>
+        </p:nvSpPr>
+        <p:spPr>
+          <a:xfrm>
+            <a:off x="5916646" y="4489659"/>
+            <a:ext cx="2329070" cy="919718"/>
+          </a:xfrm>
+          <a:prstGeom prst="rect">
+            <a:avLst/>
+          </a:prstGeom>
+        </p:spPr>
+        <p:style>
+          <a:lnRef idx="2">
+            <a:schemeClr val="accent1">
+              <a:shade val="15000"/>
+            </a:schemeClr>
+          </a:lnRef>
+          <a:fillRef idx="1">
+            <a:schemeClr val="accent1"/>
+          </a:fillRef>
+          <a:effectRef idx="0">
+            <a:schemeClr val="accent1"/>
+          </a:effectRef>
+          <a:fontRef idx="minor">
+            <a:schemeClr val="lt1"/>
+          </a:fontRef>
+        </p:style>
+        <p:txBody>
+          <a:bodyPr rtlCol="0" anchor="ctr"/>
+          <a:lstStyle/>
+          <a:p>
+            <a:pPr algn="ctr"/>
+            <a:endParaRPr lang="zh-CN" altLang="en-US" dirty="0"/>
+          </a:p>
+        </p:txBody>
+      </p:sp>
+      <p:sp>
+        <p:nvSpPr>
+          <p:cNvPr id="56" name="椭圆 55">
+            <a:extLst>
+              <a:ext uri="{FF2B5EF4-FFF2-40B4-BE49-F238E27FC236}">
+                <a16:creationId xmlns:a16="http://schemas.microsoft.com/office/drawing/2014/main" id="{7C41404F-074F-EFA6-6F99-23FE4C2D4586}"/>
+              </a:ext>
+            </a:extLst>
+          </p:cNvPr>
+          <p:cNvSpPr/>
+          <p:nvPr/>
+        </p:nvSpPr>
+        <p:spPr>
+          <a:xfrm>
+            <a:off x="8004022" y="4561514"/>
+            <a:ext cx="165100" cy="177800"/>
+          </a:xfrm>
+          <a:prstGeom prst="ellipse">
+            <a:avLst/>
+          </a:prstGeom>
+        </p:spPr>
+        <p:style>
+          <a:lnRef idx="2">
+            <a:schemeClr val="accent2">
+              <a:shade val="15000"/>
+            </a:schemeClr>
+          </a:lnRef>
+          <a:fillRef idx="1">
+            <a:schemeClr val="accent2"/>
+          </a:fillRef>
+          <a:effectRef idx="0">
+            <a:schemeClr val="accent2"/>
+          </a:effectRef>
+          <a:fontRef idx="minor">
+            <a:schemeClr val="lt1"/>
+          </a:fontRef>
+        </p:style>
+        <p:txBody>
+          <a:bodyPr rtlCol="0" anchor="ctr"/>
+          <a:lstStyle/>
+          <a:p>
+            <a:pPr algn="ctr"/>
+            <a:endParaRPr lang="zh-CN" altLang="en-US"/>
+          </a:p>
+        </p:txBody>
+      </p:sp>
+      <p:sp>
+        <p:nvSpPr>
+          <p:cNvPr id="59" name="文本框 58">
+            <a:extLst>
+              <a:ext uri="{FF2B5EF4-FFF2-40B4-BE49-F238E27FC236}">
+                <a16:creationId xmlns:a16="http://schemas.microsoft.com/office/drawing/2014/main" id="{FFFDC12D-85AB-9D4D-9545-B52B2D7A92B1}"/>
+              </a:ext>
+            </a:extLst>
+          </p:cNvPr>
+          <p:cNvSpPr txBox="1"/>
+          <p:nvPr/>
+        </p:nvSpPr>
+        <p:spPr>
+          <a:xfrm rot="2135733">
+            <a:off x="3502939" y="3728810"/>
+            <a:ext cx="2800350" cy="246262"/>
+          </a:xfrm>
+          <a:prstGeom prst="rect">
+            <a:avLst/>
+          </a:prstGeom>
+          <a:noFill/>
+        </p:spPr>
+        <p:txBody>
+          <a:bodyPr wrap="square" rtlCol="0">
+            <a:spAutoFit/>
+          </a:bodyPr>
+          <a:lstStyle/>
+          <a:p>
+            <a:r>
+              <a:rPr lang="en-US" altLang="zh-CN" sz="1000" dirty="0"/>
+              <a:t>SKILLS, Or rather, a kind of standard</a:t>
+            </a:r>
+            <a:endParaRPr lang="zh-CN" altLang="en-US" sz="1000" dirty="0"/>
+          </a:p>
+        </p:txBody>
+      </p:sp>
+      <p:sp>
+        <p:nvSpPr>
+          <p:cNvPr id="57" name="文本框 56">
+            <a:extLst>
+              <a:ext uri="{FF2B5EF4-FFF2-40B4-BE49-F238E27FC236}">
+                <a16:creationId xmlns:a16="http://schemas.microsoft.com/office/drawing/2014/main" id="{B0104898-28DC-AACA-4AAD-10E7B0A39FC3}"/>
+              </a:ext>
+            </a:extLst>
+          </p:cNvPr>
+          <p:cNvSpPr txBox="1"/>
+          <p:nvPr/>
+        </p:nvSpPr>
+        <p:spPr>
+          <a:xfrm>
+            <a:off x="7976789" y="4512965"/>
+            <a:ext cx="126206" cy="276999"/>
+          </a:xfrm>
+          <a:prstGeom prst="rect">
+            <a:avLst/>
+          </a:prstGeom>
+          <a:noFill/>
+        </p:spPr>
+        <p:txBody>
+          <a:bodyPr wrap="square" rtlCol="0">
+            <a:spAutoFit/>
+          </a:bodyPr>
+          <a:lstStyle/>
+          <a:p>
+            <a:r>
+              <a:rPr lang="en-US" altLang="zh-CN" sz="1200" dirty="0"/>
+              <a:t>3</a:t>
+            </a:r>
+            <a:endParaRPr lang="zh-CN" altLang="en-US" sz="1200" dirty="0"/>
+          </a:p>
+        </p:txBody>
+      </p:sp>
+      <p:sp>
+        <p:nvSpPr>
+          <p:cNvPr id="60" name="文本框 59">
+            <a:extLst>
+              <a:ext uri="{FF2B5EF4-FFF2-40B4-BE49-F238E27FC236}">
+                <a16:creationId xmlns:a16="http://schemas.microsoft.com/office/drawing/2014/main" id="{B01BC64A-0B9C-7C8D-5128-C63671FE39D0}"/>
+              </a:ext>
+            </a:extLst>
+          </p:cNvPr>
+          <p:cNvSpPr txBox="1"/>
+          <p:nvPr/>
+        </p:nvSpPr>
+        <p:spPr>
+          <a:xfrm>
+            <a:off x="6242973" y="4751746"/>
+            <a:ext cx="1992276" cy="369332"/>
+          </a:xfrm>
+          <a:prstGeom prst="rect">
+            <a:avLst/>
+          </a:prstGeom>
+          <a:noFill/>
+        </p:spPr>
+        <p:txBody>
+          <a:bodyPr wrap="square" rtlCol="0">
+            <a:spAutoFit/>
+          </a:bodyPr>
+          <a:lstStyle/>
+          <a:p>
+            <a:r>
+              <a:rPr lang="en-US" altLang="zh-CN" dirty="0"/>
+              <a:t>Information pool</a:t>
+            </a:r>
+            <a:endParaRPr lang="zh-CN" altLang="en-US" dirty="0"/>
+          </a:p>
+        </p:txBody>
+      </p:sp>
+      <p:sp>
+        <p:nvSpPr>
+          <p:cNvPr id="61" name="文本框 60">
+            <a:extLst>
+              <a:ext uri="{FF2B5EF4-FFF2-40B4-BE49-F238E27FC236}">
+                <a16:creationId xmlns:a16="http://schemas.microsoft.com/office/drawing/2014/main" id="{4FCD0B7A-C985-AB96-0D55-2070385574F8}"/>
+              </a:ext>
+            </a:extLst>
+          </p:cNvPr>
+          <p:cNvSpPr txBox="1"/>
+          <p:nvPr/>
+        </p:nvSpPr>
+        <p:spPr>
+          <a:xfrm>
+            <a:off x="71396" y="5834724"/>
+            <a:ext cx="2847561" cy="923330"/>
+          </a:xfrm>
+          <a:prstGeom prst="rect">
+            <a:avLst/>
+          </a:prstGeom>
+          <a:noFill/>
+        </p:spPr>
+        <p:txBody>
+          <a:bodyPr wrap="square" rtlCol="0">
+            <a:spAutoFit/>
+          </a:bodyPr>
+          <a:lstStyle/>
+          <a:p>
+            <a:r>
+              <a:rPr lang="en-US" altLang="zh-CN" dirty="0"/>
+              <a:t>3.A brand new data format, similar to JSON, used to describe the world.</a:t>
+            </a:r>
+            <a:endParaRPr lang="zh-CN" altLang="en-US" dirty="0"/>
+          </a:p>
+        </p:txBody>
+      </p:sp>
+      <p:sp>
+        <p:nvSpPr>
+          <p:cNvPr id="64" name="矩形 63">
+            <a:extLst>
+              <a:ext uri="{FF2B5EF4-FFF2-40B4-BE49-F238E27FC236}">
+                <a16:creationId xmlns:a16="http://schemas.microsoft.com/office/drawing/2014/main" id="{07C96C36-189C-C3D9-BE5B-FAA9F27B3497}"/>
+              </a:ext>
+            </a:extLst>
+          </p:cNvPr>
+          <p:cNvSpPr/>
+          <p:nvPr/>
+        </p:nvSpPr>
+        <p:spPr>
+          <a:xfrm>
+            <a:off x="9355381" y="1128091"/>
+            <a:ext cx="1990410" cy="800760"/>
+          </a:xfrm>
+          <a:prstGeom prst="rect">
+            <a:avLst/>
+          </a:prstGeom>
+        </p:spPr>
+        <p:style>
+          <a:lnRef idx="2">
+            <a:schemeClr val="accent4">
+              <a:shade val="15000"/>
+            </a:schemeClr>
+          </a:lnRef>
+          <a:fillRef idx="1">
+            <a:schemeClr val="accent4"/>
+          </a:fillRef>
+          <a:effectRef idx="0">
+            <a:schemeClr val="accent4"/>
+          </a:effectRef>
+          <a:fontRef idx="minor">
+            <a:schemeClr val="lt1"/>
+          </a:fontRef>
+        </p:style>
+        <p:txBody>
+          <a:bodyPr rtlCol="0" anchor="ctr"/>
+          <a:lstStyle/>
+          <a:p>
+            <a:pPr algn="ctr"/>
+            <a:endParaRPr lang="zh-CN" altLang="en-US"/>
+          </a:p>
+        </p:txBody>
+      </p:sp>
+      <p:sp>
+        <p:nvSpPr>
+          <p:cNvPr id="65" name="文本框 64">
+            <a:extLst>
+              <a:ext uri="{FF2B5EF4-FFF2-40B4-BE49-F238E27FC236}">
+                <a16:creationId xmlns:a16="http://schemas.microsoft.com/office/drawing/2014/main" id="{F137B836-92A7-B07C-ED52-F2FE7B306DD5}"/>
+              </a:ext>
+            </a:extLst>
+          </p:cNvPr>
+          <p:cNvSpPr txBox="1"/>
+          <p:nvPr/>
+        </p:nvSpPr>
+        <p:spPr>
+          <a:xfrm>
+            <a:off x="9509259" y="1361799"/>
+            <a:ext cx="1768341" cy="369332"/>
+          </a:xfrm>
+          <a:prstGeom prst="rect">
+            <a:avLst/>
+          </a:prstGeom>
+          <a:noFill/>
+        </p:spPr>
+        <p:txBody>
+          <a:bodyPr wrap="square" rtlCol="0">
+            <a:spAutoFit/>
+          </a:bodyPr>
+          <a:lstStyle/>
+          <a:p>
+            <a:r>
+              <a:rPr lang="en-US" altLang="zh-CN" dirty="0"/>
+              <a:t>AMAR WORLD</a:t>
+            </a:r>
+            <a:endParaRPr lang="zh-CN" altLang="en-US" dirty="0"/>
+          </a:p>
+        </p:txBody>
+      </p:sp>
+      <p:sp>
+        <p:nvSpPr>
+          <p:cNvPr id="66" name="椭圆 65">
+            <a:extLst>
+              <a:ext uri="{FF2B5EF4-FFF2-40B4-BE49-F238E27FC236}">
+                <a16:creationId xmlns:a16="http://schemas.microsoft.com/office/drawing/2014/main" id="{91FF571D-A82E-A345-2CD6-61B33F45B558}"/>
+              </a:ext>
+            </a:extLst>
+          </p:cNvPr>
+          <p:cNvSpPr/>
+          <p:nvPr/>
+        </p:nvSpPr>
+        <p:spPr>
+          <a:xfrm>
+            <a:off x="11146596" y="1206394"/>
+            <a:ext cx="165100" cy="177800"/>
+          </a:xfrm>
+          <a:prstGeom prst="ellipse">
+            <a:avLst/>
+          </a:prstGeom>
+        </p:spPr>
+        <p:style>
+          <a:lnRef idx="2">
+            <a:schemeClr val="accent2">
+              <a:shade val="15000"/>
+            </a:schemeClr>
+          </a:lnRef>
+          <a:fillRef idx="1">
+            <a:schemeClr val="accent2"/>
+          </a:fillRef>
+          <a:effectRef idx="0">
+            <a:schemeClr val="accent2"/>
+          </a:effectRef>
+          <a:fontRef idx="minor">
+            <a:schemeClr val="lt1"/>
+          </a:fontRef>
+        </p:style>
+        <p:txBody>
+          <a:bodyPr rtlCol="0" anchor="ctr"/>
+          <a:lstStyle/>
+          <a:p>
+            <a:pPr algn="ctr"/>
+            <a:endParaRPr lang="zh-CN" altLang="en-US"/>
+          </a:p>
+        </p:txBody>
+      </p:sp>
+      <p:sp>
+        <p:nvSpPr>
+          <p:cNvPr id="23" name="箭头: 下 22">
+            <a:extLst>
+              <a:ext uri="{FF2B5EF4-FFF2-40B4-BE49-F238E27FC236}">
+                <a16:creationId xmlns:a16="http://schemas.microsoft.com/office/drawing/2014/main" id="{4F7D1D11-8F9D-80B6-8645-FCB0F675687E}"/>
+              </a:ext>
+            </a:extLst>
+          </p:cNvPr>
+          <p:cNvSpPr/>
+          <p:nvPr/>
+        </p:nvSpPr>
+        <p:spPr>
+          <a:xfrm rot="18322881">
+            <a:off x="4537787" y="1914341"/>
+            <a:ext cx="65706" cy="3652592"/>
+          </a:xfrm>
+          <a:prstGeom prst="downArrow">
+            <a:avLst/>
+          </a:prstGeom>
+        </p:spPr>
+        <p:style>
+          <a:lnRef idx="2">
+            <a:schemeClr val="accent1">
+              <a:shade val="15000"/>
+            </a:schemeClr>
+          </a:lnRef>
+          <a:fillRef idx="1">
+            <a:schemeClr val="accent1"/>
+          </a:fillRef>
+          <a:effectRef idx="0">
+            <a:schemeClr val="accent1"/>
+          </a:effectRef>
+          <a:fontRef idx="minor">
+            <a:schemeClr val="lt1"/>
+          </a:fontRef>
+        </p:style>
+        <p:txBody>
+          <a:bodyPr rtlCol="0" anchor="ctr"/>
+          <a:lstStyle/>
+          <a:p>
+            <a:pPr algn="ctr"/>
+            <a:endParaRPr lang="zh-CN" altLang="en-US"/>
+          </a:p>
+        </p:txBody>
+      </p:sp>
+      <p:sp>
+        <p:nvSpPr>
+          <p:cNvPr id="67" name="箭头: 右 66">
+            <a:extLst>
+              <a:ext uri="{FF2B5EF4-FFF2-40B4-BE49-F238E27FC236}">
+                <a16:creationId xmlns:a16="http://schemas.microsoft.com/office/drawing/2014/main" id="{1AAC0EBF-B5EE-90C9-23A8-F154B4C463E8}"/>
+              </a:ext>
+            </a:extLst>
+          </p:cNvPr>
+          <p:cNvSpPr/>
+          <p:nvPr/>
+        </p:nvSpPr>
+        <p:spPr>
+          <a:xfrm rot="1033216">
+            <a:off x="4784492" y="5102124"/>
+            <a:ext cx="1483561" cy="144424"/>
+          </a:xfrm>
+          <a:prstGeom prst="rightArrow">
+            <a:avLst/>
+          </a:prstGeom>
+        </p:spPr>
+        <p:style>
+          <a:lnRef idx="2">
+            <a:schemeClr val="accent1">
+              <a:shade val="15000"/>
+            </a:schemeClr>
+          </a:lnRef>
+          <a:fillRef idx="1">
+            <a:schemeClr val="accent1"/>
+          </a:fillRef>
+          <a:effectRef idx="0">
+            <a:schemeClr val="accent1"/>
+          </a:effectRef>
+          <a:fontRef idx="minor">
+            <a:schemeClr val="lt1"/>
+          </a:fontRef>
+        </p:style>
+        <p:txBody>
+          <a:bodyPr rtlCol="0" anchor="ctr"/>
+          <a:lstStyle/>
+          <a:p>
+            <a:pPr algn="ctr"/>
+            <a:endParaRPr lang="zh-CN" altLang="en-US"/>
+          </a:p>
+        </p:txBody>
+      </p:sp>
+      <p:sp>
+        <p:nvSpPr>
+          <p:cNvPr id="68" name="箭头: 右 67">
+            <a:extLst>
+              <a:ext uri="{FF2B5EF4-FFF2-40B4-BE49-F238E27FC236}">
+                <a16:creationId xmlns:a16="http://schemas.microsoft.com/office/drawing/2014/main" id="{B53A8CC6-455A-49B3-EEAA-4547947B409E}"/>
+              </a:ext>
+            </a:extLst>
+          </p:cNvPr>
+          <p:cNvSpPr/>
+          <p:nvPr/>
+        </p:nvSpPr>
+        <p:spPr>
+          <a:xfrm rot="3389305" flipV="1">
+            <a:off x="3481763" y="3198494"/>
+            <a:ext cx="3545715" cy="139763"/>
+          </a:xfrm>
+          <a:prstGeom prst="rightArrow">
+            <a:avLst/>
+          </a:prstGeom>
+        </p:spPr>
+        <p:style>
+          <a:lnRef idx="2">
+            <a:schemeClr val="accent3">
+              <a:shade val="15000"/>
+            </a:schemeClr>
+          </a:lnRef>
+          <a:fillRef idx="1">
+            <a:schemeClr val="accent3"/>
+          </a:fillRef>
+          <a:effectRef idx="0">
+            <a:schemeClr val="accent3"/>
+          </a:effectRef>
+          <a:fontRef idx="minor">
+            <a:schemeClr val="lt1"/>
+          </a:fontRef>
+        </p:style>
+        <p:txBody>
+          <a:bodyPr rtlCol="0" anchor="ctr"/>
+          <a:lstStyle/>
+          <a:p>
+            <a:pPr algn="ctr"/>
+            <a:endParaRPr lang="zh-CN" altLang="en-US" dirty="0"/>
+          </a:p>
+        </p:txBody>
+      </p:sp>
+      <p:sp>
+        <p:nvSpPr>
+          <p:cNvPr id="41" name="矩形 40">
+            <a:extLst>
+              <a:ext uri="{FF2B5EF4-FFF2-40B4-BE49-F238E27FC236}">
+                <a16:creationId xmlns:a16="http://schemas.microsoft.com/office/drawing/2014/main" id="{E593706C-6739-ABAB-6769-0B8812CB2B71}"/>
+              </a:ext>
+            </a:extLst>
+          </p:cNvPr>
+          <p:cNvSpPr/>
+          <p:nvPr/>
+        </p:nvSpPr>
+        <p:spPr>
+          <a:xfrm>
+            <a:off x="5931042" y="3179160"/>
+            <a:ext cx="2318603" cy="773430"/>
+          </a:xfrm>
+          <a:prstGeom prst="rect">
+            <a:avLst/>
+          </a:prstGeom>
+        </p:spPr>
+        <p:style>
+          <a:lnRef idx="2">
+            <a:schemeClr val="accent1">
+              <a:shade val="15000"/>
+            </a:schemeClr>
+          </a:lnRef>
+          <a:fillRef idx="1">
+            <a:schemeClr val="accent1"/>
+          </a:fillRef>
+          <a:effectRef idx="0">
+            <a:schemeClr val="accent1"/>
+          </a:effectRef>
+          <a:fontRef idx="minor">
+            <a:schemeClr val="lt1"/>
+          </a:fontRef>
+        </p:style>
+        <p:txBody>
+          <a:bodyPr rtlCol="0" anchor="ctr"/>
+          <a:lstStyle/>
+          <a:p>
+            <a:pPr algn="ctr"/>
+            <a:endParaRPr lang="zh-CN" altLang="en-US"/>
+          </a:p>
+        </p:txBody>
+      </p:sp>
+      <p:sp>
+        <p:nvSpPr>
+          <p:cNvPr id="46" name="箭头: 下 45">
+            <a:extLst>
+              <a:ext uri="{FF2B5EF4-FFF2-40B4-BE49-F238E27FC236}">
+                <a16:creationId xmlns:a16="http://schemas.microsoft.com/office/drawing/2014/main" id="{34FB12DA-509A-40D4-9871-CF55B5D22465}"/>
+              </a:ext>
+            </a:extLst>
+          </p:cNvPr>
+          <p:cNvSpPr/>
+          <p:nvPr/>
+        </p:nvSpPr>
+        <p:spPr>
+          <a:xfrm rot="10800000">
+            <a:off x="6663690" y="3981450"/>
+            <a:ext cx="842851" cy="454673"/>
+          </a:xfrm>
+          <a:prstGeom prst="downArrow">
+            <a:avLst/>
+          </a:prstGeom>
+        </p:spPr>
+        <p:style>
+          <a:lnRef idx="2">
+            <a:schemeClr val="accent6">
+              <a:shade val="15000"/>
+            </a:schemeClr>
+          </a:lnRef>
+          <a:fillRef idx="1">
+            <a:schemeClr val="accent6"/>
+          </a:fillRef>
+          <a:effectRef idx="0">
+            <a:schemeClr val="accent6"/>
+          </a:effectRef>
+          <a:fontRef idx="minor">
+            <a:schemeClr val="lt1"/>
+          </a:fontRef>
+        </p:style>
+        <p:txBody>
+          <a:bodyPr rtlCol="0" anchor="ctr"/>
+          <a:lstStyle/>
+          <a:p>
+            <a:pPr algn="ctr"/>
+            <a:endParaRPr lang="zh-CN" altLang="en-US"/>
+          </a:p>
+        </p:txBody>
+      </p:sp>
+      <p:sp>
+        <p:nvSpPr>
+          <p:cNvPr id="47" name="文本框 46">
+            <a:extLst>
+              <a:ext uri="{FF2B5EF4-FFF2-40B4-BE49-F238E27FC236}">
+                <a16:creationId xmlns:a16="http://schemas.microsoft.com/office/drawing/2014/main" id="{7568D3FC-8C82-1D80-EB73-EC98129BF820}"/>
+              </a:ext>
+            </a:extLst>
+          </p:cNvPr>
+          <p:cNvSpPr txBox="1"/>
+          <p:nvPr/>
+        </p:nvSpPr>
+        <p:spPr>
+          <a:xfrm>
+            <a:off x="6189644" y="3345992"/>
+            <a:ext cx="1979478" cy="369332"/>
+          </a:xfrm>
+          <a:prstGeom prst="rect">
+            <a:avLst/>
+          </a:prstGeom>
+          <a:noFill/>
+        </p:spPr>
+        <p:txBody>
+          <a:bodyPr wrap="square" rtlCol="0">
+            <a:spAutoFit/>
+          </a:bodyPr>
+          <a:lstStyle/>
+          <a:p>
+            <a:r>
+              <a:rPr lang="en-US" altLang="zh-CN" dirty="0"/>
+              <a:t>Assign </a:t>
+            </a:r>
+            <a:r>
+              <a:rPr lang="en-US" altLang="zh-CN" dirty="0" err="1"/>
+              <a:t>metaclass</a:t>
+            </a:r>
+            <a:endParaRPr lang="zh-CN" altLang="en-US" dirty="0"/>
+          </a:p>
+        </p:txBody>
+      </p:sp>
+      <p:sp>
+        <p:nvSpPr>
+          <p:cNvPr id="50" name="矩形 49">
+            <a:extLst>
+              <a:ext uri="{FF2B5EF4-FFF2-40B4-BE49-F238E27FC236}">
+                <a16:creationId xmlns:a16="http://schemas.microsoft.com/office/drawing/2014/main" id="{04A8AC55-15E7-0AD6-2A4C-34CAA155B5AA}"/>
+              </a:ext>
+            </a:extLst>
+          </p:cNvPr>
+          <p:cNvSpPr/>
+          <p:nvPr/>
+        </p:nvSpPr>
+        <p:spPr>
+          <a:xfrm>
+            <a:off x="5880445" y="1982778"/>
+            <a:ext cx="2384170" cy="723577"/>
+          </a:xfrm>
+          <a:prstGeom prst="rect">
+            <a:avLst/>
+          </a:prstGeom>
+        </p:spPr>
+        <p:style>
+          <a:lnRef idx="2">
+            <a:schemeClr val="accent1">
+              <a:shade val="15000"/>
+            </a:schemeClr>
+          </a:lnRef>
+          <a:fillRef idx="1">
+            <a:schemeClr val="accent1"/>
+          </a:fillRef>
+          <a:effectRef idx="0">
+            <a:schemeClr val="accent1"/>
+          </a:effectRef>
+          <a:fontRef idx="minor">
+            <a:schemeClr val="lt1"/>
+          </a:fontRef>
+        </p:style>
+        <p:txBody>
+          <a:bodyPr rtlCol="0" anchor="ctr"/>
+          <a:lstStyle/>
+          <a:p>
+            <a:pPr algn="ctr"/>
+            <a:endParaRPr lang="zh-CN" altLang="en-US"/>
+          </a:p>
+        </p:txBody>
+      </p:sp>
+      <p:sp>
+        <p:nvSpPr>
+          <p:cNvPr id="51" name="箭头: 下 50">
+            <a:extLst>
+              <a:ext uri="{FF2B5EF4-FFF2-40B4-BE49-F238E27FC236}">
+                <a16:creationId xmlns:a16="http://schemas.microsoft.com/office/drawing/2014/main" id="{3BE3E1B4-1152-F8FA-213D-AA5F3BFDA3EC}"/>
+              </a:ext>
+            </a:extLst>
+          </p:cNvPr>
+          <p:cNvSpPr/>
+          <p:nvPr/>
+        </p:nvSpPr>
+        <p:spPr>
+          <a:xfrm rot="10800000">
+            <a:off x="6603325" y="2749480"/>
+            <a:ext cx="837623" cy="339846"/>
+          </a:xfrm>
+          <a:prstGeom prst="downArrow">
+            <a:avLst/>
+          </a:prstGeom>
+        </p:spPr>
+        <p:style>
+          <a:lnRef idx="2">
+            <a:schemeClr val="accent6">
+              <a:shade val="15000"/>
+            </a:schemeClr>
+          </a:lnRef>
+          <a:fillRef idx="1">
+            <a:schemeClr val="accent6"/>
+          </a:fillRef>
+          <a:effectRef idx="0">
+            <a:schemeClr val="accent6"/>
+          </a:effectRef>
+          <a:fontRef idx="minor">
+            <a:schemeClr val="lt1"/>
+          </a:fontRef>
+        </p:style>
+        <p:txBody>
+          <a:bodyPr rtlCol="0" anchor="ctr"/>
+          <a:lstStyle/>
+          <a:p>
+            <a:pPr algn="ctr"/>
+            <a:endParaRPr lang="zh-CN" altLang="en-US"/>
+          </a:p>
+        </p:txBody>
+      </p:sp>
+      <p:sp>
+        <p:nvSpPr>
+          <p:cNvPr id="52" name="文本框 51">
+            <a:extLst>
+              <a:ext uri="{FF2B5EF4-FFF2-40B4-BE49-F238E27FC236}">
+                <a16:creationId xmlns:a16="http://schemas.microsoft.com/office/drawing/2014/main" id="{41658801-D7BD-55B7-2474-8D0BEF5FEF16}"/>
+              </a:ext>
+            </a:extLst>
+          </p:cNvPr>
+          <p:cNvSpPr txBox="1"/>
+          <p:nvPr/>
+        </p:nvSpPr>
+        <p:spPr>
+          <a:xfrm>
+            <a:off x="6078672" y="2176113"/>
+            <a:ext cx="2247103" cy="369332"/>
+          </a:xfrm>
+          <a:prstGeom prst="rect">
+            <a:avLst/>
+          </a:prstGeom>
+          <a:noFill/>
+        </p:spPr>
+        <p:txBody>
+          <a:bodyPr wrap="square" rtlCol="0">
+            <a:spAutoFit/>
+          </a:bodyPr>
+          <a:lstStyle/>
+          <a:p>
+            <a:r>
+              <a:rPr lang="en-US" altLang="zh-CN" dirty="0"/>
+              <a:t>Parameter Layer</a:t>
+            </a:r>
+            <a:endParaRPr lang="zh-CN" altLang="en-US" dirty="0"/>
+          </a:p>
+        </p:txBody>
+      </p:sp>
+      <p:sp>
+        <p:nvSpPr>
+          <p:cNvPr id="63" name="椭圆 62">
+            <a:extLst>
+              <a:ext uri="{FF2B5EF4-FFF2-40B4-BE49-F238E27FC236}">
+                <a16:creationId xmlns:a16="http://schemas.microsoft.com/office/drawing/2014/main" id="{30ED689D-CFD0-5C86-3742-42F3C9605899}"/>
+              </a:ext>
+            </a:extLst>
+          </p:cNvPr>
+          <p:cNvSpPr/>
+          <p:nvPr/>
+        </p:nvSpPr>
+        <p:spPr>
+          <a:xfrm>
+            <a:off x="8030138" y="2044088"/>
+            <a:ext cx="165100" cy="177800"/>
+          </a:xfrm>
+          <a:prstGeom prst="ellipse">
+            <a:avLst/>
+          </a:prstGeom>
+        </p:spPr>
+        <p:style>
+          <a:lnRef idx="2">
+            <a:schemeClr val="accent2">
+              <a:shade val="15000"/>
+            </a:schemeClr>
+          </a:lnRef>
+          <a:fillRef idx="1">
+            <a:schemeClr val="accent2"/>
+          </a:fillRef>
+          <a:effectRef idx="0">
+            <a:schemeClr val="accent2"/>
+          </a:effectRef>
+          <a:fontRef idx="minor">
+            <a:schemeClr val="lt1"/>
+          </a:fontRef>
+        </p:style>
+        <p:txBody>
+          <a:bodyPr rtlCol="0" anchor="ctr"/>
+          <a:lstStyle/>
+          <a:p>
+            <a:pPr algn="ctr"/>
+            <a:endParaRPr lang="zh-CN" altLang="en-US"/>
+          </a:p>
+        </p:txBody>
+      </p:sp>
+      <p:sp>
+        <p:nvSpPr>
+          <p:cNvPr id="69" name="椭圆 68">
+            <a:extLst>
+              <a:ext uri="{FF2B5EF4-FFF2-40B4-BE49-F238E27FC236}">
+                <a16:creationId xmlns:a16="http://schemas.microsoft.com/office/drawing/2014/main" id="{7C41404F-074F-EFA6-6F99-23FE4C2D4586}"/>
+              </a:ext>
+            </a:extLst>
+          </p:cNvPr>
+          <p:cNvSpPr/>
+          <p:nvPr/>
+        </p:nvSpPr>
+        <p:spPr>
+          <a:xfrm>
+            <a:off x="8011285" y="3197652"/>
+            <a:ext cx="165100" cy="177800"/>
+          </a:xfrm>
+          <a:prstGeom prst="ellipse">
+            <a:avLst/>
+          </a:prstGeom>
+        </p:spPr>
+        <p:style>
+          <a:lnRef idx="2">
+            <a:schemeClr val="accent2">
+              <a:shade val="15000"/>
+            </a:schemeClr>
+          </a:lnRef>
+          <a:fillRef idx="1">
+            <a:schemeClr val="accent2"/>
+          </a:fillRef>
+          <a:effectRef idx="0">
+            <a:schemeClr val="accent2"/>
+          </a:effectRef>
+          <a:fontRef idx="minor">
+            <a:schemeClr val="lt1"/>
+          </a:fontRef>
+        </p:style>
+        <p:txBody>
+          <a:bodyPr rtlCol="0" anchor="ctr"/>
+          <a:lstStyle>
+            <a:defPPr>
+              <a:defRPr lang="zh-CN"/>
+            </a:defPPr>
+            <a:lvl1pPr marL="0" algn="l" defTabSz="914400" rtl="0" eaLnBrk="1" latinLnBrk="0" hangingPunct="1">
+              <a:defRPr sz="1800" kern="1200">
+                <a:solidFill>
+                  <a:schemeClr val="lt1"/>
+                </a:solidFill>
+                <a:latin typeface="+mn-lt"/>
+                <a:ea typeface="+mn-ea"/>
+                <a:cs typeface="+mn-cs"/>
+              </a:defRPr>
+            </a:lvl1pPr>
+            <a:lvl2pPr marL="457200" algn="l" defTabSz="914400" rtl="0" eaLnBrk="1" latinLnBrk="0" hangingPunct="1">
+              <a:defRPr sz="1800" kern="1200">
+                <a:solidFill>
+                  <a:schemeClr val="lt1"/>
+                </a:solidFill>
+                <a:latin typeface="+mn-lt"/>
+                <a:ea typeface="+mn-ea"/>
+                <a:cs typeface="+mn-cs"/>
+              </a:defRPr>
+            </a:lvl2pPr>
+            <a:lvl3pPr marL="914400" algn="l" defTabSz="914400" rtl="0" eaLnBrk="1" latinLnBrk="0" hangingPunct="1">
+              <a:defRPr sz="1800" kern="1200">
+                <a:solidFill>
+                  <a:schemeClr val="lt1"/>
+                </a:solidFill>
+                <a:latin typeface="+mn-lt"/>
+                <a:ea typeface="+mn-ea"/>
+                <a:cs typeface="+mn-cs"/>
+              </a:defRPr>
+            </a:lvl3pPr>
+            <a:lvl4pPr marL="1371600" algn="l" defTabSz="914400" rtl="0" eaLnBrk="1" latinLnBrk="0" hangingPunct="1">
+              <a:defRPr sz="1800" kern="1200">
+                <a:solidFill>
+                  <a:schemeClr val="lt1"/>
+                </a:solidFill>
+                <a:latin typeface="+mn-lt"/>
+                <a:ea typeface="+mn-ea"/>
+                <a:cs typeface="+mn-cs"/>
+              </a:defRPr>
+            </a:lvl4pPr>
+            <a:lvl5pPr marL="1828800" algn="l" defTabSz="914400" rtl="0" eaLnBrk="1" latinLnBrk="0" hangingPunct="1">
+              <a:defRPr sz="1800" kern="1200">
+                <a:solidFill>
+                  <a:schemeClr val="lt1"/>
+                </a:solidFill>
+                <a:latin typeface="+mn-lt"/>
+                <a:ea typeface="+mn-ea"/>
+                <a:cs typeface="+mn-cs"/>
+              </a:defRPr>
+            </a:lvl5pPr>
+            <a:lvl6pPr marL="2286000" algn="l" defTabSz="914400" rtl="0" eaLnBrk="1" latinLnBrk="0" hangingPunct="1">
+              <a:defRPr sz="1800" kern="1200">
+                <a:solidFill>
+                  <a:schemeClr val="lt1"/>
+                </a:solidFill>
+                <a:latin typeface="+mn-lt"/>
+                <a:ea typeface="+mn-ea"/>
+                <a:cs typeface="+mn-cs"/>
+              </a:defRPr>
+            </a:lvl6pPr>
+            <a:lvl7pPr marL="2743200" algn="l" defTabSz="914400" rtl="0" eaLnBrk="1" latinLnBrk="0" hangingPunct="1">
+              <a:defRPr sz="1800" kern="1200">
+                <a:solidFill>
+                  <a:schemeClr val="lt1"/>
+                </a:solidFill>
+                <a:latin typeface="+mn-lt"/>
+                <a:ea typeface="+mn-ea"/>
+                <a:cs typeface="+mn-cs"/>
+              </a:defRPr>
+            </a:lvl7pPr>
+            <a:lvl8pPr marL="3200400" algn="l" defTabSz="914400" rtl="0" eaLnBrk="1" latinLnBrk="0" hangingPunct="1">
+              <a:defRPr sz="1800" kern="1200">
+                <a:solidFill>
+                  <a:schemeClr val="lt1"/>
+                </a:solidFill>
+                <a:latin typeface="+mn-lt"/>
+                <a:ea typeface="+mn-ea"/>
+                <a:cs typeface="+mn-cs"/>
+              </a:defRPr>
+            </a:lvl8pPr>
+            <a:lvl9pPr marL="3657600" algn="l" defTabSz="914400" rtl="0" eaLnBrk="1" latinLnBrk="0" hangingPunct="1">
+              <a:defRPr sz="1800" kern="1200">
+                <a:solidFill>
+                  <a:schemeClr val="lt1"/>
+                </a:solidFill>
+                <a:latin typeface="+mn-lt"/>
+                <a:ea typeface="+mn-ea"/>
+                <a:cs typeface="+mn-cs"/>
+              </a:defRPr>
+            </a:lvl9pPr>
+          </a:lstStyle>
+          <a:p>
+            <a:pPr algn="ctr"/>
+            <a:endParaRPr lang="zh-CN" altLang="en-US"/>
+          </a:p>
+        </p:txBody>
+      </p:sp>
+      <p:sp>
+        <p:nvSpPr>
+          <p:cNvPr id="71" name="文本框 70">
+            <a:extLst>
+              <a:ext uri="{FF2B5EF4-FFF2-40B4-BE49-F238E27FC236}">
+                <a16:creationId xmlns:a16="http://schemas.microsoft.com/office/drawing/2014/main" id="{937F8CD2-EC51-1E78-10BC-7C12FA3BA907}"/>
+              </a:ext>
+            </a:extLst>
+          </p:cNvPr>
+          <p:cNvSpPr txBox="1"/>
+          <p:nvPr/>
+        </p:nvSpPr>
+        <p:spPr>
+          <a:xfrm>
+            <a:off x="7969472" y="3148052"/>
+            <a:ext cx="183953" cy="276999"/>
+          </a:xfrm>
+          <a:prstGeom prst="rect">
+            <a:avLst/>
+          </a:prstGeom>
+          <a:noFill/>
+        </p:spPr>
+        <p:txBody>
+          <a:bodyPr wrap="square" rtlCol="0">
+            <a:spAutoFit/>
+          </a:bodyPr>
+          <a:lstStyle/>
+          <a:p>
+            <a:r>
+              <a:rPr lang="en-US" altLang="zh-CN" sz="1200" dirty="0"/>
+              <a:t>4</a:t>
+            </a:r>
+            <a:endParaRPr lang="zh-CN" altLang="en-US" sz="1200" dirty="0"/>
+          </a:p>
+        </p:txBody>
+      </p:sp>
+      <p:sp>
+        <p:nvSpPr>
+          <p:cNvPr id="72" name="文本框 71">
+            <a:extLst>
+              <a:ext uri="{FF2B5EF4-FFF2-40B4-BE49-F238E27FC236}">
+                <a16:creationId xmlns:a16="http://schemas.microsoft.com/office/drawing/2014/main" id="{8ADCD6E6-4DD3-A42E-FC8F-06650FA5531D}"/>
+              </a:ext>
+            </a:extLst>
+          </p:cNvPr>
+          <p:cNvSpPr txBox="1"/>
+          <p:nvPr/>
+        </p:nvSpPr>
+        <p:spPr>
+          <a:xfrm>
+            <a:off x="8013231" y="1986044"/>
+            <a:ext cx="136493" cy="276999"/>
+          </a:xfrm>
+          <a:prstGeom prst="rect">
+            <a:avLst/>
+          </a:prstGeom>
+          <a:noFill/>
+        </p:spPr>
+        <p:txBody>
+          <a:bodyPr wrap="square" rtlCol="0">
+            <a:spAutoFit/>
+          </a:bodyPr>
+          <a:lstStyle/>
+          <a:p>
+            <a:r>
+              <a:rPr lang="en-US" altLang="zh-CN" sz="1200" dirty="0"/>
+              <a:t>5</a:t>
+            </a:r>
+            <a:endParaRPr lang="zh-CN" altLang="en-US" sz="1200" dirty="0"/>
+          </a:p>
+        </p:txBody>
+      </p:sp>
+      <p:sp>
+        <p:nvSpPr>
+          <p:cNvPr id="74" name="矩形 73">
+            <a:extLst>
+              <a:ext uri="{FF2B5EF4-FFF2-40B4-BE49-F238E27FC236}">
+                <a16:creationId xmlns:a16="http://schemas.microsoft.com/office/drawing/2014/main" id="{C373CE95-D959-746B-A204-226380DEDD0D}"/>
+              </a:ext>
+            </a:extLst>
+          </p:cNvPr>
+          <p:cNvSpPr/>
+          <p:nvPr/>
+        </p:nvSpPr>
+        <p:spPr>
+          <a:xfrm>
+            <a:off x="2571750" y="5198169"/>
+            <a:ext cx="2731294" cy="613025"/>
+          </a:xfrm>
+          <a:prstGeom prst="rect">
+            <a:avLst/>
+          </a:prstGeom>
+        </p:spPr>
+        <p:style>
+          <a:lnRef idx="2">
+            <a:schemeClr val="accent4"/>
+          </a:lnRef>
+          <a:fillRef idx="1">
+            <a:schemeClr val="lt1"/>
+          </a:fillRef>
+          <a:effectRef idx="0">
+            <a:schemeClr val="accent4"/>
+          </a:effectRef>
+          <a:fontRef idx="minor">
+            <a:schemeClr val="dk1"/>
+          </a:fontRef>
+        </p:style>
+        <p:txBody>
+          <a:bodyPr rtlCol="0" anchor="ctr"/>
+          <a:lstStyle/>
+          <a:p>
+            <a:pPr algn="ctr"/>
+            <a:endParaRPr lang="zh-CN" altLang="en-US"/>
+          </a:p>
+        </p:txBody>
+      </p:sp>
+      <p:sp>
+        <p:nvSpPr>
+          <p:cNvPr id="73" name="文本框 72">
+            <a:extLst>
+              <a:ext uri="{FF2B5EF4-FFF2-40B4-BE49-F238E27FC236}">
+                <a16:creationId xmlns:a16="http://schemas.microsoft.com/office/drawing/2014/main" id="{5F194D1A-7042-EE1E-02A6-D6004849EA36}"/>
+              </a:ext>
+            </a:extLst>
+          </p:cNvPr>
+          <p:cNvSpPr txBox="1"/>
+          <p:nvPr/>
+        </p:nvSpPr>
+        <p:spPr>
+          <a:xfrm>
+            <a:off x="2571750" y="5159521"/>
+            <a:ext cx="2731294" cy="646331"/>
+          </a:xfrm>
+          <a:prstGeom prst="rect">
+            <a:avLst/>
+          </a:prstGeom>
+          <a:noFill/>
+        </p:spPr>
+        <p:txBody>
+          <a:bodyPr wrap="square" rtlCol="0">
+            <a:spAutoFit/>
+          </a:bodyPr>
+          <a:lstStyle/>
+          <a:p>
+            <a:r>
+              <a:rPr lang="en-US" altLang="zh-CN" sz="1200" dirty="0"/>
+              <a:t>4. </a:t>
+            </a:r>
+            <a:r>
+              <a:rPr lang="en-US" altLang="zh-CN" sz="1200" dirty="0" err="1"/>
+              <a:t>mataclass</a:t>
+            </a:r>
+            <a:r>
+              <a:rPr lang="en-US" altLang="zh-CN" sz="1200" dirty="0"/>
+              <a:t> is the cornerstone of AME; see its separate GitHub repository for details.</a:t>
+            </a:r>
+            <a:endParaRPr lang="zh-CN" altLang="en-US" sz="1200" dirty="0"/>
+          </a:p>
+        </p:txBody>
+      </p:sp>
+      <p:sp>
+        <p:nvSpPr>
+          <p:cNvPr id="76" name="矩形 75">
+            <a:extLst>
+              <a:ext uri="{FF2B5EF4-FFF2-40B4-BE49-F238E27FC236}">
+                <a16:creationId xmlns:a16="http://schemas.microsoft.com/office/drawing/2014/main" id="{01576ACD-394C-E837-AB44-FDD2ED9C85D9}"/>
+              </a:ext>
+            </a:extLst>
+          </p:cNvPr>
+          <p:cNvSpPr/>
+          <p:nvPr/>
+        </p:nvSpPr>
+        <p:spPr>
+          <a:xfrm>
+            <a:off x="3014845" y="5897094"/>
+            <a:ext cx="3058933" cy="850559"/>
+          </a:xfrm>
+          <a:prstGeom prst="rect">
+            <a:avLst/>
+          </a:prstGeom>
+        </p:spPr>
+        <p:style>
+          <a:lnRef idx="2">
+            <a:schemeClr val="accent4"/>
+          </a:lnRef>
+          <a:fillRef idx="1">
+            <a:schemeClr val="lt1"/>
+          </a:fillRef>
+          <a:effectRef idx="0">
+            <a:schemeClr val="accent4"/>
+          </a:effectRef>
+          <a:fontRef idx="minor">
+            <a:schemeClr val="dk1"/>
+          </a:fontRef>
+        </p:style>
+        <p:txBody>
+          <a:bodyPr rtlCol="0" anchor="ctr"/>
+          <a:lstStyle/>
+          <a:p>
+            <a:pPr algn="ctr"/>
+            <a:endParaRPr lang="zh-CN" altLang="en-US" dirty="0"/>
+          </a:p>
+        </p:txBody>
+      </p:sp>
+      <p:sp>
+        <p:nvSpPr>
+          <p:cNvPr id="77" name="文本框 76">
+            <a:extLst>
+              <a:ext uri="{FF2B5EF4-FFF2-40B4-BE49-F238E27FC236}">
+                <a16:creationId xmlns:a16="http://schemas.microsoft.com/office/drawing/2014/main" id="{BE416108-03E4-858E-04F0-4F7923865D5C}"/>
+              </a:ext>
+            </a:extLst>
+          </p:cNvPr>
+          <p:cNvSpPr txBox="1"/>
+          <p:nvPr/>
+        </p:nvSpPr>
+        <p:spPr>
+          <a:xfrm>
+            <a:off x="11112501" y="1172152"/>
+            <a:ext cx="171061" cy="276999"/>
+          </a:xfrm>
+          <a:prstGeom prst="rect">
+            <a:avLst/>
+          </a:prstGeom>
+          <a:noFill/>
+        </p:spPr>
+        <p:txBody>
+          <a:bodyPr wrap="square" rtlCol="0">
+            <a:spAutoFit/>
+          </a:bodyPr>
+          <a:lstStyle/>
+          <a:p>
+            <a:r>
+              <a:rPr lang="en-US" altLang="zh-CN" sz="1200" dirty="0"/>
+              <a:t>7</a:t>
+            </a:r>
+            <a:endParaRPr lang="zh-CN" altLang="en-US" sz="1200" dirty="0"/>
+          </a:p>
+        </p:txBody>
+      </p:sp>
+      <p:sp>
+        <p:nvSpPr>
+          <p:cNvPr id="78" name="矩形 77">
+            <a:extLst>
+              <a:ext uri="{FF2B5EF4-FFF2-40B4-BE49-F238E27FC236}">
+                <a16:creationId xmlns:a16="http://schemas.microsoft.com/office/drawing/2014/main" id="{BC45CBCE-4304-4AD3-A10E-409620158124}"/>
+              </a:ext>
+            </a:extLst>
+          </p:cNvPr>
+          <p:cNvSpPr/>
+          <p:nvPr/>
+        </p:nvSpPr>
+        <p:spPr>
+          <a:xfrm>
+            <a:off x="5869021" y="1027879"/>
+            <a:ext cx="2436282" cy="704636"/>
+          </a:xfrm>
+          <a:prstGeom prst="rect">
+            <a:avLst/>
+          </a:prstGeom>
+        </p:spPr>
+        <p:style>
+          <a:lnRef idx="2">
+            <a:schemeClr val="accent1">
+              <a:shade val="15000"/>
+            </a:schemeClr>
+          </a:lnRef>
+          <a:fillRef idx="1">
+            <a:schemeClr val="accent1"/>
+          </a:fillRef>
+          <a:effectRef idx="0">
+            <a:schemeClr val="accent1"/>
+          </a:effectRef>
+          <a:fontRef idx="minor">
+            <a:schemeClr val="lt1"/>
+          </a:fontRef>
+        </p:style>
+        <p:txBody>
+          <a:bodyPr rtlCol="0" anchor="ctr"/>
+          <a:lstStyle/>
+          <a:p>
+            <a:pPr algn="ctr"/>
+            <a:endParaRPr lang="zh-CN" altLang="en-US"/>
+          </a:p>
+        </p:txBody>
+      </p:sp>
+      <p:sp>
+        <p:nvSpPr>
+          <p:cNvPr id="79" name="箭头: 下 78">
+            <a:extLst>
+              <a:ext uri="{FF2B5EF4-FFF2-40B4-BE49-F238E27FC236}">
+                <a16:creationId xmlns:a16="http://schemas.microsoft.com/office/drawing/2014/main" id="{08B21885-2D1C-21B2-603A-E36CC153285A}"/>
+              </a:ext>
+            </a:extLst>
+          </p:cNvPr>
+          <p:cNvSpPr/>
+          <p:nvPr/>
+        </p:nvSpPr>
+        <p:spPr>
+          <a:xfrm rot="10800000">
+            <a:off x="6702087" y="1767561"/>
+            <a:ext cx="640098" cy="160383"/>
+          </a:xfrm>
+          <a:prstGeom prst="downArrow">
+            <a:avLst/>
+          </a:prstGeom>
+        </p:spPr>
+        <p:style>
+          <a:lnRef idx="2">
+            <a:schemeClr val="accent6">
+              <a:shade val="15000"/>
+            </a:schemeClr>
+          </a:lnRef>
+          <a:fillRef idx="1">
+            <a:schemeClr val="accent6"/>
+          </a:fillRef>
+          <a:effectRef idx="0">
+            <a:schemeClr val="accent6"/>
+          </a:effectRef>
+          <a:fontRef idx="minor">
+            <a:schemeClr val="lt1"/>
+          </a:fontRef>
+        </p:style>
+        <p:txBody>
+          <a:bodyPr rtlCol="0" anchor="ctr"/>
+          <a:lstStyle/>
+          <a:p>
+            <a:pPr algn="ctr"/>
+            <a:endParaRPr lang="zh-CN" altLang="en-US"/>
+          </a:p>
+        </p:txBody>
+      </p:sp>
+      <p:sp>
+        <p:nvSpPr>
+          <p:cNvPr id="80" name="矩形 79">
+            <a:extLst>
+              <a:ext uri="{FF2B5EF4-FFF2-40B4-BE49-F238E27FC236}">
+                <a16:creationId xmlns:a16="http://schemas.microsoft.com/office/drawing/2014/main" id="{6DF9F9BF-F8BA-3FE0-AB81-87022E50B70D}"/>
+              </a:ext>
+            </a:extLst>
+          </p:cNvPr>
+          <p:cNvSpPr/>
+          <p:nvPr/>
+        </p:nvSpPr>
+        <p:spPr>
+          <a:xfrm>
+            <a:off x="6242973" y="5811194"/>
+            <a:ext cx="2692369" cy="977608"/>
+          </a:xfrm>
+          <a:prstGeom prst="rect">
+            <a:avLst/>
+          </a:prstGeom>
+        </p:spPr>
+        <p:style>
+          <a:lnRef idx="2">
+            <a:schemeClr val="accent4"/>
+          </a:lnRef>
+          <a:fillRef idx="1">
+            <a:schemeClr val="lt1"/>
+          </a:fillRef>
+          <a:effectRef idx="0">
+            <a:schemeClr val="accent4"/>
+          </a:effectRef>
+          <a:fontRef idx="minor">
+            <a:schemeClr val="dk1"/>
+          </a:fontRef>
+        </p:style>
+        <p:txBody>
+          <a:bodyPr rtlCol="0" anchor="ctr"/>
+          <a:lstStyle/>
+          <a:p>
+            <a:pPr algn="ctr"/>
+            <a:endParaRPr lang="zh-CN" altLang="en-US"/>
+          </a:p>
+        </p:txBody>
+      </p:sp>
+      <p:sp>
+        <p:nvSpPr>
+          <p:cNvPr id="81" name="矩形 80">
+            <a:extLst>
+              <a:ext uri="{FF2B5EF4-FFF2-40B4-BE49-F238E27FC236}">
+                <a16:creationId xmlns:a16="http://schemas.microsoft.com/office/drawing/2014/main" id="{01576ACD-394C-E837-AB44-FDD2ED9C85D9}"/>
+              </a:ext>
+            </a:extLst>
+          </p:cNvPr>
+          <p:cNvSpPr/>
+          <p:nvPr/>
+        </p:nvSpPr>
+        <p:spPr>
+          <a:xfrm>
+            <a:off x="9040396" y="6469282"/>
+            <a:ext cx="3080208" cy="332590"/>
+          </a:xfrm>
+          <a:prstGeom prst="rect">
+            <a:avLst/>
+          </a:prstGeom>
+        </p:spPr>
+        <p:style>
+          <a:lnRef idx="2">
+            <a:schemeClr val="accent4"/>
+          </a:lnRef>
+          <a:fillRef idx="1">
+            <a:schemeClr val="lt1"/>
+          </a:fillRef>
+          <a:effectRef idx="0">
+            <a:schemeClr val="accent4"/>
+          </a:effectRef>
+          <a:fontRef idx="minor">
+            <a:schemeClr val="dk1"/>
+          </a:fontRef>
+        </p:style>
+        <p:txBody>
+          <a:bodyPr rtlCol="0" anchor="ctr"/>
+          <a:lstStyle>
+            <a:defPPr>
+              <a:defRPr lang="zh-CN"/>
+            </a:defPPr>
+            <a:lvl1pPr marL="0" algn="l" defTabSz="914400" rtl="0" eaLnBrk="1" latinLnBrk="0" hangingPunct="1">
+              <a:defRPr sz="1800" kern="1200">
+                <a:solidFill>
+                  <a:schemeClr val="dk1"/>
+                </a:solidFill>
+                <a:latin typeface="+mn-lt"/>
+                <a:ea typeface="+mn-ea"/>
+                <a:cs typeface="+mn-cs"/>
+              </a:defRPr>
+            </a:lvl1pPr>
+            <a:lvl2pPr marL="457200" algn="l" defTabSz="914400" rtl="0" eaLnBrk="1" latinLnBrk="0" hangingPunct="1">
+              <a:defRPr sz="1800" kern="1200">
+                <a:solidFill>
+                  <a:schemeClr val="dk1"/>
+                </a:solidFill>
+                <a:latin typeface="+mn-lt"/>
+                <a:ea typeface="+mn-ea"/>
+                <a:cs typeface="+mn-cs"/>
+              </a:defRPr>
+            </a:lvl2pPr>
+            <a:lvl3pPr marL="914400" algn="l" defTabSz="914400" rtl="0" eaLnBrk="1" latinLnBrk="0" hangingPunct="1">
+              <a:defRPr sz="1800" kern="1200">
+                <a:solidFill>
+                  <a:schemeClr val="dk1"/>
+                </a:solidFill>
+                <a:latin typeface="+mn-lt"/>
+                <a:ea typeface="+mn-ea"/>
+                <a:cs typeface="+mn-cs"/>
+              </a:defRPr>
+            </a:lvl3pPr>
+            <a:lvl4pPr marL="1371600" algn="l" defTabSz="914400" rtl="0" eaLnBrk="1" latinLnBrk="0" hangingPunct="1">
+              <a:defRPr sz="1800" kern="1200">
+                <a:solidFill>
+                  <a:schemeClr val="dk1"/>
+                </a:solidFill>
+                <a:latin typeface="+mn-lt"/>
+                <a:ea typeface="+mn-ea"/>
+                <a:cs typeface="+mn-cs"/>
+              </a:defRPr>
+            </a:lvl4pPr>
+            <a:lvl5pPr marL="1828800" algn="l" defTabSz="914400" rtl="0" eaLnBrk="1" latinLnBrk="0" hangingPunct="1">
+              <a:defRPr sz="1800" kern="1200">
+                <a:solidFill>
+                  <a:schemeClr val="dk1"/>
+                </a:solidFill>
+                <a:latin typeface="+mn-lt"/>
+                <a:ea typeface="+mn-ea"/>
+                <a:cs typeface="+mn-cs"/>
+              </a:defRPr>
+            </a:lvl5pPr>
+            <a:lvl6pPr marL="2286000" algn="l" defTabSz="914400" rtl="0" eaLnBrk="1" latinLnBrk="0" hangingPunct="1">
+              <a:defRPr sz="1800" kern="1200">
+                <a:solidFill>
+                  <a:schemeClr val="dk1"/>
+                </a:solidFill>
+                <a:latin typeface="+mn-lt"/>
+                <a:ea typeface="+mn-ea"/>
+                <a:cs typeface="+mn-cs"/>
+              </a:defRPr>
+            </a:lvl6pPr>
+            <a:lvl7pPr marL="2743200" algn="l" defTabSz="914400" rtl="0" eaLnBrk="1" latinLnBrk="0" hangingPunct="1">
+              <a:defRPr sz="1800" kern="1200">
+                <a:solidFill>
+                  <a:schemeClr val="dk1"/>
+                </a:solidFill>
+                <a:latin typeface="+mn-lt"/>
+                <a:ea typeface="+mn-ea"/>
+                <a:cs typeface="+mn-cs"/>
+              </a:defRPr>
+            </a:lvl7pPr>
+            <a:lvl8pPr marL="3200400" algn="l" defTabSz="914400" rtl="0" eaLnBrk="1" latinLnBrk="0" hangingPunct="1">
+              <a:defRPr sz="1800" kern="1200">
+                <a:solidFill>
+                  <a:schemeClr val="dk1"/>
+                </a:solidFill>
+                <a:latin typeface="+mn-lt"/>
+                <a:ea typeface="+mn-ea"/>
+                <a:cs typeface="+mn-cs"/>
+              </a:defRPr>
+            </a:lvl8pPr>
+            <a:lvl9pPr marL="3657600" algn="l" defTabSz="914400" rtl="0" eaLnBrk="1" latinLnBrk="0" hangingPunct="1">
+              <a:defRPr sz="1800" kern="1200">
+                <a:solidFill>
+                  <a:schemeClr val="dk1"/>
+                </a:solidFill>
+                <a:latin typeface="+mn-lt"/>
+                <a:ea typeface="+mn-ea"/>
+                <a:cs typeface="+mn-cs"/>
+              </a:defRPr>
+            </a:lvl9pPr>
+          </a:lstStyle>
+          <a:p>
+            <a:pPr algn="ctr"/>
+            <a:endParaRPr lang="zh-CN" altLang="en-US"/>
+          </a:p>
+        </p:txBody>
+      </p:sp>
+      <p:sp>
+        <p:nvSpPr>
+          <p:cNvPr id="83" name="文本框 82">
+            <a:extLst>
+              <a:ext uri="{FF2B5EF4-FFF2-40B4-BE49-F238E27FC236}">
+                <a16:creationId xmlns:a16="http://schemas.microsoft.com/office/drawing/2014/main" id="{3D2D27DB-7E96-825E-563C-1541A22C23BA}"/>
+              </a:ext>
+            </a:extLst>
+          </p:cNvPr>
+          <p:cNvSpPr txBox="1"/>
+          <p:nvPr/>
+        </p:nvSpPr>
+        <p:spPr>
+          <a:xfrm>
+            <a:off x="6170218" y="1206981"/>
+            <a:ext cx="2265916" cy="369332"/>
+          </a:xfrm>
+          <a:prstGeom prst="rect">
+            <a:avLst/>
+          </a:prstGeom>
+          <a:noFill/>
+        </p:spPr>
+        <p:txBody>
+          <a:bodyPr wrap="square" rtlCol="0">
+            <a:spAutoFit/>
+          </a:bodyPr>
+          <a:lstStyle/>
+          <a:p>
+            <a:r>
+              <a:rPr lang="en-US" altLang="zh-CN" dirty="0"/>
+              <a:t>Start</a:t>
+            </a:r>
+            <a:r>
+              <a:rPr lang="zh-CN" altLang="en-US" dirty="0"/>
+              <a:t> </a:t>
+            </a:r>
+            <a:r>
+              <a:rPr lang="en-US" altLang="zh-CN" dirty="0"/>
+              <a:t>to</a:t>
+            </a:r>
+            <a:r>
+              <a:rPr lang="zh-CN" altLang="en-US" dirty="0"/>
+              <a:t> </a:t>
+            </a:r>
+            <a:r>
+              <a:rPr lang="en-US" altLang="zh-CN" dirty="0"/>
+              <a:t>BUILD</a:t>
+            </a:r>
+            <a:endParaRPr lang="zh-CN" altLang="en-US" dirty="0"/>
+          </a:p>
+        </p:txBody>
+      </p:sp>
+      <p:sp>
+        <p:nvSpPr>
+          <p:cNvPr id="84" name="椭圆 83">
+            <a:extLst>
+              <a:ext uri="{FF2B5EF4-FFF2-40B4-BE49-F238E27FC236}">
+                <a16:creationId xmlns:a16="http://schemas.microsoft.com/office/drawing/2014/main" id="{EE675F6B-D8E9-A1D8-9456-A4790EFF5AB1}"/>
+              </a:ext>
+            </a:extLst>
+          </p:cNvPr>
+          <p:cNvSpPr/>
+          <p:nvPr/>
+        </p:nvSpPr>
+        <p:spPr>
+          <a:xfrm>
+            <a:off x="8040197" y="1074265"/>
+            <a:ext cx="165100" cy="177800"/>
+          </a:xfrm>
+          <a:prstGeom prst="ellipse">
+            <a:avLst/>
+          </a:prstGeom>
+        </p:spPr>
+        <p:style>
+          <a:lnRef idx="2">
+            <a:schemeClr val="accent2">
+              <a:shade val="15000"/>
+            </a:schemeClr>
+          </a:lnRef>
+          <a:fillRef idx="1">
+            <a:schemeClr val="accent2"/>
+          </a:fillRef>
+          <a:effectRef idx="0">
+            <a:schemeClr val="accent2"/>
+          </a:effectRef>
+          <a:fontRef idx="minor">
+            <a:schemeClr val="lt1"/>
+          </a:fontRef>
+        </p:style>
+        <p:txBody>
+          <a:bodyPr rtlCol="0" anchor="ctr"/>
+          <a:lstStyle/>
+          <a:p>
+            <a:pPr algn="ctr"/>
+            <a:endParaRPr lang="zh-CN" altLang="en-US"/>
+          </a:p>
+        </p:txBody>
+      </p:sp>
+      <p:sp>
+        <p:nvSpPr>
+          <p:cNvPr id="85" name="文本框 84">
+            <a:extLst>
+              <a:ext uri="{FF2B5EF4-FFF2-40B4-BE49-F238E27FC236}">
+                <a16:creationId xmlns:a16="http://schemas.microsoft.com/office/drawing/2014/main" id="{E6CC673A-296F-5205-F152-5407116CFFE8}"/>
+              </a:ext>
+            </a:extLst>
+          </p:cNvPr>
+          <p:cNvSpPr txBox="1"/>
+          <p:nvPr/>
+        </p:nvSpPr>
+        <p:spPr>
+          <a:xfrm>
+            <a:off x="8043564" y="1024206"/>
+            <a:ext cx="94908" cy="276999"/>
+          </a:xfrm>
+          <a:prstGeom prst="rect">
+            <a:avLst/>
+          </a:prstGeom>
+          <a:noFill/>
+        </p:spPr>
+        <p:txBody>
+          <a:bodyPr wrap="square" rtlCol="0">
+            <a:spAutoFit/>
+          </a:bodyPr>
+          <a:lstStyle/>
+          <a:p>
+            <a:r>
+              <a:rPr lang="en-US" altLang="zh-CN" sz="1200" dirty="0"/>
+              <a:t>6</a:t>
+            </a:r>
+            <a:endParaRPr lang="zh-CN" altLang="en-US" sz="1200" dirty="0"/>
+          </a:p>
+        </p:txBody>
+      </p:sp>
+      <p:sp>
+        <p:nvSpPr>
+          <p:cNvPr id="18" name="文本框 17">
+            <a:extLst>
+              <a:ext uri="{FF2B5EF4-FFF2-40B4-BE49-F238E27FC236}">
+                <a16:creationId xmlns:a16="http://schemas.microsoft.com/office/drawing/2014/main" id="{01BE2EE4-9370-3384-0C5C-F5475CF6EB39}"/>
+              </a:ext>
+            </a:extLst>
+          </p:cNvPr>
+          <p:cNvSpPr txBox="1"/>
+          <p:nvPr/>
+        </p:nvSpPr>
+        <p:spPr>
+          <a:xfrm>
+            <a:off x="6289903" y="5811194"/>
+            <a:ext cx="2657036" cy="923330"/>
+          </a:xfrm>
+          <a:prstGeom prst="rect">
+            <a:avLst/>
+          </a:prstGeom>
+          <a:noFill/>
+        </p:spPr>
+        <p:txBody>
+          <a:bodyPr wrap="square" rtlCol="0">
+            <a:spAutoFit/>
+          </a:bodyPr>
+          <a:lstStyle/>
+          <a:p>
+            <a:r>
+              <a:rPr lang="en-US" altLang="zh-CN" dirty="0">
+                <a:highlight>
+                  <a:srgbClr val="00FF00"/>
+                </a:highlight>
+              </a:rPr>
+              <a:t>7. It's an interactive world,(folders) are not single files.</a:t>
+            </a:r>
+            <a:endParaRPr lang="zh-CN" altLang="en-US" dirty="0">
+              <a:highlight>
+                <a:srgbClr val="00FF00"/>
+              </a:highlight>
+            </a:endParaRPr>
+          </a:p>
+        </p:txBody>
+      </p:sp>
+      <p:sp>
+        <p:nvSpPr>
+          <p:cNvPr id="19" name="文本框 18">
+            <a:extLst>
+              <a:ext uri="{FF2B5EF4-FFF2-40B4-BE49-F238E27FC236}">
+                <a16:creationId xmlns:a16="http://schemas.microsoft.com/office/drawing/2014/main" id="{6B16AB4C-45CF-6116-4728-3E9F3F381D9D}"/>
+              </a:ext>
+            </a:extLst>
+          </p:cNvPr>
+          <p:cNvSpPr txBox="1"/>
+          <p:nvPr/>
+        </p:nvSpPr>
+        <p:spPr>
+          <a:xfrm>
+            <a:off x="9047918" y="6496445"/>
+            <a:ext cx="3218962" cy="261610"/>
+          </a:xfrm>
+          <a:prstGeom prst="rect">
+            <a:avLst/>
+          </a:prstGeom>
+          <a:noFill/>
+        </p:spPr>
+        <p:txBody>
+          <a:bodyPr wrap="square" rtlCol="0">
+            <a:spAutoFit/>
+          </a:bodyPr>
+          <a:lstStyle/>
+          <a:p>
+            <a:r>
+              <a:rPr lang="en-US" altLang="zh-CN" sz="1100" dirty="0"/>
+              <a:t>6. It is also the main program of AME ADMIN</a:t>
+            </a:r>
+            <a:endParaRPr lang="zh-CN" altLang="en-US" sz="1100" dirty="0"/>
+          </a:p>
+        </p:txBody>
+      </p:sp>
+      <p:sp>
+        <p:nvSpPr>
+          <p:cNvPr id="58" name="文本框 57">
+            <a:extLst>
+              <a:ext uri="{FF2B5EF4-FFF2-40B4-BE49-F238E27FC236}">
+                <a16:creationId xmlns:a16="http://schemas.microsoft.com/office/drawing/2014/main" id="{E7EEC670-B147-F19E-34A8-EE9B1F457066}"/>
+              </a:ext>
+            </a:extLst>
+          </p:cNvPr>
+          <p:cNvSpPr txBox="1"/>
+          <p:nvPr/>
+        </p:nvSpPr>
+        <p:spPr>
+          <a:xfrm>
+            <a:off x="2996061" y="5874222"/>
+            <a:ext cx="3026273" cy="738664"/>
+          </a:xfrm>
+          <a:prstGeom prst="rect">
+            <a:avLst/>
+          </a:prstGeom>
+          <a:noFill/>
+        </p:spPr>
+        <p:txBody>
+          <a:bodyPr wrap="square" rtlCol="0">
+            <a:spAutoFit/>
+          </a:bodyPr>
+          <a:lstStyle/>
+          <a:p>
+            <a:r>
+              <a:rPr lang="en-US" altLang="zh-CN" sz="1400" dirty="0"/>
+              <a:t>5. Here you set the world parameters, and AME will automatically generate a JSON file.</a:t>
+            </a:r>
+            <a:endParaRPr lang="zh-CN" altLang="en-US" sz="1400" dirty="0"/>
+          </a:p>
+        </p:txBody>
+      </p:sp>
+      <p:sp>
+        <p:nvSpPr>
+          <p:cNvPr id="70" name="箭头: 右 69">
+            <a:extLst>
+              <a:ext uri="{FF2B5EF4-FFF2-40B4-BE49-F238E27FC236}">
+                <a16:creationId xmlns:a16="http://schemas.microsoft.com/office/drawing/2014/main" id="{7AB8C733-12FE-5B31-6CC9-F008E6E8D0ED}"/>
+              </a:ext>
+            </a:extLst>
+          </p:cNvPr>
+          <p:cNvSpPr/>
+          <p:nvPr/>
+        </p:nvSpPr>
+        <p:spPr>
+          <a:xfrm>
+            <a:off x="11213820" y="1479507"/>
+            <a:ext cx="588895" cy="94334"/>
+          </a:xfrm>
+          <a:prstGeom prst="rightArrow">
+            <a:avLst/>
+          </a:prstGeom>
+        </p:spPr>
+        <p:style>
+          <a:lnRef idx="2">
+            <a:schemeClr val="accent1">
+              <a:shade val="15000"/>
+            </a:schemeClr>
+          </a:lnRef>
+          <a:fillRef idx="1">
+            <a:schemeClr val="accent1"/>
+          </a:fillRef>
+          <a:effectRef idx="0">
+            <a:schemeClr val="accent1"/>
+          </a:effectRef>
+          <a:fontRef idx="minor">
+            <a:schemeClr val="lt1"/>
+          </a:fontRef>
+        </p:style>
+        <p:txBody>
+          <a:bodyPr rtlCol="0" anchor="ctr"/>
+          <a:lstStyle/>
+          <a:p>
+            <a:pPr algn="ctr"/>
+            <a:endParaRPr lang="zh-CN" altLang="en-US"/>
+          </a:p>
+        </p:txBody>
+      </p:sp>
+      <p:sp>
+        <p:nvSpPr>
+          <p:cNvPr id="75" name="文本框 74">
+            <a:extLst>
+              <a:ext uri="{FF2B5EF4-FFF2-40B4-BE49-F238E27FC236}">
+                <a16:creationId xmlns:a16="http://schemas.microsoft.com/office/drawing/2014/main" id="{1FC809DE-A36D-60B3-61FF-F5B171ACFA67}"/>
+              </a:ext>
+            </a:extLst>
+          </p:cNvPr>
+          <p:cNvSpPr txBox="1"/>
+          <p:nvPr/>
+        </p:nvSpPr>
+        <p:spPr>
+          <a:xfrm>
+            <a:off x="11277600" y="-19826"/>
+            <a:ext cx="1303269" cy="523220"/>
+          </a:xfrm>
+          <a:prstGeom prst="rect">
+            <a:avLst/>
+          </a:prstGeom>
+          <a:noFill/>
+        </p:spPr>
+        <p:txBody>
+          <a:bodyPr wrap="square" rtlCol="0">
+            <a:spAutoFit/>
+          </a:bodyPr>
+          <a:lstStyle/>
+          <a:p>
+            <a:r>
+              <a:rPr lang="en-US" altLang="zh-CN" sz="1400" dirty="0">
+                <a:latin typeface="Noto Sans SC Black" panose="020B0200000000000000" pitchFamily="34" charset="-122"/>
+                <a:ea typeface="Noto Sans SC Black" panose="020B0200000000000000" pitchFamily="34" charset="-122"/>
+              </a:rPr>
+              <a:t>Finished product</a:t>
+            </a:r>
+            <a:endParaRPr lang="zh-CN" altLang="en-US" sz="1400" dirty="0">
+              <a:latin typeface="Noto Sans SC Black" panose="020B0200000000000000" pitchFamily="34" charset="-122"/>
+              <a:ea typeface="Noto Sans SC Black" panose="020B0200000000000000" pitchFamily="34" charset="-122"/>
+            </a:endParaRPr>
+          </a:p>
+        </p:txBody>
+      </p:sp>
+      <p:sp>
+        <p:nvSpPr>
+          <p:cNvPr id="82" name="箭头: 下 81">
+            <a:extLst>
+              <a:ext uri="{FF2B5EF4-FFF2-40B4-BE49-F238E27FC236}">
+                <a16:creationId xmlns:a16="http://schemas.microsoft.com/office/drawing/2014/main" id="{4DA12131-07E0-0743-2D0F-2CE81EA318A2}"/>
+              </a:ext>
+            </a:extLst>
+          </p:cNvPr>
+          <p:cNvSpPr/>
+          <p:nvPr/>
+        </p:nvSpPr>
+        <p:spPr>
+          <a:xfrm rot="10800000">
+            <a:off x="11802715" y="506895"/>
+            <a:ext cx="121108" cy="1061513"/>
+          </a:xfrm>
+          <a:prstGeom prst="downArrow">
+            <a:avLst/>
+          </a:prstGeom>
+        </p:spPr>
+        <p:style>
+          <a:lnRef idx="2">
+            <a:schemeClr val="accent1">
+              <a:shade val="15000"/>
+            </a:schemeClr>
+          </a:lnRef>
+          <a:fillRef idx="1">
+            <a:schemeClr val="accent1"/>
+          </a:fillRef>
+          <a:effectRef idx="0">
+            <a:schemeClr val="accent1"/>
+          </a:effectRef>
+          <a:fontRef idx="minor">
+            <a:schemeClr val="lt1"/>
+          </a:fontRef>
+        </p:style>
+        <p:txBody>
+          <a:bodyPr rtlCol="0" anchor="ctr"/>
+          <a:lstStyle/>
+          <a:p>
+            <a:pPr algn="ctr"/>
+            <a:endParaRPr lang="zh-CN" altLang="en-US"/>
+          </a:p>
+        </p:txBody>
+      </p:sp>
+    </p:spTree>
+    <p:extLst>
+      <p:ext uri="{BB962C8B-B14F-4D97-AF65-F5344CB8AC3E}">
+        <p14:creationId xmlns:p14="http://schemas.microsoft.com/office/powerpoint/2010/main" val="3317911221"/>
+      </p:ext>
+    </p:extLst>
+  </p:cSld>
+  <p:clrMapOvr>
+    <a:masterClrMapping/>
+  </p:clrMapOvr>
+</p:sld>
+</file>
+
+<file path=ppt/slides/slide4.xml><?xml version="1.0" encoding="utf-8"?>
+<p:sld xmlns:a="http://schemas.openxmlformats.org/drawingml/2006/main" xmlns:r="http://schemas.openxmlformats.org/officeDocument/2006/relationships" xmlns:p="http://schemas.openxmlformats.org/presentationml/2006/main">
+  <p:cSld>
+    <p:spTree>
+      <p:nvGrpSpPr>
+        <p:cNvPr id="1" name=""/>
+        <p:cNvGrpSpPr/>
+        <p:nvPr/>
+      </p:nvGrpSpPr>
+      <p:grpSpPr>
+        <a:xfrm>
+          <a:off x="0" y="0"/>
+          <a:ext cx="0" cy="0"/>
+          <a:chOff x="0" y="0"/>
+          <a:chExt cx="0" cy="0"/>
+        </a:xfrm>
+      </p:grpSpPr>
+      <p:sp>
+        <p:nvSpPr>
+          <p:cNvPr id="2" name="标题 1">
+            <a:extLst>
+              <a:ext uri="{FF2B5EF4-FFF2-40B4-BE49-F238E27FC236}">
+                <a16:creationId xmlns:a16="http://schemas.microsoft.com/office/drawing/2014/main" id="{6A57BF15-77F4-81A2-80C5-9FFF0EB9DB6C}"/>
+              </a:ext>
+            </a:extLst>
+          </p:cNvPr>
+          <p:cNvSpPr>
+            <a:spLocks noGrp="1"/>
+          </p:cNvSpPr>
+          <p:nvPr>
+            <p:ph type="title"/>
+          </p:nvPr>
+        </p:nvSpPr>
+        <p:spPr/>
+        <p:txBody>
+          <a:bodyPr/>
+          <a:lstStyle/>
+          <a:p>
+            <a:r>
+              <a:rPr lang="en-US" altLang="zh-CN" dirty="0">
+                <a:latin typeface="Noto Sans JP Black" panose="020B0200000000000000" pitchFamily="34" charset="-122"/>
+                <a:ea typeface="Noto Sans JP Black" panose="020B0200000000000000" pitchFamily="34" charset="-122"/>
+              </a:rPr>
+              <a:t>ABOUT US</a:t>
+            </a:r>
+            <a:endParaRPr lang="zh-CN" altLang="en-US" dirty="0">
+              <a:latin typeface="Noto Sans JP Black" panose="020B0200000000000000" pitchFamily="34" charset="-122"/>
+              <a:ea typeface="Noto Sans JP Black" panose="020B0200000000000000" pitchFamily="34" charset="-122"/>
+            </a:endParaRPr>
+          </a:p>
+        </p:txBody>
+      </p:sp>
+      <p:sp>
+        <p:nvSpPr>
+          <p:cNvPr id="3" name="内容占位符 2">
+            <a:extLst>
+              <a:ext uri="{FF2B5EF4-FFF2-40B4-BE49-F238E27FC236}">
+                <a16:creationId xmlns:a16="http://schemas.microsoft.com/office/drawing/2014/main" id="{4C24DB54-D574-FD55-FE53-49E9081DB724}"/>
+              </a:ext>
+            </a:extLst>
+          </p:cNvPr>
+          <p:cNvSpPr>
+            <a:spLocks noGrp="1"/>
+          </p:cNvSpPr>
+          <p:nvPr>
+            <p:ph idx="1"/>
+          </p:nvPr>
+        </p:nvSpPr>
+        <p:spPr/>
+        <p:txBody>
+          <a:bodyPr/>
+          <a:lstStyle/>
+          <a:p>
+            <a:endParaRPr lang="zh-CN" altLang="en-US" dirty="0"/>
+          </a:p>
+        </p:txBody>
+      </p:sp>
+      <p:sp>
+        <p:nvSpPr>
+          <p:cNvPr id="4" name="矩形 3">
+            <a:extLst>
+              <a:ext uri="{FF2B5EF4-FFF2-40B4-BE49-F238E27FC236}">
+                <a16:creationId xmlns:a16="http://schemas.microsoft.com/office/drawing/2014/main" id="{A48C643F-7FED-4F25-11FD-DAC5BBAF0AF5}"/>
+              </a:ext>
+            </a:extLst>
+          </p:cNvPr>
+          <p:cNvSpPr/>
+          <p:nvPr/>
+        </p:nvSpPr>
+        <p:spPr>
+          <a:xfrm>
+            <a:off x="725557" y="1426265"/>
+            <a:ext cx="3374334" cy="5066610"/>
+          </a:xfrm>
+          <a:prstGeom prst="rect">
+            <a:avLst/>
+          </a:prstGeom>
+        </p:spPr>
+        <p:style>
+          <a:lnRef idx="2">
+            <a:schemeClr val="accent4"/>
+          </a:lnRef>
+          <a:fillRef idx="1">
+            <a:schemeClr val="lt1"/>
+          </a:fillRef>
+          <a:effectRef idx="0">
+            <a:schemeClr val="accent4"/>
+          </a:effectRef>
+          <a:fontRef idx="minor">
+            <a:schemeClr val="dk1"/>
+          </a:fontRef>
+        </p:style>
+        <p:txBody>
+          <a:bodyPr rtlCol="0" anchor="ctr"/>
+          <a:lstStyle/>
+          <a:p>
+            <a:pPr algn="ctr"/>
+            <a:endParaRPr lang="zh-CN" altLang="en-US"/>
+          </a:p>
+        </p:txBody>
+      </p:sp>
+      <p:sp>
+        <p:nvSpPr>
+          <p:cNvPr id="5" name="矩形 4">
+            <a:extLst>
+              <a:ext uri="{FF2B5EF4-FFF2-40B4-BE49-F238E27FC236}">
+                <a16:creationId xmlns:a16="http://schemas.microsoft.com/office/drawing/2014/main" id="{82EF4A6D-6FFF-68CC-E8B6-65E830DB7F34}"/>
+              </a:ext>
+            </a:extLst>
+          </p:cNvPr>
+          <p:cNvSpPr/>
+          <p:nvPr/>
+        </p:nvSpPr>
+        <p:spPr>
+          <a:xfrm>
+            <a:off x="4139648" y="1426265"/>
+            <a:ext cx="3374334" cy="5066610"/>
+          </a:xfrm>
+          <a:prstGeom prst="rect">
+            <a:avLst/>
+          </a:prstGeom>
+        </p:spPr>
+        <p:style>
+          <a:lnRef idx="2">
+            <a:schemeClr val="accent4"/>
+          </a:lnRef>
+          <a:fillRef idx="1">
+            <a:schemeClr val="lt1"/>
+          </a:fillRef>
+          <a:effectRef idx="0">
+            <a:schemeClr val="accent4"/>
+          </a:effectRef>
+          <a:fontRef idx="minor">
+            <a:schemeClr val="dk1"/>
+          </a:fontRef>
+        </p:style>
+        <p:txBody>
+          <a:bodyPr rtlCol="0" anchor="ctr"/>
+          <a:lstStyle/>
+          <a:p>
+            <a:pPr algn="ctr"/>
+            <a:endParaRPr lang="zh-CN" altLang="en-US"/>
+          </a:p>
+        </p:txBody>
+      </p:sp>
+      <p:sp>
+        <p:nvSpPr>
+          <p:cNvPr id="6" name="矩形 5">
+            <a:extLst>
+              <a:ext uri="{FF2B5EF4-FFF2-40B4-BE49-F238E27FC236}">
+                <a16:creationId xmlns:a16="http://schemas.microsoft.com/office/drawing/2014/main" id="{A48C643F-7FED-4F25-11FD-DAC5BBAF0AF5}"/>
+              </a:ext>
+            </a:extLst>
+          </p:cNvPr>
+          <p:cNvSpPr/>
+          <p:nvPr/>
+        </p:nvSpPr>
+        <p:spPr>
+          <a:xfrm>
+            <a:off x="7553739" y="1426265"/>
+            <a:ext cx="3374334" cy="5066610"/>
+          </a:xfrm>
+          <a:prstGeom prst="rect">
+            <a:avLst/>
+          </a:prstGeom>
+        </p:spPr>
+        <p:style>
+          <a:lnRef idx="2">
+            <a:schemeClr val="accent4"/>
+          </a:lnRef>
+          <a:fillRef idx="1">
+            <a:schemeClr val="lt1"/>
+          </a:fillRef>
+          <a:effectRef idx="0">
+            <a:schemeClr val="accent4"/>
+          </a:effectRef>
+          <a:fontRef idx="minor">
+            <a:schemeClr val="dk1"/>
+          </a:fontRef>
+        </p:style>
+        <p:txBody>
+          <a:bodyPr rtlCol="0" anchor="ctr"/>
+          <a:lstStyle>
+            <a:defPPr>
+              <a:defRPr lang="zh-CN"/>
+            </a:defPPr>
+            <a:lvl1pPr marL="0" algn="l" defTabSz="914400" rtl="0" eaLnBrk="1" latinLnBrk="0" hangingPunct="1">
+              <a:defRPr sz="1800" kern="1200">
+                <a:solidFill>
+                  <a:schemeClr val="dk1"/>
+                </a:solidFill>
+                <a:latin typeface="+mn-lt"/>
+                <a:ea typeface="+mn-ea"/>
+                <a:cs typeface="+mn-cs"/>
+              </a:defRPr>
+            </a:lvl1pPr>
+            <a:lvl2pPr marL="457200" algn="l" defTabSz="914400" rtl="0" eaLnBrk="1" latinLnBrk="0" hangingPunct="1">
+              <a:defRPr sz="1800" kern="1200">
+                <a:solidFill>
+                  <a:schemeClr val="dk1"/>
+                </a:solidFill>
+                <a:latin typeface="+mn-lt"/>
+                <a:ea typeface="+mn-ea"/>
+                <a:cs typeface="+mn-cs"/>
+              </a:defRPr>
+            </a:lvl2pPr>
+            <a:lvl3pPr marL="914400" algn="l" defTabSz="914400" rtl="0" eaLnBrk="1" latinLnBrk="0" hangingPunct="1">
+              <a:defRPr sz="1800" kern="1200">
+                <a:solidFill>
+                  <a:schemeClr val="dk1"/>
+                </a:solidFill>
+                <a:latin typeface="+mn-lt"/>
+                <a:ea typeface="+mn-ea"/>
+                <a:cs typeface="+mn-cs"/>
+              </a:defRPr>
+            </a:lvl3pPr>
+            <a:lvl4pPr marL="1371600" algn="l" defTabSz="914400" rtl="0" eaLnBrk="1" latinLnBrk="0" hangingPunct="1">
+              <a:defRPr sz="1800" kern="1200">
+                <a:solidFill>
+                  <a:schemeClr val="dk1"/>
+                </a:solidFill>
+                <a:latin typeface="+mn-lt"/>
+                <a:ea typeface="+mn-ea"/>
+                <a:cs typeface="+mn-cs"/>
+              </a:defRPr>
+            </a:lvl4pPr>
+            <a:lvl5pPr marL="1828800" algn="l" defTabSz="914400" rtl="0" eaLnBrk="1" latinLnBrk="0" hangingPunct="1">
+              <a:defRPr sz="1800" kern="1200">
+                <a:solidFill>
+                  <a:schemeClr val="dk1"/>
+                </a:solidFill>
+                <a:latin typeface="+mn-lt"/>
+                <a:ea typeface="+mn-ea"/>
+                <a:cs typeface="+mn-cs"/>
+              </a:defRPr>
+            </a:lvl5pPr>
+            <a:lvl6pPr marL="2286000" algn="l" defTabSz="914400" rtl="0" eaLnBrk="1" latinLnBrk="0" hangingPunct="1">
+              <a:defRPr sz="1800" kern="1200">
+                <a:solidFill>
+                  <a:schemeClr val="dk1"/>
+                </a:solidFill>
+                <a:latin typeface="+mn-lt"/>
+                <a:ea typeface="+mn-ea"/>
+                <a:cs typeface="+mn-cs"/>
+              </a:defRPr>
+            </a:lvl6pPr>
+            <a:lvl7pPr marL="2743200" algn="l" defTabSz="914400" rtl="0" eaLnBrk="1" latinLnBrk="0" hangingPunct="1">
+              <a:defRPr sz="1800" kern="1200">
+                <a:solidFill>
+                  <a:schemeClr val="dk1"/>
+                </a:solidFill>
+                <a:latin typeface="+mn-lt"/>
+                <a:ea typeface="+mn-ea"/>
+                <a:cs typeface="+mn-cs"/>
+              </a:defRPr>
+            </a:lvl7pPr>
+            <a:lvl8pPr marL="3200400" algn="l" defTabSz="914400" rtl="0" eaLnBrk="1" latinLnBrk="0" hangingPunct="1">
+              <a:defRPr sz="1800" kern="1200">
+                <a:solidFill>
+                  <a:schemeClr val="dk1"/>
+                </a:solidFill>
+                <a:latin typeface="+mn-lt"/>
+                <a:ea typeface="+mn-ea"/>
+                <a:cs typeface="+mn-cs"/>
+              </a:defRPr>
+            </a:lvl8pPr>
+            <a:lvl9pPr marL="3657600" algn="l" defTabSz="914400" rtl="0" eaLnBrk="1" latinLnBrk="0" hangingPunct="1">
+              <a:defRPr sz="1800" kern="1200">
+                <a:solidFill>
+                  <a:schemeClr val="dk1"/>
+                </a:solidFill>
+                <a:latin typeface="+mn-lt"/>
+                <a:ea typeface="+mn-ea"/>
+                <a:cs typeface="+mn-cs"/>
+              </a:defRPr>
+            </a:lvl9pPr>
+          </a:lstStyle>
+          <a:p>
+            <a:pPr algn="ctr"/>
+            <a:endParaRPr lang="zh-CN" altLang="en-US"/>
+          </a:p>
+        </p:txBody>
+      </p:sp>
+      <p:sp>
+        <p:nvSpPr>
+          <p:cNvPr id="7" name="文本框 6">
+            <a:extLst>
+              <a:ext uri="{FF2B5EF4-FFF2-40B4-BE49-F238E27FC236}">
+                <a16:creationId xmlns:a16="http://schemas.microsoft.com/office/drawing/2014/main" id="{F2C8D887-4AF6-623B-0CF0-444AA513A77A}"/>
+              </a:ext>
+            </a:extLst>
+          </p:cNvPr>
+          <p:cNvSpPr txBox="1"/>
+          <p:nvPr/>
+        </p:nvSpPr>
+        <p:spPr>
+          <a:xfrm>
+            <a:off x="838200" y="1470991"/>
+            <a:ext cx="3301448" cy="646331"/>
+          </a:xfrm>
+          <a:prstGeom prst="rect">
+            <a:avLst/>
+          </a:prstGeom>
+          <a:noFill/>
+        </p:spPr>
+        <p:txBody>
+          <a:bodyPr wrap="square" rtlCol="0">
+            <a:spAutoFit/>
+          </a:bodyPr>
+          <a:lstStyle/>
+          <a:p>
+            <a:r>
+              <a:rPr lang="en-US" altLang="zh-CN" dirty="0" err="1">
+                <a:latin typeface="Noto Sans SC Black" panose="020B0200000000000000" pitchFamily="34" charset="-122"/>
+                <a:ea typeface="Noto Sans SC Black" panose="020B0200000000000000" pitchFamily="34" charset="-122"/>
+              </a:rPr>
+              <a:t>Ceaserzhao</a:t>
+            </a:r>
+            <a:r>
+              <a:rPr lang="en-US" altLang="zh-CN" dirty="0">
+                <a:latin typeface="Noto Sans SC Black" panose="020B0200000000000000" pitchFamily="34" charset="-122"/>
+                <a:ea typeface="Noto Sans SC Black" panose="020B0200000000000000" pitchFamily="34" charset="-122"/>
+              </a:rPr>
+              <a:t>(</a:t>
+            </a:r>
+            <a:r>
+              <a:rPr lang="en-US" altLang="zh-CN" dirty="0" err="1">
+                <a:latin typeface="Noto Sans SC Black" panose="020B0200000000000000" pitchFamily="34" charset="-122"/>
+                <a:ea typeface="Noto Sans SC Black" panose="020B0200000000000000" pitchFamily="34" charset="-122"/>
+              </a:rPr>
+              <a:t>Wenzhang</a:t>
+            </a:r>
+            <a:r>
+              <a:rPr lang="en-US" altLang="zh-CN" dirty="0">
+                <a:latin typeface="Noto Sans SC Black" panose="020B0200000000000000" pitchFamily="34" charset="-122"/>
+                <a:ea typeface="Noto Sans SC Black" panose="020B0200000000000000" pitchFamily="34" charset="-122"/>
+              </a:rPr>
+              <a:t> Zhao)</a:t>
+            </a:r>
+            <a:endParaRPr lang="zh-CN" altLang="en-US" dirty="0">
+              <a:latin typeface="Noto Sans SC Black" panose="020B0200000000000000" pitchFamily="34" charset="-122"/>
+              <a:ea typeface="Noto Sans SC Black" panose="020B0200000000000000" pitchFamily="34" charset="-122"/>
+            </a:endParaRPr>
+          </a:p>
+        </p:txBody>
+      </p:sp>
+      <p:sp>
+        <p:nvSpPr>
+          <p:cNvPr id="8" name="文本框 7">
+            <a:extLst>
+              <a:ext uri="{FF2B5EF4-FFF2-40B4-BE49-F238E27FC236}">
+                <a16:creationId xmlns:a16="http://schemas.microsoft.com/office/drawing/2014/main" id="{732519DF-4396-EE40-F196-1B2B8184F6F4}"/>
+              </a:ext>
+            </a:extLst>
+          </p:cNvPr>
+          <p:cNvSpPr txBox="1"/>
+          <p:nvPr/>
+        </p:nvSpPr>
+        <p:spPr>
+          <a:xfrm>
+            <a:off x="7603435" y="1570383"/>
+            <a:ext cx="2375452" cy="369332"/>
+          </a:xfrm>
+          <a:prstGeom prst="rect">
+            <a:avLst/>
+          </a:prstGeom>
+          <a:noFill/>
+        </p:spPr>
+        <p:txBody>
+          <a:bodyPr wrap="square" rtlCol="0">
+            <a:spAutoFit/>
+          </a:bodyPr>
+          <a:lstStyle/>
+          <a:p>
+            <a:r>
+              <a:rPr lang="en-US" altLang="zh-CN" dirty="0" err="1">
+                <a:latin typeface="Noto Sans SC Black" panose="020B0200000000000000" pitchFamily="34" charset="-122"/>
+                <a:ea typeface="Noto Sans SC Black" panose="020B0200000000000000" pitchFamily="34" charset="-122"/>
+              </a:rPr>
+              <a:t>Nissunay</a:t>
+            </a:r>
+            <a:endParaRPr lang="zh-CN" altLang="en-US" dirty="0">
+              <a:latin typeface="Noto Sans SC Black" panose="020B0200000000000000" pitchFamily="34" charset="-122"/>
+              <a:ea typeface="Noto Sans SC Black" panose="020B0200000000000000" pitchFamily="34" charset="-122"/>
+            </a:endParaRPr>
+          </a:p>
+        </p:txBody>
+      </p:sp>
+      <p:sp>
+        <p:nvSpPr>
+          <p:cNvPr id="9" name="文本框 8">
+            <a:extLst>
+              <a:ext uri="{FF2B5EF4-FFF2-40B4-BE49-F238E27FC236}">
+                <a16:creationId xmlns:a16="http://schemas.microsoft.com/office/drawing/2014/main" id="{54A7EB2D-D42C-32BB-753D-7542AF7493F8}"/>
+              </a:ext>
+            </a:extLst>
+          </p:cNvPr>
+          <p:cNvSpPr txBox="1"/>
+          <p:nvPr/>
+        </p:nvSpPr>
+        <p:spPr>
+          <a:xfrm>
+            <a:off x="4212534" y="1506022"/>
+            <a:ext cx="2360545" cy="369332"/>
+          </a:xfrm>
+          <a:prstGeom prst="rect">
+            <a:avLst/>
+          </a:prstGeom>
+          <a:noFill/>
+        </p:spPr>
+        <p:txBody>
+          <a:bodyPr wrap="square" rtlCol="0">
+            <a:spAutoFit/>
+          </a:bodyPr>
+          <a:lstStyle/>
+          <a:p>
+            <a:r>
+              <a:rPr lang="en-US" altLang="zh-CN" dirty="0">
+                <a:latin typeface="Noto Sans SC Black" panose="020B0200000000000000" pitchFamily="34" charset="-122"/>
+                <a:ea typeface="Noto Sans SC Black" panose="020B0200000000000000" pitchFamily="34" charset="-122"/>
+              </a:rPr>
+              <a:t>Evan Tang</a:t>
+            </a:r>
+            <a:endParaRPr lang="zh-CN" altLang="en-US" dirty="0">
+              <a:latin typeface="Noto Sans SC Black" panose="020B0200000000000000" pitchFamily="34" charset="-122"/>
+              <a:ea typeface="Noto Sans SC Black" panose="020B0200000000000000" pitchFamily="34" charset="-122"/>
+            </a:endParaRPr>
+          </a:p>
+        </p:txBody>
+      </p:sp>
+      <p:sp>
+        <p:nvSpPr>
+          <p:cNvPr id="10" name="文本框 9">
+            <a:extLst>
+              <a:ext uri="{FF2B5EF4-FFF2-40B4-BE49-F238E27FC236}">
+                <a16:creationId xmlns:a16="http://schemas.microsoft.com/office/drawing/2014/main" id="{DF3FAF57-E3CA-6BCE-6225-D2B47D2E85FB}"/>
+              </a:ext>
+            </a:extLst>
+          </p:cNvPr>
+          <p:cNvSpPr txBox="1"/>
+          <p:nvPr/>
+        </p:nvSpPr>
+        <p:spPr>
+          <a:xfrm>
+            <a:off x="803412" y="2993796"/>
+            <a:ext cx="1984513" cy="369332"/>
+          </a:xfrm>
+          <a:prstGeom prst="rect">
+            <a:avLst/>
+          </a:prstGeom>
+          <a:noFill/>
+        </p:spPr>
+        <p:txBody>
+          <a:bodyPr wrap="square" rtlCol="0">
+            <a:spAutoFit/>
+          </a:bodyPr>
+          <a:lstStyle/>
+          <a:p>
+            <a:r>
+              <a:rPr lang="en-US" altLang="zh-CN" dirty="0"/>
+              <a:t>FROM:CHINA</a:t>
+            </a:r>
+            <a:endParaRPr lang="zh-CN" altLang="en-US" dirty="0"/>
+          </a:p>
+        </p:txBody>
+      </p:sp>
+      <p:sp>
+        <p:nvSpPr>
+          <p:cNvPr id="11" name="文本框 10">
+            <a:extLst>
+              <a:ext uri="{FF2B5EF4-FFF2-40B4-BE49-F238E27FC236}">
+                <a16:creationId xmlns:a16="http://schemas.microsoft.com/office/drawing/2014/main" id="{4BFAEE57-6187-1354-C277-3E1F0F28F38D}"/>
+              </a:ext>
+            </a:extLst>
+          </p:cNvPr>
+          <p:cNvSpPr txBox="1"/>
+          <p:nvPr/>
+        </p:nvSpPr>
+        <p:spPr>
+          <a:xfrm>
+            <a:off x="7894983" y="3000855"/>
+            <a:ext cx="2292626" cy="369332"/>
+          </a:xfrm>
+          <a:prstGeom prst="rect">
+            <a:avLst/>
+          </a:prstGeom>
+          <a:noFill/>
+        </p:spPr>
+        <p:txBody>
+          <a:bodyPr wrap="square" rtlCol="0">
+            <a:spAutoFit/>
+          </a:bodyPr>
+          <a:lstStyle/>
+          <a:p>
+            <a:r>
+              <a:rPr lang="en-US" altLang="zh-CN" dirty="0"/>
+              <a:t>FROM:MEXICO</a:t>
+            </a:r>
+            <a:endParaRPr lang="zh-CN" altLang="en-US" dirty="0"/>
+          </a:p>
+        </p:txBody>
+      </p:sp>
+      <p:sp>
+        <p:nvSpPr>
+          <p:cNvPr id="12" name="文本框 11">
+            <a:extLst>
+              <a:ext uri="{FF2B5EF4-FFF2-40B4-BE49-F238E27FC236}">
+                <a16:creationId xmlns:a16="http://schemas.microsoft.com/office/drawing/2014/main" id="{11729016-4456-C71E-DC83-89A95A42B7D7}"/>
+              </a:ext>
+            </a:extLst>
+          </p:cNvPr>
+          <p:cNvSpPr txBox="1"/>
+          <p:nvPr/>
+        </p:nvSpPr>
+        <p:spPr>
+          <a:xfrm>
+            <a:off x="4400549" y="2993796"/>
+            <a:ext cx="1984513" cy="369332"/>
+          </a:xfrm>
+          <a:prstGeom prst="rect">
+            <a:avLst/>
+          </a:prstGeom>
+          <a:noFill/>
+        </p:spPr>
+        <p:txBody>
+          <a:bodyPr wrap="square" rtlCol="0">
+            <a:spAutoFit/>
+          </a:bodyPr>
+          <a:lstStyle/>
+          <a:p>
+            <a:r>
+              <a:rPr lang="en-US" altLang="zh-CN" dirty="0"/>
+              <a:t>FROM:CHINA</a:t>
+            </a:r>
+            <a:endParaRPr lang="zh-CN" altLang="en-US" dirty="0"/>
+          </a:p>
+        </p:txBody>
+      </p:sp>
+      <p:sp>
+        <p:nvSpPr>
+          <p:cNvPr id="13" name="文本框 12">
+            <a:extLst>
+              <a:ext uri="{FF2B5EF4-FFF2-40B4-BE49-F238E27FC236}">
+                <a16:creationId xmlns:a16="http://schemas.microsoft.com/office/drawing/2014/main" id="{CC95FC8B-340B-A0D6-AFC2-9FE45D242A91}"/>
+              </a:ext>
+            </a:extLst>
+          </p:cNvPr>
+          <p:cNvSpPr txBox="1"/>
+          <p:nvPr/>
+        </p:nvSpPr>
+        <p:spPr>
+          <a:xfrm>
+            <a:off x="879613" y="2390361"/>
+            <a:ext cx="2574235" cy="369332"/>
+          </a:xfrm>
+          <a:prstGeom prst="rect">
+            <a:avLst/>
+          </a:prstGeom>
+          <a:noFill/>
+        </p:spPr>
+        <p:txBody>
+          <a:bodyPr wrap="square" rtlCol="0">
+            <a:spAutoFit/>
+          </a:bodyPr>
+          <a:lstStyle/>
+          <a:p>
+            <a:r>
+              <a:rPr lang="en-US" altLang="zh-CN" dirty="0"/>
+              <a:t>Founder &amp; CEO</a:t>
+            </a:r>
+            <a:endParaRPr lang="zh-CN" altLang="en-US" dirty="0"/>
+          </a:p>
+        </p:txBody>
+      </p:sp>
+      <p:sp>
+        <p:nvSpPr>
+          <p:cNvPr id="14" name="文本框 13">
+            <a:extLst>
+              <a:ext uri="{FF2B5EF4-FFF2-40B4-BE49-F238E27FC236}">
+                <a16:creationId xmlns:a16="http://schemas.microsoft.com/office/drawing/2014/main" id="{C837F801-F554-A99E-4805-1F1B370A3691}"/>
+              </a:ext>
+            </a:extLst>
+          </p:cNvPr>
+          <p:cNvSpPr txBox="1"/>
+          <p:nvPr/>
+        </p:nvSpPr>
+        <p:spPr>
+          <a:xfrm>
+            <a:off x="879613" y="4184374"/>
+            <a:ext cx="2834308" cy="646331"/>
+          </a:xfrm>
+          <a:prstGeom prst="rect">
+            <a:avLst/>
+          </a:prstGeom>
+          <a:noFill/>
+        </p:spPr>
+        <p:txBody>
+          <a:bodyPr wrap="square" rtlCol="0">
+            <a:spAutoFit/>
+          </a:bodyPr>
+          <a:lstStyle/>
+          <a:p>
+            <a:r>
+              <a:rPr lang="en-US" altLang="zh-CN" dirty="0" err="1"/>
+              <a:t>Github:https</a:t>
+            </a:r>
+            <a:r>
+              <a:rPr lang="en-US" altLang="zh-CN" dirty="0"/>
+              <a:t>://github.com/</a:t>
+            </a:r>
+            <a:r>
+              <a:rPr lang="en-US" altLang="zh-CN" dirty="0" err="1"/>
+              <a:t>zbbsdsb</a:t>
+            </a:r>
+            <a:endParaRPr lang="zh-CN" altLang="en-US" dirty="0"/>
+          </a:p>
+        </p:txBody>
+      </p:sp>
+      <p:sp>
+        <p:nvSpPr>
+          <p:cNvPr id="15" name="文本框 14">
+            <a:extLst>
+              <a:ext uri="{FF2B5EF4-FFF2-40B4-BE49-F238E27FC236}">
+                <a16:creationId xmlns:a16="http://schemas.microsoft.com/office/drawing/2014/main" id="{FB5057EE-A3DF-011D-6AE0-0A7DB9DDB33E}"/>
+              </a:ext>
+            </a:extLst>
+          </p:cNvPr>
+          <p:cNvSpPr txBox="1"/>
+          <p:nvPr/>
+        </p:nvSpPr>
+        <p:spPr>
+          <a:xfrm>
+            <a:off x="4409661" y="4239602"/>
+            <a:ext cx="2834308" cy="646331"/>
+          </a:xfrm>
+          <a:prstGeom prst="rect">
+            <a:avLst/>
+          </a:prstGeom>
+          <a:noFill/>
+        </p:spPr>
+        <p:txBody>
+          <a:bodyPr wrap="square" rtlCol="0">
+            <a:spAutoFit/>
+          </a:bodyPr>
+          <a:lstStyle/>
+          <a:p>
+            <a:r>
+              <a:rPr lang="en-US" altLang="zh-CN" dirty="0" err="1"/>
+              <a:t>Github:https</a:t>
+            </a:r>
+            <a:r>
+              <a:rPr lang="en-US" altLang="zh-CN" dirty="0"/>
+              <a:t>://github.com/tangsky123</a:t>
+            </a:r>
+            <a:endParaRPr lang="zh-CN" altLang="en-US" dirty="0"/>
+          </a:p>
+        </p:txBody>
+      </p:sp>
+      <p:sp>
+        <p:nvSpPr>
+          <p:cNvPr id="16" name="文本框 15">
+            <a:extLst>
+              <a:ext uri="{FF2B5EF4-FFF2-40B4-BE49-F238E27FC236}">
+                <a16:creationId xmlns:a16="http://schemas.microsoft.com/office/drawing/2014/main" id="{820DD644-9AEC-2D9D-341B-D203AB0E32BA}"/>
+              </a:ext>
+            </a:extLst>
+          </p:cNvPr>
+          <p:cNvSpPr txBox="1"/>
+          <p:nvPr/>
+        </p:nvSpPr>
+        <p:spPr>
+          <a:xfrm>
+            <a:off x="7894983" y="4219577"/>
+            <a:ext cx="2834308" cy="646331"/>
+          </a:xfrm>
+          <a:prstGeom prst="rect">
+            <a:avLst/>
+          </a:prstGeom>
+          <a:noFill/>
+        </p:spPr>
+        <p:txBody>
+          <a:bodyPr wrap="square" rtlCol="0">
+            <a:spAutoFit/>
+          </a:bodyPr>
+          <a:lstStyle/>
+          <a:p>
+            <a:r>
+              <a:rPr lang="en-US" altLang="zh-CN" dirty="0" err="1"/>
+              <a:t>Github:https</a:t>
+            </a:r>
+            <a:r>
+              <a:rPr lang="en-US" altLang="zh-CN" dirty="0"/>
+              <a:t>://github.com/</a:t>
+            </a:r>
+            <a:r>
+              <a:rPr lang="en-US" altLang="zh-CN" dirty="0" err="1"/>
+              <a:t>AmaiDonatsu</a:t>
+            </a:r>
+            <a:endParaRPr lang="zh-CN" altLang="en-US" dirty="0"/>
+          </a:p>
+        </p:txBody>
+      </p:sp>
+    </p:spTree>
+    <p:extLst>
+      <p:ext uri="{BB962C8B-B14F-4D97-AF65-F5344CB8AC3E}">
+        <p14:creationId xmlns:p14="http://schemas.microsoft.com/office/powerpoint/2010/main" val="901082095"/>
+      </p:ext>
+    </p:extLst>
+  </p:cSld>
+  <p:clrMapOvr>
+    <a:masterClrMapping/>
+  </p:clrMapOvr>
+</p:sld>
+</file>
+
+<file path=ppt/slides/slide5.xml><?xml version="1.0" encoding="utf-8"?>
+<p:sld xmlns:a="http://schemas.openxmlformats.org/drawingml/2006/main" xmlns:r="http://schemas.openxmlformats.org/officeDocument/2006/relationships" xmlns:p="http://schemas.openxmlformats.org/presentationml/2006/main">
+  <p:cSld>
+    <p:spTree>
+      <p:nvGrpSpPr>
+        <p:cNvPr id="1" name=""/>
+        <p:cNvGrpSpPr/>
+        <p:nvPr/>
+      </p:nvGrpSpPr>
+      <p:grpSpPr>
+        <a:xfrm>
+          <a:off x="0" y="0"/>
+          <a:ext cx="0" cy="0"/>
+          <a:chOff x="0" y="0"/>
+          <a:chExt cx="0" cy="0"/>
+        </a:xfrm>
+      </p:grpSpPr>
+      <p:sp>
+        <p:nvSpPr>
           <p:cNvPr id="4" name="文本框 3">
             <a:extLst>
               <a:ext uri="{FF2B5EF4-FFF2-40B4-BE49-F238E27FC236}">
@@ -7123,4720 +11602,7 @@
 </p:sld>
 </file>
 
-<file path=ppt/slides/slide4.xml><?xml version="1.0" encoding="utf-8"?>
-<p:sld xmlns:a="http://schemas.openxmlformats.org/drawingml/2006/main" xmlns:r="http://schemas.openxmlformats.org/officeDocument/2006/relationships" xmlns:p="http://schemas.openxmlformats.org/presentationml/2006/main">
-  <p:cSld>
-    <p:spTree>
-      <p:nvGrpSpPr>
-        <p:cNvPr id="1" name=""/>
-        <p:cNvGrpSpPr/>
-        <p:nvPr/>
-      </p:nvGrpSpPr>
-      <p:grpSpPr>
-        <a:xfrm>
-          <a:off x="0" y="0"/>
-          <a:ext cx="0" cy="0"/>
-          <a:chOff x="0" y="0"/>
-          <a:chExt cx="0" cy="0"/>
-        </a:xfrm>
-      </p:grpSpPr>
-      <p:sp>
-        <p:nvSpPr>
-          <p:cNvPr id="62" name="矩形 61">
-            <a:extLst>
-              <a:ext uri="{FF2B5EF4-FFF2-40B4-BE49-F238E27FC236}">
-                <a16:creationId xmlns:a16="http://schemas.microsoft.com/office/drawing/2014/main" id="{5BE91CDD-C68E-59CC-BA62-6297C4EBBCC4}"/>
-              </a:ext>
-            </a:extLst>
-          </p:cNvPr>
-          <p:cNvSpPr/>
-          <p:nvPr/>
-        </p:nvSpPr>
-        <p:spPr>
-          <a:xfrm>
-            <a:off x="81998" y="5883965"/>
-            <a:ext cx="2800350" cy="850559"/>
-          </a:xfrm>
-          <a:prstGeom prst="rect">
-            <a:avLst/>
-          </a:prstGeom>
-        </p:spPr>
-        <p:style>
-          <a:lnRef idx="2">
-            <a:schemeClr val="accent4"/>
-          </a:lnRef>
-          <a:fillRef idx="1">
-            <a:schemeClr val="lt1"/>
-          </a:fillRef>
-          <a:effectRef idx="0">
-            <a:schemeClr val="accent4"/>
-          </a:effectRef>
-          <a:fontRef idx="minor">
-            <a:schemeClr val="dk1"/>
-          </a:fontRef>
-        </p:style>
-        <p:txBody>
-          <a:bodyPr rtlCol="0" anchor="ctr"/>
-          <a:lstStyle/>
-          <a:p>
-            <a:pPr algn="ctr"/>
-            <a:endParaRPr lang="zh-CN" altLang="en-US"/>
-          </a:p>
-        </p:txBody>
-      </p:sp>
-      <p:sp>
-        <p:nvSpPr>
-          <p:cNvPr id="53" name="矩形 52">
-            <a:extLst>
-              <a:ext uri="{FF2B5EF4-FFF2-40B4-BE49-F238E27FC236}">
-                <a16:creationId xmlns:a16="http://schemas.microsoft.com/office/drawing/2014/main" id="{8A767945-2F1C-E6A0-D465-7D0850E0514B}"/>
-              </a:ext>
-            </a:extLst>
-          </p:cNvPr>
-          <p:cNvSpPr/>
-          <p:nvPr/>
-        </p:nvSpPr>
-        <p:spPr>
-          <a:xfrm>
-            <a:off x="81998" y="5198169"/>
-            <a:ext cx="2425810" cy="615779"/>
-          </a:xfrm>
-          <a:prstGeom prst="rect">
-            <a:avLst/>
-          </a:prstGeom>
-        </p:spPr>
-        <p:style>
-          <a:lnRef idx="2">
-            <a:schemeClr val="accent4"/>
-          </a:lnRef>
-          <a:fillRef idx="1">
-            <a:schemeClr val="lt1"/>
-          </a:fillRef>
-          <a:effectRef idx="0">
-            <a:schemeClr val="accent4"/>
-          </a:effectRef>
-          <a:fontRef idx="minor">
-            <a:schemeClr val="dk1"/>
-          </a:fontRef>
-        </p:style>
-        <p:txBody>
-          <a:bodyPr rtlCol="0" anchor="ctr"/>
-          <a:lstStyle/>
-          <a:p>
-            <a:pPr algn="ctr"/>
-            <a:endParaRPr lang="zh-CN" altLang="en-US"/>
-          </a:p>
-        </p:txBody>
-      </p:sp>
-      <p:sp>
-        <p:nvSpPr>
-          <p:cNvPr id="49" name="矩形 48">
-            <a:extLst>
-              <a:ext uri="{FF2B5EF4-FFF2-40B4-BE49-F238E27FC236}">
-                <a16:creationId xmlns:a16="http://schemas.microsoft.com/office/drawing/2014/main" id="{51D13E15-AC94-633D-5CED-1A5950B4E791}"/>
-              </a:ext>
-            </a:extLst>
-          </p:cNvPr>
-          <p:cNvSpPr/>
-          <p:nvPr/>
-        </p:nvSpPr>
-        <p:spPr>
-          <a:xfrm>
-            <a:off x="71396" y="4489659"/>
-            <a:ext cx="2436412" cy="646331"/>
-          </a:xfrm>
-          <a:prstGeom prst="rect">
-            <a:avLst/>
-          </a:prstGeom>
-        </p:spPr>
-        <p:style>
-          <a:lnRef idx="2">
-            <a:schemeClr val="accent4"/>
-          </a:lnRef>
-          <a:fillRef idx="1">
-            <a:schemeClr val="lt1"/>
-          </a:fillRef>
-          <a:effectRef idx="0">
-            <a:schemeClr val="accent4"/>
-          </a:effectRef>
-          <a:fontRef idx="minor">
-            <a:schemeClr val="dk1"/>
-          </a:fontRef>
-        </p:style>
-        <p:txBody>
-          <a:bodyPr rtlCol="0" anchor="ctr"/>
-          <a:lstStyle/>
-          <a:p>
-            <a:pPr algn="ctr"/>
-            <a:endParaRPr lang="zh-CN" altLang="en-US" dirty="0"/>
-          </a:p>
-        </p:txBody>
-      </p:sp>
-      <p:sp>
-        <p:nvSpPr>
-          <p:cNvPr id="8" name="矩形 7">
-            <a:extLst>
-              <a:ext uri="{FF2B5EF4-FFF2-40B4-BE49-F238E27FC236}">
-                <a16:creationId xmlns:a16="http://schemas.microsoft.com/office/drawing/2014/main" id="{7FC3AC08-1B62-48A1-797F-2AAA0B113715}"/>
-              </a:ext>
-            </a:extLst>
-          </p:cNvPr>
-          <p:cNvSpPr/>
-          <p:nvPr/>
-        </p:nvSpPr>
-        <p:spPr>
-          <a:xfrm>
-            <a:off x="1289602" y="631134"/>
-            <a:ext cx="2489752" cy="3250096"/>
-          </a:xfrm>
-          <a:prstGeom prst="rect">
-            <a:avLst/>
-          </a:prstGeom>
-        </p:spPr>
-        <p:style>
-          <a:lnRef idx="2">
-            <a:schemeClr val="accent2">
-              <a:shade val="15000"/>
-            </a:schemeClr>
-          </a:lnRef>
-          <a:fillRef idx="1">
-            <a:schemeClr val="accent2"/>
-          </a:fillRef>
-          <a:effectRef idx="0">
-            <a:schemeClr val="accent2"/>
-          </a:effectRef>
-          <a:fontRef idx="minor">
-            <a:schemeClr val="lt1"/>
-          </a:fontRef>
-        </p:style>
-        <p:txBody>
-          <a:bodyPr rtlCol="0" anchor="ctr"/>
-          <a:lstStyle/>
-          <a:p>
-            <a:pPr algn="ctr"/>
-            <a:endParaRPr lang="zh-CN" altLang="en-US"/>
-          </a:p>
-        </p:txBody>
-      </p:sp>
-      <p:sp>
-        <p:nvSpPr>
-          <p:cNvPr id="4" name="矩形 3">
-            <a:extLst>
-              <a:ext uri="{FF2B5EF4-FFF2-40B4-BE49-F238E27FC236}">
-                <a16:creationId xmlns:a16="http://schemas.microsoft.com/office/drawing/2014/main" id="{6CCC5C1A-A47F-0EB6-EFF3-B21231832262}"/>
-              </a:ext>
-            </a:extLst>
-          </p:cNvPr>
-          <p:cNvSpPr/>
-          <p:nvPr/>
-        </p:nvSpPr>
-        <p:spPr>
-          <a:xfrm>
-            <a:off x="1759226" y="1212574"/>
-            <a:ext cx="1550504" cy="785191"/>
-          </a:xfrm>
-          <a:prstGeom prst="rect">
-            <a:avLst/>
-          </a:prstGeom>
-        </p:spPr>
-        <p:style>
-          <a:lnRef idx="2">
-            <a:schemeClr val="accent1">
-              <a:shade val="15000"/>
-            </a:schemeClr>
-          </a:lnRef>
-          <a:fillRef idx="1">
-            <a:schemeClr val="accent1"/>
-          </a:fillRef>
-          <a:effectRef idx="0">
-            <a:schemeClr val="accent1"/>
-          </a:effectRef>
-          <a:fontRef idx="minor">
-            <a:schemeClr val="lt1"/>
-          </a:fontRef>
-        </p:style>
-        <p:txBody>
-          <a:bodyPr rtlCol="0" anchor="ctr"/>
-          <a:lstStyle/>
-          <a:p>
-            <a:pPr algn="ctr"/>
-            <a:endParaRPr lang="zh-CN" altLang="en-US"/>
-          </a:p>
-        </p:txBody>
-      </p:sp>
-      <p:sp>
-        <p:nvSpPr>
-          <p:cNvPr id="6" name="矩形 5">
-            <a:extLst>
-              <a:ext uri="{FF2B5EF4-FFF2-40B4-BE49-F238E27FC236}">
-                <a16:creationId xmlns:a16="http://schemas.microsoft.com/office/drawing/2014/main" id="{C81BC4E6-8331-AEDE-3946-7F2EAA6E5774}"/>
-              </a:ext>
-            </a:extLst>
-          </p:cNvPr>
-          <p:cNvSpPr/>
-          <p:nvPr/>
-        </p:nvSpPr>
-        <p:spPr>
-          <a:xfrm>
-            <a:off x="1759226" y="2080591"/>
-            <a:ext cx="1550504" cy="785191"/>
-          </a:xfrm>
-          <a:prstGeom prst="rect">
-            <a:avLst/>
-          </a:prstGeom>
-        </p:spPr>
-        <p:style>
-          <a:lnRef idx="2">
-            <a:schemeClr val="accent1">
-              <a:shade val="15000"/>
-            </a:schemeClr>
-          </a:lnRef>
-          <a:fillRef idx="1">
-            <a:schemeClr val="accent1"/>
-          </a:fillRef>
-          <a:effectRef idx="0">
-            <a:schemeClr val="accent1"/>
-          </a:effectRef>
-          <a:fontRef idx="minor">
-            <a:schemeClr val="lt1"/>
-          </a:fontRef>
-        </p:style>
-        <p:txBody>
-          <a:bodyPr rtlCol="0" anchor="ctr"/>
-          <a:lstStyle/>
-          <a:p>
-            <a:pPr algn="ctr"/>
-            <a:endParaRPr lang="zh-CN" altLang="en-US"/>
-          </a:p>
-        </p:txBody>
-      </p:sp>
-      <p:sp>
-        <p:nvSpPr>
-          <p:cNvPr id="7" name="矩形 6">
-            <a:extLst>
-              <a:ext uri="{FF2B5EF4-FFF2-40B4-BE49-F238E27FC236}">
-                <a16:creationId xmlns:a16="http://schemas.microsoft.com/office/drawing/2014/main" id="{EA8275DF-53D8-4E1E-AA98-EB8720A2D58A}"/>
-              </a:ext>
-            </a:extLst>
-          </p:cNvPr>
-          <p:cNvSpPr/>
-          <p:nvPr/>
-        </p:nvSpPr>
-        <p:spPr>
-          <a:xfrm>
-            <a:off x="1759226" y="2948608"/>
-            <a:ext cx="1550504" cy="785191"/>
-          </a:xfrm>
-          <a:prstGeom prst="rect">
-            <a:avLst/>
-          </a:prstGeom>
-        </p:spPr>
-        <p:style>
-          <a:lnRef idx="2">
-            <a:schemeClr val="accent1">
-              <a:shade val="15000"/>
-            </a:schemeClr>
-          </a:lnRef>
-          <a:fillRef idx="1">
-            <a:schemeClr val="accent1"/>
-          </a:fillRef>
-          <a:effectRef idx="0">
-            <a:schemeClr val="accent1"/>
-          </a:effectRef>
-          <a:fontRef idx="minor">
-            <a:schemeClr val="lt1"/>
-          </a:fontRef>
-        </p:style>
-        <p:txBody>
-          <a:bodyPr rtlCol="0" anchor="ctr"/>
-          <a:lstStyle/>
-          <a:p>
-            <a:pPr algn="ctr"/>
-            <a:endParaRPr lang="zh-CN" altLang="en-US"/>
-          </a:p>
-        </p:txBody>
-      </p:sp>
-      <p:sp>
-        <p:nvSpPr>
-          <p:cNvPr id="2" name="文本框 1">
-            <a:extLst>
-              <a:ext uri="{FF2B5EF4-FFF2-40B4-BE49-F238E27FC236}">
-                <a16:creationId xmlns:a16="http://schemas.microsoft.com/office/drawing/2014/main" id="{A43141FA-B24C-18E7-D130-E91BF5CF010E}"/>
-              </a:ext>
-            </a:extLst>
-          </p:cNvPr>
-          <p:cNvSpPr txBox="1"/>
-          <p:nvPr/>
-        </p:nvSpPr>
-        <p:spPr>
-          <a:xfrm>
-            <a:off x="2087217" y="695811"/>
-            <a:ext cx="1396448" cy="369332"/>
-          </a:xfrm>
-          <a:prstGeom prst="rect">
-            <a:avLst/>
-          </a:prstGeom>
-          <a:noFill/>
-        </p:spPr>
-        <p:txBody>
-          <a:bodyPr wrap="square" rtlCol="0">
-            <a:spAutoFit/>
-          </a:bodyPr>
-          <a:lstStyle/>
-          <a:p>
-            <a:r>
-              <a:rPr lang="en-US" altLang="zh-CN" dirty="0">
-                <a:latin typeface="MS UI Gothic" panose="020B0600070205080204" pitchFamily="34" charset="-128"/>
-                <a:ea typeface="MS UI Gothic" panose="020B0600070205080204" pitchFamily="34" charset="-128"/>
-              </a:rPr>
-              <a:t>INPUT</a:t>
-            </a:r>
-            <a:endParaRPr lang="zh-CN" altLang="en-US" dirty="0">
-              <a:latin typeface="MS UI Gothic" panose="020B0600070205080204" pitchFamily="34" charset="-128"/>
-              <a:ea typeface="MS UI Gothic" panose="020B0600070205080204" pitchFamily="34" charset="-128"/>
-            </a:endParaRPr>
-          </a:p>
-        </p:txBody>
-      </p:sp>
-      <p:sp>
-        <p:nvSpPr>
-          <p:cNvPr id="3" name="矩形 2">
-            <a:extLst>
-              <a:ext uri="{FF2B5EF4-FFF2-40B4-BE49-F238E27FC236}">
-                <a16:creationId xmlns:a16="http://schemas.microsoft.com/office/drawing/2014/main" id="{414C27B1-FD70-8F48-D8C5-EAFAB2532D61}"/>
-              </a:ext>
-            </a:extLst>
-          </p:cNvPr>
-          <p:cNvSpPr/>
-          <p:nvPr/>
-        </p:nvSpPr>
-        <p:spPr>
-          <a:xfrm>
-            <a:off x="9064486" y="506895"/>
-            <a:ext cx="2594113" cy="5928691"/>
-          </a:xfrm>
-          <a:prstGeom prst="rect">
-            <a:avLst/>
-          </a:prstGeom>
-        </p:spPr>
-        <p:style>
-          <a:lnRef idx="2">
-            <a:schemeClr val="accent2">
-              <a:shade val="15000"/>
-            </a:schemeClr>
-          </a:lnRef>
-          <a:fillRef idx="1">
-            <a:schemeClr val="accent2"/>
-          </a:fillRef>
-          <a:effectRef idx="0">
-            <a:schemeClr val="accent2"/>
-          </a:effectRef>
-          <a:fontRef idx="minor">
-            <a:schemeClr val="lt1"/>
-          </a:fontRef>
-        </p:style>
-        <p:txBody>
-          <a:bodyPr rtlCol="0" anchor="ctr"/>
-          <a:lstStyle/>
-          <a:p>
-            <a:pPr algn="ctr"/>
-            <a:endParaRPr lang="zh-CN" altLang="en-US"/>
-          </a:p>
-        </p:txBody>
-      </p:sp>
-      <p:sp>
-        <p:nvSpPr>
-          <p:cNvPr id="5" name="矩形 4">
-            <a:extLst>
-              <a:ext uri="{FF2B5EF4-FFF2-40B4-BE49-F238E27FC236}">
-                <a16:creationId xmlns:a16="http://schemas.microsoft.com/office/drawing/2014/main" id="{90363CCF-F9C6-2297-5930-700E203DDB8F}"/>
-              </a:ext>
-            </a:extLst>
-          </p:cNvPr>
-          <p:cNvSpPr/>
-          <p:nvPr/>
-        </p:nvSpPr>
-        <p:spPr>
-          <a:xfrm>
-            <a:off x="9230689" y="971351"/>
-            <a:ext cx="2251213" cy="3841475"/>
-          </a:xfrm>
-          <a:prstGeom prst="rect">
-            <a:avLst/>
-          </a:prstGeom>
-        </p:spPr>
-        <p:style>
-          <a:lnRef idx="2">
-            <a:schemeClr val="accent6">
-              <a:shade val="15000"/>
-            </a:schemeClr>
-          </a:lnRef>
-          <a:fillRef idx="1">
-            <a:schemeClr val="accent6"/>
-          </a:fillRef>
-          <a:effectRef idx="0">
-            <a:schemeClr val="accent6"/>
-          </a:effectRef>
-          <a:fontRef idx="minor">
-            <a:schemeClr val="lt1"/>
-          </a:fontRef>
-        </p:style>
-        <p:txBody>
-          <a:bodyPr rtlCol="0" anchor="ctr"/>
-          <a:lstStyle/>
-          <a:p>
-            <a:pPr algn="ctr"/>
-            <a:endParaRPr lang="zh-CN" altLang="en-US"/>
-          </a:p>
-        </p:txBody>
-      </p:sp>
-      <p:sp>
-        <p:nvSpPr>
-          <p:cNvPr id="9" name="矩形 8">
-            <a:extLst>
-              <a:ext uri="{FF2B5EF4-FFF2-40B4-BE49-F238E27FC236}">
-                <a16:creationId xmlns:a16="http://schemas.microsoft.com/office/drawing/2014/main" id="{A9014885-527C-63CE-94D9-F425BD860CD2}"/>
-              </a:ext>
-            </a:extLst>
-          </p:cNvPr>
-          <p:cNvSpPr/>
-          <p:nvPr/>
-        </p:nvSpPr>
-        <p:spPr>
-          <a:xfrm>
-            <a:off x="9278176" y="4904961"/>
-            <a:ext cx="2166730" cy="1446144"/>
-          </a:xfrm>
-          <a:prstGeom prst="rect">
-            <a:avLst/>
-          </a:prstGeom>
-        </p:spPr>
-        <p:style>
-          <a:lnRef idx="1">
-            <a:schemeClr val="accent4"/>
-          </a:lnRef>
-          <a:fillRef idx="2">
-            <a:schemeClr val="accent4"/>
-          </a:fillRef>
-          <a:effectRef idx="1">
-            <a:schemeClr val="accent4"/>
-          </a:effectRef>
-          <a:fontRef idx="minor">
-            <a:schemeClr val="dk1"/>
-          </a:fontRef>
-        </p:style>
-        <p:txBody>
-          <a:bodyPr rtlCol="0" anchor="ctr"/>
-          <a:lstStyle/>
-          <a:p>
-            <a:pPr algn="ctr"/>
-            <a:endParaRPr lang="zh-CN" altLang="en-US"/>
-          </a:p>
-        </p:txBody>
-      </p:sp>
-      <p:sp>
-        <p:nvSpPr>
-          <p:cNvPr id="10" name="文本框 9">
-            <a:extLst>
-              <a:ext uri="{FF2B5EF4-FFF2-40B4-BE49-F238E27FC236}">
-                <a16:creationId xmlns:a16="http://schemas.microsoft.com/office/drawing/2014/main" id="{11BC3741-A913-0762-7012-A3B0A65F83F3}"/>
-              </a:ext>
-            </a:extLst>
-          </p:cNvPr>
-          <p:cNvSpPr txBox="1"/>
-          <p:nvPr/>
-        </p:nvSpPr>
-        <p:spPr>
-          <a:xfrm>
-            <a:off x="9695622" y="558284"/>
-            <a:ext cx="2107093" cy="369332"/>
-          </a:xfrm>
-          <a:prstGeom prst="rect">
-            <a:avLst/>
-          </a:prstGeom>
-          <a:noFill/>
-        </p:spPr>
-        <p:txBody>
-          <a:bodyPr wrap="square" rtlCol="0">
-            <a:spAutoFit/>
-          </a:bodyPr>
-          <a:lstStyle/>
-          <a:p>
-            <a:r>
-              <a:rPr lang="en-US" altLang="zh-CN" dirty="0"/>
-              <a:t>OUTPUT</a:t>
-            </a:r>
-            <a:endParaRPr lang="zh-CN" altLang="en-US" dirty="0"/>
-          </a:p>
-        </p:txBody>
-      </p:sp>
-      <p:sp>
-        <p:nvSpPr>
-          <p:cNvPr id="11" name="文本框 10">
-            <a:extLst>
-              <a:ext uri="{FF2B5EF4-FFF2-40B4-BE49-F238E27FC236}">
-                <a16:creationId xmlns:a16="http://schemas.microsoft.com/office/drawing/2014/main" id="{67C17DFB-C0FF-F35A-5DF0-66D74223F73C}"/>
-              </a:ext>
-            </a:extLst>
-          </p:cNvPr>
-          <p:cNvSpPr txBox="1"/>
-          <p:nvPr/>
-        </p:nvSpPr>
-        <p:spPr>
-          <a:xfrm>
-            <a:off x="9509259" y="5013503"/>
-            <a:ext cx="1704561" cy="369332"/>
-          </a:xfrm>
-          <a:prstGeom prst="rect">
-            <a:avLst/>
-          </a:prstGeom>
-          <a:noFill/>
-        </p:spPr>
-        <p:txBody>
-          <a:bodyPr wrap="square" rtlCol="0">
-            <a:spAutoFit/>
-          </a:bodyPr>
-          <a:lstStyle/>
-          <a:p>
-            <a:r>
-              <a:rPr lang="en-US" altLang="zh-CN" dirty="0"/>
-              <a:t>EME WORLD</a:t>
-            </a:r>
-            <a:endParaRPr lang="zh-CN" altLang="en-US" dirty="0"/>
-          </a:p>
-        </p:txBody>
-      </p:sp>
-      <p:sp>
-        <p:nvSpPr>
-          <p:cNvPr id="12" name="文本框 11">
-            <a:extLst>
-              <a:ext uri="{FF2B5EF4-FFF2-40B4-BE49-F238E27FC236}">
-                <a16:creationId xmlns:a16="http://schemas.microsoft.com/office/drawing/2014/main" id="{1E932628-2694-BD66-E75B-F1B3E9707A87}"/>
-              </a:ext>
-            </a:extLst>
-          </p:cNvPr>
-          <p:cNvSpPr txBox="1"/>
-          <p:nvPr/>
-        </p:nvSpPr>
-        <p:spPr>
-          <a:xfrm>
-            <a:off x="2087217" y="2256182"/>
-            <a:ext cx="1386509" cy="369332"/>
-          </a:xfrm>
-          <a:prstGeom prst="rect">
-            <a:avLst/>
-          </a:prstGeom>
-          <a:noFill/>
-        </p:spPr>
-        <p:txBody>
-          <a:bodyPr wrap="square" rtlCol="0">
-            <a:spAutoFit/>
-          </a:bodyPr>
-          <a:lstStyle/>
-          <a:p>
-            <a:r>
-              <a:rPr lang="en-US" altLang="zh-CN" dirty="0"/>
-              <a:t>LLM API</a:t>
-            </a:r>
-            <a:endParaRPr lang="zh-CN" altLang="en-US" dirty="0"/>
-          </a:p>
-        </p:txBody>
-      </p:sp>
-      <p:sp>
-        <p:nvSpPr>
-          <p:cNvPr id="13" name="文本框 12">
-            <a:extLst>
-              <a:ext uri="{FF2B5EF4-FFF2-40B4-BE49-F238E27FC236}">
-                <a16:creationId xmlns:a16="http://schemas.microsoft.com/office/drawing/2014/main" id="{FB4FEC95-B6E1-D130-EA6A-8CD95B0ADEA5}"/>
-              </a:ext>
-            </a:extLst>
-          </p:cNvPr>
-          <p:cNvSpPr txBox="1"/>
-          <p:nvPr/>
-        </p:nvSpPr>
-        <p:spPr>
-          <a:xfrm>
-            <a:off x="1993900" y="3124200"/>
-            <a:ext cx="1085850" cy="369332"/>
-          </a:xfrm>
-          <a:prstGeom prst="rect">
-            <a:avLst/>
-          </a:prstGeom>
-          <a:noFill/>
-        </p:spPr>
-        <p:txBody>
-          <a:bodyPr wrap="square" rtlCol="0">
-            <a:spAutoFit/>
-          </a:bodyPr>
-          <a:lstStyle/>
-          <a:p>
-            <a:r>
-              <a:rPr lang="en-US" altLang="zh-CN" dirty="0"/>
-              <a:t>3DGS</a:t>
-            </a:r>
-            <a:endParaRPr lang="zh-CN" altLang="en-US" dirty="0"/>
-          </a:p>
-        </p:txBody>
-      </p:sp>
-      <p:sp>
-        <p:nvSpPr>
-          <p:cNvPr id="14" name="文本框 13">
-            <a:extLst>
-              <a:ext uri="{FF2B5EF4-FFF2-40B4-BE49-F238E27FC236}">
-                <a16:creationId xmlns:a16="http://schemas.microsoft.com/office/drawing/2014/main" id="{27F2FB6D-5423-ABA2-ABC5-C18DB98A8523}"/>
-              </a:ext>
-            </a:extLst>
-          </p:cNvPr>
-          <p:cNvSpPr txBox="1"/>
-          <p:nvPr/>
-        </p:nvSpPr>
-        <p:spPr>
-          <a:xfrm>
-            <a:off x="9559290" y="5292098"/>
-            <a:ext cx="1615440" cy="461665"/>
-          </a:xfrm>
-          <a:prstGeom prst="rect">
-            <a:avLst/>
-          </a:prstGeom>
-          <a:noFill/>
-        </p:spPr>
-        <p:txBody>
-          <a:bodyPr wrap="square" rtlCol="0">
-            <a:spAutoFit/>
-          </a:bodyPr>
-          <a:lstStyle/>
-          <a:p>
-            <a:r>
-              <a:rPr lang="en-US" altLang="zh-CN" sz="1200" dirty="0"/>
-              <a:t>We don't need to consider this for now.</a:t>
-            </a:r>
-            <a:endParaRPr lang="zh-CN" altLang="en-US" sz="1200" dirty="0"/>
-          </a:p>
-        </p:txBody>
-      </p:sp>
-      <p:sp>
-        <p:nvSpPr>
-          <p:cNvPr id="15" name="文本框 14">
-            <a:extLst>
-              <a:ext uri="{FF2B5EF4-FFF2-40B4-BE49-F238E27FC236}">
-                <a16:creationId xmlns:a16="http://schemas.microsoft.com/office/drawing/2014/main" id="{BBD2CF9C-6E52-A147-8215-55B8D7F3892E}"/>
-              </a:ext>
-            </a:extLst>
-          </p:cNvPr>
-          <p:cNvSpPr txBox="1"/>
-          <p:nvPr/>
-        </p:nvSpPr>
-        <p:spPr>
-          <a:xfrm>
-            <a:off x="1870074" y="1263650"/>
-            <a:ext cx="1463675" cy="369332"/>
-          </a:xfrm>
-          <a:prstGeom prst="rect">
-            <a:avLst/>
-          </a:prstGeom>
-          <a:noFill/>
-        </p:spPr>
-        <p:txBody>
-          <a:bodyPr wrap="square" rtlCol="0">
-            <a:spAutoFit/>
-          </a:bodyPr>
-          <a:lstStyle/>
-          <a:p>
-            <a:r>
-              <a:rPr lang="en-US" altLang="zh-CN" dirty="0" err="1"/>
-              <a:t>Photo,video</a:t>
-            </a:r>
-            <a:endParaRPr lang="zh-CN" altLang="en-US" dirty="0"/>
-          </a:p>
-        </p:txBody>
-      </p:sp>
-      <p:sp>
-        <p:nvSpPr>
-          <p:cNvPr id="16" name="矩形 15">
-            <a:extLst>
-              <a:ext uri="{FF2B5EF4-FFF2-40B4-BE49-F238E27FC236}">
-                <a16:creationId xmlns:a16="http://schemas.microsoft.com/office/drawing/2014/main" id="{D3C047A2-B398-185B-A46F-9A774994271B}"/>
-              </a:ext>
-            </a:extLst>
-          </p:cNvPr>
-          <p:cNvSpPr/>
-          <p:nvPr/>
-        </p:nvSpPr>
-        <p:spPr>
-          <a:xfrm>
-            <a:off x="4089400" y="1212850"/>
-            <a:ext cx="1339850" cy="704850"/>
-          </a:xfrm>
-          <a:prstGeom prst="rect">
-            <a:avLst/>
-          </a:prstGeom>
-        </p:spPr>
-        <p:style>
-          <a:lnRef idx="2">
-            <a:schemeClr val="accent1">
-              <a:shade val="15000"/>
-            </a:schemeClr>
-          </a:lnRef>
-          <a:fillRef idx="1">
-            <a:schemeClr val="accent1"/>
-          </a:fillRef>
-          <a:effectRef idx="0">
-            <a:schemeClr val="accent1"/>
-          </a:effectRef>
-          <a:fontRef idx="minor">
-            <a:schemeClr val="lt1"/>
-          </a:fontRef>
-        </p:style>
-        <p:txBody>
-          <a:bodyPr rtlCol="0" anchor="ctr"/>
-          <a:lstStyle/>
-          <a:p>
-            <a:pPr algn="ctr"/>
-            <a:endParaRPr lang="zh-CN" altLang="en-US"/>
-          </a:p>
-        </p:txBody>
-      </p:sp>
-      <p:sp>
-        <p:nvSpPr>
-          <p:cNvPr id="17" name="文本框 16">
-            <a:extLst>
-              <a:ext uri="{FF2B5EF4-FFF2-40B4-BE49-F238E27FC236}">
-                <a16:creationId xmlns:a16="http://schemas.microsoft.com/office/drawing/2014/main" id="{35940A9D-0E41-7561-4CC1-21F5DEAC1D2A}"/>
-              </a:ext>
-            </a:extLst>
-          </p:cNvPr>
-          <p:cNvSpPr txBox="1"/>
-          <p:nvPr/>
-        </p:nvSpPr>
-        <p:spPr>
-          <a:xfrm>
-            <a:off x="4264025" y="1355725"/>
-            <a:ext cx="1165225" cy="369332"/>
-          </a:xfrm>
-          <a:prstGeom prst="rect">
-            <a:avLst/>
-          </a:prstGeom>
-          <a:noFill/>
-        </p:spPr>
-        <p:txBody>
-          <a:bodyPr wrap="square" rtlCol="0">
-            <a:spAutoFit/>
-          </a:bodyPr>
-          <a:lstStyle/>
-          <a:p>
-            <a:r>
-              <a:rPr lang="en-US" altLang="zh-CN" dirty="0"/>
-              <a:t>Tahoe</a:t>
-            </a:r>
-            <a:endParaRPr lang="zh-CN" altLang="en-US" dirty="0"/>
-          </a:p>
-        </p:txBody>
-      </p:sp>
-      <p:sp>
-        <p:nvSpPr>
-          <p:cNvPr id="20" name="箭头: 右 19">
-            <a:extLst>
-              <a:ext uri="{FF2B5EF4-FFF2-40B4-BE49-F238E27FC236}">
-                <a16:creationId xmlns:a16="http://schemas.microsoft.com/office/drawing/2014/main" id="{243B9B5A-9DF2-5739-FB44-60C57D9F2FFD}"/>
-              </a:ext>
-            </a:extLst>
-          </p:cNvPr>
-          <p:cNvSpPr/>
-          <p:nvPr/>
-        </p:nvSpPr>
-        <p:spPr>
-          <a:xfrm>
-            <a:off x="3419475" y="1355725"/>
-            <a:ext cx="628650" cy="369332"/>
-          </a:xfrm>
-          <a:prstGeom prst="rightArrow">
-            <a:avLst/>
-          </a:prstGeom>
-        </p:spPr>
-        <p:style>
-          <a:lnRef idx="2">
-            <a:schemeClr val="accent1">
-              <a:shade val="15000"/>
-            </a:schemeClr>
-          </a:lnRef>
-          <a:fillRef idx="1">
-            <a:schemeClr val="accent1"/>
-          </a:fillRef>
-          <a:effectRef idx="0">
-            <a:schemeClr val="accent1"/>
-          </a:effectRef>
-          <a:fontRef idx="minor">
-            <a:schemeClr val="lt1"/>
-          </a:fontRef>
-        </p:style>
-        <p:txBody>
-          <a:bodyPr rtlCol="0" anchor="ctr"/>
-          <a:lstStyle/>
-          <a:p>
-            <a:pPr algn="ctr"/>
-            <a:endParaRPr lang="zh-CN" altLang="en-US"/>
-          </a:p>
-        </p:txBody>
-      </p:sp>
-      <p:sp>
-        <p:nvSpPr>
-          <p:cNvPr id="21" name="椭圆 20">
-            <a:extLst>
-              <a:ext uri="{FF2B5EF4-FFF2-40B4-BE49-F238E27FC236}">
-                <a16:creationId xmlns:a16="http://schemas.microsoft.com/office/drawing/2014/main" id="{BC2F963A-4350-5A96-3512-FB11643490A2}"/>
-              </a:ext>
-            </a:extLst>
-          </p:cNvPr>
-          <p:cNvSpPr/>
-          <p:nvPr/>
-        </p:nvSpPr>
-        <p:spPr>
-          <a:xfrm>
-            <a:off x="5176836" y="1263650"/>
-            <a:ext cx="165100" cy="177800"/>
-          </a:xfrm>
-          <a:prstGeom prst="ellipse">
-            <a:avLst/>
-          </a:prstGeom>
-        </p:spPr>
-        <p:style>
-          <a:lnRef idx="2">
-            <a:schemeClr val="accent2">
-              <a:shade val="15000"/>
-            </a:schemeClr>
-          </a:lnRef>
-          <a:fillRef idx="1">
-            <a:schemeClr val="accent2"/>
-          </a:fillRef>
-          <a:effectRef idx="0">
-            <a:schemeClr val="accent2"/>
-          </a:effectRef>
-          <a:fontRef idx="minor">
-            <a:schemeClr val="lt1"/>
-          </a:fontRef>
-        </p:style>
-        <p:txBody>
-          <a:bodyPr rtlCol="0" anchor="ctr"/>
-          <a:lstStyle/>
-          <a:p>
-            <a:pPr algn="ctr"/>
-            <a:endParaRPr lang="zh-CN" altLang="en-US"/>
-          </a:p>
-        </p:txBody>
-      </p:sp>
-      <p:sp>
-        <p:nvSpPr>
-          <p:cNvPr id="22" name="文本框 21">
-            <a:extLst>
-              <a:ext uri="{FF2B5EF4-FFF2-40B4-BE49-F238E27FC236}">
-                <a16:creationId xmlns:a16="http://schemas.microsoft.com/office/drawing/2014/main" id="{1D984F89-675C-46D8-A980-F7F632A9E723}"/>
-              </a:ext>
-            </a:extLst>
-          </p:cNvPr>
-          <p:cNvSpPr txBox="1"/>
-          <p:nvPr/>
-        </p:nvSpPr>
-        <p:spPr>
-          <a:xfrm>
-            <a:off x="5137945" y="1225592"/>
-            <a:ext cx="165099" cy="253916"/>
-          </a:xfrm>
-          <a:prstGeom prst="rect">
-            <a:avLst/>
-          </a:prstGeom>
-          <a:noFill/>
-        </p:spPr>
-        <p:txBody>
-          <a:bodyPr wrap="square" rtlCol="0">
-            <a:spAutoFit/>
-          </a:bodyPr>
-          <a:lstStyle/>
-          <a:p>
-            <a:r>
-              <a:rPr lang="en-US" altLang="zh-CN" sz="1050" dirty="0"/>
-              <a:t>1</a:t>
-            </a:r>
-            <a:endParaRPr lang="zh-CN" altLang="en-US" sz="1050" dirty="0"/>
-          </a:p>
-        </p:txBody>
-      </p:sp>
-      <p:sp>
-        <p:nvSpPr>
-          <p:cNvPr id="24" name="矩形 23">
-            <a:extLst>
-              <a:ext uri="{FF2B5EF4-FFF2-40B4-BE49-F238E27FC236}">
-                <a16:creationId xmlns:a16="http://schemas.microsoft.com/office/drawing/2014/main" id="{BA8D103F-E6D2-0C69-1F32-C58447F00C71}"/>
-              </a:ext>
-            </a:extLst>
-          </p:cNvPr>
-          <p:cNvSpPr/>
-          <p:nvPr/>
-        </p:nvSpPr>
-        <p:spPr>
-          <a:xfrm>
-            <a:off x="9355381" y="3881230"/>
-            <a:ext cx="2012315" cy="827930"/>
-          </a:xfrm>
-          <a:prstGeom prst="rect">
-            <a:avLst/>
-          </a:prstGeom>
-        </p:spPr>
-        <p:style>
-          <a:lnRef idx="2">
-            <a:schemeClr val="accent4">
-              <a:shade val="15000"/>
-            </a:schemeClr>
-          </a:lnRef>
-          <a:fillRef idx="1">
-            <a:schemeClr val="accent4"/>
-          </a:fillRef>
-          <a:effectRef idx="0">
-            <a:schemeClr val="accent4"/>
-          </a:effectRef>
-          <a:fontRef idx="minor">
-            <a:schemeClr val="lt1"/>
-          </a:fontRef>
-        </p:style>
-        <p:txBody>
-          <a:bodyPr rtlCol="0" anchor="ctr"/>
-          <a:lstStyle/>
-          <a:p>
-            <a:pPr algn="ctr"/>
-            <a:endParaRPr lang="zh-CN" altLang="en-US"/>
-          </a:p>
-        </p:txBody>
-      </p:sp>
-      <p:sp>
-        <p:nvSpPr>
-          <p:cNvPr id="25" name="文本框 24">
-            <a:extLst>
-              <a:ext uri="{FF2B5EF4-FFF2-40B4-BE49-F238E27FC236}">
-                <a16:creationId xmlns:a16="http://schemas.microsoft.com/office/drawing/2014/main" id="{C3FC6DA9-36F2-0E5E-B307-2E7EC4D673C1}"/>
-              </a:ext>
-            </a:extLst>
-          </p:cNvPr>
-          <p:cNvSpPr txBox="1"/>
-          <p:nvPr/>
-        </p:nvSpPr>
-        <p:spPr>
-          <a:xfrm>
-            <a:off x="9890712" y="4066792"/>
-            <a:ext cx="1824990" cy="369332"/>
-          </a:xfrm>
-          <a:prstGeom prst="rect">
-            <a:avLst/>
-          </a:prstGeom>
-          <a:noFill/>
-        </p:spPr>
-        <p:txBody>
-          <a:bodyPr wrap="square" rtlCol="0">
-            <a:spAutoFit/>
-          </a:bodyPr>
-          <a:lstStyle/>
-          <a:p>
-            <a:r>
-              <a:rPr lang="en-US" altLang="zh-CN" dirty="0"/>
-              <a:t>Genesis</a:t>
-            </a:r>
-            <a:endParaRPr lang="zh-CN" altLang="en-US" dirty="0"/>
-          </a:p>
-        </p:txBody>
-      </p:sp>
-      <p:sp>
-        <p:nvSpPr>
-          <p:cNvPr id="26" name="箭头: 下 25">
-            <a:extLst>
-              <a:ext uri="{FF2B5EF4-FFF2-40B4-BE49-F238E27FC236}">
-                <a16:creationId xmlns:a16="http://schemas.microsoft.com/office/drawing/2014/main" id="{700ED5AB-62A5-D122-4C9A-C7D989BAA292}"/>
-              </a:ext>
-            </a:extLst>
-          </p:cNvPr>
-          <p:cNvSpPr/>
-          <p:nvPr/>
-        </p:nvSpPr>
-        <p:spPr>
-          <a:xfrm>
-            <a:off x="9559290" y="3429000"/>
-            <a:ext cx="444443" cy="360095"/>
-          </a:xfrm>
-          <a:prstGeom prst="downArrow">
-            <a:avLst/>
-          </a:prstGeom>
-        </p:spPr>
-        <p:style>
-          <a:lnRef idx="2">
-            <a:schemeClr val="accent1">
-              <a:shade val="15000"/>
-            </a:schemeClr>
-          </a:lnRef>
-          <a:fillRef idx="1">
-            <a:schemeClr val="accent1"/>
-          </a:fillRef>
-          <a:effectRef idx="0">
-            <a:schemeClr val="accent1"/>
-          </a:effectRef>
-          <a:fontRef idx="minor">
-            <a:schemeClr val="lt1"/>
-          </a:fontRef>
-        </p:style>
-        <p:txBody>
-          <a:bodyPr rtlCol="0" anchor="ctr"/>
-          <a:lstStyle/>
-          <a:p>
-            <a:pPr algn="ctr"/>
-            <a:endParaRPr lang="zh-CN" altLang="en-US"/>
-          </a:p>
-        </p:txBody>
-      </p:sp>
-      <p:sp>
-        <p:nvSpPr>
-          <p:cNvPr id="27" name="文本框 26">
-            <a:extLst>
-              <a:ext uri="{FF2B5EF4-FFF2-40B4-BE49-F238E27FC236}">
-                <a16:creationId xmlns:a16="http://schemas.microsoft.com/office/drawing/2014/main" id="{EED7DF7D-79DE-FE7D-5649-FF5EB5BC2C22}"/>
-              </a:ext>
-            </a:extLst>
-          </p:cNvPr>
-          <p:cNvSpPr txBox="1"/>
-          <p:nvPr/>
-        </p:nvSpPr>
-        <p:spPr>
-          <a:xfrm>
-            <a:off x="10042525" y="3429000"/>
-            <a:ext cx="1235075" cy="369332"/>
-          </a:xfrm>
-          <a:prstGeom prst="rect">
-            <a:avLst/>
-          </a:prstGeom>
-          <a:noFill/>
-        </p:spPr>
-        <p:txBody>
-          <a:bodyPr wrap="square" rtlCol="0">
-            <a:spAutoFit/>
-          </a:bodyPr>
-          <a:lstStyle/>
-          <a:p>
-            <a:r>
-              <a:rPr lang="en-US" altLang="zh-CN" dirty="0"/>
-              <a:t>Based on</a:t>
-            </a:r>
-            <a:endParaRPr lang="zh-CN" altLang="en-US" dirty="0"/>
-          </a:p>
-        </p:txBody>
-      </p:sp>
-      <p:sp>
-        <p:nvSpPr>
-          <p:cNvPr id="28" name="矩形 27">
-            <a:extLst>
-              <a:ext uri="{FF2B5EF4-FFF2-40B4-BE49-F238E27FC236}">
-                <a16:creationId xmlns:a16="http://schemas.microsoft.com/office/drawing/2014/main" id="{D880FCCE-7103-9A73-DF05-607D4895CFFA}"/>
-              </a:ext>
-            </a:extLst>
-          </p:cNvPr>
-          <p:cNvSpPr/>
-          <p:nvPr/>
-        </p:nvSpPr>
-        <p:spPr>
-          <a:xfrm>
-            <a:off x="9302750" y="2498725"/>
-            <a:ext cx="2107093" cy="781050"/>
-          </a:xfrm>
-          <a:prstGeom prst="rect">
-            <a:avLst/>
-          </a:prstGeom>
-          <a:solidFill>
-            <a:srgbClr val="FF0000"/>
-          </a:solidFill>
-        </p:spPr>
-        <p:style>
-          <a:lnRef idx="2">
-            <a:schemeClr val="accent4">
-              <a:shade val="15000"/>
-            </a:schemeClr>
-          </a:lnRef>
-          <a:fillRef idx="1">
-            <a:schemeClr val="accent4"/>
-          </a:fillRef>
-          <a:effectRef idx="0">
-            <a:schemeClr val="accent4"/>
-          </a:effectRef>
-          <a:fontRef idx="minor">
-            <a:schemeClr val="lt1"/>
-          </a:fontRef>
-        </p:style>
-        <p:txBody>
-          <a:bodyPr rtlCol="0" anchor="ctr"/>
-          <a:lstStyle/>
-          <a:p>
-            <a:pPr algn="ctr"/>
-            <a:endParaRPr lang="zh-CN" altLang="en-US"/>
-          </a:p>
-        </p:txBody>
-      </p:sp>
-      <p:sp>
-        <p:nvSpPr>
-          <p:cNvPr id="29" name="文本框 28">
-            <a:extLst>
-              <a:ext uri="{FF2B5EF4-FFF2-40B4-BE49-F238E27FC236}">
-                <a16:creationId xmlns:a16="http://schemas.microsoft.com/office/drawing/2014/main" id="{4EF0427C-E840-5409-49CD-F2C8B5FCE8F9}"/>
-              </a:ext>
-            </a:extLst>
-          </p:cNvPr>
-          <p:cNvSpPr txBox="1"/>
-          <p:nvPr/>
-        </p:nvSpPr>
-        <p:spPr>
-          <a:xfrm>
-            <a:off x="9404350" y="2673350"/>
-            <a:ext cx="1809470" cy="369332"/>
-          </a:xfrm>
-          <a:prstGeom prst="rect">
-            <a:avLst/>
-          </a:prstGeom>
-          <a:noFill/>
-        </p:spPr>
-        <p:txBody>
-          <a:bodyPr wrap="square" rtlCol="0">
-            <a:spAutoFit/>
-          </a:bodyPr>
-          <a:lstStyle/>
-          <a:p>
-            <a:r>
-              <a:rPr lang="en-US" altLang="zh-CN" dirty="0"/>
-              <a:t>AMAR GENIS</a:t>
-            </a:r>
-            <a:endParaRPr lang="zh-CN" altLang="en-US" dirty="0"/>
-          </a:p>
-        </p:txBody>
-      </p:sp>
-      <p:sp>
-        <p:nvSpPr>
-          <p:cNvPr id="30" name="箭头: 下 29">
-            <a:extLst>
-              <a:ext uri="{FF2B5EF4-FFF2-40B4-BE49-F238E27FC236}">
-                <a16:creationId xmlns:a16="http://schemas.microsoft.com/office/drawing/2014/main" id="{C31BD1BD-369A-84A0-021F-9407484AB32E}"/>
-              </a:ext>
-            </a:extLst>
-          </p:cNvPr>
-          <p:cNvSpPr/>
-          <p:nvPr/>
-        </p:nvSpPr>
-        <p:spPr>
-          <a:xfrm>
-            <a:off x="9559290" y="2080591"/>
-            <a:ext cx="330835" cy="333653"/>
-          </a:xfrm>
-          <a:prstGeom prst="downArrow">
-            <a:avLst/>
-          </a:prstGeom>
-        </p:spPr>
-        <p:style>
-          <a:lnRef idx="2">
-            <a:schemeClr val="accent1">
-              <a:shade val="15000"/>
-            </a:schemeClr>
-          </a:lnRef>
-          <a:fillRef idx="1">
-            <a:schemeClr val="accent1"/>
-          </a:fillRef>
-          <a:effectRef idx="0">
-            <a:schemeClr val="accent1"/>
-          </a:effectRef>
-          <a:fontRef idx="minor">
-            <a:schemeClr val="lt1"/>
-          </a:fontRef>
-        </p:style>
-        <p:txBody>
-          <a:bodyPr rtlCol="0" anchor="ctr"/>
-          <a:lstStyle/>
-          <a:p>
-            <a:pPr algn="ctr"/>
-            <a:endParaRPr lang="zh-CN" altLang="en-US"/>
-          </a:p>
-        </p:txBody>
-      </p:sp>
-      <p:sp>
-        <p:nvSpPr>
-          <p:cNvPr id="31" name="文本框 30">
-            <a:extLst>
-              <a:ext uri="{FF2B5EF4-FFF2-40B4-BE49-F238E27FC236}">
-                <a16:creationId xmlns:a16="http://schemas.microsoft.com/office/drawing/2014/main" id="{C51AB83E-90C0-6DF1-EA2C-97C28F7E3EED}"/>
-              </a:ext>
-            </a:extLst>
-          </p:cNvPr>
-          <p:cNvSpPr txBox="1"/>
-          <p:nvPr/>
-        </p:nvSpPr>
-        <p:spPr>
-          <a:xfrm>
-            <a:off x="9974332" y="2013332"/>
-            <a:ext cx="1371459" cy="369332"/>
-          </a:xfrm>
-          <a:prstGeom prst="rect">
-            <a:avLst/>
-          </a:prstGeom>
-          <a:noFill/>
-        </p:spPr>
-        <p:txBody>
-          <a:bodyPr wrap="square" rtlCol="0">
-            <a:spAutoFit/>
-          </a:bodyPr>
-          <a:lstStyle/>
-          <a:p>
-            <a:r>
-              <a:rPr lang="en-US" altLang="zh-CN" dirty="0"/>
-              <a:t>Based on</a:t>
-            </a:r>
-            <a:endParaRPr lang="zh-CN" altLang="en-US" dirty="0"/>
-          </a:p>
-        </p:txBody>
-      </p:sp>
-      <p:sp>
-        <p:nvSpPr>
-          <p:cNvPr id="32" name="文本框 31">
-            <a:extLst>
-              <a:ext uri="{FF2B5EF4-FFF2-40B4-BE49-F238E27FC236}">
-                <a16:creationId xmlns:a16="http://schemas.microsoft.com/office/drawing/2014/main" id="{985A8567-5450-9BDE-A4B3-74EC53705452}"/>
-              </a:ext>
-            </a:extLst>
-          </p:cNvPr>
-          <p:cNvSpPr txBox="1"/>
-          <p:nvPr/>
-        </p:nvSpPr>
-        <p:spPr>
-          <a:xfrm>
-            <a:off x="81998" y="4489660"/>
-            <a:ext cx="2758108" cy="646331"/>
-          </a:xfrm>
-          <a:prstGeom prst="rect">
-            <a:avLst/>
-          </a:prstGeom>
-          <a:noFill/>
-        </p:spPr>
-        <p:txBody>
-          <a:bodyPr wrap="square" rtlCol="0">
-            <a:spAutoFit/>
-          </a:bodyPr>
-          <a:lstStyle/>
-          <a:p>
-            <a:r>
-              <a:rPr lang="en-US" altLang="zh-CN" dirty="0"/>
-              <a:t>1.This is a world model based on </a:t>
-            </a:r>
-            <a:r>
-              <a:rPr lang="en-US" altLang="zh-CN" dirty="0" err="1"/>
-              <a:t>SpatialLM</a:t>
-            </a:r>
-            <a:r>
-              <a:rPr lang="en-US" altLang="zh-CN" dirty="0"/>
-              <a:t>.</a:t>
-            </a:r>
-            <a:endParaRPr lang="zh-CN" altLang="en-US" dirty="0"/>
-          </a:p>
-        </p:txBody>
-      </p:sp>
-      <p:sp>
-        <p:nvSpPr>
-          <p:cNvPr id="33" name="文本框 32">
-            <a:extLst>
-              <a:ext uri="{FF2B5EF4-FFF2-40B4-BE49-F238E27FC236}">
-                <a16:creationId xmlns:a16="http://schemas.microsoft.com/office/drawing/2014/main" id="{19490E92-BF83-D9A6-E7D6-9841493BFCED}"/>
-              </a:ext>
-            </a:extLst>
-          </p:cNvPr>
-          <p:cNvSpPr txBox="1"/>
-          <p:nvPr/>
-        </p:nvSpPr>
-        <p:spPr>
-          <a:xfrm>
-            <a:off x="104361" y="4086765"/>
-            <a:ext cx="1316935" cy="369332"/>
-          </a:xfrm>
-          <a:prstGeom prst="rect">
-            <a:avLst/>
-          </a:prstGeom>
-          <a:noFill/>
-        </p:spPr>
-        <p:txBody>
-          <a:bodyPr wrap="square" rtlCol="0">
-            <a:spAutoFit/>
-          </a:bodyPr>
-          <a:lstStyle/>
-          <a:p>
-            <a:r>
-              <a:rPr lang="en-US" altLang="zh-CN" dirty="0"/>
-              <a:t>Notes:</a:t>
-            </a:r>
-            <a:endParaRPr lang="zh-CN" altLang="en-US" dirty="0"/>
-          </a:p>
-        </p:txBody>
-      </p:sp>
-      <p:sp>
-        <p:nvSpPr>
-          <p:cNvPr id="34" name="文本框 33">
-            <a:extLst>
-              <a:ext uri="{FF2B5EF4-FFF2-40B4-BE49-F238E27FC236}">
-                <a16:creationId xmlns:a16="http://schemas.microsoft.com/office/drawing/2014/main" id="{0EC00E08-8A78-CF2F-D06A-505750BC38A3}"/>
-              </a:ext>
-            </a:extLst>
-          </p:cNvPr>
-          <p:cNvSpPr txBox="1"/>
-          <p:nvPr/>
-        </p:nvSpPr>
-        <p:spPr>
-          <a:xfrm>
-            <a:off x="160682" y="61404"/>
-            <a:ext cx="4635683" cy="369332"/>
-          </a:xfrm>
-          <a:prstGeom prst="rect">
-            <a:avLst/>
-          </a:prstGeom>
-          <a:noFill/>
-        </p:spPr>
-        <p:txBody>
-          <a:bodyPr wrap="square" rtlCol="0">
-            <a:spAutoFit/>
-          </a:bodyPr>
-          <a:lstStyle/>
-          <a:p>
-            <a:r>
-              <a:rPr lang="en-US" altLang="zh-CN" dirty="0">
-                <a:latin typeface="Noto Sans JP Black" panose="020B0200000000000000" pitchFamily="34" charset="-122"/>
-                <a:ea typeface="Noto Sans JP Black" panose="020B0200000000000000" pitchFamily="34" charset="-122"/>
-              </a:rPr>
-              <a:t>AMAR ENGINE     </a:t>
-            </a:r>
-            <a:r>
-              <a:rPr lang="en-US" altLang="zh-CN" dirty="0"/>
-              <a:t>User Experience Flow</a:t>
-            </a:r>
-            <a:endParaRPr lang="zh-CN" altLang="en-US" dirty="0">
-              <a:latin typeface="Noto Sans JP Black" panose="020B0200000000000000" pitchFamily="34" charset="-122"/>
-              <a:ea typeface="Noto Sans JP Black" panose="020B0200000000000000" pitchFamily="34" charset="-122"/>
-            </a:endParaRPr>
-          </a:p>
-        </p:txBody>
-      </p:sp>
-      <p:sp>
-        <p:nvSpPr>
-          <p:cNvPr id="35" name="文本框 34">
-            <a:extLst>
-              <a:ext uri="{FF2B5EF4-FFF2-40B4-BE49-F238E27FC236}">
-                <a16:creationId xmlns:a16="http://schemas.microsoft.com/office/drawing/2014/main" id="{8F7F5F47-DAAD-CCCA-1923-407607941B71}"/>
-              </a:ext>
-            </a:extLst>
-          </p:cNvPr>
-          <p:cNvSpPr txBox="1"/>
-          <p:nvPr/>
-        </p:nvSpPr>
-        <p:spPr>
-          <a:xfrm>
-            <a:off x="104361" y="800100"/>
-            <a:ext cx="1041125" cy="261610"/>
-          </a:xfrm>
-          <a:prstGeom prst="rect">
-            <a:avLst/>
-          </a:prstGeom>
-          <a:noFill/>
-        </p:spPr>
-        <p:txBody>
-          <a:bodyPr wrap="square" rtlCol="0">
-            <a:spAutoFit/>
-          </a:bodyPr>
-          <a:lstStyle/>
-          <a:p>
-            <a:r>
-              <a:rPr lang="en-US" altLang="zh-CN" sz="1100" dirty="0" err="1">
-                <a:latin typeface="Britannic Bold" panose="020B0903060703020204" pitchFamily="34" charset="0"/>
-              </a:rPr>
-              <a:t>ceaserzhao</a:t>
-            </a:r>
-            <a:endParaRPr lang="zh-CN" altLang="en-US" sz="1100" dirty="0">
-              <a:latin typeface="Britannic Bold" panose="020B0903060703020204" pitchFamily="34" charset="0"/>
-            </a:endParaRPr>
-          </a:p>
-        </p:txBody>
-      </p:sp>
-      <p:sp>
-        <p:nvSpPr>
-          <p:cNvPr id="36" name="矩形 35">
-            <a:extLst>
-              <a:ext uri="{FF2B5EF4-FFF2-40B4-BE49-F238E27FC236}">
-                <a16:creationId xmlns:a16="http://schemas.microsoft.com/office/drawing/2014/main" id="{4A1544BB-AF39-1C71-DF33-8DB37E71A01D}"/>
-              </a:ext>
-            </a:extLst>
-          </p:cNvPr>
-          <p:cNvSpPr/>
-          <p:nvPr/>
-        </p:nvSpPr>
-        <p:spPr>
-          <a:xfrm>
-            <a:off x="5610760" y="558284"/>
-            <a:ext cx="2737025" cy="5048228"/>
-          </a:xfrm>
-          <a:prstGeom prst="rect">
-            <a:avLst/>
-          </a:prstGeom>
-        </p:spPr>
-        <p:style>
-          <a:lnRef idx="2">
-            <a:schemeClr val="accent2">
-              <a:shade val="15000"/>
-            </a:schemeClr>
-          </a:lnRef>
-          <a:fillRef idx="1">
-            <a:schemeClr val="accent2"/>
-          </a:fillRef>
-          <a:effectRef idx="0">
-            <a:schemeClr val="accent2"/>
-          </a:effectRef>
-          <a:fontRef idx="minor">
-            <a:schemeClr val="lt1"/>
-          </a:fontRef>
-        </p:style>
-        <p:txBody>
-          <a:bodyPr rtlCol="0" anchor="ctr"/>
-          <a:lstStyle/>
-          <a:p>
-            <a:pPr algn="ctr"/>
-            <a:endParaRPr lang="zh-CN" altLang="en-US" dirty="0"/>
-          </a:p>
-        </p:txBody>
-      </p:sp>
-      <p:sp>
-        <p:nvSpPr>
-          <p:cNvPr id="37" name="文本框 36">
-            <a:extLst>
-              <a:ext uri="{FF2B5EF4-FFF2-40B4-BE49-F238E27FC236}">
-                <a16:creationId xmlns:a16="http://schemas.microsoft.com/office/drawing/2014/main" id="{347E795D-4F29-B6D3-743C-EAC0C77F773F}"/>
-              </a:ext>
-            </a:extLst>
-          </p:cNvPr>
-          <p:cNvSpPr txBox="1"/>
-          <p:nvPr/>
-        </p:nvSpPr>
-        <p:spPr>
-          <a:xfrm>
-            <a:off x="6341164" y="646115"/>
-            <a:ext cx="2216426" cy="369332"/>
-          </a:xfrm>
-          <a:prstGeom prst="rect">
-            <a:avLst/>
-          </a:prstGeom>
-          <a:noFill/>
-        </p:spPr>
-        <p:txBody>
-          <a:bodyPr wrap="square" rtlCol="0">
-            <a:spAutoFit/>
-          </a:bodyPr>
-          <a:lstStyle/>
-          <a:p>
-            <a:r>
-              <a:rPr lang="en-US" altLang="zh-CN" dirty="0"/>
-              <a:t>AME ADMIN</a:t>
-            </a:r>
-            <a:endParaRPr lang="zh-CN" altLang="en-US" dirty="0"/>
-          </a:p>
-        </p:txBody>
-      </p:sp>
-      <p:sp>
-        <p:nvSpPr>
-          <p:cNvPr id="39" name="矩形 38">
-            <a:extLst>
-              <a:ext uri="{FF2B5EF4-FFF2-40B4-BE49-F238E27FC236}">
-                <a16:creationId xmlns:a16="http://schemas.microsoft.com/office/drawing/2014/main" id="{6CD7EADD-6243-D921-FA03-9AD0956E200C}"/>
-              </a:ext>
-            </a:extLst>
-          </p:cNvPr>
-          <p:cNvSpPr/>
-          <p:nvPr/>
-        </p:nvSpPr>
-        <p:spPr>
-          <a:xfrm>
-            <a:off x="3436711" y="4471454"/>
-            <a:ext cx="1604484" cy="552968"/>
-          </a:xfrm>
-          <a:prstGeom prst="rect">
-            <a:avLst/>
-          </a:prstGeom>
-        </p:spPr>
-        <p:style>
-          <a:lnRef idx="2">
-            <a:schemeClr val="accent6">
-              <a:shade val="15000"/>
-            </a:schemeClr>
-          </a:lnRef>
-          <a:fillRef idx="1">
-            <a:schemeClr val="accent6"/>
-          </a:fillRef>
-          <a:effectRef idx="0">
-            <a:schemeClr val="accent6"/>
-          </a:effectRef>
-          <a:fontRef idx="minor">
-            <a:schemeClr val="lt1"/>
-          </a:fontRef>
-        </p:style>
-        <p:txBody>
-          <a:bodyPr rtlCol="0" anchor="ctr"/>
-          <a:lstStyle/>
-          <a:p>
-            <a:pPr algn="ctr"/>
-            <a:endParaRPr lang="zh-CN" altLang="en-US"/>
-          </a:p>
-        </p:txBody>
-      </p:sp>
-      <p:sp>
-        <p:nvSpPr>
-          <p:cNvPr id="38" name="箭头: 右 37">
-            <a:extLst>
-              <a:ext uri="{FF2B5EF4-FFF2-40B4-BE49-F238E27FC236}">
-                <a16:creationId xmlns:a16="http://schemas.microsoft.com/office/drawing/2014/main" id="{A147669C-5D84-B053-896E-C267DF095108}"/>
-              </a:ext>
-            </a:extLst>
-          </p:cNvPr>
-          <p:cNvSpPr/>
-          <p:nvPr/>
-        </p:nvSpPr>
-        <p:spPr>
-          <a:xfrm rot="3387979">
-            <a:off x="2522053" y="3969231"/>
-            <a:ext cx="1480950" cy="104801"/>
-          </a:xfrm>
-          <a:prstGeom prst="rightArrow">
-            <a:avLst/>
-          </a:prstGeom>
-        </p:spPr>
-        <p:style>
-          <a:lnRef idx="2">
-            <a:schemeClr val="accent1">
-              <a:shade val="15000"/>
-            </a:schemeClr>
-          </a:lnRef>
-          <a:fillRef idx="1">
-            <a:schemeClr val="accent1"/>
-          </a:fillRef>
-          <a:effectRef idx="0">
-            <a:schemeClr val="accent1"/>
-          </a:effectRef>
-          <a:fontRef idx="minor">
-            <a:schemeClr val="lt1"/>
-          </a:fontRef>
-        </p:style>
-        <p:txBody>
-          <a:bodyPr rtlCol="0" anchor="ctr"/>
-          <a:lstStyle/>
-          <a:p>
-            <a:pPr algn="ctr"/>
-            <a:endParaRPr lang="zh-CN" altLang="en-US"/>
-          </a:p>
-        </p:txBody>
-      </p:sp>
-      <p:sp>
-        <p:nvSpPr>
-          <p:cNvPr id="40" name="文本框 39">
-            <a:extLst>
-              <a:ext uri="{FF2B5EF4-FFF2-40B4-BE49-F238E27FC236}">
-                <a16:creationId xmlns:a16="http://schemas.microsoft.com/office/drawing/2014/main" id="{3169AFDA-52E0-C61E-B0EA-F90CCD6F3261}"/>
-              </a:ext>
-            </a:extLst>
-          </p:cNvPr>
-          <p:cNvSpPr txBox="1"/>
-          <p:nvPr/>
-        </p:nvSpPr>
-        <p:spPr>
-          <a:xfrm>
-            <a:off x="3412207" y="4575579"/>
-            <a:ext cx="1729418" cy="369332"/>
-          </a:xfrm>
-          <a:prstGeom prst="rect">
-            <a:avLst/>
-          </a:prstGeom>
-          <a:noFill/>
-        </p:spPr>
-        <p:txBody>
-          <a:bodyPr wrap="square" rtlCol="0">
-            <a:spAutoFit/>
-          </a:bodyPr>
-          <a:lstStyle/>
-          <a:p>
-            <a:r>
-              <a:rPr lang="en-US" altLang="zh-CN" dirty="0"/>
-              <a:t>AME SCANNER</a:t>
-            </a:r>
-            <a:endParaRPr lang="zh-CN" altLang="en-US" dirty="0"/>
-          </a:p>
-        </p:txBody>
-      </p:sp>
-      <p:pic>
-        <p:nvPicPr>
-          <p:cNvPr id="42" name="图片 41" descr="徽标, 公司名称&#10;&#10;AI 生成的内容可能不正确。">
-            <a:extLst>
-              <a:ext uri="{FF2B5EF4-FFF2-40B4-BE49-F238E27FC236}">
-                <a16:creationId xmlns:a16="http://schemas.microsoft.com/office/drawing/2014/main" id="{1185C566-0941-CCAE-731E-B1D0F3C298BF}"/>
-              </a:ext>
-            </a:extLst>
-          </p:cNvPr>
-          <p:cNvPicPr>
-            <a:picLocks noChangeAspect="1"/>
-          </p:cNvPicPr>
-          <p:nvPr/>
-        </p:nvPicPr>
-        <p:blipFill>
-          <a:blip r:embed="rId3">
-            <a:extLst>
-              <a:ext uri="{28A0092B-C50C-407E-A947-70E740481C1C}">
-                <a14:useLocalDpi xmlns:a14="http://schemas.microsoft.com/office/drawing/2010/main" val="0"/>
-              </a:ext>
-            </a:extLst>
-          </a:blip>
-          <a:stretch>
-            <a:fillRect/>
-          </a:stretch>
-        </p:blipFill>
-        <p:spPr>
-          <a:xfrm>
-            <a:off x="89866" y="1267033"/>
-            <a:ext cx="930965" cy="930965"/>
-          </a:xfrm>
-          <a:prstGeom prst="rect">
-            <a:avLst/>
-          </a:prstGeom>
-        </p:spPr>
-      </p:pic>
-      <p:sp>
-        <p:nvSpPr>
-          <p:cNvPr id="43" name="箭头: 右 42">
-            <a:extLst>
-              <a:ext uri="{FF2B5EF4-FFF2-40B4-BE49-F238E27FC236}">
-                <a16:creationId xmlns:a16="http://schemas.microsoft.com/office/drawing/2014/main" id="{BE5614AD-DE1D-D731-B3EC-78B017719254}"/>
-              </a:ext>
-            </a:extLst>
-          </p:cNvPr>
-          <p:cNvSpPr/>
-          <p:nvPr/>
-        </p:nvSpPr>
-        <p:spPr>
-          <a:xfrm>
-            <a:off x="8348870" y="1263650"/>
-            <a:ext cx="984387" cy="461407"/>
-          </a:xfrm>
-          <a:prstGeom prst="rightArrow">
-            <a:avLst/>
-          </a:prstGeom>
-        </p:spPr>
-        <p:style>
-          <a:lnRef idx="2">
-            <a:schemeClr val="accent1">
-              <a:shade val="15000"/>
-            </a:schemeClr>
-          </a:lnRef>
-          <a:fillRef idx="1">
-            <a:schemeClr val="accent1"/>
-          </a:fillRef>
-          <a:effectRef idx="0">
-            <a:schemeClr val="accent1"/>
-          </a:effectRef>
-          <a:fontRef idx="minor">
-            <a:schemeClr val="lt1"/>
-          </a:fontRef>
-        </p:style>
-        <p:txBody>
-          <a:bodyPr rtlCol="0" anchor="ctr"/>
-          <a:lstStyle/>
-          <a:p>
-            <a:pPr algn="ctr"/>
-            <a:endParaRPr lang="zh-CN" altLang="en-US"/>
-          </a:p>
-        </p:txBody>
-      </p:sp>
-      <p:sp>
-        <p:nvSpPr>
-          <p:cNvPr id="44" name="椭圆 43">
-            <a:extLst>
-              <a:ext uri="{FF2B5EF4-FFF2-40B4-BE49-F238E27FC236}">
-                <a16:creationId xmlns:a16="http://schemas.microsoft.com/office/drawing/2014/main" id="{7507A5E4-71F8-791F-BCCC-06F99122A4FE}"/>
-              </a:ext>
-            </a:extLst>
-          </p:cNvPr>
-          <p:cNvSpPr/>
-          <p:nvPr/>
-        </p:nvSpPr>
-        <p:spPr>
-          <a:xfrm>
-            <a:off x="8887789" y="1390608"/>
-            <a:ext cx="165100" cy="177800"/>
-          </a:xfrm>
-          <a:prstGeom prst="ellipse">
-            <a:avLst/>
-          </a:prstGeom>
-        </p:spPr>
-        <p:style>
-          <a:lnRef idx="2">
-            <a:schemeClr val="accent2">
-              <a:shade val="15000"/>
-            </a:schemeClr>
-          </a:lnRef>
-          <a:fillRef idx="1">
-            <a:schemeClr val="accent2"/>
-          </a:fillRef>
-          <a:effectRef idx="0">
-            <a:schemeClr val="accent2"/>
-          </a:effectRef>
-          <a:fontRef idx="minor">
-            <a:schemeClr val="lt1"/>
-          </a:fontRef>
-        </p:style>
-        <p:txBody>
-          <a:bodyPr rtlCol="0" anchor="ctr"/>
-          <a:lstStyle/>
-          <a:p>
-            <a:pPr algn="ctr"/>
-            <a:endParaRPr lang="zh-CN" altLang="en-US"/>
-          </a:p>
-        </p:txBody>
-      </p:sp>
-      <p:sp>
-        <p:nvSpPr>
-          <p:cNvPr id="45" name="文本框 44">
-            <a:extLst>
-              <a:ext uri="{FF2B5EF4-FFF2-40B4-BE49-F238E27FC236}">
-                <a16:creationId xmlns:a16="http://schemas.microsoft.com/office/drawing/2014/main" id="{793CA584-C824-EF90-2C46-ADFFCFEF5D1B}"/>
-              </a:ext>
-            </a:extLst>
-          </p:cNvPr>
-          <p:cNvSpPr txBox="1"/>
-          <p:nvPr/>
-        </p:nvSpPr>
-        <p:spPr>
-          <a:xfrm>
-            <a:off x="8875955" y="1341008"/>
-            <a:ext cx="104775" cy="276999"/>
-          </a:xfrm>
-          <a:prstGeom prst="rect">
-            <a:avLst/>
-          </a:prstGeom>
-          <a:noFill/>
-        </p:spPr>
-        <p:txBody>
-          <a:bodyPr wrap="square" rtlCol="0">
-            <a:spAutoFit/>
-          </a:bodyPr>
-          <a:lstStyle/>
-          <a:p>
-            <a:r>
-              <a:rPr lang="en-US" altLang="zh-CN" sz="1200" dirty="0"/>
-              <a:t>2</a:t>
-            </a:r>
-            <a:endParaRPr lang="zh-CN" altLang="en-US" sz="1200" dirty="0"/>
-          </a:p>
-        </p:txBody>
-      </p:sp>
-      <p:sp>
-        <p:nvSpPr>
-          <p:cNvPr id="48" name="文本框 47">
-            <a:extLst>
-              <a:ext uri="{FF2B5EF4-FFF2-40B4-BE49-F238E27FC236}">
-                <a16:creationId xmlns:a16="http://schemas.microsoft.com/office/drawing/2014/main" id="{F354C7C6-FB1B-9D3D-BFC1-05AE942125F9}"/>
-              </a:ext>
-            </a:extLst>
-          </p:cNvPr>
-          <p:cNvSpPr txBox="1"/>
-          <p:nvPr/>
-        </p:nvSpPr>
-        <p:spPr>
-          <a:xfrm>
-            <a:off x="104361" y="5151804"/>
-            <a:ext cx="2251710" cy="646331"/>
-          </a:xfrm>
-          <a:prstGeom prst="rect">
-            <a:avLst/>
-          </a:prstGeom>
-          <a:noFill/>
-        </p:spPr>
-        <p:txBody>
-          <a:bodyPr wrap="square" rtlCol="0">
-            <a:spAutoFit/>
-          </a:bodyPr>
-          <a:lstStyle/>
-          <a:p>
-            <a:r>
-              <a:rPr lang="en-US" altLang="zh-CN" dirty="0"/>
-              <a:t>2.A series of complex processes</a:t>
-            </a:r>
-            <a:endParaRPr lang="zh-CN" altLang="en-US" dirty="0"/>
-          </a:p>
-        </p:txBody>
-      </p:sp>
-      <p:sp>
-        <p:nvSpPr>
-          <p:cNvPr id="54" name="文本框 53">
-            <a:extLst>
-              <a:ext uri="{FF2B5EF4-FFF2-40B4-BE49-F238E27FC236}">
-                <a16:creationId xmlns:a16="http://schemas.microsoft.com/office/drawing/2014/main" id="{50295B0E-594C-85D8-8168-93220D4456C5}"/>
-              </a:ext>
-            </a:extLst>
-          </p:cNvPr>
-          <p:cNvSpPr txBox="1"/>
-          <p:nvPr/>
-        </p:nvSpPr>
-        <p:spPr>
-          <a:xfrm>
-            <a:off x="119818" y="1002639"/>
-            <a:ext cx="1130892" cy="230832"/>
-          </a:xfrm>
-          <a:prstGeom prst="rect">
-            <a:avLst/>
-          </a:prstGeom>
-          <a:noFill/>
-        </p:spPr>
-        <p:txBody>
-          <a:bodyPr wrap="square" rtlCol="0">
-            <a:spAutoFit/>
-          </a:bodyPr>
-          <a:lstStyle/>
-          <a:p>
-            <a:r>
-              <a:rPr lang="en-US" altLang="zh-CN" sz="900" dirty="0">
-                <a:latin typeface="BIZ UDGothic" panose="020B0400000000000000" pitchFamily="33" charset="-128"/>
-                <a:ea typeface="BIZ UDGothic" panose="020B0400000000000000" pitchFamily="33" charset="-128"/>
-              </a:rPr>
-              <a:t>2.23.2026</a:t>
-            </a:r>
-            <a:endParaRPr lang="zh-CN" altLang="en-US" sz="900" dirty="0">
-              <a:latin typeface="BIZ UDGothic" panose="020B0400000000000000" pitchFamily="33" charset="-128"/>
-              <a:ea typeface="BIZ UDGothic" panose="020B0400000000000000" pitchFamily="33" charset="-128"/>
-            </a:endParaRPr>
-          </a:p>
-        </p:txBody>
-      </p:sp>
-      <p:sp>
-        <p:nvSpPr>
-          <p:cNvPr id="55" name="矩形 54">
-            <a:extLst>
-              <a:ext uri="{FF2B5EF4-FFF2-40B4-BE49-F238E27FC236}">
-                <a16:creationId xmlns:a16="http://schemas.microsoft.com/office/drawing/2014/main" id="{A94C40C3-64B0-CCA4-53B5-999BD45EED56}"/>
-              </a:ext>
-            </a:extLst>
-          </p:cNvPr>
-          <p:cNvSpPr/>
-          <p:nvPr/>
-        </p:nvSpPr>
-        <p:spPr>
-          <a:xfrm>
-            <a:off x="5916646" y="4489659"/>
-            <a:ext cx="2329070" cy="919718"/>
-          </a:xfrm>
-          <a:prstGeom prst="rect">
-            <a:avLst/>
-          </a:prstGeom>
-        </p:spPr>
-        <p:style>
-          <a:lnRef idx="2">
-            <a:schemeClr val="accent1">
-              <a:shade val="15000"/>
-            </a:schemeClr>
-          </a:lnRef>
-          <a:fillRef idx="1">
-            <a:schemeClr val="accent1"/>
-          </a:fillRef>
-          <a:effectRef idx="0">
-            <a:schemeClr val="accent1"/>
-          </a:effectRef>
-          <a:fontRef idx="minor">
-            <a:schemeClr val="lt1"/>
-          </a:fontRef>
-        </p:style>
-        <p:txBody>
-          <a:bodyPr rtlCol="0" anchor="ctr"/>
-          <a:lstStyle/>
-          <a:p>
-            <a:pPr algn="ctr"/>
-            <a:endParaRPr lang="zh-CN" altLang="en-US" dirty="0"/>
-          </a:p>
-        </p:txBody>
-      </p:sp>
-      <p:sp>
-        <p:nvSpPr>
-          <p:cNvPr id="56" name="椭圆 55">
-            <a:extLst>
-              <a:ext uri="{FF2B5EF4-FFF2-40B4-BE49-F238E27FC236}">
-                <a16:creationId xmlns:a16="http://schemas.microsoft.com/office/drawing/2014/main" id="{7C41404F-074F-EFA6-6F99-23FE4C2D4586}"/>
-              </a:ext>
-            </a:extLst>
-          </p:cNvPr>
-          <p:cNvSpPr/>
-          <p:nvPr/>
-        </p:nvSpPr>
-        <p:spPr>
-          <a:xfrm>
-            <a:off x="8004022" y="4561514"/>
-            <a:ext cx="165100" cy="177800"/>
-          </a:xfrm>
-          <a:prstGeom prst="ellipse">
-            <a:avLst/>
-          </a:prstGeom>
-        </p:spPr>
-        <p:style>
-          <a:lnRef idx="2">
-            <a:schemeClr val="accent2">
-              <a:shade val="15000"/>
-            </a:schemeClr>
-          </a:lnRef>
-          <a:fillRef idx="1">
-            <a:schemeClr val="accent2"/>
-          </a:fillRef>
-          <a:effectRef idx="0">
-            <a:schemeClr val="accent2"/>
-          </a:effectRef>
-          <a:fontRef idx="minor">
-            <a:schemeClr val="lt1"/>
-          </a:fontRef>
-        </p:style>
-        <p:txBody>
-          <a:bodyPr rtlCol="0" anchor="ctr"/>
-          <a:lstStyle/>
-          <a:p>
-            <a:pPr algn="ctr"/>
-            <a:endParaRPr lang="zh-CN" altLang="en-US"/>
-          </a:p>
-        </p:txBody>
-      </p:sp>
-      <p:sp>
-        <p:nvSpPr>
-          <p:cNvPr id="59" name="文本框 58">
-            <a:extLst>
-              <a:ext uri="{FF2B5EF4-FFF2-40B4-BE49-F238E27FC236}">
-                <a16:creationId xmlns:a16="http://schemas.microsoft.com/office/drawing/2014/main" id="{FFFDC12D-85AB-9D4D-9545-B52B2D7A92B1}"/>
-              </a:ext>
-            </a:extLst>
-          </p:cNvPr>
-          <p:cNvSpPr txBox="1"/>
-          <p:nvPr/>
-        </p:nvSpPr>
-        <p:spPr>
-          <a:xfrm rot="2135733">
-            <a:off x="3502939" y="3728810"/>
-            <a:ext cx="2800350" cy="246262"/>
-          </a:xfrm>
-          <a:prstGeom prst="rect">
-            <a:avLst/>
-          </a:prstGeom>
-          <a:noFill/>
-        </p:spPr>
-        <p:txBody>
-          <a:bodyPr wrap="square" rtlCol="0">
-            <a:spAutoFit/>
-          </a:bodyPr>
-          <a:lstStyle/>
-          <a:p>
-            <a:r>
-              <a:rPr lang="en-US" altLang="zh-CN" sz="1000" dirty="0"/>
-              <a:t>SKILLS, Or rather, a kind of standard</a:t>
-            </a:r>
-            <a:endParaRPr lang="zh-CN" altLang="en-US" sz="1000" dirty="0"/>
-          </a:p>
-        </p:txBody>
-      </p:sp>
-      <p:sp>
-        <p:nvSpPr>
-          <p:cNvPr id="57" name="文本框 56">
-            <a:extLst>
-              <a:ext uri="{FF2B5EF4-FFF2-40B4-BE49-F238E27FC236}">
-                <a16:creationId xmlns:a16="http://schemas.microsoft.com/office/drawing/2014/main" id="{B0104898-28DC-AACA-4AAD-10E7B0A39FC3}"/>
-              </a:ext>
-            </a:extLst>
-          </p:cNvPr>
-          <p:cNvSpPr txBox="1"/>
-          <p:nvPr/>
-        </p:nvSpPr>
-        <p:spPr>
-          <a:xfrm>
-            <a:off x="7976789" y="4512965"/>
-            <a:ext cx="126206" cy="276999"/>
-          </a:xfrm>
-          <a:prstGeom prst="rect">
-            <a:avLst/>
-          </a:prstGeom>
-          <a:noFill/>
-        </p:spPr>
-        <p:txBody>
-          <a:bodyPr wrap="square" rtlCol="0">
-            <a:spAutoFit/>
-          </a:bodyPr>
-          <a:lstStyle/>
-          <a:p>
-            <a:r>
-              <a:rPr lang="en-US" altLang="zh-CN" sz="1200" dirty="0"/>
-              <a:t>3</a:t>
-            </a:r>
-            <a:endParaRPr lang="zh-CN" altLang="en-US" sz="1200" dirty="0"/>
-          </a:p>
-        </p:txBody>
-      </p:sp>
-      <p:sp>
-        <p:nvSpPr>
-          <p:cNvPr id="60" name="文本框 59">
-            <a:extLst>
-              <a:ext uri="{FF2B5EF4-FFF2-40B4-BE49-F238E27FC236}">
-                <a16:creationId xmlns:a16="http://schemas.microsoft.com/office/drawing/2014/main" id="{B01BC64A-0B9C-7C8D-5128-C63671FE39D0}"/>
-              </a:ext>
-            </a:extLst>
-          </p:cNvPr>
-          <p:cNvSpPr txBox="1"/>
-          <p:nvPr/>
-        </p:nvSpPr>
-        <p:spPr>
-          <a:xfrm>
-            <a:off x="6242973" y="4751746"/>
-            <a:ext cx="1992276" cy="369332"/>
-          </a:xfrm>
-          <a:prstGeom prst="rect">
-            <a:avLst/>
-          </a:prstGeom>
-          <a:noFill/>
-        </p:spPr>
-        <p:txBody>
-          <a:bodyPr wrap="square" rtlCol="0">
-            <a:spAutoFit/>
-          </a:bodyPr>
-          <a:lstStyle/>
-          <a:p>
-            <a:r>
-              <a:rPr lang="en-US" altLang="zh-CN" dirty="0"/>
-              <a:t>Information pool</a:t>
-            </a:r>
-            <a:endParaRPr lang="zh-CN" altLang="en-US" dirty="0"/>
-          </a:p>
-        </p:txBody>
-      </p:sp>
-      <p:sp>
-        <p:nvSpPr>
-          <p:cNvPr id="61" name="文本框 60">
-            <a:extLst>
-              <a:ext uri="{FF2B5EF4-FFF2-40B4-BE49-F238E27FC236}">
-                <a16:creationId xmlns:a16="http://schemas.microsoft.com/office/drawing/2014/main" id="{4FCD0B7A-C985-AB96-0D55-2070385574F8}"/>
-              </a:ext>
-            </a:extLst>
-          </p:cNvPr>
-          <p:cNvSpPr txBox="1"/>
-          <p:nvPr/>
-        </p:nvSpPr>
-        <p:spPr>
-          <a:xfrm>
-            <a:off x="71396" y="5834724"/>
-            <a:ext cx="2847561" cy="923330"/>
-          </a:xfrm>
-          <a:prstGeom prst="rect">
-            <a:avLst/>
-          </a:prstGeom>
-          <a:noFill/>
-        </p:spPr>
-        <p:txBody>
-          <a:bodyPr wrap="square" rtlCol="0">
-            <a:spAutoFit/>
-          </a:bodyPr>
-          <a:lstStyle/>
-          <a:p>
-            <a:r>
-              <a:rPr lang="en-US" altLang="zh-CN" dirty="0"/>
-              <a:t>3.A brand new data format, similar to JSON, used to describe the world.</a:t>
-            </a:r>
-            <a:endParaRPr lang="zh-CN" altLang="en-US" dirty="0"/>
-          </a:p>
-        </p:txBody>
-      </p:sp>
-      <p:sp>
-        <p:nvSpPr>
-          <p:cNvPr id="64" name="矩形 63">
-            <a:extLst>
-              <a:ext uri="{FF2B5EF4-FFF2-40B4-BE49-F238E27FC236}">
-                <a16:creationId xmlns:a16="http://schemas.microsoft.com/office/drawing/2014/main" id="{07C96C36-189C-C3D9-BE5B-FAA9F27B3497}"/>
-              </a:ext>
-            </a:extLst>
-          </p:cNvPr>
-          <p:cNvSpPr/>
-          <p:nvPr/>
-        </p:nvSpPr>
-        <p:spPr>
-          <a:xfrm>
-            <a:off x="9355381" y="1128091"/>
-            <a:ext cx="1990410" cy="800760"/>
-          </a:xfrm>
-          <a:prstGeom prst="rect">
-            <a:avLst/>
-          </a:prstGeom>
-        </p:spPr>
-        <p:style>
-          <a:lnRef idx="2">
-            <a:schemeClr val="accent4">
-              <a:shade val="15000"/>
-            </a:schemeClr>
-          </a:lnRef>
-          <a:fillRef idx="1">
-            <a:schemeClr val="accent4"/>
-          </a:fillRef>
-          <a:effectRef idx="0">
-            <a:schemeClr val="accent4"/>
-          </a:effectRef>
-          <a:fontRef idx="minor">
-            <a:schemeClr val="lt1"/>
-          </a:fontRef>
-        </p:style>
-        <p:txBody>
-          <a:bodyPr rtlCol="0" anchor="ctr"/>
-          <a:lstStyle/>
-          <a:p>
-            <a:pPr algn="ctr"/>
-            <a:endParaRPr lang="zh-CN" altLang="en-US"/>
-          </a:p>
-        </p:txBody>
-      </p:sp>
-      <p:sp>
-        <p:nvSpPr>
-          <p:cNvPr id="65" name="文本框 64">
-            <a:extLst>
-              <a:ext uri="{FF2B5EF4-FFF2-40B4-BE49-F238E27FC236}">
-                <a16:creationId xmlns:a16="http://schemas.microsoft.com/office/drawing/2014/main" id="{F137B836-92A7-B07C-ED52-F2FE7B306DD5}"/>
-              </a:ext>
-            </a:extLst>
-          </p:cNvPr>
-          <p:cNvSpPr txBox="1"/>
-          <p:nvPr/>
-        </p:nvSpPr>
-        <p:spPr>
-          <a:xfrm>
-            <a:off x="9509259" y="1361799"/>
-            <a:ext cx="1768341" cy="369332"/>
-          </a:xfrm>
-          <a:prstGeom prst="rect">
-            <a:avLst/>
-          </a:prstGeom>
-          <a:noFill/>
-        </p:spPr>
-        <p:txBody>
-          <a:bodyPr wrap="square" rtlCol="0">
-            <a:spAutoFit/>
-          </a:bodyPr>
-          <a:lstStyle/>
-          <a:p>
-            <a:r>
-              <a:rPr lang="en-US" altLang="zh-CN" dirty="0"/>
-              <a:t>AMAR WORLD</a:t>
-            </a:r>
-            <a:endParaRPr lang="zh-CN" altLang="en-US" dirty="0"/>
-          </a:p>
-        </p:txBody>
-      </p:sp>
-      <p:sp>
-        <p:nvSpPr>
-          <p:cNvPr id="66" name="椭圆 65">
-            <a:extLst>
-              <a:ext uri="{FF2B5EF4-FFF2-40B4-BE49-F238E27FC236}">
-                <a16:creationId xmlns:a16="http://schemas.microsoft.com/office/drawing/2014/main" id="{91FF571D-A82E-A345-2CD6-61B33F45B558}"/>
-              </a:ext>
-            </a:extLst>
-          </p:cNvPr>
-          <p:cNvSpPr/>
-          <p:nvPr/>
-        </p:nvSpPr>
-        <p:spPr>
-          <a:xfrm>
-            <a:off x="11146596" y="1206394"/>
-            <a:ext cx="165100" cy="177800"/>
-          </a:xfrm>
-          <a:prstGeom prst="ellipse">
-            <a:avLst/>
-          </a:prstGeom>
-        </p:spPr>
-        <p:style>
-          <a:lnRef idx="2">
-            <a:schemeClr val="accent2">
-              <a:shade val="15000"/>
-            </a:schemeClr>
-          </a:lnRef>
-          <a:fillRef idx="1">
-            <a:schemeClr val="accent2"/>
-          </a:fillRef>
-          <a:effectRef idx="0">
-            <a:schemeClr val="accent2"/>
-          </a:effectRef>
-          <a:fontRef idx="minor">
-            <a:schemeClr val="lt1"/>
-          </a:fontRef>
-        </p:style>
-        <p:txBody>
-          <a:bodyPr rtlCol="0" anchor="ctr"/>
-          <a:lstStyle/>
-          <a:p>
-            <a:pPr algn="ctr"/>
-            <a:endParaRPr lang="zh-CN" altLang="en-US"/>
-          </a:p>
-        </p:txBody>
-      </p:sp>
-      <p:sp>
-        <p:nvSpPr>
-          <p:cNvPr id="23" name="箭头: 下 22">
-            <a:extLst>
-              <a:ext uri="{FF2B5EF4-FFF2-40B4-BE49-F238E27FC236}">
-                <a16:creationId xmlns:a16="http://schemas.microsoft.com/office/drawing/2014/main" id="{4F7D1D11-8F9D-80B6-8645-FCB0F675687E}"/>
-              </a:ext>
-            </a:extLst>
-          </p:cNvPr>
-          <p:cNvSpPr/>
-          <p:nvPr/>
-        </p:nvSpPr>
-        <p:spPr>
-          <a:xfrm rot="18322881">
-            <a:off x="4537787" y="1914341"/>
-            <a:ext cx="65706" cy="3652592"/>
-          </a:xfrm>
-          <a:prstGeom prst="downArrow">
-            <a:avLst/>
-          </a:prstGeom>
-        </p:spPr>
-        <p:style>
-          <a:lnRef idx="2">
-            <a:schemeClr val="accent1">
-              <a:shade val="15000"/>
-            </a:schemeClr>
-          </a:lnRef>
-          <a:fillRef idx="1">
-            <a:schemeClr val="accent1"/>
-          </a:fillRef>
-          <a:effectRef idx="0">
-            <a:schemeClr val="accent1"/>
-          </a:effectRef>
-          <a:fontRef idx="minor">
-            <a:schemeClr val="lt1"/>
-          </a:fontRef>
-        </p:style>
-        <p:txBody>
-          <a:bodyPr rtlCol="0" anchor="ctr"/>
-          <a:lstStyle/>
-          <a:p>
-            <a:pPr algn="ctr"/>
-            <a:endParaRPr lang="zh-CN" altLang="en-US"/>
-          </a:p>
-        </p:txBody>
-      </p:sp>
-      <p:sp>
-        <p:nvSpPr>
-          <p:cNvPr id="67" name="箭头: 右 66">
-            <a:extLst>
-              <a:ext uri="{FF2B5EF4-FFF2-40B4-BE49-F238E27FC236}">
-                <a16:creationId xmlns:a16="http://schemas.microsoft.com/office/drawing/2014/main" id="{1AAC0EBF-B5EE-90C9-23A8-F154B4C463E8}"/>
-              </a:ext>
-            </a:extLst>
-          </p:cNvPr>
-          <p:cNvSpPr/>
-          <p:nvPr/>
-        </p:nvSpPr>
-        <p:spPr>
-          <a:xfrm rot="1033216">
-            <a:off x="4784492" y="5102124"/>
-            <a:ext cx="1483561" cy="144424"/>
-          </a:xfrm>
-          <a:prstGeom prst="rightArrow">
-            <a:avLst/>
-          </a:prstGeom>
-        </p:spPr>
-        <p:style>
-          <a:lnRef idx="2">
-            <a:schemeClr val="accent1">
-              <a:shade val="15000"/>
-            </a:schemeClr>
-          </a:lnRef>
-          <a:fillRef idx="1">
-            <a:schemeClr val="accent1"/>
-          </a:fillRef>
-          <a:effectRef idx="0">
-            <a:schemeClr val="accent1"/>
-          </a:effectRef>
-          <a:fontRef idx="minor">
-            <a:schemeClr val="lt1"/>
-          </a:fontRef>
-        </p:style>
-        <p:txBody>
-          <a:bodyPr rtlCol="0" anchor="ctr"/>
-          <a:lstStyle/>
-          <a:p>
-            <a:pPr algn="ctr"/>
-            <a:endParaRPr lang="zh-CN" altLang="en-US"/>
-          </a:p>
-        </p:txBody>
-      </p:sp>
-      <p:sp>
-        <p:nvSpPr>
-          <p:cNvPr id="68" name="箭头: 右 67">
-            <a:extLst>
-              <a:ext uri="{FF2B5EF4-FFF2-40B4-BE49-F238E27FC236}">
-                <a16:creationId xmlns:a16="http://schemas.microsoft.com/office/drawing/2014/main" id="{B53A8CC6-455A-49B3-EEAA-4547947B409E}"/>
-              </a:ext>
-            </a:extLst>
-          </p:cNvPr>
-          <p:cNvSpPr/>
-          <p:nvPr/>
-        </p:nvSpPr>
-        <p:spPr>
-          <a:xfrm rot="3389305" flipV="1">
-            <a:off x="3481763" y="3198494"/>
-            <a:ext cx="3545715" cy="139763"/>
-          </a:xfrm>
-          <a:prstGeom prst="rightArrow">
-            <a:avLst/>
-          </a:prstGeom>
-        </p:spPr>
-        <p:style>
-          <a:lnRef idx="2">
-            <a:schemeClr val="accent3">
-              <a:shade val="15000"/>
-            </a:schemeClr>
-          </a:lnRef>
-          <a:fillRef idx="1">
-            <a:schemeClr val="accent3"/>
-          </a:fillRef>
-          <a:effectRef idx="0">
-            <a:schemeClr val="accent3"/>
-          </a:effectRef>
-          <a:fontRef idx="minor">
-            <a:schemeClr val="lt1"/>
-          </a:fontRef>
-        </p:style>
-        <p:txBody>
-          <a:bodyPr rtlCol="0" anchor="ctr"/>
-          <a:lstStyle/>
-          <a:p>
-            <a:pPr algn="ctr"/>
-            <a:endParaRPr lang="zh-CN" altLang="en-US" dirty="0"/>
-          </a:p>
-        </p:txBody>
-      </p:sp>
-      <p:sp>
-        <p:nvSpPr>
-          <p:cNvPr id="41" name="矩形 40">
-            <a:extLst>
-              <a:ext uri="{FF2B5EF4-FFF2-40B4-BE49-F238E27FC236}">
-                <a16:creationId xmlns:a16="http://schemas.microsoft.com/office/drawing/2014/main" id="{E593706C-6739-ABAB-6769-0B8812CB2B71}"/>
-              </a:ext>
-            </a:extLst>
-          </p:cNvPr>
-          <p:cNvSpPr/>
-          <p:nvPr/>
-        </p:nvSpPr>
-        <p:spPr>
-          <a:xfrm>
-            <a:off x="5931042" y="3179160"/>
-            <a:ext cx="2318603" cy="773430"/>
-          </a:xfrm>
-          <a:prstGeom prst="rect">
-            <a:avLst/>
-          </a:prstGeom>
-        </p:spPr>
-        <p:style>
-          <a:lnRef idx="2">
-            <a:schemeClr val="accent1">
-              <a:shade val="15000"/>
-            </a:schemeClr>
-          </a:lnRef>
-          <a:fillRef idx="1">
-            <a:schemeClr val="accent1"/>
-          </a:fillRef>
-          <a:effectRef idx="0">
-            <a:schemeClr val="accent1"/>
-          </a:effectRef>
-          <a:fontRef idx="minor">
-            <a:schemeClr val="lt1"/>
-          </a:fontRef>
-        </p:style>
-        <p:txBody>
-          <a:bodyPr rtlCol="0" anchor="ctr"/>
-          <a:lstStyle/>
-          <a:p>
-            <a:pPr algn="ctr"/>
-            <a:endParaRPr lang="zh-CN" altLang="en-US"/>
-          </a:p>
-        </p:txBody>
-      </p:sp>
-      <p:sp>
-        <p:nvSpPr>
-          <p:cNvPr id="46" name="箭头: 下 45">
-            <a:extLst>
-              <a:ext uri="{FF2B5EF4-FFF2-40B4-BE49-F238E27FC236}">
-                <a16:creationId xmlns:a16="http://schemas.microsoft.com/office/drawing/2014/main" id="{34FB12DA-509A-40D4-9871-CF55B5D22465}"/>
-              </a:ext>
-            </a:extLst>
-          </p:cNvPr>
-          <p:cNvSpPr/>
-          <p:nvPr/>
-        </p:nvSpPr>
-        <p:spPr>
-          <a:xfrm rot="10800000">
-            <a:off x="6663690" y="3981450"/>
-            <a:ext cx="842851" cy="454673"/>
-          </a:xfrm>
-          <a:prstGeom prst="downArrow">
-            <a:avLst/>
-          </a:prstGeom>
-        </p:spPr>
-        <p:style>
-          <a:lnRef idx="2">
-            <a:schemeClr val="accent6">
-              <a:shade val="15000"/>
-            </a:schemeClr>
-          </a:lnRef>
-          <a:fillRef idx="1">
-            <a:schemeClr val="accent6"/>
-          </a:fillRef>
-          <a:effectRef idx="0">
-            <a:schemeClr val="accent6"/>
-          </a:effectRef>
-          <a:fontRef idx="minor">
-            <a:schemeClr val="lt1"/>
-          </a:fontRef>
-        </p:style>
-        <p:txBody>
-          <a:bodyPr rtlCol="0" anchor="ctr"/>
-          <a:lstStyle/>
-          <a:p>
-            <a:pPr algn="ctr"/>
-            <a:endParaRPr lang="zh-CN" altLang="en-US"/>
-          </a:p>
-        </p:txBody>
-      </p:sp>
-      <p:sp>
-        <p:nvSpPr>
-          <p:cNvPr id="47" name="文本框 46">
-            <a:extLst>
-              <a:ext uri="{FF2B5EF4-FFF2-40B4-BE49-F238E27FC236}">
-                <a16:creationId xmlns:a16="http://schemas.microsoft.com/office/drawing/2014/main" id="{7568D3FC-8C82-1D80-EB73-EC98129BF820}"/>
-              </a:ext>
-            </a:extLst>
-          </p:cNvPr>
-          <p:cNvSpPr txBox="1"/>
-          <p:nvPr/>
-        </p:nvSpPr>
-        <p:spPr>
-          <a:xfrm>
-            <a:off x="6189644" y="3345992"/>
-            <a:ext cx="1979478" cy="369332"/>
-          </a:xfrm>
-          <a:prstGeom prst="rect">
-            <a:avLst/>
-          </a:prstGeom>
-          <a:noFill/>
-        </p:spPr>
-        <p:txBody>
-          <a:bodyPr wrap="square" rtlCol="0">
-            <a:spAutoFit/>
-          </a:bodyPr>
-          <a:lstStyle/>
-          <a:p>
-            <a:r>
-              <a:rPr lang="en-US" altLang="zh-CN" dirty="0"/>
-              <a:t>Assign </a:t>
-            </a:r>
-            <a:r>
-              <a:rPr lang="en-US" altLang="zh-CN" dirty="0" err="1"/>
-              <a:t>metaclass</a:t>
-            </a:r>
-            <a:endParaRPr lang="zh-CN" altLang="en-US" dirty="0"/>
-          </a:p>
-        </p:txBody>
-      </p:sp>
-      <p:sp>
-        <p:nvSpPr>
-          <p:cNvPr id="50" name="矩形 49">
-            <a:extLst>
-              <a:ext uri="{FF2B5EF4-FFF2-40B4-BE49-F238E27FC236}">
-                <a16:creationId xmlns:a16="http://schemas.microsoft.com/office/drawing/2014/main" id="{04A8AC55-15E7-0AD6-2A4C-34CAA155B5AA}"/>
-              </a:ext>
-            </a:extLst>
-          </p:cNvPr>
-          <p:cNvSpPr/>
-          <p:nvPr/>
-        </p:nvSpPr>
-        <p:spPr>
-          <a:xfrm>
-            <a:off x="5880445" y="1982778"/>
-            <a:ext cx="2384170" cy="723577"/>
-          </a:xfrm>
-          <a:prstGeom prst="rect">
-            <a:avLst/>
-          </a:prstGeom>
-        </p:spPr>
-        <p:style>
-          <a:lnRef idx="2">
-            <a:schemeClr val="accent1">
-              <a:shade val="15000"/>
-            </a:schemeClr>
-          </a:lnRef>
-          <a:fillRef idx="1">
-            <a:schemeClr val="accent1"/>
-          </a:fillRef>
-          <a:effectRef idx="0">
-            <a:schemeClr val="accent1"/>
-          </a:effectRef>
-          <a:fontRef idx="minor">
-            <a:schemeClr val="lt1"/>
-          </a:fontRef>
-        </p:style>
-        <p:txBody>
-          <a:bodyPr rtlCol="0" anchor="ctr"/>
-          <a:lstStyle/>
-          <a:p>
-            <a:pPr algn="ctr"/>
-            <a:endParaRPr lang="zh-CN" altLang="en-US"/>
-          </a:p>
-        </p:txBody>
-      </p:sp>
-      <p:sp>
-        <p:nvSpPr>
-          <p:cNvPr id="51" name="箭头: 下 50">
-            <a:extLst>
-              <a:ext uri="{FF2B5EF4-FFF2-40B4-BE49-F238E27FC236}">
-                <a16:creationId xmlns:a16="http://schemas.microsoft.com/office/drawing/2014/main" id="{3BE3E1B4-1152-F8FA-213D-AA5F3BFDA3EC}"/>
-              </a:ext>
-            </a:extLst>
-          </p:cNvPr>
-          <p:cNvSpPr/>
-          <p:nvPr/>
-        </p:nvSpPr>
-        <p:spPr>
-          <a:xfrm rot="10800000">
-            <a:off x="6603325" y="2749480"/>
-            <a:ext cx="837623" cy="339846"/>
-          </a:xfrm>
-          <a:prstGeom prst="downArrow">
-            <a:avLst/>
-          </a:prstGeom>
-        </p:spPr>
-        <p:style>
-          <a:lnRef idx="2">
-            <a:schemeClr val="accent6">
-              <a:shade val="15000"/>
-            </a:schemeClr>
-          </a:lnRef>
-          <a:fillRef idx="1">
-            <a:schemeClr val="accent6"/>
-          </a:fillRef>
-          <a:effectRef idx="0">
-            <a:schemeClr val="accent6"/>
-          </a:effectRef>
-          <a:fontRef idx="minor">
-            <a:schemeClr val="lt1"/>
-          </a:fontRef>
-        </p:style>
-        <p:txBody>
-          <a:bodyPr rtlCol="0" anchor="ctr"/>
-          <a:lstStyle/>
-          <a:p>
-            <a:pPr algn="ctr"/>
-            <a:endParaRPr lang="zh-CN" altLang="en-US"/>
-          </a:p>
-        </p:txBody>
-      </p:sp>
-      <p:sp>
-        <p:nvSpPr>
-          <p:cNvPr id="52" name="文本框 51">
-            <a:extLst>
-              <a:ext uri="{FF2B5EF4-FFF2-40B4-BE49-F238E27FC236}">
-                <a16:creationId xmlns:a16="http://schemas.microsoft.com/office/drawing/2014/main" id="{41658801-D7BD-55B7-2474-8D0BEF5FEF16}"/>
-              </a:ext>
-            </a:extLst>
-          </p:cNvPr>
-          <p:cNvSpPr txBox="1"/>
-          <p:nvPr/>
-        </p:nvSpPr>
-        <p:spPr>
-          <a:xfrm>
-            <a:off x="6078672" y="2176113"/>
-            <a:ext cx="2247103" cy="369332"/>
-          </a:xfrm>
-          <a:prstGeom prst="rect">
-            <a:avLst/>
-          </a:prstGeom>
-          <a:noFill/>
-        </p:spPr>
-        <p:txBody>
-          <a:bodyPr wrap="square" rtlCol="0">
-            <a:spAutoFit/>
-          </a:bodyPr>
-          <a:lstStyle/>
-          <a:p>
-            <a:r>
-              <a:rPr lang="en-US" altLang="zh-CN" dirty="0"/>
-              <a:t>Parameter Layer</a:t>
-            </a:r>
-            <a:endParaRPr lang="zh-CN" altLang="en-US" dirty="0"/>
-          </a:p>
-        </p:txBody>
-      </p:sp>
-      <p:sp>
-        <p:nvSpPr>
-          <p:cNvPr id="63" name="椭圆 62">
-            <a:extLst>
-              <a:ext uri="{FF2B5EF4-FFF2-40B4-BE49-F238E27FC236}">
-                <a16:creationId xmlns:a16="http://schemas.microsoft.com/office/drawing/2014/main" id="{30ED689D-CFD0-5C86-3742-42F3C9605899}"/>
-              </a:ext>
-            </a:extLst>
-          </p:cNvPr>
-          <p:cNvSpPr/>
-          <p:nvPr/>
-        </p:nvSpPr>
-        <p:spPr>
-          <a:xfrm>
-            <a:off x="8030138" y="2044088"/>
-            <a:ext cx="165100" cy="177800"/>
-          </a:xfrm>
-          <a:prstGeom prst="ellipse">
-            <a:avLst/>
-          </a:prstGeom>
-        </p:spPr>
-        <p:style>
-          <a:lnRef idx="2">
-            <a:schemeClr val="accent2">
-              <a:shade val="15000"/>
-            </a:schemeClr>
-          </a:lnRef>
-          <a:fillRef idx="1">
-            <a:schemeClr val="accent2"/>
-          </a:fillRef>
-          <a:effectRef idx="0">
-            <a:schemeClr val="accent2"/>
-          </a:effectRef>
-          <a:fontRef idx="minor">
-            <a:schemeClr val="lt1"/>
-          </a:fontRef>
-        </p:style>
-        <p:txBody>
-          <a:bodyPr rtlCol="0" anchor="ctr"/>
-          <a:lstStyle/>
-          <a:p>
-            <a:pPr algn="ctr"/>
-            <a:endParaRPr lang="zh-CN" altLang="en-US"/>
-          </a:p>
-        </p:txBody>
-      </p:sp>
-      <p:sp>
-        <p:nvSpPr>
-          <p:cNvPr id="69" name="椭圆 68">
-            <a:extLst>
-              <a:ext uri="{FF2B5EF4-FFF2-40B4-BE49-F238E27FC236}">
-                <a16:creationId xmlns:a16="http://schemas.microsoft.com/office/drawing/2014/main" id="{7C41404F-074F-EFA6-6F99-23FE4C2D4586}"/>
-              </a:ext>
-            </a:extLst>
-          </p:cNvPr>
-          <p:cNvSpPr/>
-          <p:nvPr/>
-        </p:nvSpPr>
-        <p:spPr>
-          <a:xfrm>
-            <a:off x="8011285" y="3197652"/>
-            <a:ext cx="165100" cy="177800"/>
-          </a:xfrm>
-          <a:prstGeom prst="ellipse">
-            <a:avLst/>
-          </a:prstGeom>
-        </p:spPr>
-        <p:style>
-          <a:lnRef idx="2">
-            <a:schemeClr val="accent2">
-              <a:shade val="15000"/>
-            </a:schemeClr>
-          </a:lnRef>
-          <a:fillRef idx="1">
-            <a:schemeClr val="accent2"/>
-          </a:fillRef>
-          <a:effectRef idx="0">
-            <a:schemeClr val="accent2"/>
-          </a:effectRef>
-          <a:fontRef idx="minor">
-            <a:schemeClr val="lt1"/>
-          </a:fontRef>
-        </p:style>
-        <p:txBody>
-          <a:bodyPr rtlCol="0" anchor="ctr"/>
-          <a:lstStyle>
-            <a:defPPr>
-              <a:defRPr lang="zh-CN"/>
-            </a:defPPr>
-            <a:lvl1pPr marL="0" algn="l" defTabSz="914400" rtl="0" eaLnBrk="1" latinLnBrk="0" hangingPunct="1">
-              <a:defRPr sz="1800" kern="1200">
-                <a:solidFill>
-                  <a:schemeClr val="lt1"/>
-                </a:solidFill>
-                <a:latin typeface="+mn-lt"/>
-                <a:ea typeface="+mn-ea"/>
-                <a:cs typeface="+mn-cs"/>
-              </a:defRPr>
-            </a:lvl1pPr>
-            <a:lvl2pPr marL="457200" algn="l" defTabSz="914400" rtl="0" eaLnBrk="1" latinLnBrk="0" hangingPunct="1">
-              <a:defRPr sz="1800" kern="1200">
-                <a:solidFill>
-                  <a:schemeClr val="lt1"/>
-                </a:solidFill>
-                <a:latin typeface="+mn-lt"/>
-                <a:ea typeface="+mn-ea"/>
-                <a:cs typeface="+mn-cs"/>
-              </a:defRPr>
-            </a:lvl2pPr>
-            <a:lvl3pPr marL="914400" algn="l" defTabSz="914400" rtl="0" eaLnBrk="1" latinLnBrk="0" hangingPunct="1">
-              <a:defRPr sz="1800" kern="1200">
-                <a:solidFill>
-                  <a:schemeClr val="lt1"/>
-                </a:solidFill>
-                <a:latin typeface="+mn-lt"/>
-                <a:ea typeface="+mn-ea"/>
-                <a:cs typeface="+mn-cs"/>
-              </a:defRPr>
-            </a:lvl3pPr>
-            <a:lvl4pPr marL="1371600" algn="l" defTabSz="914400" rtl="0" eaLnBrk="1" latinLnBrk="0" hangingPunct="1">
-              <a:defRPr sz="1800" kern="1200">
-                <a:solidFill>
-                  <a:schemeClr val="lt1"/>
-                </a:solidFill>
-                <a:latin typeface="+mn-lt"/>
-                <a:ea typeface="+mn-ea"/>
-                <a:cs typeface="+mn-cs"/>
-              </a:defRPr>
-            </a:lvl4pPr>
-            <a:lvl5pPr marL="1828800" algn="l" defTabSz="914400" rtl="0" eaLnBrk="1" latinLnBrk="0" hangingPunct="1">
-              <a:defRPr sz="1800" kern="1200">
-                <a:solidFill>
-                  <a:schemeClr val="lt1"/>
-                </a:solidFill>
-                <a:latin typeface="+mn-lt"/>
-                <a:ea typeface="+mn-ea"/>
-                <a:cs typeface="+mn-cs"/>
-              </a:defRPr>
-            </a:lvl5pPr>
-            <a:lvl6pPr marL="2286000" algn="l" defTabSz="914400" rtl="0" eaLnBrk="1" latinLnBrk="0" hangingPunct="1">
-              <a:defRPr sz="1800" kern="1200">
-                <a:solidFill>
-                  <a:schemeClr val="lt1"/>
-                </a:solidFill>
-                <a:latin typeface="+mn-lt"/>
-                <a:ea typeface="+mn-ea"/>
-                <a:cs typeface="+mn-cs"/>
-              </a:defRPr>
-            </a:lvl6pPr>
-            <a:lvl7pPr marL="2743200" algn="l" defTabSz="914400" rtl="0" eaLnBrk="1" latinLnBrk="0" hangingPunct="1">
-              <a:defRPr sz="1800" kern="1200">
-                <a:solidFill>
-                  <a:schemeClr val="lt1"/>
-                </a:solidFill>
-                <a:latin typeface="+mn-lt"/>
-                <a:ea typeface="+mn-ea"/>
-                <a:cs typeface="+mn-cs"/>
-              </a:defRPr>
-            </a:lvl7pPr>
-            <a:lvl8pPr marL="3200400" algn="l" defTabSz="914400" rtl="0" eaLnBrk="1" latinLnBrk="0" hangingPunct="1">
-              <a:defRPr sz="1800" kern="1200">
-                <a:solidFill>
-                  <a:schemeClr val="lt1"/>
-                </a:solidFill>
-                <a:latin typeface="+mn-lt"/>
-                <a:ea typeface="+mn-ea"/>
-                <a:cs typeface="+mn-cs"/>
-              </a:defRPr>
-            </a:lvl8pPr>
-            <a:lvl9pPr marL="3657600" algn="l" defTabSz="914400" rtl="0" eaLnBrk="1" latinLnBrk="0" hangingPunct="1">
-              <a:defRPr sz="1800" kern="1200">
-                <a:solidFill>
-                  <a:schemeClr val="lt1"/>
-                </a:solidFill>
-                <a:latin typeface="+mn-lt"/>
-                <a:ea typeface="+mn-ea"/>
-                <a:cs typeface="+mn-cs"/>
-              </a:defRPr>
-            </a:lvl9pPr>
-          </a:lstStyle>
-          <a:p>
-            <a:pPr algn="ctr"/>
-            <a:endParaRPr lang="zh-CN" altLang="en-US"/>
-          </a:p>
-        </p:txBody>
-      </p:sp>
-      <p:sp>
-        <p:nvSpPr>
-          <p:cNvPr id="71" name="文本框 70">
-            <a:extLst>
-              <a:ext uri="{FF2B5EF4-FFF2-40B4-BE49-F238E27FC236}">
-                <a16:creationId xmlns:a16="http://schemas.microsoft.com/office/drawing/2014/main" id="{937F8CD2-EC51-1E78-10BC-7C12FA3BA907}"/>
-              </a:ext>
-            </a:extLst>
-          </p:cNvPr>
-          <p:cNvSpPr txBox="1"/>
-          <p:nvPr/>
-        </p:nvSpPr>
-        <p:spPr>
-          <a:xfrm>
-            <a:off x="7969472" y="3148052"/>
-            <a:ext cx="183953" cy="276999"/>
-          </a:xfrm>
-          <a:prstGeom prst="rect">
-            <a:avLst/>
-          </a:prstGeom>
-          <a:noFill/>
-        </p:spPr>
-        <p:txBody>
-          <a:bodyPr wrap="square" rtlCol="0">
-            <a:spAutoFit/>
-          </a:bodyPr>
-          <a:lstStyle/>
-          <a:p>
-            <a:r>
-              <a:rPr lang="en-US" altLang="zh-CN" sz="1200" dirty="0"/>
-              <a:t>4</a:t>
-            </a:r>
-            <a:endParaRPr lang="zh-CN" altLang="en-US" sz="1200" dirty="0"/>
-          </a:p>
-        </p:txBody>
-      </p:sp>
-      <p:sp>
-        <p:nvSpPr>
-          <p:cNvPr id="72" name="文本框 71">
-            <a:extLst>
-              <a:ext uri="{FF2B5EF4-FFF2-40B4-BE49-F238E27FC236}">
-                <a16:creationId xmlns:a16="http://schemas.microsoft.com/office/drawing/2014/main" id="{8ADCD6E6-4DD3-A42E-FC8F-06650FA5531D}"/>
-              </a:ext>
-            </a:extLst>
-          </p:cNvPr>
-          <p:cNvSpPr txBox="1"/>
-          <p:nvPr/>
-        </p:nvSpPr>
-        <p:spPr>
-          <a:xfrm>
-            <a:off x="8013231" y="1986044"/>
-            <a:ext cx="136493" cy="276999"/>
-          </a:xfrm>
-          <a:prstGeom prst="rect">
-            <a:avLst/>
-          </a:prstGeom>
-          <a:noFill/>
-        </p:spPr>
-        <p:txBody>
-          <a:bodyPr wrap="square" rtlCol="0">
-            <a:spAutoFit/>
-          </a:bodyPr>
-          <a:lstStyle/>
-          <a:p>
-            <a:r>
-              <a:rPr lang="en-US" altLang="zh-CN" sz="1200" dirty="0"/>
-              <a:t>5</a:t>
-            </a:r>
-            <a:endParaRPr lang="zh-CN" altLang="en-US" sz="1200" dirty="0"/>
-          </a:p>
-        </p:txBody>
-      </p:sp>
-      <p:sp>
-        <p:nvSpPr>
-          <p:cNvPr id="74" name="矩形 73">
-            <a:extLst>
-              <a:ext uri="{FF2B5EF4-FFF2-40B4-BE49-F238E27FC236}">
-                <a16:creationId xmlns:a16="http://schemas.microsoft.com/office/drawing/2014/main" id="{C373CE95-D959-746B-A204-226380DEDD0D}"/>
-              </a:ext>
-            </a:extLst>
-          </p:cNvPr>
-          <p:cNvSpPr/>
-          <p:nvPr/>
-        </p:nvSpPr>
-        <p:spPr>
-          <a:xfrm>
-            <a:off x="2571750" y="5198169"/>
-            <a:ext cx="2731294" cy="613025"/>
-          </a:xfrm>
-          <a:prstGeom prst="rect">
-            <a:avLst/>
-          </a:prstGeom>
-        </p:spPr>
-        <p:style>
-          <a:lnRef idx="2">
-            <a:schemeClr val="accent4"/>
-          </a:lnRef>
-          <a:fillRef idx="1">
-            <a:schemeClr val="lt1"/>
-          </a:fillRef>
-          <a:effectRef idx="0">
-            <a:schemeClr val="accent4"/>
-          </a:effectRef>
-          <a:fontRef idx="minor">
-            <a:schemeClr val="dk1"/>
-          </a:fontRef>
-        </p:style>
-        <p:txBody>
-          <a:bodyPr rtlCol="0" anchor="ctr"/>
-          <a:lstStyle/>
-          <a:p>
-            <a:pPr algn="ctr"/>
-            <a:endParaRPr lang="zh-CN" altLang="en-US"/>
-          </a:p>
-        </p:txBody>
-      </p:sp>
-      <p:sp>
-        <p:nvSpPr>
-          <p:cNvPr id="73" name="文本框 72">
-            <a:extLst>
-              <a:ext uri="{FF2B5EF4-FFF2-40B4-BE49-F238E27FC236}">
-                <a16:creationId xmlns:a16="http://schemas.microsoft.com/office/drawing/2014/main" id="{5F194D1A-7042-EE1E-02A6-D6004849EA36}"/>
-              </a:ext>
-            </a:extLst>
-          </p:cNvPr>
-          <p:cNvSpPr txBox="1"/>
-          <p:nvPr/>
-        </p:nvSpPr>
-        <p:spPr>
-          <a:xfrm>
-            <a:off x="2571750" y="5159521"/>
-            <a:ext cx="2731294" cy="646331"/>
-          </a:xfrm>
-          <a:prstGeom prst="rect">
-            <a:avLst/>
-          </a:prstGeom>
-          <a:noFill/>
-        </p:spPr>
-        <p:txBody>
-          <a:bodyPr wrap="square" rtlCol="0">
-            <a:spAutoFit/>
-          </a:bodyPr>
-          <a:lstStyle/>
-          <a:p>
-            <a:r>
-              <a:rPr lang="en-US" altLang="zh-CN" sz="1200" dirty="0"/>
-              <a:t>4. </a:t>
-            </a:r>
-            <a:r>
-              <a:rPr lang="en-US" altLang="zh-CN" sz="1200" dirty="0" err="1"/>
-              <a:t>mataclass</a:t>
-            </a:r>
-            <a:r>
-              <a:rPr lang="en-US" altLang="zh-CN" sz="1200" dirty="0"/>
-              <a:t> is the cornerstone of AME; see its separate GitHub repository for details.</a:t>
-            </a:r>
-            <a:endParaRPr lang="zh-CN" altLang="en-US" sz="1200" dirty="0"/>
-          </a:p>
-        </p:txBody>
-      </p:sp>
-      <p:sp>
-        <p:nvSpPr>
-          <p:cNvPr id="76" name="矩形 75">
-            <a:extLst>
-              <a:ext uri="{FF2B5EF4-FFF2-40B4-BE49-F238E27FC236}">
-                <a16:creationId xmlns:a16="http://schemas.microsoft.com/office/drawing/2014/main" id="{01576ACD-394C-E837-AB44-FDD2ED9C85D9}"/>
-              </a:ext>
-            </a:extLst>
-          </p:cNvPr>
-          <p:cNvSpPr/>
-          <p:nvPr/>
-        </p:nvSpPr>
-        <p:spPr>
-          <a:xfrm>
-            <a:off x="3014845" y="5897094"/>
-            <a:ext cx="3058933" cy="850559"/>
-          </a:xfrm>
-          <a:prstGeom prst="rect">
-            <a:avLst/>
-          </a:prstGeom>
-        </p:spPr>
-        <p:style>
-          <a:lnRef idx="2">
-            <a:schemeClr val="accent4"/>
-          </a:lnRef>
-          <a:fillRef idx="1">
-            <a:schemeClr val="lt1"/>
-          </a:fillRef>
-          <a:effectRef idx="0">
-            <a:schemeClr val="accent4"/>
-          </a:effectRef>
-          <a:fontRef idx="minor">
-            <a:schemeClr val="dk1"/>
-          </a:fontRef>
-        </p:style>
-        <p:txBody>
-          <a:bodyPr rtlCol="0" anchor="ctr"/>
-          <a:lstStyle/>
-          <a:p>
-            <a:pPr algn="ctr"/>
-            <a:endParaRPr lang="zh-CN" altLang="en-US" dirty="0"/>
-          </a:p>
-        </p:txBody>
-      </p:sp>
-      <p:sp>
-        <p:nvSpPr>
-          <p:cNvPr id="77" name="文本框 76">
-            <a:extLst>
-              <a:ext uri="{FF2B5EF4-FFF2-40B4-BE49-F238E27FC236}">
-                <a16:creationId xmlns:a16="http://schemas.microsoft.com/office/drawing/2014/main" id="{BE416108-03E4-858E-04F0-4F7923865D5C}"/>
-              </a:ext>
-            </a:extLst>
-          </p:cNvPr>
-          <p:cNvSpPr txBox="1"/>
-          <p:nvPr/>
-        </p:nvSpPr>
-        <p:spPr>
-          <a:xfrm>
-            <a:off x="11112501" y="1172152"/>
-            <a:ext cx="171061" cy="276999"/>
-          </a:xfrm>
-          <a:prstGeom prst="rect">
-            <a:avLst/>
-          </a:prstGeom>
-          <a:noFill/>
-        </p:spPr>
-        <p:txBody>
-          <a:bodyPr wrap="square" rtlCol="0">
-            <a:spAutoFit/>
-          </a:bodyPr>
-          <a:lstStyle/>
-          <a:p>
-            <a:r>
-              <a:rPr lang="en-US" altLang="zh-CN" sz="1200" dirty="0"/>
-              <a:t>7</a:t>
-            </a:r>
-            <a:endParaRPr lang="zh-CN" altLang="en-US" sz="1200" dirty="0"/>
-          </a:p>
-        </p:txBody>
-      </p:sp>
-      <p:sp>
-        <p:nvSpPr>
-          <p:cNvPr id="78" name="矩形 77">
-            <a:extLst>
-              <a:ext uri="{FF2B5EF4-FFF2-40B4-BE49-F238E27FC236}">
-                <a16:creationId xmlns:a16="http://schemas.microsoft.com/office/drawing/2014/main" id="{BC45CBCE-4304-4AD3-A10E-409620158124}"/>
-              </a:ext>
-            </a:extLst>
-          </p:cNvPr>
-          <p:cNvSpPr/>
-          <p:nvPr/>
-        </p:nvSpPr>
-        <p:spPr>
-          <a:xfrm>
-            <a:off x="5869021" y="1027879"/>
-            <a:ext cx="2436282" cy="704636"/>
-          </a:xfrm>
-          <a:prstGeom prst="rect">
-            <a:avLst/>
-          </a:prstGeom>
-        </p:spPr>
-        <p:style>
-          <a:lnRef idx="2">
-            <a:schemeClr val="accent1">
-              <a:shade val="15000"/>
-            </a:schemeClr>
-          </a:lnRef>
-          <a:fillRef idx="1">
-            <a:schemeClr val="accent1"/>
-          </a:fillRef>
-          <a:effectRef idx="0">
-            <a:schemeClr val="accent1"/>
-          </a:effectRef>
-          <a:fontRef idx="minor">
-            <a:schemeClr val="lt1"/>
-          </a:fontRef>
-        </p:style>
-        <p:txBody>
-          <a:bodyPr rtlCol="0" anchor="ctr"/>
-          <a:lstStyle/>
-          <a:p>
-            <a:pPr algn="ctr"/>
-            <a:endParaRPr lang="zh-CN" altLang="en-US"/>
-          </a:p>
-        </p:txBody>
-      </p:sp>
-      <p:sp>
-        <p:nvSpPr>
-          <p:cNvPr id="79" name="箭头: 下 78">
-            <a:extLst>
-              <a:ext uri="{FF2B5EF4-FFF2-40B4-BE49-F238E27FC236}">
-                <a16:creationId xmlns:a16="http://schemas.microsoft.com/office/drawing/2014/main" id="{08B21885-2D1C-21B2-603A-E36CC153285A}"/>
-              </a:ext>
-            </a:extLst>
-          </p:cNvPr>
-          <p:cNvSpPr/>
-          <p:nvPr/>
-        </p:nvSpPr>
-        <p:spPr>
-          <a:xfrm rot="10800000">
-            <a:off x="6702087" y="1767561"/>
-            <a:ext cx="640098" cy="160383"/>
-          </a:xfrm>
-          <a:prstGeom prst="downArrow">
-            <a:avLst/>
-          </a:prstGeom>
-        </p:spPr>
-        <p:style>
-          <a:lnRef idx="2">
-            <a:schemeClr val="accent6">
-              <a:shade val="15000"/>
-            </a:schemeClr>
-          </a:lnRef>
-          <a:fillRef idx="1">
-            <a:schemeClr val="accent6"/>
-          </a:fillRef>
-          <a:effectRef idx="0">
-            <a:schemeClr val="accent6"/>
-          </a:effectRef>
-          <a:fontRef idx="minor">
-            <a:schemeClr val="lt1"/>
-          </a:fontRef>
-        </p:style>
-        <p:txBody>
-          <a:bodyPr rtlCol="0" anchor="ctr"/>
-          <a:lstStyle/>
-          <a:p>
-            <a:pPr algn="ctr"/>
-            <a:endParaRPr lang="zh-CN" altLang="en-US"/>
-          </a:p>
-        </p:txBody>
-      </p:sp>
-      <p:sp>
-        <p:nvSpPr>
-          <p:cNvPr id="80" name="矩形 79">
-            <a:extLst>
-              <a:ext uri="{FF2B5EF4-FFF2-40B4-BE49-F238E27FC236}">
-                <a16:creationId xmlns:a16="http://schemas.microsoft.com/office/drawing/2014/main" id="{6DF9F9BF-F8BA-3FE0-AB81-87022E50B70D}"/>
-              </a:ext>
-            </a:extLst>
-          </p:cNvPr>
-          <p:cNvSpPr/>
-          <p:nvPr/>
-        </p:nvSpPr>
-        <p:spPr>
-          <a:xfrm>
-            <a:off x="6242973" y="5811194"/>
-            <a:ext cx="2692369" cy="977608"/>
-          </a:xfrm>
-          <a:prstGeom prst="rect">
-            <a:avLst/>
-          </a:prstGeom>
-        </p:spPr>
-        <p:style>
-          <a:lnRef idx="2">
-            <a:schemeClr val="accent4"/>
-          </a:lnRef>
-          <a:fillRef idx="1">
-            <a:schemeClr val="lt1"/>
-          </a:fillRef>
-          <a:effectRef idx="0">
-            <a:schemeClr val="accent4"/>
-          </a:effectRef>
-          <a:fontRef idx="minor">
-            <a:schemeClr val="dk1"/>
-          </a:fontRef>
-        </p:style>
-        <p:txBody>
-          <a:bodyPr rtlCol="0" anchor="ctr"/>
-          <a:lstStyle/>
-          <a:p>
-            <a:pPr algn="ctr"/>
-            <a:endParaRPr lang="zh-CN" altLang="en-US"/>
-          </a:p>
-        </p:txBody>
-      </p:sp>
-      <p:sp>
-        <p:nvSpPr>
-          <p:cNvPr id="81" name="矩形 80">
-            <a:extLst>
-              <a:ext uri="{FF2B5EF4-FFF2-40B4-BE49-F238E27FC236}">
-                <a16:creationId xmlns:a16="http://schemas.microsoft.com/office/drawing/2014/main" id="{01576ACD-394C-E837-AB44-FDD2ED9C85D9}"/>
-              </a:ext>
-            </a:extLst>
-          </p:cNvPr>
-          <p:cNvSpPr/>
-          <p:nvPr/>
-        </p:nvSpPr>
-        <p:spPr>
-          <a:xfrm>
-            <a:off x="9040396" y="6469282"/>
-            <a:ext cx="3080208" cy="332590"/>
-          </a:xfrm>
-          <a:prstGeom prst="rect">
-            <a:avLst/>
-          </a:prstGeom>
-        </p:spPr>
-        <p:style>
-          <a:lnRef idx="2">
-            <a:schemeClr val="accent4"/>
-          </a:lnRef>
-          <a:fillRef idx="1">
-            <a:schemeClr val="lt1"/>
-          </a:fillRef>
-          <a:effectRef idx="0">
-            <a:schemeClr val="accent4"/>
-          </a:effectRef>
-          <a:fontRef idx="minor">
-            <a:schemeClr val="dk1"/>
-          </a:fontRef>
-        </p:style>
-        <p:txBody>
-          <a:bodyPr rtlCol="0" anchor="ctr"/>
-          <a:lstStyle>
-            <a:defPPr>
-              <a:defRPr lang="zh-CN"/>
-            </a:defPPr>
-            <a:lvl1pPr marL="0" algn="l" defTabSz="914400" rtl="0" eaLnBrk="1" latinLnBrk="0" hangingPunct="1">
-              <a:defRPr sz="1800" kern="1200">
-                <a:solidFill>
-                  <a:schemeClr val="dk1"/>
-                </a:solidFill>
-                <a:latin typeface="+mn-lt"/>
-                <a:ea typeface="+mn-ea"/>
-                <a:cs typeface="+mn-cs"/>
-              </a:defRPr>
-            </a:lvl1pPr>
-            <a:lvl2pPr marL="457200" algn="l" defTabSz="914400" rtl="0" eaLnBrk="1" latinLnBrk="0" hangingPunct="1">
-              <a:defRPr sz="1800" kern="1200">
-                <a:solidFill>
-                  <a:schemeClr val="dk1"/>
-                </a:solidFill>
-                <a:latin typeface="+mn-lt"/>
-                <a:ea typeface="+mn-ea"/>
-                <a:cs typeface="+mn-cs"/>
-              </a:defRPr>
-            </a:lvl2pPr>
-            <a:lvl3pPr marL="914400" algn="l" defTabSz="914400" rtl="0" eaLnBrk="1" latinLnBrk="0" hangingPunct="1">
-              <a:defRPr sz="1800" kern="1200">
-                <a:solidFill>
-                  <a:schemeClr val="dk1"/>
-                </a:solidFill>
-                <a:latin typeface="+mn-lt"/>
-                <a:ea typeface="+mn-ea"/>
-                <a:cs typeface="+mn-cs"/>
-              </a:defRPr>
-            </a:lvl3pPr>
-            <a:lvl4pPr marL="1371600" algn="l" defTabSz="914400" rtl="0" eaLnBrk="1" latinLnBrk="0" hangingPunct="1">
-              <a:defRPr sz="1800" kern="1200">
-                <a:solidFill>
-                  <a:schemeClr val="dk1"/>
-                </a:solidFill>
-                <a:latin typeface="+mn-lt"/>
-                <a:ea typeface="+mn-ea"/>
-                <a:cs typeface="+mn-cs"/>
-              </a:defRPr>
-            </a:lvl4pPr>
-            <a:lvl5pPr marL="1828800" algn="l" defTabSz="914400" rtl="0" eaLnBrk="1" latinLnBrk="0" hangingPunct="1">
-              <a:defRPr sz="1800" kern="1200">
-                <a:solidFill>
-                  <a:schemeClr val="dk1"/>
-                </a:solidFill>
-                <a:latin typeface="+mn-lt"/>
-                <a:ea typeface="+mn-ea"/>
-                <a:cs typeface="+mn-cs"/>
-              </a:defRPr>
-            </a:lvl5pPr>
-            <a:lvl6pPr marL="2286000" algn="l" defTabSz="914400" rtl="0" eaLnBrk="1" latinLnBrk="0" hangingPunct="1">
-              <a:defRPr sz="1800" kern="1200">
-                <a:solidFill>
-                  <a:schemeClr val="dk1"/>
-                </a:solidFill>
-                <a:latin typeface="+mn-lt"/>
-                <a:ea typeface="+mn-ea"/>
-                <a:cs typeface="+mn-cs"/>
-              </a:defRPr>
-            </a:lvl6pPr>
-            <a:lvl7pPr marL="2743200" algn="l" defTabSz="914400" rtl="0" eaLnBrk="1" latinLnBrk="0" hangingPunct="1">
-              <a:defRPr sz="1800" kern="1200">
-                <a:solidFill>
-                  <a:schemeClr val="dk1"/>
-                </a:solidFill>
-                <a:latin typeface="+mn-lt"/>
-                <a:ea typeface="+mn-ea"/>
-                <a:cs typeface="+mn-cs"/>
-              </a:defRPr>
-            </a:lvl7pPr>
-            <a:lvl8pPr marL="3200400" algn="l" defTabSz="914400" rtl="0" eaLnBrk="1" latinLnBrk="0" hangingPunct="1">
-              <a:defRPr sz="1800" kern="1200">
-                <a:solidFill>
-                  <a:schemeClr val="dk1"/>
-                </a:solidFill>
-                <a:latin typeface="+mn-lt"/>
-                <a:ea typeface="+mn-ea"/>
-                <a:cs typeface="+mn-cs"/>
-              </a:defRPr>
-            </a:lvl8pPr>
-            <a:lvl9pPr marL="3657600" algn="l" defTabSz="914400" rtl="0" eaLnBrk="1" latinLnBrk="0" hangingPunct="1">
-              <a:defRPr sz="1800" kern="1200">
-                <a:solidFill>
-                  <a:schemeClr val="dk1"/>
-                </a:solidFill>
-                <a:latin typeface="+mn-lt"/>
-                <a:ea typeface="+mn-ea"/>
-                <a:cs typeface="+mn-cs"/>
-              </a:defRPr>
-            </a:lvl9pPr>
-          </a:lstStyle>
-          <a:p>
-            <a:pPr algn="ctr"/>
-            <a:endParaRPr lang="zh-CN" altLang="en-US"/>
-          </a:p>
-        </p:txBody>
-      </p:sp>
-      <p:sp>
-        <p:nvSpPr>
-          <p:cNvPr id="83" name="文本框 82">
-            <a:extLst>
-              <a:ext uri="{FF2B5EF4-FFF2-40B4-BE49-F238E27FC236}">
-                <a16:creationId xmlns:a16="http://schemas.microsoft.com/office/drawing/2014/main" id="{3D2D27DB-7E96-825E-563C-1541A22C23BA}"/>
-              </a:ext>
-            </a:extLst>
-          </p:cNvPr>
-          <p:cNvSpPr txBox="1"/>
-          <p:nvPr/>
-        </p:nvSpPr>
-        <p:spPr>
-          <a:xfrm>
-            <a:off x="6170218" y="1206981"/>
-            <a:ext cx="2265916" cy="369332"/>
-          </a:xfrm>
-          <a:prstGeom prst="rect">
-            <a:avLst/>
-          </a:prstGeom>
-          <a:noFill/>
-        </p:spPr>
-        <p:txBody>
-          <a:bodyPr wrap="square" rtlCol="0">
-            <a:spAutoFit/>
-          </a:bodyPr>
-          <a:lstStyle/>
-          <a:p>
-            <a:r>
-              <a:rPr lang="en-US" altLang="zh-CN" dirty="0"/>
-              <a:t>Start</a:t>
-            </a:r>
-            <a:r>
-              <a:rPr lang="zh-CN" altLang="en-US" dirty="0"/>
-              <a:t> </a:t>
-            </a:r>
-            <a:r>
-              <a:rPr lang="en-US" altLang="zh-CN" dirty="0"/>
-              <a:t>to</a:t>
-            </a:r>
-            <a:r>
-              <a:rPr lang="zh-CN" altLang="en-US" dirty="0"/>
-              <a:t> </a:t>
-            </a:r>
-            <a:r>
-              <a:rPr lang="en-US" altLang="zh-CN" dirty="0"/>
-              <a:t>BUILD</a:t>
-            </a:r>
-            <a:endParaRPr lang="zh-CN" altLang="en-US" dirty="0"/>
-          </a:p>
-        </p:txBody>
-      </p:sp>
-      <p:sp>
-        <p:nvSpPr>
-          <p:cNvPr id="84" name="椭圆 83">
-            <a:extLst>
-              <a:ext uri="{FF2B5EF4-FFF2-40B4-BE49-F238E27FC236}">
-                <a16:creationId xmlns:a16="http://schemas.microsoft.com/office/drawing/2014/main" id="{EE675F6B-D8E9-A1D8-9456-A4790EFF5AB1}"/>
-              </a:ext>
-            </a:extLst>
-          </p:cNvPr>
-          <p:cNvSpPr/>
-          <p:nvPr/>
-        </p:nvSpPr>
-        <p:spPr>
-          <a:xfrm>
-            <a:off x="8040197" y="1074265"/>
-            <a:ext cx="165100" cy="177800"/>
-          </a:xfrm>
-          <a:prstGeom prst="ellipse">
-            <a:avLst/>
-          </a:prstGeom>
-        </p:spPr>
-        <p:style>
-          <a:lnRef idx="2">
-            <a:schemeClr val="accent2">
-              <a:shade val="15000"/>
-            </a:schemeClr>
-          </a:lnRef>
-          <a:fillRef idx="1">
-            <a:schemeClr val="accent2"/>
-          </a:fillRef>
-          <a:effectRef idx="0">
-            <a:schemeClr val="accent2"/>
-          </a:effectRef>
-          <a:fontRef idx="minor">
-            <a:schemeClr val="lt1"/>
-          </a:fontRef>
-        </p:style>
-        <p:txBody>
-          <a:bodyPr rtlCol="0" anchor="ctr"/>
-          <a:lstStyle/>
-          <a:p>
-            <a:pPr algn="ctr"/>
-            <a:endParaRPr lang="zh-CN" altLang="en-US"/>
-          </a:p>
-        </p:txBody>
-      </p:sp>
-      <p:sp>
-        <p:nvSpPr>
-          <p:cNvPr id="85" name="文本框 84">
-            <a:extLst>
-              <a:ext uri="{FF2B5EF4-FFF2-40B4-BE49-F238E27FC236}">
-                <a16:creationId xmlns:a16="http://schemas.microsoft.com/office/drawing/2014/main" id="{E6CC673A-296F-5205-F152-5407116CFFE8}"/>
-              </a:ext>
-            </a:extLst>
-          </p:cNvPr>
-          <p:cNvSpPr txBox="1"/>
-          <p:nvPr/>
-        </p:nvSpPr>
-        <p:spPr>
-          <a:xfrm>
-            <a:off x="8043564" y="1024206"/>
-            <a:ext cx="94908" cy="276999"/>
-          </a:xfrm>
-          <a:prstGeom prst="rect">
-            <a:avLst/>
-          </a:prstGeom>
-          <a:noFill/>
-        </p:spPr>
-        <p:txBody>
-          <a:bodyPr wrap="square" rtlCol="0">
-            <a:spAutoFit/>
-          </a:bodyPr>
-          <a:lstStyle/>
-          <a:p>
-            <a:r>
-              <a:rPr lang="en-US" altLang="zh-CN" sz="1200" dirty="0"/>
-              <a:t>6</a:t>
-            </a:r>
-            <a:endParaRPr lang="zh-CN" altLang="en-US" sz="1200" dirty="0"/>
-          </a:p>
-        </p:txBody>
-      </p:sp>
-      <p:sp>
-        <p:nvSpPr>
-          <p:cNvPr id="18" name="文本框 17">
-            <a:extLst>
-              <a:ext uri="{FF2B5EF4-FFF2-40B4-BE49-F238E27FC236}">
-                <a16:creationId xmlns:a16="http://schemas.microsoft.com/office/drawing/2014/main" id="{01BE2EE4-9370-3384-0C5C-F5475CF6EB39}"/>
-              </a:ext>
-            </a:extLst>
-          </p:cNvPr>
-          <p:cNvSpPr txBox="1"/>
-          <p:nvPr/>
-        </p:nvSpPr>
-        <p:spPr>
-          <a:xfrm>
-            <a:off x="6289903" y="5811194"/>
-            <a:ext cx="2657036" cy="923330"/>
-          </a:xfrm>
-          <a:prstGeom prst="rect">
-            <a:avLst/>
-          </a:prstGeom>
-          <a:noFill/>
-        </p:spPr>
-        <p:txBody>
-          <a:bodyPr wrap="square" rtlCol="0">
-            <a:spAutoFit/>
-          </a:bodyPr>
-          <a:lstStyle/>
-          <a:p>
-            <a:r>
-              <a:rPr lang="en-US" altLang="zh-CN" dirty="0">
-                <a:highlight>
-                  <a:srgbClr val="00FF00"/>
-                </a:highlight>
-              </a:rPr>
-              <a:t>7. It's an interactive world,(folders) are not single files.</a:t>
-            </a:r>
-            <a:endParaRPr lang="zh-CN" altLang="en-US" dirty="0">
-              <a:highlight>
-                <a:srgbClr val="00FF00"/>
-              </a:highlight>
-            </a:endParaRPr>
-          </a:p>
-        </p:txBody>
-      </p:sp>
-      <p:sp>
-        <p:nvSpPr>
-          <p:cNvPr id="19" name="文本框 18">
-            <a:extLst>
-              <a:ext uri="{FF2B5EF4-FFF2-40B4-BE49-F238E27FC236}">
-                <a16:creationId xmlns:a16="http://schemas.microsoft.com/office/drawing/2014/main" id="{6B16AB4C-45CF-6116-4728-3E9F3F381D9D}"/>
-              </a:ext>
-            </a:extLst>
-          </p:cNvPr>
-          <p:cNvSpPr txBox="1"/>
-          <p:nvPr/>
-        </p:nvSpPr>
-        <p:spPr>
-          <a:xfrm>
-            <a:off x="9047918" y="6496445"/>
-            <a:ext cx="3218962" cy="261610"/>
-          </a:xfrm>
-          <a:prstGeom prst="rect">
-            <a:avLst/>
-          </a:prstGeom>
-          <a:noFill/>
-        </p:spPr>
-        <p:txBody>
-          <a:bodyPr wrap="square" rtlCol="0">
-            <a:spAutoFit/>
-          </a:bodyPr>
-          <a:lstStyle/>
-          <a:p>
-            <a:r>
-              <a:rPr lang="en-US" altLang="zh-CN" sz="1100" dirty="0"/>
-              <a:t>6. It is also the main program of AME ADMIN</a:t>
-            </a:r>
-            <a:endParaRPr lang="zh-CN" altLang="en-US" sz="1100" dirty="0"/>
-          </a:p>
-        </p:txBody>
-      </p:sp>
-      <p:sp>
-        <p:nvSpPr>
-          <p:cNvPr id="58" name="文本框 57">
-            <a:extLst>
-              <a:ext uri="{FF2B5EF4-FFF2-40B4-BE49-F238E27FC236}">
-                <a16:creationId xmlns:a16="http://schemas.microsoft.com/office/drawing/2014/main" id="{E7EEC670-B147-F19E-34A8-EE9B1F457066}"/>
-              </a:ext>
-            </a:extLst>
-          </p:cNvPr>
-          <p:cNvSpPr txBox="1"/>
-          <p:nvPr/>
-        </p:nvSpPr>
-        <p:spPr>
-          <a:xfrm>
-            <a:off x="2996061" y="5874222"/>
-            <a:ext cx="3026273" cy="738664"/>
-          </a:xfrm>
-          <a:prstGeom prst="rect">
-            <a:avLst/>
-          </a:prstGeom>
-          <a:noFill/>
-        </p:spPr>
-        <p:txBody>
-          <a:bodyPr wrap="square" rtlCol="0">
-            <a:spAutoFit/>
-          </a:bodyPr>
-          <a:lstStyle/>
-          <a:p>
-            <a:r>
-              <a:rPr lang="en-US" altLang="zh-CN" sz="1400" dirty="0"/>
-              <a:t>5. Here you set the world parameters, and AME will automatically generate a JSON file.</a:t>
-            </a:r>
-            <a:endParaRPr lang="zh-CN" altLang="en-US" sz="1400" dirty="0"/>
-          </a:p>
-        </p:txBody>
-      </p:sp>
-      <p:sp>
-        <p:nvSpPr>
-          <p:cNvPr id="70" name="箭头: 右 69">
-            <a:extLst>
-              <a:ext uri="{FF2B5EF4-FFF2-40B4-BE49-F238E27FC236}">
-                <a16:creationId xmlns:a16="http://schemas.microsoft.com/office/drawing/2014/main" id="{7AB8C733-12FE-5B31-6CC9-F008E6E8D0ED}"/>
-              </a:ext>
-            </a:extLst>
-          </p:cNvPr>
-          <p:cNvSpPr/>
-          <p:nvPr/>
-        </p:nvSpPr>
-        <p:spPr>
-          <a:xfrm>
-            <a:off x="11213820" y="1479507"/>
-            <a:ext cx="588895" cy="94334"/>
-          </a:xfrm>
-          <a:prstGeom prst="rightArrow">
-            <a:avLst/>
-          </a:prstGeom>
-        </p:spPr>
-        <p:style>
-          <a:lnRef idx="2">
-            <a:schemeClr val="accent1">
-              <a:shade val="15000"/>
-            </a:schemeClr>
-          </a:lnRef>
-          <a:fillRef idx="1">
-            <a:schemeClr val="accent1"/>
-          </a:fillRef>
-          <a:effectRef idx="0">
-            <a:schemeClr val="accent1"/>
-          </a:effectRef>
-          <a:fontRef idx="minor">
-            <a:schemeClr val="lt1"/>
-          </a:fontRef>
-        </p:style>
-        <p:txBody>
-          <a:bodyPr rtlCol="0" anchor="ctr"/>
-          <a:lstStyle/>
-          <a:p>
-            <a:pPr algn="ctr"/>
-            <a:endParaRPr lang="zh-CN" altLang="en-US"/>
-          </a:p>
-        </p:txBody>
-      </p:sp>
-      <p:sp>
-        <p:nvSpPr>
-          <p:cNvPr id="75" name="文本框 74">
-            <a:extLst>
-              <a:ext uri="{FF2B5EF4-FFF2-40B4-BE49-F238E27FC236}">
-                <a16:creationId xmlns:a16="http://schemas.microsoft.com/office/drawing/2014/main" id="{1FC809DE-A36D-60B3-61FF-F5B171ACFA67}"/>
-              </a:ext>
-            </a:extLst>
-          </p:cNvPr>
-          <p:cNvSpPr txBox="1"/>
-          <p:nvPr/>
-        </p:nvSpPr>
-        <p:spPr>
-          <a:xfrm>
-            <a:off x="11277600" y="-19826"/>
-            <a:ext cx="1303269" cy="523220"/>
-          </a:xfrm>
-          <a:prstGeom prst="rect">
-            <a:avLst/>
-          </a:prstGeom>
-          <a:noFill/>
-        </p:spPr>
-        <p:txBody>
-          <a:bodyPr wrap="square" rtlCol="0">
-            <a:spAutoFit/>
-          </a:bodyPr>
-          <a:lstStyle/>
-          <a:p>
-            <a:r>
-              <a:rPr lang="en-US" altLang="zh-CN" sz="1400" dirty="0">
-                <a:latin typeface="Noto Sans SC Black" panose="020B0200000000000000" pitchFamily="34" charset="-122"/>
-                <a:ea typeface="Noto Sans SC Black" panose="020B0200000000000000" pitchFamily="34" charset="-122"/>
-              </a:rPr>
-              <a:t>Finished product</a:t>
-            </a:r>
-            <a:endParaRPr lang="zh-CN" altLang="en-US" sz="1400" dirty="0">
-              <a:latin typeface="Noto Sans SC Black" panose="020B0200000000000000" pitchFamily="34" charset="-122"/>
-              <a:ea typeface="Noto Sans SC Black" panose="020B0200000000000000" pitchFamily="34" charset="-122"/>
-            </a:endParaRPr>
-          </a:p>
-        </p:txBody>
-      </p:sp>
-      <p:sp>
-        <p:nvSpPr>
-          <p:cNvPr id="82" name="箭头: 下 81">
-            <a:extLst>
-              <a:ext uri="{FF2B5EF4-FFF2-40B4-BE49-F238E27FC236}">
-                <a16:creationId xmlns:a16="http://schemas.microsoft.com/office/drawing/2014/main" id="{4DA12131-07E0-0743-2D0F-2CE81EA318A2}"/>
-              </a:ext>
-            </a:extLst>
-          </p:cNvPr>
-          <p:cNvSpPr/>
-          <p:nvPr/>
-        </p:nvSpPr>
-        <p:spPr>
-          <a:xfrm rot="10800000">
-            <a:off x="11802715" y="506895"/>
-            <a:ext cx="121108" cy="1061513"/>
-          </a:xfrm>
-          <a:prstGeom prst="downArrow">
-            <a:avLst/>
-          </a:prstGeom>
-        </p:spPr>
-        <p:style>
-          <a:lnRef idx="2">
-            <a:schemeClr val="accent1">
-              <a:shade val="15000"/>
-            </a:schemeClr>
-          </a:lnRef>
-          <a:fillRef idx="1">
-            <a:schemeClr val="accent1"/>
-          </a:fillRef>
-          <a:effectRef idx="0">
-            <a:schemeClr val="accent1"/>
-          </a:effectRef>
-          <a:fontRef idx="minor">
-            <a:schemeClr val="lt1"/>
-          </a:fontRef>
-        </p:style>
-        <p:txBody>
-          <a:bodyPr rtlCol="0" anchor="ctr"/>
-          <a:lstStyle/>
-          <a:p>
-            <a:pPr algn="ctr"/>
-            <a:endParaRPr lang="zh-CN" altLang="en-US"/>
-          </a:p>
-        </p:txBody>
-      </p:sp>
-    </p:spTree>
-    <p:extLst>
-      <p:ext uri="{BB962C8B-B14F-4D97-AF65-F5344CB8AC3E}">
-        <p14:creationId xmlns:p14="http://schemas.microsoft.com/office/powerpoint/2010/main" val="3317911221"/>
-      </p:ext>
-    </p:extLst>
-  </p:cSld>
-  <p:clrMapOvr>
-    <a:masterClrMapping/>
-  </p:clrMapOvr>
-</p:sld>
-</file>
-
-<file path=ppt/slides/slide5.xml><?xml version="1.0" encoding="utf-8"?>
-<p:sld xmlns:a="http://schemas.openxmlformats.org/drawingml/2006/main" xmlns:r="http://schemas.openxmlformats.org/officeDocument/2006/relationships" xmlns:p="http://schemas.openxmlformats.org/presentationml/2006/main">
-  <p:cSld>
-    <p:spTree>
-      <p:nvGrpSpPr>
-        <p:cNvPr id="1" name=""/>
-        <p:cNvGrpSpPr/>
-        <p:nvPr/>
-      </p:nvGrpSpPr>
-      <p:grpSpPr>
-        <a:xfrm>
-          <a:off x="0" y="0"/>
-          <a:ext cx="0" cy="0"/>
-          <a:chOff x="0" y="0"/>
-          <a:chExt cx="0" cy="0"/>
-        </a:xfrm>
-      </p:grpSpPr>
-      <p:sp>
-        <p:nvSpPr>
-          <p:cNvPr id="2" name="标题 1">
-            <a:extLst>
-              <a:ext uri="{FF2B5EF4-FFF2-40B4-BE49-F238E27FC236}">
-                <a16:creationId xmlns:a16="http://schemas.microsoft.com/office/drawing/2014/main" id="{6A57BF15-77F4-81A2-80C5-9FFF0EB9DB6C}"/>
-              </a:ext>
-            </a:extLst>
-          </p:cNvPr>
-          <p:cNvSpPr>
-            <a:spLocks noGrp="1"/>
-          </p:cNvSpPr>
-          <p:nvPr>
-            <p:ph type="title"/>
-          </p:nvPr>
-        </p:nvSpPr>
-        <p:spPr/>
-        <p:txBody>
-          <a:bodyPr/>
-          <a:lstStyle/>
-          <a:p>
-            <a:r>
-              <a:rPr lang="en-US" altLang="zh-CN" dirty="0">
-                <a:latin typeface="Noto Sans JP Black" panose="020B0200000000000000" pitchFamily="34" charset="-122"/>
-                <a:ea typeface="Noto Sans JP Black" panose="020B0200000000000000" pitchFamily="34" charset="-122"/>
-              </a:rPr>
-              <a:t>ABOUT US</a:t>
-            </a:r>
-            <a:endParaRPr lang="zh-CN" altLang="en-US" dirty="0">
-              <a:latin typeface="Noto Sans JP Black" panose="020B0200000000000000" pitchFamily="34" charset="-122"/>
-              <a:ea typeface="Noto Sans JP Black" panose="020B0200000000000000" pitchFamily="34" charset="-122"/>
-            </a:endParaRPr>
-          </a:p>
-        </p:txBody>
-      </p:sp>
-      <p:sp>
-        <p:nvSpPr>
-          <p:cNvPr id="3" name="内容占位符 2">
-            <a:extLst>
-              <a:ext uri="{FF2B5EF4-FFF2-40B4-BE49-F238E27FC236}">
-                <a16:creationId xmlns:a16="http://schemas.microsoft.com/office/drawing/2014/main" id="{4C24DB54-D574-FD55-FE53-49E9081DB724}"/>
-              </a:ext>
-            </a:extLst>
-          </p:cNvPr>
-          <p:cNvSpPr>
-            <a:spLocks noGrp="1"/>
-          </p:cNvSpPr>
-          <p:nvPr>
-            <p:ph idx="1"/>
-          </p:nvPr>
-        </p:nvSpPr>
-        <p:spPr/>
-        <p:txBody>
-          <a:bodyPr/>
-          <a:lstStyle/>
-          <a:p>
-            <a:endParaRPr lang="zh-CN" altLang="en-US" dirty="0"/>
-          </a:p>
-        </p:txBody>
-      </p:sp>
-      <p:sp>
-        <p:nvSpPr>
-          <p:cNvPr id="4" name="矩形 3">
-            <a:extLst>
-              <a:ext uri="{FF2B5EF4-FFF2-40B4-BE49-F238E27FC236}">
-                <a16:creationId xmlns:a16="http://schemas.microsoft.com/office/drawing/2014/main" id="{A48C643F-7FED-4F25-11FD-DAC5BBAF0AF5}"/>
-              </a:ext>
-            </a:extLst>
-          </p:cNvPr>
-          <p:cNvSpPr/>
-          <p:nvPr/>
-        </p:nvSpPr>
-        <p:spPr>
-          <a:xfrm>
-            <a:off x="725557" y="1426265"/>
-            <a:ext cx="3374334" cy="5066610"/>
-          </a:xfrm>
-          <a:prstGeom prst="rect">
-            <a:avLst/>
-          </a:prstGeom>
-        </p:spPr>
-        <p:style>
-          <a:lnRef idx="2">
-            <a:schemeClr val="accent4"/>
-          </a:lnRef>
-          <a:fillRef idx="1">
-            <a:schemeClr val="lt1"/>
-          </a:fillRef>
-          <a:effectRef idx="0">
-            <a:schemeClr val="accent4"/>
-          </a:effectRef>
-          <a:fontRef idx="minor">
-            <a:schemeClr val="dk1"/>
-          </a:fontRef>
-        </p:style>
-        <p:txBody>
-          <a:bodyPr rtlCol="0" anchor="ctr"/>
-          <a:lstStyle/>
-          <a:p>
-            <a:pPr algn="ctr"/>
-            <a:endParaRPr lang="zh-CN" altLang="en-US"/>
-          </a:p>
-        </p:txBody>
-      </p:sp>
-      <p:sp>
-        <p:nvSpPr>
-          <p:cNvPr id="5" name="矩形 4">
-            <a:extLst>
-              <a:ext uri="{FF2B5EF4-FFF2-40B4-BE49-F238E27FC236}">
-                <a16:creationId xmlns:a16="http://schemas.microsoft.com/office/drawing/2014/main" id="{82EF4A6D-6FFF-68CC-E8B6-65E830DB7F34}"/>
-              </a:ext>
-            </a:extLst>
-          </p:cNvPr>
-          <p:cNvSpPr/>
-          <p:nvPr/>
-        </p:nvSpPr>
-        <p:spPr>
-          <a:xfrm>
-            <a:off x="4139648" y="1426265"/>
-            <a:ext cx="3374334" cy="5066610"/>
-          </a:xfrm>
-          <a:prstGeom prst="rect">
-            <a:avLst/>
-          </a:prstGeom>
-        </p:spPr>
-        <p:style>
-          <a:lnRef idx="2">
-            <a:schemeClr val="accent4"/>
-          </a:lnRef>
-          <a:fillRef idx="1">
-            <a:schemeClr val="lt1"/>
-          </a:fillRef>
-          <a:effectRef idx="0">
-            <a:schemeClr val="accent4"/>
-          </a:effectRef>
-          <a:fontRef idx="minor">
-            <a:schemeClr val="dk1"/>
-          </a:fontRef>
-        </p:style>
-        <p:txBody>
-          <a:bodyPr rtlCol="0" anchor="ctr"/>
-          <a:lstStyle/>
-          <a:p>
-            <a:pPr algn="ctr"/>
-            <a:endParaRPr lang="zh-CN" altLang="en-US"/>
-          </a:p>
-        </p:txBody>
-      </p:sp>
-      <p:sp>
-        <p:nvSpPr>
-          <p:cNvPr id="6" name="矩形 5">
-            <a:extLst>
-              <a:ext uri="{FF2B5EF4-FFF2-40B4-BE49-F238E27FC236}">
-                <a16:creationId xmlns:a16="http://schemas.microsoft.com/office/drawing/2014/main" id="{A48C643F-7FED-4F25-11FD-DAC5BBAF0AF5}"/>
-              </a:ext>
-            </a:extLst>
-          </p:cNvPr>
-          <p:cNvSpPr/>
-          <p:nvPr/>
-        </p:nvSpPr>
-        <p:spPr>
-          <a:xfrm>
-            <a:off x="7553739" y="1426265"/>
-            <a:ext cx="3374334" cy="5066610"/>
-          </a:xfrm>
-          <a:prstGeom prst="rect">
-            <a:avLst/>
-          </a:prstGeom>
-        </p:spPr>
-        <p:style>
-          <a:lnRef idx="2">
-            <a:schemeClr val="accent4"/>
-          </a:lnRef>
-          <a:fillRef idx="1">
-            <a:schemeClr val="lt1"/>
-          </a:fillRef>
-          <a:effectRef idx="0">
-            <a:schemeClr val="accent4"/>
-          </a:effectRef>
-          <a:fontRef idx="minor">
-            <a:schemeClr val="dk1"/>
-          </a:fontRef>
-        </p:style>
-        <p:txBody>
-          <a:bodyPr rtlCol="0" anchor="ctr"/>
-          <a:lstStyle>
-            <a:defPPr>
-              <a:defRPr lang="zh-CN"/>
-            </a:defPPr>
-            <a:lvl1pPr marL="0" algn="l" defTabSz="914400" rtl="0" eaLnBrk="1" latinLnBrk="0" hangingPunct="1">
-              <a:defRPr sz="1800" kern="1200">
-                <a:solidFill>
-                  <a:schemeClr val="dk1"/>
-                </a:solidFill>
-                <a:latin typeface="+mn-lt"/>
-                <a:ea typeface="+mn-ea"/>
-                <a:cs typeface="+mn-cs"/>
-              </a:defRPr>
-            </a:lvl1pPr>
-            <a:lvl2pPr marL="457200" algn="l" defTabSz="914400" rtl="0" eaLnBrk="1" latinLnBrk="0" hangingPunct="1">
-              <a:defRPr sz="1800" kern="1200">
-                <a:solidFill>
-                  <a:schemeClr val="dk1"/>
-                </a:solidFill>
-                <a:latin typeface="+mn-lt"/>
-                <a:ea typeface="+mn-ea"/>
-                <a:cs typeface="+mn-cs"/>
-              </a:defRPr>
-            </a:lvl2pPr>
-            <a:lvl3pPr marL="914400" algn="l" defTabSz="914400" rtl="0" eaLnBrk="1" latinLnBrk="0" hangingPunct="1">
-              <a:defRPr sz="1800" kern="1200">
-                <a:solidFill>
-                  <a:schemeClr val="dk1"/>
-                </a:solidFill>
-                <a:latin typeface="+mn-lt"/>
-                <a:ea typeface="+mn-ea"/>
-                <a:cs typeface="+mn-cs"/>
-              </a:defRPr>
-            </a:lvl3pPr>
-            <a:lvl4pPr marL="1371600" algn="l" defTabSz="914400" rtl="0" eaLnBrk="1" latinLnBrk="0" hangingPunct="1">
-              <a:defRPr sz="1800" kern="1200">
-                <a:solidFill>
-                  <a:schemeClr val="dk1"/>
-                </a:solidFill>
-                <a:latin typeface="+mn-lt"/>
-                <a:ea typeface="+mn-ea"/>
-                <a:cs typeface="+mn-cs"/>
-              </a:defRPr>
-            </a:lvl4pPr>
-            <a:lvl5pPr marL="1828800" algn="l" defTabSz="914400" rtl="0" eaLnBrk="1" latinLnBrk="0" hangingPunct="1">
-              <a:defRPr sz="1800" kern="1200">
-                <a:solidFill>
-                  <a:schemeClr val="dk1"/>
-                </a:solidFill>
-                <a:latin typeface="+mn-lt"/>
-                <a:ea typeface="+mn-ea"/>
-                <a:cs typeface="+mn-cs"/>
-              </a:defRPr>
-            </a:lvl5pPr>
-            <a:lvl6pPr marL="2286000" algn="l" defTabSz="914400" rtl="0" eaLnBrk="1" latinLnBrk="0" hangingPunct="1">
-              <a:defRPr sz="1800" kern="1200">
-                <a:solidFill>
-                  <a:schemeClr val="dk1"/>
-                </a:solidFill>
-                <a:latin typeface="+mn-lt"/>
-                <a:ea typeface="+mn-ea"/>
-                <a:cs typeface="+mn-cs"/>
-              </a:defRPr>
-            </a:lvl6pPr>
-            <a:lvl7pPr marL="2743200" algn="l" defTabSz="914400" rtl="0" eaLnBrk="1" latinLnBrk="0" hangingPunct="1">
-              <a:defRPr sz="1800" kern="1200">
-                <a:solidFill>
-                  <a:schemeClr val="dk1"/>
-                </a:solidFill>
-                <a:latin typeface="+mn-lt"/>
-                <a:ea typeface="+mn-ea"/>
-                <a:cs typeface="+mn-cs"/>
-              </a:defRPr>
-            </a:lvl7pPr>
-            <a:lvl8pPr marL="3200400" algn="l" defTabSz="914400" rtl="0" eaLnBrk="1" latinLnBrk="0" hangingPunct="1">
-              <a:defRPr sz="1800" kern="1200">
-                <a:solidFill>
-                  <a:schemeClr val="dk1"/>
-                </a:solidFill>
-                <a:latin typeface="+mn-lt"/>
-                <a:ea typeface="+mn-ea"/>
-                <a:cs typeface="+mn-cs"/>
-              </a:defRPr>
-            </a:lvl8pPr>
-            <a:lvl9pPr marL="3657600" algn="l" defTabSz="914400" rtl="0" eaLnBrk="1" latinLnBrk="0" hangingPunct="1">
-              <a:defRPr sz="1800" kern="1200">
-                <a:solidFill>
-                  <a:schemeClr val="dk1"/>
-                </a:solidFill>
-                <a:latin typeface="+mn-lt"/>
-                <a:ea typeface="+mn-ea"/>
-                <a:cs typeface="+mn-cs"/>
-              </a:defRPr>
-            </a:lvl9pPr>
-          </a:lstStyle>
-          <a:p>
-            <a:pPr algn="ctr"/>
-            <a:endParaRPr lang="zh-CN" altLang="en-US"/>
-          </a:p>
-        </p:txBody>
-      </p:sp>
-      <p:sp>
-        <p:nvSpPr>
-          <p:cNvPr id="7" name="文本框 6">
-            <a:extLst>
-              <a:ext uri="{FF2B5EF4-FFF2-40B4-BE49-F238E27FC236}">
-                <a16:creationId xmlns:a16="http://schemas.microsoft.com/office/drawing/2014/main" id="{F2C8D887-4AF6-623B-0CF0-444AA513A77A}"/>
-              </a:ext>
-            </a:extLst>
-          </p:cNvPr>
-          <p:cNvSpPr txBox="1"/>
-          <p:nvPr/>
-        </p:nvSpPr>
-        <p:spPr>
-          <a:xfrm>
-            <a:off x="838200" y="1470991"/>
-            <a:ext cx="3301448" cy="646331"/>
-          </a:xfrm>
-          <a:prstGeom prst="rect">
-            <a:avLst/>
-          </a:prstGeom>
-          <a:noFill/>
-        </p:spPr>
-        <p:txBody>
-          <a:bodyPr wrap="square" rtlCol="0">
-            <a:spAutoFit/>
-          </a:bodyPr>
-          <a:lstStyle/>
-          <a:p>
-            <a:r>
-              <a:rPr lang="en-US" altLang="zh-CN" dirty="0" err="1">
-                <a:latin typeface="Noto Sans SC Black" panose="020B0200000000000000" pitchFamily="34" charset="-122"/>
-                <a:ea typeface="Noto Sans SC Black" panose="020B0200000000000000" pitchFamily="34" charset="-122"/>
-              </a:rPr>
-              <a:t>Ceaserzhao</a:t>
-            </a:r>
-            <a:r>
-              <a:rPr lang="en-US" altLang="zh-CN" dirty="0">
-                <a:latin typeface="Noto Sans SC Black" panose="020B0200000000000000" pitchFamily="34" charset="-122"/>
-                <a:ea typeface="Noto Sans SC Black" panose="020B0200000000000000" pitchFamily="34" charset="-122"/>
-              </a:rPr>
-              <a:t>(</a:t>
-            </a:r>
-            <a:r>
-              <a:rPr lang="en-US" altLang="zh-CN" dirty="0" err="1">
-                <a:latin typeface="Noto Sans SC Black" panose="020B0200000000000000" pitchFamily="34" charset="-122"/>
-                <a:ea typeface="Noto Sans SC Black" panose="020B0200000000000000" pitchFamily="34" charset="-122"/>
-              </a:rPr>
-              <a:t>Wenzhang</a:t>
-            </a:r>
-            <a:r>
-              <a:rPr lang="en-US" altLang="zh-CN" dirty="0">
-                <a:latin typeface="Noto Sans SC Black" panose="020B0200000000000000" pitchFamily="34" charset="-122"/>
-                <a:ea typeface="Noto Sans SC Black" panose="020B0200000000000000" pitchFamily="34" charset="-122"/>
-              </a:rPr>
-              <a:t> Zhao)</a:t>
-            </a:r>
-            <a:endParaRPr lang="zh-CN" altLang="en-US" dirty="0">
-              <a:latin typeface="Noto Sans SC Black" panose="020B0200000000000000" pitchFamily="34" charset="-122"/>
-              <a:ea typeface="Noto Sans SC Black" panose="020B0200000000000000" pitchFamily="34" charset="-122"/>
-            </a:endParaRPr>
-          </a:p>
-        </p:txBody>
-      </p:sp>
-      <p:sp>
-        <p:nvSpPr>
-          <p:cNvPr id="8" name="文本框 7">
-            <a:extLst>
-              <a:ext uri="{FF2B5EF4-FFF2-40B4-BE49-F238E27FC236}">
-                <a16:creationId xmlns:a16="http://schemas.microsoft.com/office/drawing/2014/main" id="{732519DF-4396-EE40-F196-1B2B8184F6F4}"/>
-              </a:ext>
-            </a:extLst>
-          </p:cNvPr>
-          <p:cNvSpPr txBox="1"/>
-          <p:nvPr/>
-        </p:nvSpPr>
-        <p:spPr>
-          <a:xfrm>
-            <a:off x="7603435" y="1570383"/>
-            <a:ext cx="2375452" cy="369332"/>
-          </a:xfrm>
-          <a:prstGeom prst="rect">
-            <a:avLst/>
-          </a:prstGeom>
-          <a:noFill/>
-        </p:spPr>
-        <p:txBody>
-          <a:bodyPr wrap="square" rtlCol="0">
-            <a:spAutoFit/>
-          </a:bodyPr>
-          <a:lstStyle/>
-          <a:p>
-            <a:r>
-              <a:rPr lang="en-US" altLang="zh-CN" dirty="0" err="1">
-                <a:latin typeface="Noto Sans SC Black" panose="020B0200000000000000" pitchFamily="34" charset="-122"/>
-                <a:ea typeface="Noto Sans SC Black" panose="020B0200000000000000" pitchFamily="34" charset="-122"/>
-              </a:rPr>
-              <a:t>Nissunay</a:t>
-            </a:r>
-            <a:endParaRPr lang="zh-CN" altLang="en-US" dirty="0">
-              <a:latin typeface="Noto Sans SC Black" panose="020B0200000000000000" pitchFamily="34" charset="-122"/>
-              <a:ea typeface="Noto Sans SC Black" panose="020B0200000000000000" pitchFamily="34" charset="-122"/>
-            </a:endParaRPr>
-          </a:p>
-        </p:txBody>
-      </p:sp>
-      <p:sp>
-        <p:nvSpPr>
-          <p:cNvPr id="9" name="文本框 8">
-            <a:extLst>
-              <a:ext uri="{FF2B5EF4-FFF2-40B4-BE49-F238E27FC236}">
-                <a16:creationId xmlns:a16="http://schemas.microsoft.com/office/drawing/2014/main" id="{54A7EB2D-D42C-32BB-753D-7542AF7493F8}"/>
-              </a:ext>
-            </a:extLst>
-          </p:cNvPr>
-          <p:cNvSpPr txBox="1"/>
-          <p:nvPr/>
-        </p:nvSpPr>
-        <p:spPr>
-          <a:xfrm>
-            <a:off x="4212534" y="1506022"/>
-            <a:ext cx="2360545" cy="369332"/>
-          </a:xfrm>
-          <a:prstGeom prst="rect">
-            <a:avLst/>
-          </a:prstGeom>
-          <a:noFill/>
-        </p:spPr>
-        <p:txBody>
-          <a:bodyPr wrap="square" rtlCol="0">
-            <a:spAutoFit/>
-          </a:bodyPr>
-          <a:lstStyle/>
-          <a:p>
-            <a:r>
-              <a:rPr lang="en-US" altLang="zh-CN" dirty="0">
-                <a:latin typeface="Noto Sans SC Black" panose="020B0200000000000000" pitchFamily="34" charset="-122"/>
-                <a:ea typeface="Noto Sans SC Black" panose="020B0200000000000000" pitchFamily="34" charset="-122"/>
-              </a:rPr>
-              <a:t>Evan Tang</a:t>
-            </a:r>
-            <a:endParaRPr lang="zh-CN" altLang="en-US" dirty="0">
-              <a:latin typeface="Noto Sans SC Black" panose="020B0200000000000000" pitchFamily="34" charset="-122"/>
-              <a:ea typeface="Noto Sans SC Black" panose="020B0200000000000000" pitchFamily="34" charset="-122"/>
-            </a:endParaRPr>
-          </a:p>
-        </p:txBody>
-      </p:sp>
-      <p:sp>
-        <p:nvSpPr>
-          <p:cNvPr id="10" name="文本框 9">
-            <a:extLst>
-              <a:ext uri="{FF2B5EF4-FFF2-40B4-BE49-F238E27FC236}">
-                <a16:creationId xmlns:a16="http://schemas.microsoft.com/office/drawing/2014/main" id="{DF3FAF57-E3CA-6BCE-6225-D2B47D2E85FB}"/>
-              </a:ext>
-            </a:extLst>
-          </p:cNvPr>
-          <p:cNvSpPr txBox="1"/>
-          <p:nvPr/>
-        </p:nvSpPr>
-        <p:spPr>
-          <a:xfrm>
-            <a:off x="803412" y="2993796"/>
-            <a:ext cx="1984513" cy="369332"/>
-          </a:xfrm>
-          <a:prstGeom prst="rect">
-            <a:avLst/>
-          </a:prstGeom>
-          <a:noFill/>
-        </p:spPr>
-        <p:txBody>
-          <a:bodyPr wrap="square" rtlCol="0">
-            <a:spAutoFit/>
-          </a:bodyPr>
-          <a:lstStyle/>
-          <a:p>
-            <a:r>
-              <a:rPr lang="en-US" altLang="zh-CN" dirty="0"/>
-              <a:t>FROM:CHINA</a:t>
-            </a:r>
-            <a:endParaRPr lang="zh-CN" altLang="en-US" dirty="0"/>
-          </a:p>
-        </p:txBody>
-      </p:sp>
-      <p:sp>
-        <p:nvSpPr>
-          <p:cNvPr id="11" name="文本框 10">
-            <a:extLst>
-              <a:ext uri="{FF2B5EF4-FFF2-40B4-BE49-F238E27FC236}">
-                <a16:creationId xmlns:a16="http://schemas.microsoft.com/office/drawing/2014/main" id="{4BFAEE57-6187-1354-C277-3E1F0F28F38D}"/>
-              </a:ext>
-            </a:extLst>
-          </p:cNvPr>
-          <p:cNvSpPr txBox="1"/>
-          <p:nvPr/>
-        </p:nvSpPr>
-        <p:spPr>
-          <a:xfrm>
-            <a:off x="7894983" y="3000855"/>
-            <a:ext cx="2292626" cy="369332"/>
-          </a:xfrm>
-          <a:prstGeom prst="rect">
-            <a:avLst/>
-          </a:prstGeom>
-          <a:noFill/>
-        </p:spPr>
-        <p:txBody>
-          <a:bodyPr wrap="square" rtlCol="0">
-            <a:spAutoFit/>
-          </a:bodyPr>
-          <a:lstStyle/>
-          <a:p>
-            <a:r>
-              <a:rPr lang="en-US" altLang="zh-CN" dirty="0"/>
-              <a:t>FROM:MEXICO</a:t>
-            </a:r>
-            <a:endParaRPr lang="zh-CN" altLang="en-US" dirty="0"/>
-          </a:p>
-        </p:txBody>
-      </p:sp>
-      <p:sp>
-        <p:nvSpPr>
-          <p:cNvPr id="12" name="文本框 11">
-            <a:extLst>
-              <a:ext uri="{FF2B5EF4-FFF2-40B4-BE49-F238E27FC236}">
-                <a16:creationId xmlns:a16="http://schemas.microsoft.com/office/drawing/2014/main" id="{11729016-4456-C71E-DC83-89A95A42B7D7}"/>
-              </a:ext>
-            </a:extLst>
-          </p:cNvPr>
-          <p:cNvSpPr txBox="1"/>
-          <p:nvPr/>
-        </p:nvSpPr>
-        <p:spPr>
-          <a:xfrm>
-            <a:off x="4400549" y="2993796"/>
-            <a:ext cx="1984513" cy="369332"/>
-          </a:xfrm>
-          <a:prstGeom prst="rect">
-            <a:avLst/>
-          </a:prstGeom>
-          <a:noFill/>
-        </p:spPr>
-        <p:txBody>
-          <a:bodyPr wrap="square" rtlCol="0">
-            <a:spAutoFit/>
-          </a:bodyPr>
-          <a:lstStyle/>
-          <a:p>
-            <a:r>
-              <a:rPr lang="en-US" altLang="zh-CN" dirty="0"/>
-              <a:t>FROM:CHINA</a:t>
-            </a:r>
-            <a:endParaRPr lang="zh-CN" altLang="en-US" dirty="0"/>
-          </a:p>
-        </p:txBody>
-      </p:sp>
-      <p:sp>
-        <p:nvSpPr>
-          <p:cNvPr id="13" name="文本框 12">
-            <a:extLst>
-              <a:ext uri="{FF2B5EF4-FFF2-40B4-BE49-F238E27FC236}">
-                <a16:creationId xmlns:a16="http://schemas.microsoft.com/office/drawing/2014/main" id="{CC95FC8B-340B-A0D6-AFC2-9FE45D242A91}"/>
-              </a:ext>
-            </a:extLst>
-          </p:cNvPr>
-          <p:cNvSpPr txBox="1"/>
-          <p:nvPr/>
-        </p:nvSpPr>
-        <p:spPr>
-          <a:xfrm>
-            <a:off x="879613" y="2390361"/>
-            <a:ext cx="2574235" cy="369332"/>
-          </a:xfrm>
-          <a:prstGeom prst="rect">
-            <a:avLst/>
-          </a:prstGeom>
-          <a:noFill/>
-        </p:spPr>
-        <p:txBody>
-          <a:bodyPr wrap="square" rtlCol="0">
-            <a:spAutoFit/>
-          </a:bodyPr>
-          <a:lstStyle/>
-          <a:p>
-            <a:r>
-              <a:rPr lang="en-US" altLang="zh-CN" dirty="0"/>
-              <a:t>Founder &amp; CEO</a:t>
-            </a:r>
-            <a:endParaRPr lang="zh-CN" altLang="en-US" dirty="0"/>
-          </a:p>
-        </p:txBody>
-      </p:sp>
-      <p:sp>
-        <p:nvSpPr>
-          <p:cNvPr id="14" name="文本框 13">
-            <a:extLst>
-              <a:ext uri="{FF2B5EF4-FFF2-40B4-BE49-F238E27FC236}">
-                <a16:creationId xmlns:a16="http://schemas.microsoft.com/office/drawing/2014/main" id="{C837F801-F554-A99E-4805-1F1B370A3691}"/>
-              </a:ext>
-            </a:extLst>
-          </p:cNvPr>
-          <p:cNvSpPr txBox="1"/>
-          <p:nvPr/>
-        </p:nvSpPr>
-        <p:spPr>
-          <a:xfrm>
-            <a:off x="879613" y="4184374"/>
-            <a:ext cx="2834308" cy="646331"/>
-          </a:xfrm>
-          <a:prstGeom prst="rect">
-            <a:avLst/>
-          </a:prstGeom>
-          <a:noFill/>
-        </p:spPr>
-        <p:txBody>
-          <a:bodyPr wrap="square" rtlCol="0">
-            <a:spAutoFit/>
-          </a:bodyPr>
-          <a:lstStyle/>
-          <a:p>
-            <a:r>
-              <a:rPr lang="en-US" altLang="zh-CN" dirty="0" err="1"/>
-              <a:t>Github:https</a:t>
-            </a:r>
-            <a:r>
-              <a:rPr lang="en-US" altLang="zh-CN" dirty="0"/>
-              <a:t>://github.com/</a:t>
-            </a:r>
-            <a:r>
-              <a:rPr lang="en-US" altLang="zh-CN" dirty="0" err="1"/>
-              <a:t>zbbsdsb</a:t>
-            </a:r>
-            <a:endParaRPr lang="zh-CN" altLang="en-US" dirty="0"/>
-          </a:p>
-        </p:txBody>
-      </p:sp>
-      <p:sp>
-        <p:nvSpPr>
-          <p:cNvPr id="15" name="文本框 14">
-            <a:extLst>
-              <a:ext uri="{FF2B5EF4-FFF2-40B4-BE49-F238E27FC236}">
-                <a16:creationId xmlns:a16="http://schemas.microsoft.com/office/drawing/2014/main" id="{FB5057EE-A3DF-011D-6AE0-0A7DB9DDB33E}"/>
-              </a:ext>
-            </a:extLst>
-          </p:cNvPr>
-          <p:cNvSpPr txBox="1"/>
-          <p:nvPr/>
-        </p:nvSpPr>
-        <p:spPr>
-          <a:xfrm>
-            <a:off x="4409661" y="4239602"/>
-            <a:ext cx="2834308" cy="646331"/>
-          </a:xfrm>
-          <a:prstGeom prst="rect">
-            <a:avLst/>
-          </a:prstGeom>
-          <a:noFill/>
-        </p:spPr>
-        <p:txBody>
-          <a:bodyPr wrap="square" rtlCol="0">
-            <a:spAutoFit/>
-          </a:bodyPr>
-          <a:lstStyle/>
-          <a:p>
-            <a:r>
-              <a:rPr lang="en-US" altLang="zh-CN" dirty="0" err="1"/>
-              <a:t>Github:https</a:t>
-            </a:r>
-            <a:r>
-              <a:rPr lang="en-US" altLang="zh-CN" dirty="0"/>
-              <a:t>://github.com/tangsky123</a:t>
-            </a:r>
-            <a:endParaRPr lang="zh-CN" altLang="en-US" dirty="0"/>
-          </a:p>
-        </p:txBody>
-      </p:sp>
-      <p:sp>
-        <p:nvSpPr>
-          <p:cNvPr id="16" name="文本框 15">
-            <a:extLst>
-              <a:ext uri="{FF2B5EF4-FFF2-40B4-BE49-F238E27FC236}">
-                <a16:creationId xmlns:a16="http://schemas.microsoft.com/office/drawing/2014/main" id="{820DD644-9AEC-2D9D-341B-D203AB0E32BA}"/>
-              </a:ext>
-            </a:extLst>
-          </p:cNvPr>
-          <p:cNvSpPr txBox="1"/>
-          <p:nvPr/>
-        </p:nvSpPr>
-        <p:spPr>
-          <a:xfrm>
-            <a:off x="7894983" y="4219577"/>
-            <a:ext cx="2834308" cy="646331"/>
-          </a:xfrm>
-          <a:prstGeom prst="rect">
-            <a:avLst/>
-          </a:prstGeom>
-          <a:noFill/>
-        </p:spPr>
-        <p:txBody>
-          <a:bodyPr wrap="square" rtlCol="0">
-            <a:spAutoFit/>
-          </a:bodyPr>
-          <a:lstStyle/>
-          <a:p>
-            <a:r>
-              <a:rPr lang="en-US" altLang="zh-CN" dirty="0" err="1"/>
-              <a:t>Github:https</a:t>
-            </a:r>
-            <a:r>
-              <a:rPr lang="en-US" altLang="zh-CN" dirty="0"/>
-              <a:t>://github.com/</a:t>
-            </a:r>
-            <a:r>
-              <a:rPr lang="en-US" altLang="zh-CN" dirty="0" err="1"/>
-              <a:t>AmaiDonatsu</a:t>
-            </a:r>
-            <a:endParaRPr lang="zh-CN" altLang="en-US" dirty="0"/>
-          </a:p>
-        </p:txBody>
-      </p:sp>
-    </p:spTree>
-    <p:extLst>
-      <p:ext uri="{BB962C8B-B14F-4D97-AF65-F5344CB8AC3E}">
-        <p14:creationId xmlns:p14="http://schemas.microsoft.com/office/powerpoint/2010/main" val="901082095"/>
-      </p:ext>
-    </p:extLst>
-  </p:cSld>
-  <p:clrMapOvr>
-    <a:masterClrMapping/>
-  </p:clrMapOvr>
-</p:sld>
-</file>
-
 <file path=ppt/slides/slide6.xml><?xml version="1.0" encoding="utf-8"?>
-<p:sld xmlns:a="http://schemas.openxmlformats.org/drawingml/2006/main" xmlns:r="http://schemas.openxmlformats.org/officeDocument/2006/relationships" xmlns:p="http://schemas.openxmlformats.org/presentationml/2006/main">
-  <p:cSld>
-    <p:spTree>
-      <p:nvGrpSpPr>
-        <p:cNvPr id="1" name=""/>
-        <p:cNvGrpSpPr/>
-        <p:nvPr/>
-      </p:nvGrpSpPr>
-      <p:grpSpPr>
-        <a:xfrm>
-          <a:off x="0" y="0"/>
-          <a:ext cx="0" cy="0"/>
-          <a:chOff x="0" y="0"/>
-          <a:chExt cx="0" cy="0"/>
-        </a:xfrm>
-      </p:grpSpPr>
-      <p:sp>
-        <p:nvSpPr>
-          <p:cNvPr id="2" name="标题 1">
-            <a:extLst>
-              <a:ext uri="{FF2B5EF4-FFF2-40B4-BE49-F238E27FC236}">
-                <a16:creationId xmlns:a16="http://schemas.microsoft.com/office/drawing/2014/main" id="{7FDA2C4D-46C0-CE4A-D7D4-8580EF1CA0B0}"/>
-              </a:ext>
-            </a:extLst>
-          </p:cNvPr>
-          <p:cNvSpPr>
-            <a:spLocks noGrp="1"/>
-          </p:cNvSpPr>
-          <p:nvPr>
-            <p:ph type="title"/>
-          </p:nvPr>
-        </p:nvSpPr>
-        <p:spPr/>
-        <p:txBody>
-          <a:bodyPr/>
-          <a:lstStyle/>
-          <a:p>
-            <a:r>
-              <a:rPr lang="zh-CN" altLang="en-US" dirty="0"/>
-              <a:t>补充</a:t>
-            </a:r>
-          </a:p>
-        </p:txBody>
-      </p:sp>
-      <p:sp>
-        <p:nvSpPr>
-          <p:cNvPr id="3" name="内容占位符 2">
-            <a:extLst>
-              <a:ext uri="{FF2B5EF4-FFF2-40B4-BE49-F238E27FC236}">
-                <a16:creationId xmlns:a16="http://schemas.microsoft.com/office/drawing/2014/main" id="{547C3539-7607-5D17-C602-79B4E6F12052}"/>
-              </a:ext>
-            </a:extLst>
-          </p:cNvPr>
-          <p:cNvSpPr>
-            <a:spLocks noGrp="1"/>
-          </p:cNvSpPr>
-          <p:nvPr>
-            <p:ph idx="1"/>
-          </p:nvPr>
-        </p:nvSpPr>
-        <p:spPr/>
-        <p:txBody>
-          <a:bodyPr>
-            <a:normAutofit fontScale="25000" lnSpcReduction="20000"/>
-          </a:bodyPr>
-          <a:lstStyle/>
-          <a:p>
-            <a:r>
-              <a:rPr lang="zh-CN" altLang="en-US" b="1" dirty="0"/>
-              <a:t>🧩 现在我给你一个视觉建议</a:t>
-            </a:r>
-          </a:p>
-          <a:p>
-            <a:r>
-              <a:rPr lang="zh-CN" altLang="en-US" dirty="0"/>
-              <a:t>左侧用冷色（蓝）</a:t>
-            </a:r>
-          </a:p>
-          <a:p>
-            <a:r>
-              <a:rPr lang="zh-CN" altLang="en-US" dirty="0"/>
-              <a:t>右侧用结构色（灰</a:t>
-            </a:r>
-            <a:r>
-              <a:rPr lang="en-US" altLang="zh-CN" dirty="0"/>
-              <a:t>/</a:t>
-            </a:r>
-            <a:r>
-              <a:rPr lang="zh-CN" altLang="en-US" dirty="0"/>
-              <a:t>白）</a:t>
-            </a:r>
-          </a:p>
-          <a:p>
-            <a:r>
-              <a:rPr lang="en-US" altLang="zh-CN" dirty="0"/>
-              <a:t>GENIS </a:t>
-            </a:r>
-            <a:r>
-              <a:rPr lang="zh-CN" altLang="en-US" dirty="0"/>
-              <a:t>用红色（物理核心）</a:t>
-            </a:r>
-          </a:p>
-          <a:p>
-            <a:r>
-              <a:rPr lang="en-US" altLang="zh-CN" dirty="0"/>
-              <a:t>Interactive World </a:t>
-            </a:r>
-            <a:r>
-              <a:rPr lang="zh-CN" altLang="en-US" dirty="0"/>
-              <a:t>用绿色（结果）</a:t>
-            </a:r>
-          </a:p>
-          <a:p>
-            <a:r>
-              <a:rPr lang="zh-CN" altLang="en-US" dirty="0"/>
-              <a:t>颜色要讲故事。</a:t>
-            </a:r>
-          </a:p>
-          <a:p>
-            <a:br>
-              <a:rPr lang="zh-CN" altLang="en-US" dirty="0"/>
-            </a:br>
-            <a:endParaRPr lang="zh-CN" altLang="en-US" dirty="0"/>
-          </a:p>
-          <a:p>
-            <a:r>
-              <a:rPr lang="zh-CN" altLang="en-US" b="1" dirty="0"/>
-              <a:t>📌 第二页将会是：</a:t>
-            </a:r>
-          </a:p>
-          <a:p>
-            <a:r>
-              <a:rPr lang="en-US" altLang="zh-CN" dirty="0"/>
-              <a:t>User Flow</a:t>
-            </a:r>
-          </a:p>
-          <a:p>
-            <a:r>
-              <a:rPr lang="zh-CN" altLang="en-US" dirty="0"/>
-              <a:t>但第一页必须是：</a:t>
-            </a:r>
-          </a:p>
-          <a:p>
-            <a:r>
-              <a:rPr lang="zh-CN" altLang="en-US" dirty="0"/>
-              <a:t>“结构权力分布图”。</a:t>
-            </a:r>
-          </a:p>
-          <a:p>
-            <a:br>
-              <a:rPr lang="zh-CN" altLang="en-US" dirty="0"/>
-            </a:br>
-            <a:endParaRPr lang="zh-CN" altLang="en-US" dirty="0"/>
-          </a:p>
-          <a:p>
-            <a:r>
-              <a:rPr lang="zh-CN" altLang="en-US" b="1" dirty="0"/>
-              <a:t>🔥 现在我问你一个关键问题</a:t>
-            </a:r>
-          </a:p>
-          <a:p>
-            <a:r>
-              <a:rPr lang="en-US" altLang="zh-CN" dirty="0" err="1"/>
-              <a:t>Metaclass</a:t>
-            </a:r>
-            <a:r>
-              <a:rPr lang="en-US" altLang="zh-CN" dirty="0"/>
-              <a:t> System </a:t>
-            </a:r>
-            <a:r>
-              <a:rPr lang="zh-CN" altLang="en-US" dirty="0"/>
-              <a:t>是否拥有版本号？</a:t>
-            </a:r>
-          </a:p>
-          <a:p>
-            <a:r>
-              <a:rPr lang="zh-CN" altLang="en-US" dirty="0"/>
-              <a:t>如果有：</a:t>
-            </a:r>
-          </a:p>
-          <a:p>
-            <a:r>
-              <a:rPr lang="zh-CN" altLang="en-US" dirty="0"/>
-              <a:t>我们可以在图上写：</a:t>
-            </a:r>
-          </a:p>
-          <a:p>
-            <a:r>
-              <a:rPr lang="en-US" altLang="zh-CN" dirty="0" err="1"/>
-              <a:t>Metaclass</a:t>
-            </a:r>
-            <a:r>
-              <a:rPr lang="en-US" altLang="zh-CN" dirty="0"/>
-              <a:t> Standard v0.1</a:t>
-            </a:r>
-          </a:p>
-          <a:p>
-            <a:r>
-              <a:rPr lang="zh-CN" altLang="en-US" dirty="0"/>
-              <a:t>这会极度专业。</a:t>
-            </a:r>
-          </a:p>
-          <a:p>
-            <a:r>
-              <a:rPr lang="zh-CN" altLang="en-US" dirty="0"/>
-              <a:t>如果没有，</a:t>
-            </a:r>
-          </a:p>
-          <a:p>
-            <a:r>
-              <a:rPr lang="zh-CN" altLang="en-US" dirty="0"/>
-              <a:t>我们可以开始定义版本。</a:t>
-            </a:r>
-          </a:p>
-          <a:p>
-            <a:endParaRPr lang="zh-CN" altLang="en-US" dirty="0"/>
-          </a:p>
-        </p:txBody>
-      </p:sp>
-    </p:spTree>
-    <p:extLst>
-      <p:ext uri="{BB962C8B-B14F-4D97-AF65-F5344CB8AC3E}">
-        <p14:creationId xmlns:p14="http://schemas.microsoft.com/office/powerpoint/2010/main" val="3056409584"/>
-      </p:ext>
-    </p:extLst>
-  </p:cSld>
-  <p:clrMapOvr>
-    <a:masterClrMapping/>
-  </p:clrMapOvr>
-</p:sld>
-</file>
-
-<file path=ppt/slides/slide7.xml><?xml version="1.0" encoding="utf-8"?>
 <p:sld xmlns:a="http://schemas.openxmlformats.org/drawingml/2006/main" xmlns:r="http://schemas.openxmlformats.org/officeDocument/2006/relationships" xmlns:p="http://schemas.openxmlformats.org/presentationml/2006/main">
   <p:cSld>
     <p:spTree>
